--- a/poster/poster_khung_1-2.pptx
+++ b/poster/poster_khung_1-2.pptx
@@ -512,7 +512,12 @@
           </a:p>
           <a:p>
             <a:r>
-              <a:t>Không đặt: Logo nhà trường, Tên trường, Mã dự án, Tên giáo viên hướng dẫn, Tên học sinh tham gia.</a:t>
+              <a:t>Mã ô (H1, T1, G1, S1, P1…) khớp bảng tra poster/DU_LIEU_POSTER.md.</a:t>
+            </a:r>
+          </a:p>
+          <a:p>
+            <a:r>
+              <a:t>Không đặt: Logo nhà trường, Tên trường (kể cả viết tắt), Mã dự án, Tên giáo viên hướng dẫn, Tên học sinh tham gia.</a:t>
             </a:r>
           </a:p>
         </p:txBody>
@@ -3702,111 +3707,6 @@
         </p:nvSpPr>
         <p:spPr>
           <a:xfrm>
-            <a:off x="9450000" y="540000"/>
-            <a:ext cx="17100000" cy="4860000"/>
-          </a:xfrm>
-          <a:prstGeom prst="roundRect">
-            <a:avLst>
-              <a:gd name="adj" fmla="val 2222"/>
-            </a:avLst>
-          </a:prstGeom>
-          <a:solidFill>
-            <a:srgbClr val="1C2321"/>
-          </a:solidFill>
-          <a:ln>
-            <a:noFill/>
-          </a:ln>
-          <a:effectLst/>
-        </p:spPr>
-        <p:style>
-          <a:lnRef idx="1">
-            <a:schemeClr val="accent1"/>
-          </a:lnRef>
-          <a:fillRef idx="3">
-            <a:schemeClr val="accent1"/>
-          </a:fillRef>
-          <a:effectRef idx="2">
-            <a:schemeClr val="accent1"/>
-          </a:effectRef>
-          <a:fontRef idx="minor">
-            <a:schemeClr val="lt1"/>
-          </a:fontRef>
-        </p:style>
-        <p:txBody>
-          <a:bodyPr rtlCol="0" anchor="ctr"/>
-          <a:lstStyle/>
-          <a:p>
-            <a:pPr algn="ctr"/>
-          </a:p>
-        </p:txBody>
-      </p:sp>
-      <p:sp>
-        <p:nvSpPr>
-          <p:cNvPr id="7" name="TextBox 6"/>
-          <p:cNvSpPr txBox="1"/>
-          <p:nvPr/>
-        </p:nvSpPr>
-        <p:spPr>
-          <a:xfrm>
-            <a:off x="9990000" y="936000"/>
-            <a:ext cx="16020000" cy="4068000"/>
-          </a:xfrm>
-          <a:prstGeom prst="rect">
-            <a:avLst/>
-          </a:prstGeom>
-          <a:noFill/>
-        </p:spPr>
-        <p:txBody>
-          <a:bodyPr wrap="square" anchor="ctr" lIns="0" rIns="0" tIns="0" bIns="0">
-            <a:spAutoFit/>
-          </a:bodyPr>
-          <a:lstStyle/>
-          <a:p>
-            <a:pPr algn="l"/>
-            <a:r>
-              <a:rPr sz="2000" b="1" i="0">
-                <a:solidFill>
-                  <a:srgbClr val="C98A1F"/>
-                </a:solidFill>
-                <a:latin typeface="IBM Plex Sans"/>
-              </a:rPr>
-              <a:t>[ LĨNH VỰC DỰ THI ]</a:t>
-            </a:r>
-          </a:p>
-          <a:p>
-            <a:pPr algn="l"/>
-            <a:r>
-              <a:rPr sz="7000" b="1" i="0">
-                <a:solidFill>
-                  <a:srgbClr val="F3F4F1"/>
-                </a:solidFill>
-                <a:latin typeface="Be Vietnam Pro"/>
-              </a:rPr>
-              <a:t>[ TÊN ĐỀ TÀI — VIẾT HOA, TỐI ĐA HAI DÒNG ]</a:t>
-            </a:r>
-          </a:p>
-          <a:p>
-            <a:pPr algn="l"/>
-            <a:r>
-              <a:rPr sz="2200" b="0" i="0">
-                <a:solidFill>
-                  <a:srgbClr val="DBDCD5"/>
-                </a:solidFill>
-                <a:latin typeface="IBM Plex Sans"/>
-              </a:rPr>
-              <a:t>[ Một câu nói sản phẩm giải quyết việc gì ]</a:t>
-            </a:r>
-          </a:p>
-        </p:txBody>
-      </p:sp>
-      <p:sp>
-        <p:nvSpPr>
-          <p:cNvPr id="8" name="Rounded Rectangle 7"/>
-          <p:cNvSpPr/>
-          <p:nvPr/>
-        </p:nvSpPr>
-        <p:spPr>
-          <a:xfrm>
             <a:off x="540000" y="540000"/>
             <a:ext cx="8010000" cy="7920000"/>
           </a:xfrm>
@@ -3849,7 +3749,7 @@
       </p:sp>
       <p:sp>
         <p:nvSpPr>
-          <p:cNvPr id="9" name="Oval 8"/>
+          <p:cNvPr id="7" name="Oval 6"/>
           <p:cNvSpPr/>
           <p:nvPr/>
         </p:nvSpPr>
@@ -3884,12 +3784,12 @@
           </a:fontRef>
         </p:style>
         <p:txBody>
-          <a:bodyPr rtlCol="0" anchor="ctr" lIns="0" rIns="0" tIns="0" bIns="0"/>
+          <a:bodyPr rtlCol="0" anchor="ctr" wrap="square" lIns="0" rIns="0" tIns="0" bIns="0"/>
           <a:lstStyle/>
           <a:p>
             <a:pPr algn="ctr"/>
             <a:r>
-              <a:rPr sz="1860" b="1">
+              <a:rPr sz="1860" b="1" i="0">
                 <a:solidFill>
                   <a:srgbClr val="FFFFFF"/>
                 </a:solidFill>
@@ -3902,14 +3802,14 @@
       </p:sp>
       <p:sp>
         <p:nvSpPr>
-          <p:cNvPr id="10" name="TextBox 9"/>
+          <p:cNvPr id="8" name="TextBox 7"/>
           <p:cNvSpPr txBox="1"/>
           <p:nvPr/>
         </p:nvSpPr>
         <p:spPr>
           <a:xfrm>
             <a:off x="1530000" y="827999"/>
-            <a:ext cx="6696000" cy="522000"/>
+            <a:ext cx="6695999" cy="522000"/>
           </a:xfrm>
           <a:prstGeom prst="rect">
             <a:avLst/>
@@ -3930,21 +3830,68 @@
                 </a:solidFill>
                 <a:latin typeface="Be Vietnam Pro"/>
               </a:rPr>
-              <a:t>Đặt vấn đề</a:t>
-            </a:r>
-          </a:p>
-        </p:txBody>
-      </p:sp>
-      <p:sp>
-        <p:nvSpPr>
-          <p:cNvPr id="11" name="TextBox 10"/>
+              <a:t>Vấn đề</a:t>
+            </a:r>
+          </a:p>
+        </p:txBody>
+      </p:sp>
+      <p:sp>
+        <p:nvSpPr>
+          <p:cNvPr id="9" name="Rounded Rectangle 8"/>
+          <p:cNvSpPr/>
+          <p:nvPr/>
+        </p:nvSpPr>
+        <p:spPr>
+          <a:xfrm>
+            <a:off x="864000" y="1530000"/>
+            <a:ext cx="7362000" cy="6606000"/>
+          </a:xfrm>
+          <a:prstGeom prst="roundRect">
+            <a:avLst>
+              <a:gd name="adj" fmla="val 1634"/>
+            </a:avLst>
+          </a:prstGeom>
+          <a:noFill/>
+          <a:ln w="18000">
+            <a:solidFill>
+              <a:srgbClr val="DBDCD5"/>
+            </a:solidFill>
+            <a:prstDash val="dash"/>
+          </a:ln>
+          <a:effectLst/>
+        </p:spPr>
+        <p:style>
+          <a:lnRef idx="1">
+            <a:schemeClr val="accent1"/>
+          </a:lnRef>
+          <a:fillRef idx="3">
+            <a:schemeClr val="accent1"/>
+          </a:fillRef>
+          <a:effectRef idx="2">
+            <a:schemeClr val="accent1"/>
+          </a:effectRef>
+          <a:fontRef idx="minor">
+            <a:schemeClr val="lt1"/>
+          </a:fontRef>
+        </p:style>
+        <p:txBody>
+          <a:bodyPr rtlCol="0" anchor="ctr"/>
+          <a:lstStyle/>
+          <a:p>
+            <a:pPr algn="ctr"/>
+          </a:p>
+        </p:txBody>
+      </p:sp>
+      <p:sp>
+        <p:nvSpPr>
+          <p:cNvPr id="10" name="TextBox 9"/>
           <p:cNvSpPr txBox="1"/>
           <p:nvPr/>
         </p:nvSpPr>
         <p:spPr>
           <a:xfrm>
-            <a:off x="864000" y="1530000"/>
-            <a:ext cx="7362000" cy="6642000"/>
+            <a:off x="1044000" y="1674000"/>
+            <a:ext cx="7002000" cy="6318000"/>
           </a:xfrm>
           <a:prstGeom prst="rect">
             <a:avLst/>
@@ -3965,25 +3912,25 @@
                 </a:solidFill>
                 <a:latin typeface="IBM Plex Sans"/>
               </a:rPr>
-              <a:t>Vấn đề thực tế là gì? Ai gặp phải, ở đâu, mức độ ra sao? Vì sao cách làm hiện tại chưa ổn?</a:t>
-            </a:r>
-          </a:p>
-        </p:txBody>
-      </p:sp>
-      <p:sp>
-        <p:nvSpPr>
-          <p:cNvPr id="12" name="Rounded Rectangle 11"/>
+              <a:t>[ T1 — em viết 2–3 câu. Hiện nay xếp học sinh vào CLB thế nào? Ai thiệt, thiệt ra sao? ]</a:t>
+            </a:r>
+          </a:p>
+        </p:txBody>
+      </p:sp>
+      <p:sp>
+        <p:nvSpPr>
+          <p:cNvPr id="11" name="Rounded Rectangle 10"/>
           <p:cNvSpPr/>
           <p:nvPr/>
         </p:nvSpPr>
         <p:spPr>
           <a:xfrm>
             <a:off x="540000" y="8910000"/>
-            <a:ext cx="8010000" cy="6840000"/>
+            <a:ext cx="8010000" cy="9720000"/>
           </a:xfrm>
           <a:prstGeom prst="roundRect">
             <a:avLst>
-              <a:gd name="adj" fmla="val 1578"/>
+              <a:gd name="adj" fmla="val 1348"/>
             </a:avLst>
           </a:prstGeom>
           <a:solidFill>
@@ -4020,7 +3967,7 @@
       </p:sp>
       <p:sp>
         <p:nvSpPr>
-          <p:cNvPr id="13" name="Oval 12"/>
+          <p:cNvPr id="12" name="Oval 11"/>
           <p:cNvSpPr/>
           <p:nvPr/>
         </p:nvSpPr>
@@ -4055,12 +4002,12 @@
           </a:fontRef>
         </p:style>
         <p:txBody>
-          <a:bodyPr rtlCol="0" anchor="ctr" lIns="0" rIns="0" tIns="0" bIns="0"/>
+          <a:bodyPr rtlCol="0" anchor="ctr" wrap="square" lIns="0" rIns="0" tIns="0" bIns="0"/>
           <a:lstStyle/>
           <a:p>
             <a:pPr algn="ctr"/>
             <a:r>
-              <a:rPr sz="1860" b="1">
+              <a:rPr sz="1860" b="1" i="0">
                 <a:solidFill>
                   <a:srgbClr val="FFFFFF"/>
                 </a:solidFill>
@@ -4073,14 +4020,14 @@
       </p:sp>
       <p:sp>
         <p:nvSpPr>
-          <p:cNvPr id="14" name="TextBox 13"/>
+          <p:cNvPr id="13" name="TextBox 12"/>
           <p:cNvSpPr txBox="1"/>
           <p:nvPr/>
         </p:nvSpPr>
         <p:spPr>
           <a:xfrm>
             <a:off x="1530000" y="9198000"/>
-            <a:ext cx="6696000" cy="522000"/>
+            <a:ext cx="6695999" cy="522000"/>
           </a:xfrm>
           <a:prstGeom prst="rect">
             <a:avLst/>
@@ -4101,11 +4048,35 @@
                 </a:solidFill>
                 <a:latin typeface="Be Vietnam Pro"/>
               </a:rPr>
-              <a:t>Mục tiêu &amp; câu hỏi nghiên cứu</a:t>
-            </a:r>
-          </a:p>
-        </p:txBody>
-      </p:sp>
+              <a:t>Dùng thế nào</a:t>
+            </a:r>
+          </a:p>
+        </p:txBody>
+      </p:sp>
+      <p:pic>
+        <p:nvPicPr>
+          <p:cNvPr id="14" name="Picture 13" descr="giao_dien_van_hanh.png"/>
+          <p:cNvPicPr>
+            <a:picLocks noChangeAspect="1"/>
+          </p:cNvPicPr>
+          <p:nvPr/>
+        </p:nvPicPr>
+        <p:blipFill>
+          <a:blip r:embed="rId2"/>
+          <a:stretch>
+            <a:fillRect/>
+          </a:stretch>
+        </p:blipFill>
+        <p:spPr>
+          <a:xfrm>
+            <a:off x="864000" y="9900000"/>
+            <a:ext cx="7362000" cy="4601250"/>
+          </a:xfrm>
+          <a:prstGeom prst="rect">
+            <a:avLst/>
+          </a:prstGeom>
+        </p:spPr>
+      </p:pic>
       <p:sp>
         <p:nvSpPr>
           <p:cNvPr id="15" name="TextBox 14"/>
@@ -4114,8 +4085,90 @@
         </p:nvSpPr>
         <p:spPr>
           <a:xfrm>
-            <a:off x="864000" y="9900000"/>
-            <a:ext cx="7362000" cy="5562000"/>
+            <a:off x="864000" y="14573250"/>
+            <a:ext cx="7362000" cy="288000"/>
+          </a:xfrm>
+          <a:prstGeom prst="rect">
+            <a:avLst/>
+          </a:prstGeom>
+          <a:noFill/>
+        </p:spPr>
+        <p:txBody>
+          <a:bodyPr wrap="square" anchor="t" lIns="0" rIns="0" tIns="0" bIns="0">
+            <a:spAutoFit/>
+          </a:bodyPr>
+          <a:lstStyle/>
+          <a:p>
+            <a:pPr algn="l"/>
+            <a:r>
+              <a:rPr sz="1200" b="0" i="0">
+                <a:solidFill>
+                  <a:srgbClr val="5B6570"/>
+                </a:solidFill>
+                <a:latin typeface="IBM Plex Sans"/>
+              </a:rPr>
+              <a:t>Ảnh chụp giao diện thật · dữ liệu mô phỏng</a:t>
+            </a:r>
+          </a:p>
+        </p:txBody>
+      </p:sp>
+      <p:sp>
+        <p:nvSpPr>
+          <p:cNvPr id="16" name="Rounded Rectangle 15"/>
+          <p:cNvSpPr/>
+          <p:nvPr/>
+        </p:nvSpPr>
+        <p:spPr>
+          <a:xfrm>
+            <a:off x="864000" y="14933250"/>
+            <a:ext cx="7362000" cy="3372750"/>
+          </a:xfrm>
+          <a:prstGeom prst="roundRect">
+            <a:avLst>
+              <a:gd name="adj" fmla="val 3202"/>
+            </a:avLst>
+          </a:prstGeom>
+          <a:noFill/>
+          <a:ln w="18000">
+            <a:solidFill>
+              <a:srgbClr val="DBDCD5"/>
+            </a:solidFill>
+            <a:prstDash val="dash"/>
+          </a:ln>
+          <a:effectLst/>
+        </p:spPr>
+        <p:style>
+          <a:lnRef idx="1">
+            <a:schemeClr val="accent1"/>
+          </a:lnRef>
+          <a:fillRef idx="3">
+            <a:schemeClr val="accent1"/>
+          </a:fillRef>
+          <a:effectRef idx="2">
+            <a:schemeClr val="accent1"/>
+          </a:effectRef>
+          <a:fontRef idx="minor">
+            <a:schemeClr val="lt1"/>
+          </a:fontRef>
+        </p:style>
+        <p:txBody>
+          <a:bodyPr rtlCol="0" anchor="ctr"/>
+          <a:lstStyle/>
+          <a:p>
+            <a:pPr algn="ctr"/>
+          </a:p>
+        </p:txBody>
+      </p:sp>
+      <p:sp>
+        <p:nvSpPr>
+          <p:cNvPr id="17" name="TextBox 16"/>
+          <p:cNvSpPr txBox="1"/>
+          <p:nvPr/>
+        </p:nvSpPr>
+        <p:spPr>
+          <a:xfrm>
+            <a:off x="1044000" y="15077250"/>
+            <a:ext cx="7002000" cy="3084750"/>
           </a:xfrm>
           <a:prstGeom prst="rect">
             <a:avLst/>
@@ -4136,25 +4189,25 @@
                 </a:solidFill>
                 <a:latin typeface="IBM Plex Sans"/>
               </a:rPr>
-              <a:t>Mục tiêu chính và 2–3 câu hỏi nghiên cứu, mỗi câu một dòng.</a:t>
-            </a:r>
-          </a:p>
-        </p:txBody>
-      </p:sp>
-      <p:sp>
-        <p:nvSpPr>
-          <p:cNvPr id="16" name="Rounded Rectangle 15"/>
+              <a:t>[ T2 — em viết: người dùng làm mấy bước? Mỗi bước một dòng. ]</a:t>
+            </a:r>
+          </a:p>
+        </p:txBody>
+      </p:sp>
+      <p:sp>
+        <p:nvSpPr>
+          <p:cNvPr id="18" name="Rounded Rectangle 17"/>
           <p:cNvSpPr/>
           <p:nvPr/>
         </p:nvSpPr>
         <p:spPr>
           <a:xfrm>
-            <a:off x="540000" y="16200000"/>
-            <a:ext cx="8010000" cy="10080000"/>
+            <a:off x="540000" y="19080000"/>
+            <a:ext cx="8010000" cy="7200000"/>
           </a:xfrm>
           <a:prstGeom prst="roundRect">
             <a:avLst>
-              <a:gd name="adj" fmla="val 1348"/>
+              <a:gd name="adj" fmla="val 1500"/>
             </a:avLst>
           </a:prstGeom>
           <a:solidFill>
@@ -4191,13 +4244,13 @@
       </p:sp>
       <p:sp>
         <p:nvSpPr>
-          <p:cNvPr id="17" name="Oval 16"/>
+          <p:cNvPr id="19" name="Oval 18"/>
           <p:cNvSpPr/>
           <p:nvPr/>
         </p:nvSpPr>
         <p:spPr>
           <a:xfrm>
-            <a:off x="864000" y="16487999"/>
+            <a:off x="864000" y="19368000"/>
             <a:ext cx="522000" cy="522000"/>
           </a:xfrm>
           <a:prstGeom prst="ellipse">
@@ -4226,12 +4279,12 @@
           </a:fontRef>
         </p:style>
         <p:txBody>
-          <a:bodyPr rtlCol="0" anchor="ctr" lIns="0" rIns="0" tIns="0" bIns="0"/>
+          <a:bodyPr rtlCol="0" anchor="ctr" wrap="square" lIns="0" rIns="0" tIns="0" bIns="0"/>
           <a:lstStyle/>
           <a:p>
             <a:pPr algn="ctr"/>
             <a:r>
-              <a:rPr sz="1860" b="1">
+              <a:rPr sz="1860" b="1" i="0">
                 <a:solidFill>
                   <a:srgbClr val="FFFFFF"/>
                 </a:solidFill>
@@ -4244,14 +4297,14 @@
       </p:sp>
       <p:sp>
         <p:nvSpPr>
-          <p:cNvPr id="18" name="TextBox 17"/>
+          <p:cNvPr id="20" name="TextBox 19"/>
           <p:cNvSpPr txBox="1"/>
           <p:nvPr/>
         </p:nvSpPr>
         <p:spPr>
           <a:xfrm>
-            <a:off x="1530000" y="16487999"/>
-            <a:ext cx="6696000" cy="522000"/>
+            <a:off x="1530000" y="19368000"/>
+            <a:ext cx="6695999" cy="522000"/>
           </a:xfrm>
           <a:prstGeom prst="rect">
             <a:avLst/>
@@ -4272,21 +4325,126 @@
                 </a:solidFill>
                 <a:latin typeface="Be Vietnam Pro"/>
               </a:rPr>
-              <a:t>Cơ sở lý thuyết</a:t>
-            </a:r>
-          </a:p>
-        </p:txBody>
-      </p:sp>
-      <p:sp>
-        <p:nvSpPr>
-          <p:cNvPr id="19" name="TextBox 18"/>
+              <a:t>Xem thử</a:t>
+            </a:r>
+          </a:p>
+        </p:txBody>
+      </p:sp>
+      <p:sp>
+        <p:nvSpPr>
+          <p:cNvPr id="21" name="Rounded Rectangle 20"/>
+          <p:cNvSpPr/>
+          <p:nvPr/>
+        </p:nvSpPr>
+        <p:spPr>
+          <a:xfrm>
+            <a:off x="864000" y="20070000"/>
+            <a:ext cx="3600000" cy="3600000"/>
+          </a:xfrm>
+          <a:prstGeom prst="roundRect">
+            <a:avLst>
+              <a:gd name="adj" fmla="val 3000"/>
+            </a:avLst>
+          </a:prstGeom>
+          <a:solidFill>
+            <a:srgbClr val="F3F4F1"/>
+          </a:solidFill>
+          <a:ln w="25200">
+            <a:solidFill>
+              <a:srgbClr val="5B6570"/>
+            </a:solidFill>
+            <a:prstDash val="dash"/>
+          </a:ln>
+          <a:effectLst/>
+        </p:spPr>
+        <p:style>
+          <a:lnRef idx="1">
+            <a:schemeClr val="accent1"/>
+          </a:lnRef>
+          <a:fillRef idx="3">
+            <a:schemeClr val="accent1"/>
+          </a:fillRef>
+          <a:effectRef idx="2">
+            <a:schemeClr val="accent1"/>
+          </a:effectRef>
+          <a:fontRef idx="minor">
+            <a:schemeClr val="lt1"/>
+          </a:fontRef>
+        </p:style>
+        <p:txBody>
+          <a:bodyPr rtlCol="0" anchor="ctr" wrap="square" lIns="0" rIns="0" tIns="0" bIns="0"/>
+          <a:lstStyle/>
+          <a:p>
+            <a:pPr algn="ctr"/>
+            <a:r>
+              <a:rPr sz="1200" b="0" i="0">
+                <a:solidFill>
+                  <a:srgbClr val="5B6570"/>
+                </a:solidFill>
+                <a:latin typeface="IBM Plex Sans"/>
+              </a:rPr>
+              <a:t>[ QR tới video demo — KHÔNG trỏ tới GitHub ]</a:t>
+            </a:r>
+          </a:p>
+        </p:txBody>
+      </p:sp>
+      <p:sp>
+        <p:nvSpPr>
+          <p:cNvPr id="22" name="Rounded Rectangle 21"/>
+          <p:cNvSpPr/>
+          <p:nvPr/>
+        </p:nvSpPr>
+        <p:spPr>
+          <a:xfrm>
+            <a:off x="4734000" y="20070000"/>
+            <a:ext cx="3491999" cy="3600000"/>
+          </a:xfrm>
+          <a:prstGeom prst="roundRect">
+            <a:avLst>
+              <a:gd name="adj" fmla="val 3092"/>
+            </a:avLst>
+          </a:prstGeom>
+          <a:noFill/>
+          <a:ln w="18000">
+            <a:solidFill>
+              <a:srgbClr val="DBDCD5"/>
+            </a:solidFill>
+            <a:prstDash val="dash"/>
+          </a:ln>
+          <a:effectLst/>
+        </p:spPr>
+        <p:style>
+          <a:lnRef idx="1">
+            <a:schemeClr val="accent1"/>
+          </a:lnRef>
+          <a:fillRef idx="3">
+            <a:schemeClr val="accent1"/>
+          </a:fillRef>
+          <a:effectRef idx="2">
+            <a:schemeClr val="accent1"/>
+          </a:effectRef>
+          <a:fontRef idx="minor">
+            <a:schemeClr val="lt1"/>
+          </a:fontRef>
+        </p:style>
+        <p:txBody>
+          <a:bodyPr rtlCol="0" anchor="ctr"/>
+          <a:lstStyle/>
+          <a:p>
+            <a:pPr algn="ctr"/>
+          </a:p>
+        </p:txBody>
+      </p:sp>
+      <p:sp>
+        <p:nvSpPr>
+          <p:cNvPr id="23" name="TextBox 22"/>
           <p:cNvSpPr txBox="1"/>
           <p:nvPr/>
         </p:nvSpPr>
         <p:spPr>
           <a:xfrm>
-            <a:off x="864000" y="17190000"/>
-            <a:ext cx="7362000" cy="1980000"/>
+            <a:off x="4914000" y="20214000"/>
+            <a:ext cx="3131999" cy="3311999"/>
           </a:xfrm>
           <a:prstGeom prst="rect">
             <a:avLst/>
@@ -4307,35 +4465,32 @@
                 </a:solidFill>
                 <a:latin typeface="IBM Plex Sans"/>
               </a:rPr>
-              <a:t>Khái niệm và tài liệu nền tảng đề tài dựa vào.</a:t>
-            </a:r>
-          </a:p>
-        </p:txBody>
-      </p:sp>
-      <p:sp>
-        <p:nvSpPr>
-          <p:cNvPr id="20" name="Rounded Rectangle 19"/>
+              <a:t>[ T3 — em viết 1 câu mời xem demo / dùng thử tại gian ]</a:t>
+            </a:r>
+          </a:p>
+        </p:txBody>
+      </p:sp>
+      <p:sp>
+        <p:nvSpPr>
+          <p:cNvPr id="24" name="Rounded Rectangle 23"/>
           <p:cNvSpPr/>
           <p:nvPr/>
         </p:nvSpPr>
         <p:spPr>
           <a:xfrm>
-            <a:off x="864000" y="19350000"/>
-            <a:ext cx="7362000" cy="6642000"/>
+            <a:off x="9450000" y="540000"/>
+            <a:ext cx="17100000" cy="4860000"/>
           </a:xfrm>
           <a:prstGeom prst="roundRect">
             <a:avLst>
-              <a:gd name="adj" fmla="val 1626"/>
+              <a:gd name="adj" fmla="val 2222"/>
             </a:avLst>
           </a:prstGeom>
           <a:solidFill>
-            <a:srgbClr val="F3F4F1"/>
+            <a:srgbClr val="1C2321"/>
           </a:solidFill>
-          <a:ln w="21600">
-            <a:solidFill>
-              <a:srgbClr val="5B6570"/>
-            </a:solidFill>
-            <a:prstDash val="dash"/>
+          <a:ln>
+            <a:noFill/>
           </a:ln>
           <a:effectLst/>
         </p:spPr>
@@ -4358,32 +4513,82 @@
           <a:lstStyle/>
           <a:p>
             <a:pPr algn="ctr"/>
-            <a:r>
-              <a:rPr sz="1300">
+          </a:p>
+        </p:txBody>
+      </p:sp>
+      <p:sp>
+        <p:nvSpPr>
+          <p:cNvPr id="25" name="TextBox 24"/>
+          <p:cNvSpPr txBox="1"/>
+          <p:nvPr/>
+        </p:nvSpPr>
+        <p:spPr>
+          <a:xfrm>
+            <a:off x="9990000" y="936000"/>
+            <a:ext cx="16020000" cy="4068000"/>
+          </a:xfrm>
+          <a:prstGeom prst="rect">
+            <a:avLst/>
+          </a:prstGeom>
+          <a:noFill/>
+        </p:spPr>
+        <p:txBody>
+          <a:bodyPr wrap="square" anchor="ctr" lIns="0" rIns="0" tIns="0" bIns="0">
+            <a:spAutoFit/>
+          </a:bodyPr>
+          <a:lstStyle/>
+          <a:p>
+            <a:pPr algn="l"/>
+            <a:r>
+              <a:rPr sz="2000" b="1" i="0">
                 <a:solidFill>
-                  <a:srgbClr val="5B6570"/>
+                  <a:srgbClr val="C98A1F"/>
                 </a:solidFill>
                 <a:latin typeface="IBM Plex Sans"/>
               </a:rPr>
-              <a:t>[ Sơ đồ khái niệm (nếu có) ]</a:t>
-            </a:r>
-          </a:p>
-        </p:txBody>
-      </p:sp>
-      <p:sp>
-        <p:nvSpPr>
-          <p:cNvPr id="21" name="Rounded Rectangle 20"/>
+              <a:t>[ H1 — LĨNH VỰC DỰ THI ]</a:t>
+            </a:r>
+          </a:p>
+          <a:p>
+            <a:pPr algn="l"/>
+            <a:r>
+              <a:rPr sz="7000" b="1" i="0">
+                <a:solidFill>
+                  <a:srgbClr val="F3F4F1"/>
+                </a:solidFill>
+                <a:latin typeface="Be Vietnam Pro"/>
+              </a:rPr>
+              <a:t>[ H2 — THÔNG ĐIỆP CHÍNH, MỘT CÂU, TỐI ĐA HAI DÒNG ]</a:t>
+            </a:r>
+          </a:p>
+          <a:p>
+            <a:pPr algn="l"/>
+            <a:r>
+              <a:rPr sz="2400" b="0" i="0">
+                <a:solidFill>
+                  <a:srgbClr val="DBDCD5"/>
+                </a:solidFill>
+                <a:latin typeface="IBM Plex Sans"/>
+              </a:rPr>
+              <a:t>[ H3 — tên đề tài đầy đủ ]</a:t>
+            </a:r>
+          </a:p>
+        </p:txBody>
+      </p:sp>
+      <p:sp>
+        <p:nvSpPr>
+          <p:cNvPr id="26" name="Rounded Rectangle 25"/>
           <p:cNvSpPr/>
           <p:nvPr/>
         </p:nvSpPr>
         <p:spPr>
           <a:xfrm>
             <a:off x="9450000" y="5850000"/>
-            <a:ext cx="17100000" cy="7560000"/>
+            <a:ext cx="10980000" cy="10260000"/>
           </a:xfrm>
           <a:prstGeom prst="roundRect">
             <a:avLst>
-              <a:gd name="adj" fmla="val 1428"/>
+              <a:gd name="adj" fmla="val 1052"/>
             </a:avLst>
           </a:prstGeom>
           <a:solidFill>
@@ -4418,25 +4623,87 @@
           </a:p>
         </p:txBody>
       </p:sp>
-      <p:sp>
-        <p:nvSpPr>
-          <p:cNvPr id="22" name="Oval 21"/>
+      <p:pic>
+        <p:nvPicPr>
+          <p:cNvPr id="27" name="Picture 26" descr="giao_dien_ket_qua.png"/>
+          <p:cNvPicPr>
+            <a:picLocks noChangeAspect="1"/>
+          </p:cNvPicPr>
+          <p:nvPr/>
+        </p:nvPicPr>
+        <p:blipFill>
+          <a:blip r:embed="rId3"/>
+          <a:stretch>
+            <a:fillRect/>
+          </a:stretch>
+        </p:blipFill>
+        <p:spPr>
+          <a:xfrm>
+            <a:off x="9774000" y="6173999"/>
+            <a:ext cx="10332000" cy="6457500"/>
+          </a:xfrm>
+          <a:prstGeom prst="rect">
+            <a:avLst/>
+          </a:prstGeom>
+        </p:spPr>
+      </p:pic>
+      <p:sp>
+        <p:nvSpPr>
+          <p:cNvPr id="28" name="TextBox 27"/>
+          <p:cNvSpPr txBox="1"/>
+          <p:nvPr/>
+        </p:nvSpPr>
+        <p:spPr>
+          <a:xfrm>
+            <a:off x="9774000" y="12703500"/>
+            <a:ext cx="10332000" cy="288000"/>
+          </a:xfrm>
+          <a:prstGeom prst="rect">
+            <a:avLst/>
+          </a:prstGeom>
+          <a:noFill/>
+        </p:spPr>
+        <p:txBody>
+          <a:bodyPr wrap="square" anchor="t" lIns="0" rIns="0" tIns="0" bIns="0">
+            <a:spAutoFit/>
+          </a:bodyPr>
+          <a:lstStyle/>
+          <a:p>
+            <a:pPr algn="l"/>
+            <a:r>
+              <a:rPr sz="1200" b="0" i="0">
+                <a:solidFill>
+                  <a:srgbClr val="5B6570"/>
+                </a:solidFill>
+                <a:latin typeface="IBM Plex Sans"/>
+              </a:rPr>
+              <a:t>Ảnh chụp giao diện thật · tab Kết quả · dữ liệu mô phỏng (120 học sinh, 10 CLB)</a:t>
+            </a:r>
+          </a:p>
+        </p:txBody>
+      </p:sp>
+      <p:sp>
+        <p:nvSpPr>
+          <p:cNvPr id="29" name="Rounded Rectangle 28"/>
           <p:cNvSpPr/>
           <p:nvPr/>
         </p:nvSpPr>
         <p:spPr>
           <a:xfrm>
-            <a:off x="9774000" y="6138000"/>
-            <a:ext cx="522000" cy="522000"/>
-          </a:xfrm>
-          <a:prstGeom prst="ellipse">
-            <a:avLst/>
-          </a:prstGeom>
-          <a:solidFill>
-            <a:srgbClr val="C98A1F"/>
-          </a:solidFill>
-          <a:ln>
-            <a:noFill/>
+            <a:off x="9774000" y="13063500"/>
+            <a:ext cx="10332000" cy="2722500"/>
+          </a:xfrm>
+          <a:prstGeom prst="roundRect">
+            <a:avLst>
+              <a:gd name="adj" fmla="val 3966"/>
+            </a:avLst>
+          </a:prstGeom>
+          <a:noFill/>
+          <a:ln w="18000">
+            <a:solidFill>
+              <a:srgbClr val="DBDCD5"/>
+            </a:solidFill>
+            <a:prstDash val="dash"/>
           </a:ln>
           <a:effectLst/>
         </p:spPr>
@@ -4455,67 +4722,23 @@
           </a:fontRef>
         </p:style>
         <p:txBody>
-          <a:bodyPr rtlCol="0" anchor="ctr" lIns="0" rIns="0" tIns="0" bIns="0"/>
+          <a:bodyPr rtlCol="0" anchor="ctr"/>
           <a:lstStyle/>
           <a:p>
             <a:pPr algn="ctr"/>
-            <a:r>
-              <a:rPr sz="1860" b="1">
-                <a:solidFill>
-                  <a:srgbClr val="FFFFFF"/>
-                </a:solidFill>
-                <a:latin typeface="Be Vietnam Pro"/>
-              </a:rPr>
-              <a:t>04</a:t>
-            </a:r>
-          </a:p>
-        </p:txBody>
-      </p:sp>
-      <p:sp>
-        <p:nvSpPr>
-          <p:cNvPr id="23" name="TextBox 22"/>
+          </a:p>
+        </p:txBody>
+      </p:sp>
+      <p:sp>
+        <p:nvSpPr>
+          <p:cNvPr id="30" name="TextBox 29"/>
           <p:cNvSpPr txBox="1"/>
           <p:nvPr/>
         </p:nvSpPr>
         <p:spPr>
           <a:xfrm>
-            <a:off x="10439999" y="6138000"/>
-            <a:ext cx="15785999" cy="522000"/>
-          </a:xfrm>
-          <a:prstGeom prst="rect">
-            <a:avLst/>
-          </a:prstGeom>
-          <a:noFill/>
-        </p:spPr>
-        <p:txBody>
-          <a:bodyPr wrap="square" anchor="ctr" lIns="0" rIns="0" tIns="0" bIns="0">
-            <a:spAutoFit/>
-          </a:bodyPr>
-          <a:lstStyle/>
-          <a:p>
-            <a:pPr algn="l"/>
-            <a:r>
-              <a:rPr sz="3000" b="1" i="0">
-                <a:solidFill>
-                  <a:srgbClr val="1C2321"/>
-                </a:solidFill>
-                <a:latin typeface="Be Vietnam Pro"/>
-              </a:rPr>
-              <a:t>Phương pháp &amp; quy trình</a:t>
-            </a:r>
-          </a:p>
-        </p:txBody>
-      </p:sp>
-      <p:sp>
-        <p:nvSpPr>
-          <p:cNvPr id="24" name="TextBox 23"/>
-          <p:cNvSpPr txBox="1"/>
-          <p:nvPr/>
-        </p:nvSpPr>
-        <p:spPr>
-          <a:xfrm>
-            <a:off x="9774000" y="6840000"/>
-            <a:ext cx="16452000" cy="1530000"/>
+            <a:off x="9954000" y="13207500"/>
+            <a:ext cx="9972000" cy="2434500"/>
           </a:xfrm>
           <a:prstGeom prst="rect">
             <a:avLst/>
@@ -4536,83 +4759,25 @@
                 </a:solidFill>
                 <a:latin typeface="IBM Plex Sans"/>
               </a:rPr>
-              <a:t>Các bước thực hiện, từ dữ liệu đầu vào tới kết quả.</a:t>
-            </a:r>
-          </a:p>
-        </p:txBody>
-      </p:sp>
-      <p:sp>
-        <p:nvSpPr>
-          <p:cNvPr id="25" name="Rounded Rectangle 24"/>
+              <a:t>[ G1 — em viết 1–2 câu: ảnh này cho thấy phần mềm làm được gì? ]</a:t>
+            </a:r>
+          </a:p>
+        </p:txBody>
+      </p:sp>
+      <p:sp>
+        <p:nvSpPr>
+          <p:cNvPr id="31" name="Rounded Rectangle 30"/>
           <p:cNvSpPr/>
           <p:nvPr/>
         </p:nvSpPr>
         <p:spPr>
           <a:xfrm>
-            <a:off x="9774000" y="8550000"/>
-            <a:ext cx="16452000" cy="4572000"/>
+            <a:off x="20880000" y="5850000"/>
+            <a:ext cx="5670000" cy="3180000"/>
           </a:xfrm>
           <a:prstGeom prst="roundRect">
             <a:avLst>
-              <a:gd name="adj" fmla="val 2362"/>
-            </a:avLst>
-          </a:prstGeom>
-          <a:solidFill>
-            <a:srgbClr val="F3F4F1"/>
-          </a:solidFill>
-          <a:ln w="21600">
-            <a:solidFill>
-              <a:srgbClr val="5B6570"/>
-            </a:solidFill>
-            <a:prstDash val="dash"/>
-          </a:ln>
-          <a:effectLst/>
-        </p:spPr>
-        <p:style>
-          <a:lnRef idx="1">
-            <a:schemeClr val="accent1"/>
-          </a:lnRef>
-          <a:fillRef idx="3">
-            <a:schemeClr val="accent1"/>
-          </a:fillRef>
-          <a:effectRef idx="2">
-            <a:schemeClr val="accent1"/>
-          </a:effectRef>
-          <a:fontRef idx="minor">
-            <a:schemeClr val="lt1"/>
-          </a:fontRef>
-        </p:style>
-        <p:txBody>
-          <a:bodyPr rtlCol="0" anchor="ctr"/>
-          <a:lstStyle/>
-          <a:p>
-            <a:pPr algn="ctr"/>
-            <a:r>
-              <a:rPr sz="1300">
-                <a:solidFill>
-                  <a:srgbClr val="5B6570"/>
-                </a:solidFill>
-                <a:latin typeface="IBM Plex Sans"/>
-              </a:rPr>
-              <a:t>[ Sơ đồ quy trình — khổ ngang ]</a:t>
-            </a:r>
-          </a:p>
-        </p:txBody>
-      </p:sp>
-      <p:sp>
-        <p:nvSpPr>
-          <p:cNvPr id="26" name="Rounded Rectangle 25"/>
-          <p:cNvSpPr/>
-          <p:nvPr/>
-        </p:nvSpPr>
-        <p:spPr>
-          <a:xfrm>
-            <a:off x="9450000" y="13860000"/>
-            <a:ext cx="8325000" cy="12420000"/>
-          </a:xfrm>
-          <a:prstGeom prst="roundRect">
-            <a:avLst>
-              <a:gd name="adj" fmla="val 1297"/>
+              <a:gd name="adj" fmla="val 3396"/>
             </a:avLst>
           </a:prstGeom>
           <a:solidFill>
@@ -4649,20 +4814,20 @@
       </p:sp>
       <p:sp>
         <p:nvSpPr>
-          <p:cNvPr id="27" name="Oval 26"/>
+          <p:cNvPr id="32" name="Rectangle 31"/>
           <p:cNvSpPr/>
           <p:nvPr/>
         </p:nvSpPr>
         <p:spPr>
           <a:xfrm>
-            <a:off x="9774000" y="14147999"/>
-            <a:ext cx="522000" cy="522000"/>
-          </a:xfrm>
-          <a:prstGeom prst="ellipse">
+            <a:off x="20880000" y="5850000"/>
+            <a:ext cx="108000" cy="3180000"/>
+          </a:xfrm>
+          <a:prstGeom prst="rect">
             <a:avLst/>
           </a:prstGeom>
           <a:solidFill>
-            <a:srgbClr val="C98A1F"/>
+            <a:srgbClr val="27805A"/>
           </a:solidFill>
           <a:ln>
             <a:noFill/>
@@ -4684,199 +4849,86 @@
           </a:fontRef>
         </p:style>
         <p:txBody>
-          <a:bodyPr rtlCol="0" anchor="ctr" lIns="0" rIns="0" tIns="0" bIns="0"/>
+          <a:bodyPr rtlCol="0" anchor="ctr"/>
           <a:lstStyle/>
           <a:p>
             <a:pPr algn="ctr"/>
-            <a:r>
-              <a:rPr sz="1860" b="1">
+          </a:p>
+        </p:txBody>
+      </p:sp>
+      <p:sp>
+        <p:nvSpPr>
+          <p:cNvPr id="33" name="TextBox 32"/>
+          <p:cNvSpPr txBox="1"/>
+          <p:nvPr/>
+        </p:nvSpPr>
+        <p:spPr>
+          <a:xfrm>
+            <a:off x="21168000" y="6066000"/>
+            <a:ext cx="5166000" cy="2748000"/>
+          </a:xfrm>
+          <a:prstGeom prst="rect">
+            <a:avLst/>
+          </a:prstGeom>
+          <a:noFill/>
+        </p:spPr>
+        <p:txBody>
+          <a:bodyPr wrap="square" anchor="t" lIns="0" rIns="0" tIns="0" bIns="0">
+            <a:spAutoFit/>
+          </a:bodyPr>
+          <a:lstStyle/>
+          <a:p>
+            <a:pPr algn="l"/>
+            <a:r>
+              <a:rPr sz="5500" b="1" i="0">
                 <a:solidFill>
-                  <a:srgbClr val="FFFFFF"/>
+                  <a:srgbClr val="27805A"/>
                 </a:solidFill>
                 <a:latin typeface="Be Vietnam Pro"/>
               </a:rPr>
-              <a:t>05</a:t>
-            </a:r>
-          </a:p>
-        </p:txBody>
-      </p:sp>
-      <p:sp>
-        <p:nvSpPr>
-          <p:cNvPr id="28" name="TextBox 27"/>
-          <p:cNvSpPr txBox="1"/>
-          <p:nvPr/>
-        </p:nvSpPr>
-        <p:spPr>
-          <a:xfrm>
-            <a:off x="10439999" y="14147999"/>
-            <a:ext cx="7011000" cy="522000"/>
-          </a:xfrm>
-          <a:prstGeom prst="rect">
-            <a:avLst/>
-          </a:prstGeom>
-          <a:noFill/>
-        </p:spPr>
-        <p:txBody>
-          <a:bodyPr wrap="square" anchor="ctr" lIns="0" rIns="0" tIns="0" bIns="0">
-            <a:spAutoFit/>
-          </a:bodyPr>
-          <a:lstStyle/>
+              <a:t>0</a:t>
+            </a:r>
+          </a:p>
           <a:p>
             <a:pPr algn="l"/>
             <a:r>
-              <a:rPr sz="3000" b="1" i="0">
+              <a:rPr sz="1200" b="1" i="0">
                 <a:solidFill>
                   <a:srgbClr val="1C2321"/>
                 </a:solidFill>
-                <a:latin typeface="Be Vietnam Pro"/>
+                <a:latin typeface="IBM Plex Sans"/>
               </a:rPr>
-              <a:t>Sản phẩm</a:t>
-            </a:r>
-          </a:p>
-        </p:txBody>
-      </p:sp>
-      <p:sp>
-        <p:nvSpPr>
-          <p:cNvPr id="29" name="TextBox 28"/>
-          <p:cNvSpPr txBox="1"/>
-          <p:nvPr/>
-        </p:nvSpPr>
-        <p:spPr>
-          <a:xfrm>
-            <a:off x="9774000" y="14850000"/>
-            <a:ext cx="7677000" cy="1620000"/>
-          </a:xfrm>
-          <a:prstGeom prst="rect">
-            <a:avLst/>
-          </a:prstGeom>
-          <a:noFill/>
-        </p:spPr>
-        <p:txBody>
-          <a:bodyPr wrap="square" anchor="t" lIns="0" rIns="0" tIns="0" bIns="0">
-            <a:spAutoFit/>
-          </a:bodyPr>
-          <a:lstStyle/>
+              <a:t>cặp phá vỡ · mọi seed, mọi bộ dữ liệu mô phỏng</a:t>
+            </a:r>
+          </a:p>
           <a:p>
             <a:pPr algn="l"/>
             <a:r>
-              <a:rPr sz="1600" b="0" i="1">
+              <a:rPr sz="1200" b="0" i="1">
                 <a:solidFill>
                   <a:srgbClr val="5B6570"/>
                 </a:solidFill>
                 <a:latin typeface="IBM Plex Sans"/>
               </a:rPr>
-              <a:t>Sản phẩm làm được gì, dùng thế nào.</a:t>
-            </a:r>
-          </a:p>
-        </p:txBody>
-      </p:sp>
-      <p:sp>
-        <p:nvSpPr>
-          <p:cNvPr id="30" name="Rounded Rectangle 29"/>
+              <a:t>[ S1 — em viết 1 dòng: con số này nghĩa là gì? ]</a:t>
+            </a:r>
+          </a:p>
+        </p:txBody>
+      </p:sp>
+      <p:sp>
+        <p:nvSpPr>
+          <p:cNvPr id="34" name="Rounded Rectangle 33"/>
           <p:cNvSpPr/>
           <p:nvPr/>
         </p:nvSpPr>
         <p:spPr>
           <a:xfrm>
-            <a:off x="9774000" y="16650000"/>
-            <a:ext cx="7677000" cy="6840000"/>
+            <a:off x="20880000" y="9390000"/>
+            <a:ext cx="5670000" cy="3180000"/>
           </a:xfrm>
           <a:prstGeom prst="roundRect">
             <a:avLst>
-              <a:gd name="adj" fmla="val 1578"/>
-            </a:avLst>
-          </a:prstGeom>
-          <a:solidFill>
-            <a:srgbClr val="F3F4F1"/>
-          </a:solidFill>
-          <a:ln w="21600">
-            <a:solidFill>
-              <a:srgbClr val="5B6570"/>
-            </a:solidFill>
-            <a:prstDash val="dash"/>
-          </a:ln>
-          <a:effectLst/>
-        </p:spPr>
-        <p:style>
-          <a:lnRef idx="1">
-            <a:schemeClr val="accent1"/>
-          </a:lnRef>
-          <a:fillRef idx="3">
-            <a:schemeClr val="accent1"/>
-          </a:fillRef>
-          <a:effectRef idx="2">
-            <a:schemeClr val="accent1"/>
-          </a:effectRef>
-          <a:fontRef idx="minor">
-            <a:schemeClr val="lt1"/>
-          </a:fontRef>
-        </p:style>
-        <p:txBody>
-          <a:bodyPr rtlCol="0" anchor="ctr"/>
-          <a:lstStyle/>
-          <a:p>
-            <a:pPr algn="ctr"/>
-            <a:r>
-              <a:rPr sz="1300">
-                <a:solidFill>
-                  <a:srgbClr val="5B6570"/>
-                </a:solidFill>
-                <a:latin typeface="IBM Plex Sans"/>
-              </a:rPr>
-              <a:t>[ Ảnh chụp giao diện / sản phẩm ]</a:t>
-            </a:r>
-          </a:p>
-        </p:txBody>
-      </p:sp>
-      <p:sp>
-        <p:nvSpPr>
-          <p:cNvPr id="31" name="TextBox 30"/>
-          <p:cNvSpPr txBox="1"/>
-          <p:nvPr/>
-        </p:nvSpPr>
-        <p:spPr>
-          <a:xfrm>
-            <a:off x="9774000" y="23670000"/>
-            <a:ext cx="7677000" cy="2322000"/>
-          </a:xfrm>
-          <a:prstGeom prst="rect">
-            <a:avLst/>
-          </a:prstGeom>
-          <a:noFill/>
-        </p:spPr>
-        <p:txBody>
-          <a:bodyPr wrap="square" anchor="t" lIns="0" rIns="0" tIns="0" bIns="0">
-            <a:spAutoFit/>
-          </a:bodyPr>
-          <a:lstStyle/>
-          <a:p>
-            <a:pPr algn="l"/>
-            <a:r>
-              <a:rPr sz="1300" b="0" i="1">
-                <a:solidFill>
-                  <a:srgbClr val="5B6570"/>
-                </a:solidFill>
-                <a:latin typeface="IBM Plex Sans"/>
-              </a:rPr>
-              <a:t>Chú thích ảnh và 3–4 dòng diễn giải.</a:t>
-            </a:r>
-          </a:p>
-        </p:txBody>
-      </p:sp>
-      <p:sp>
-        <p:nvSpPr>
-          <p:cNvPr id="32" name="Rounded Rectangle 31"/>
-          <p:cNvSpPr/>
-          <p:nvPr/>
-        </p:nvSpPr>
-        <p:spPr>
-          <a:xfrm>
-            <a:off x="18225000" y="13860000"/>
-            <a:ext cx="8325000" cy="12420000"/>
-          </a:xfrm>
-          <a:prstGeom prst="roundRect">
-            <a:avLst>
-              <a:gd name="adj" fmla="val 1297"/>
+              <a:gd name="adj" fmla="val 3396"/>
             </a:avLst>
           </a:prstGeom>
           <a:solidFill>
@@ -4913,20 +4965,20 @@
       </p:sp>
       <p:sp>
         <p:nvSpPr>
-          <p:cNvPr id="33" name="Oval 32"/>
+          <p:cNvPr id="35" name="Rectangle 34"/>
           <p:cNvSpPr/>
           <p:nvPr/>
         </p:nvSpPr>
         <p:spPr>
           <a:xfrm>
-            <a:off x="18549000" y="14147999"/>
-            <a:ext cx="522000" cy="522000"/>
-          </a:xfrm>
-          <a:prstGeom prst="ellipse">
+            <a:off x="20880000" y="9390000"/>
+            <a:ext cx="108000" cy="3180000"/>
+          </a:xfrm>
+          <a:prstGeom prst="rect">
             <a:avLst/>
           </a:prstGeom>
           <a:solidFill>
-            <a:srgbClr val="C98A1F"/>
+            <a:srgbClr val="27805A"/>
           </a:solidFill>
           <a:ln>
             <a:noFill/>
@@ -4948,199 +5000,86 @@
           </a:fontRef>
         </p:style>
         <p:txBody>
-          <a:bodyPr rtlCol="0" anchor="ctr" lIns="0" rIns="0" tIns="0" bIns="0"/>
+          <a:bodyPr rtlCol="0" anchor="ctr"/>
           <a:lstStyle/>
           <a:p>
             <a:pPr algn="ctr"/>
-            <a:r>
-              <a:rPr sz="1860" b="1">
+          </a:p>
+        </p:txBody>
+      </p:sp>
+      <p:sp>
+        <p:nvSpPr>
+          <p:cNvPr id="36" name="TextBox 35"/>
+          <p:cNvSpPr txBox="1"/>
+          <p:nvPr/>
+        </p:nvSpPr>
+        <p:spPr>
+          <a:xfrm>
+            <a:off x="21168000" y="9606000"/>
+            <a:ext cx="5166000" cy="2748000"/>
+          </a:xfrm>
+          <a:prstGeom prst="rect">
+            <a:avLst/>
+          </a:prstGeom>
+          <a:noFill/>
+        </p:spPr>
+        <p:txBody>
+          <a:bodyPr wrap="square" anchor="t" lIns="0" rIns="0" tIns="0" bIns="0">
+            <a:spAutoFit/>
+          </a:bodyPr>
+          <a:lstStyle/>
+          <a:p>
+            <a:pPr algn="l"/>
+            <a:r>
+              <a:rPr sz="5500" b="1" i="0">
                 <a:solidFill>
-                  <a:srgbClr val="FFFFFF"/>
+                  <a:srgbClr val="27805A"/>
                 </a:solidFill>
                 <a:latin typeface="Be Vietnam Pro"/>
               </a:rPr>
-              <a:t>06</a:t>
-            </a:r>
-          </a:p>
-        </p:txBody>
-      </p:sp>
-      <p:sp>
-        <p:nvSpPr>
-          <p:cNvPr id="34" name="TextBox 33"/>
-          <p:cNvSpPr txBox="1"/>
-          <p:nvPr/>
-        </p:nvSpPr>
-        <p:spPr>
-          <a:xfrm>
-            <a:off x="19215000" y="14147999"/>
-            <a:ext cx="7010999" cy="522000"/>
-          </a:xfrm>
-          <a:prstGeom prst="rect">
-            <a:avLst/>
-          </a:prstGeom>
-          <a:noFill/>
-        </p:spPr>
-        <p:txBody>
-          <a:bodyPr wrap="square" anchor="ctr" lIns="0" rIns="0" tIns="0" bIns="0">
-            <a:spAutoFit/>
-          </a:bodyPr>
-          <a:lstStyle/>
+              <a:t>0,14 giây</a:t>
+            </a:r>
+          </a:p>
           <a:p>
             <a:pPr algn="l"/>
             <a:r>
-              <a:rPr sz="3000" b="1" i="0">
+              <a:rPr sz="1200" b="1" i="0">
                 <a:solidFill>
                   <a:srgbClr val="1C2321"/>
                 </a:solidFill>
-                <a:latin typeface="Be Vietnam Pro"/>
+                <a:latin typeface="IBM Plex Sans"/>
               </a:rPr>
-              <a:t>Kết quả</a:t>
-            </a:r>
-          </a:p>
-        </p:txBody>
-      </p:sp>
-      <p:sp>
-        <p:nvSpPr>
-          <p:cNvPr id="35" name="TextBox 34"/>
-          <p:cNvSpPr txBox="1"/>
-          <p:nvPr/>
-        </p:nvSpPr>
-        <p:spPr>
-          <a:xfrm>
-            <a:off x="18549000" y="14850000"/>
-            <a:ext cx="7677000" cy="1620000"/>
-          </a:xfrm>
-          <a:prstGeom prst="rect">
-            <a:avLst/>
-          </a:prstGeom>
-          <a:noFill/>
-        </p:spPr>
-        <p:txBody>
-          <a:bodyPr wrap="square" anchor="t" lIns="0" rIns="0" tIns="0" bIns="0">
-            <a:spAutoFit/>
-          </a:bodyPr>
-          <a:lstStyle/>
+              <a:t>xếp 2 000 học sinh · 40 CLB · dữ liệu mô phỏng</a:t>
+            </a:r>
+          </a:p>
           <a:p>
             <a:pPr algn="l"/>
             <a:r>
-              <a:rPr sz="1600" b="0" i="1">
+              <a:rPr sz="1200" b="0" i="1">
                 <a:solidFill>
                   <a:srgbClr val="5B6570"/>
                 </a:solidFill>
                 <a:latin typeface="IBM Plex Sans"/>
               </a:rPr>
-              <a:t>Số đo chính. Dữ liệu mô phỏng thì ghi rõ là mô phỏng.</a:t>
-            </a:r>
-          </a:p>
-        </p:txBody>
-      </p:sp>
-      <p:sp>
-        <p:nvSpPr>
-          <p:cNvPr id="36" name="Rounded Rectangle 35"/>
+              <a:t>[ S2 — em viết 1 dòng: con số này nghĩa là gì? ]</a:t>
+            </a:r>
+          </a:p>
+        </p:txBody>
+      </p:sp>
+      <p:sp>
+        <p:nvSpPr>
+          <p:cNvPr id="37" name="Rounded Rectangle 36"/>
           <p:cNvSpPr/>
           <p:nvPr/>
         </p:nvSpPr>
         <p:spPr>
           <a:xfrm>
-            <a:off x="18549000" y="16650000"/>
-            <a:ext cx="7677000" cy="6840000"/>
+            <a:off x="20880000" y="12930000"/>
+            <a:ext cx="5670000" cy="3180000"/>
           </a:xfrm>
           <a:prstGeom prst="roundRect">
             <a:avLst>
-              <a:gd name="adj" fmla="val 1578"/>
-            </a:avLst>
-          </a:prstGeom>
-          <a:solidFill>
-            <a:srgbClr val="F3F4F1"/>
-          </a:solidFill>
-          <a:ln w="21600">
-            <a:solidFill>
-              <a:srgbClr val="5B6570"/>
-            </a:solidFill>
-            <a:prstDash val="dash"/>
-          </a:ln>
-          <a:effectLst/>
-        </p:spPr>
-        <p:style>
-          <a:lnRef idx="1">
-            <a:schemeClr val="accent1"/>
-          </a:lnRef>
-          <a:fillRef idx="3">
-            <a:schemeClr val="accent1"/>
-          </a:fillRef>
-          <a:effectRef idx="2">
-            <a:schemeClr val="accent1"/>
-          </a:effectRef>
-          <a:fontRef idx="minor">
-            <a:schemeClr val="lt1"/>
-          </a:fontRef>
-        </p:style>
-        <p:txBody>
-          <a:bodyPr rtlCol="0" anchor="ctr"/>
-          <a:lstStyle/>
-          <a:p>
-            <a:pPr algn="ctr"/>
-            <a:r>
-              <a:rPr sz="1300">
-                <a:solidFill>
-                  <a:srgbClr val="5B6570"/>
-                </a:solidFill>
-                <a:latin typeface="IBM Plex Sans"/>
-              </a:rPr>
-              <a:t>[ Biểu đồ / bảng số liệu ]</a:t>
-            </a:r>
-          </a:p>
-        </p:txBody>
-      </p:sp>
-      <p:sp>
-        <p:nvSpPr>
-          <p:cNvPr id="37" name="TextBox 36"/>
-          <p:cNvSpPr txBox="1"/>
-          <p:nvPr/>
-        </p:nvSpPr>
-        <p:spPr>
-          <a:xfrm>
-            <a:off x="18549000" y="23670000"/>
-            <a:ext cx="7677000" cy="2322000"/>
-          </a:xfrm>
-          <a:prstGeom prst="rect">
-            <a:avLst/>
-          </a:prstGeom>
-          <a:noFill/>
-        </p:spPr>
-        <p:txBody>
-          <a:bodyPr wrap="square" anchor="t" lIns="0" rIns="0" tIns="0" bIns="0">
-            <a:spAutoFit/>
-          </a:bodyPr>
-          <a:lstStyle/>
-          <a:p>
-            <a:pPr algn="l"/>
-            <a:r>
-              <a:rPr sz="1300" b="0" i="1">
-                <a:solidFill>
-                  <a:srgbClr val="5B6570"/>
-                </a:solidFill>
-                <a:latin typeface="IBM Plex Sans"/>
-              </a:rPr>
-              <a:t>Chú thích ảnh và 3–4 dòng diễn giải.</a:t>
-            </a:r>
-          </a:p>
-        </p:txBody>
-      </p:sp>
-      <p:sp>
-        <p:nvSpPr>
-          <p:cNvPr id="38" name="Rounded Rectangle 37"/>
-          <p:cNvSpPr/>
-          <p:nvPr/>
-        </p:nvSpPr>
-        <p:spPr>
-          <a:xfrm>
-            <a:off x="27450000" y="540000"/>
-            <a:ext cx="8010000" cy="7200000"/>
-          </a:xfrm>
-          <a:prstGeom prst="roundRect">
-            <a:avLst>
-              <a:gd name="adj" fmla="val 1500"/>
+              <a:gd name="adj" fmla="val 3396"/>
             </a:avLst>
           </a:prstGeom>
           <a:solidFill>
@@ -5177,20 +5116,20 @@
       </p:sp>
       <p:sp>
         <p:nvSpPr>
-          <p:cNvPr id="39" name="Oval 38"/>
+          <p:cNvPr id="38" name="Rectangle 37"/>
           <p:cNvSpPr/>
           <p:nvPr/>
         </p:nvSpPr>
         <p:spPr>
           <a:xfrm>
-            <a:off x="27774000" y="827999"/>
-            <a:ext cx="522000" cy="522000"/>
-          </a:xfrm>
-          <a:prstGeom prst="ellipse">
+            <a:off x="20880000" y="12930000"/>
+            <a:ext cx="108000" cy="3180000"/>
+          </a:xfrm>
+          <a:prstGeom prst="rect">
             <a:avLst/>
           </a:prstGeom>
           <a:solidFill>
-            <a:srgbClr val="C98A1F"/>
+            <a:srgbClr val="27805A"/>
           </a:solidFill>
           <a:ln>
             <a:noFill/>
@@ -5212,277 +5151,86 @@
           </a:fontRef>
         </p:style>
         <p:txBody>
-          <a:bodyPr rtlCol="0" anchor="ctr" lIns="0" rIns="0" tIns="0" bIns="0"/>
+          <a:bodyPr rtlCol="0" anchor="ctr"/>
           <a:lstStyle/>
           <a:p>
             <a:pPr algn="ctr"/>
-            <a:r>
-              <a:rPr sz="1860" b="1">
+          </a:p>
+        </p:txBody>
+      </p:sp>
+      <p:sp>
+        <p:nvSpPr>
+          <p:cNvPr id="39" name="TextBox 38"/>
+          <p:cNvSpPr txBox="1"/>
+          <p:nvPr/>
+        </p:nvSpPr>
+        <p:spPr>
+          <a:xfrm>
+            <a:off x="21168000" y="13146000"/>
+            <a:ext cx="5166000" cy="2748000"/>
+          </a:xfrm>
+          <a:prstGeom prst="rect">
+            <a:avLst/>
+          </a:prstGeom>
+          <a:noFill/>
+        </p:spPr>
+        <p:txBody>
+          <a:bodyPr wrap="square" anchor="t" lIns="0" rIns="0" tIns="0" bIns="0">
+            <a:spAutoFit/>
+          </a:bodyPr>
+          <a:lstStyle/>
+          <a:p>
+            <a:pPr algn="l"/>
+            <a:r>
+              <a:rPr sz="5500" b="1" i="0">
                 <a:solidFill>
-                  <a:srgbClr val="FFFFFF"/>
+                  <a:srgbClr val="27805A"/>
                 </a:solidFill>
                 <a:latin typeface="Be Vietnam Pro"/>
               </a:rPr>
-              <a:t>07</a:t>
-            </a:r>
-          </a:p>
-        </p:txBody>
-      </p:sp>
-      <p:sp>
-        <p:nvSpPr>
-          <p:cNvPr id="40" name="TextBox 39"/>
-          <p:cNvSpPr txBox="1"/>
-          <p:nvPr/>
-        </p:nvSpPr>
-        <p:spPr>
-          <a:xfrm>
-            <a:off x="28440000" y="827999"/>
-            <a:ext cx="6695999" cy="522000"/>
-          </a:xfrm>
-          <a:prstGeom prst="rect">
-            <a:avLst/>
-          </a:prstGeom>
-          <a:noFill/>
-        </p:spPr>
-        <p:txBody>
-          <a:bodyPr wrap="square" anchor="ctr" lIns="0" rIns="0" tIns="0" bIns="0">
-            <a:spAutoFit/>
-          </a:bodyPr>
-          <a:lstStyle/>
+              <a:t>816</a:t>
+            </a:r>
+          </a:p>
           <a:p>
             <a:pPr algn="l"/>
             <a:r>
-              <a:rPr sz="3000" b="1" i="0">
+              <a:rPr sz="1200" b="1" i="0">
                 <a:solidFill>
                   <a:srgbClr val="1C2321"/>
                 </a:solidFill>
-                <a:latin typeface="Be Vietnam Pro"/>
+                <a:latin typeface="IBM Plex Sans"/>
               </a:rPr>
-              <a:t>Thảo luận &amp; đánh giá</a:t>
-            </a:r>
-          </a:p>
-        </p:txBody>
-      </p:sp>
-      <p:sp>
-        <p:nvSpPr>
-          <p:cNvPr id="41" name="TextBox 40"/>
-          <p:cNvSpPr txBox="1"/>
-          <p:nvPr/>
-        </p:nvSpPr>
-        <p:spPr>
-          <a:xfrm>
-            <a:off x="27774000" y="1530000"/>
-            <a:ext cx="7362000" cy="5922000"/>
-          </a:xfrm>
-          <a:prstGeom prst="rect">
-            <a:avLst/>
-          </a:prstGeom>
-          <a:noFill/>
-        </p:spPr>
-        <p:txBody>
-          <a:bodyPr wrap="square" anchor="t" lIns="0" rIns="0" tIns="0" bIns="0">
-            <a:spAutoFit/>
-          </a:bodyPr>
-          <a:lstStyle/>
+              <a:t>bài kiểm thử tự động</a:t>
+            </a:r>
+          </a:p>
           <a:p>
             <a:pPr algn="l"/>
             <a:r>
-              <a:rPr sz="1600" b="0" i="1">
+              <a:rPr sz="1200" b="0" i="1">
                 <a:solidFill>
                   <a:srgbClr val="5B6570"/>
                 </a:solidFill>
                 <a:latin typeface="IBM Plex Sans"/>
               </a:rPr>
-              <a:t>Kết quả nói lên điều gì? Hạn chế của đề tài.</a:t>
-            </a:r>
-          </a:p>
-        </p:txBody>
-      </p:sp>
-      <p:sp>
-        <p:nvSpPr>
-          <p:cNvPr id="42" name="Rounded Rectangle 41"/>
+              <a:t>[ S3 — em viết 1 dòng: con số này nghĩa là gì? ]</a:t>
+            </a:r>
+          </a:p>
+        </p:txBody>
+      </p:sp>
+      <p:sp>
+        <p:nvSpPr>
+          <p:cNvPr id="40" name="Rounded Rectangle 39"/>
           <p:cNvSpPr/>
           <p:nvPr/>
         </p:nvSpPr>
         <p:spPr>
           <a:xfrm>
-            <a:off x="27450000" y="8190000"/>
-            <a:ext cx="8010000" cy="7200000"/>
+            <a:off x="9450000" y="16560000"/>
+            <a:ext cx="17100000" cy="9720000"/>
           </a:xfrm>
           <a:prstGeom prst="roundRect">
             <a:avLst>
-              <a:gd name="adj" fmla="val 1500"/>
-            </a:avLst>
-          </a:prstGeom>
-          <a:solidFill>
-            <a:srgbClr val="F1DFB8"/>
-          </a:solidFill>
-          <a:ln w="25200">
-            <a:solidFill>
-              <a:srgbClr val="C98A1F"/>
-            </a:solidFill>
-          </a:ln>
-          <a:effectLst/>
-        </p:spPr>
-        <p:style>
-          <a:lnRef idx="1">
-            <a:schemeClr val="accent1"/>
-          </a:lnRef>
-          <a:fillRef idx="3">
-            <a:schemeClr val="accent1"/>
-          </a:fillRef>
-          <a:effectRef idx="2">
-            <a:schemeClr val="accent1"/>
-          </a:effectRef>
-          <a:fontRef idx="minor">
-            <a:schemeClr val="lt1"/>
-          </a:fontRef>
-        </p:style>
-        <p:txBody>
-          <a:bodyPr rtlCol="0" anchor="ctr"/>
-          <a:lstStyle/>
-          <a:p>
-            <a:pPr algn="ctr"/>
-          </a:p>
-        </p:txBody>
-      </p:sp>
-      <p:sp>
-        <p:nvSpPr>
-          <p:cNvPr id="43" name="Oval 42"/>
-          <p:cNvSpPr/>
-          <p:nvPr/>
-        </p:nvSpPr>
-        <p:spPr>
-          <a:xfrm>
-            <a:off x="27774000" y="8478000"/>
-            <a:ext cx="522000" cy="522000"/>
-          </a:xfrm>
-          <a:prstGeom prst="ellipse">
-            <a:avLst/>
-          </a:prstGeom>
-          <a:solidFill>
-            <a:srgbClr val="1C2321"/>
-          </a:solidFill>
-          <a:ln>
-            <a:noFill/>
-          </a:ln>
-          <a:effectLst/>
-        </p:spPr>
-        <p:style>
-          <a:lnRef idx="1">
-            <a:schemeClr val="accent1"/>
-          </a:lnRef>
-          <a:fillRef idx="3">
-            <a:schemeClr val="accent1"/>
-          </a:fillRef>
-          <a:effectRef idx="2">
-            <a:schemeClr val="accent1"/>
-          </a:effectRef>
-          <a:fontRef idx="minor">
-            <a:schemeClr val="lt1"/>
-          </a:fontRef>
-        </p:style>
-        <p:txBody>
-          <a:bodyPr rtlCol="0" anchor="ctr" lIns="0" rIns="0" tIns="0" bIns="0"/>
-          <a:lstStyle/>
-          <a:p>
-            <a:pPr algn="ctr"/>
-            <a:r>
-              <a:rPr sz="1860" b="1">
-                <a:solidFill>
-                  <a:srgbClr val="FFFFFF"/>
-                </a:solidFill>
-                <a:latin typeface="Be Vietnam Pro"/>
-              </a:rPr>
-              <a:t>08</a:t>
-            </a:r>
-          </a:p>
-        </p:txBody>
-      </p:sp>
-      <p:sp>
-        <p:nvSpPr>
-          <p:cNvPr id="44" name="TextBox 43"/>
-          <p:cNvSpPr txBox="1"/>
-          <p:nvPr/>
-        </p:nvSpPr>
-        <p:spPr>
-          <a:xfrm>
-            <a:off x="28440000" y="8478000"/>
-            <a:ext cx="6695999" cy="522000"/>
-          </a:xfrm>
-          <a:prstGeom prst="rect">
-            <a:avLst/>
-          </a:prstGeom>
-          <a:noFill/>
-        </p:spPr>
-        <p:txBody>
-          <a:bodyPr wrap="square" anchor="ctr" lIns="0" rIns="0" tIns="0" bIns="0">
-            <a:spAutoFit/>
-          </a:bodyPr>
-          <a:lstStyle/>
-          <a:p>
-            <a:pPr algn="l"/>
-            <a:r>
-              <a:rPr sz="3000" b="1" i="0">
-                <a:solidFill>
-                  <a:srgbClr val="1C2321"/>
-                </a:solidFill>
-                <a:latin typeface="Be Vietnam Pro"/>
-              </a:rPr>
-              <a:t>Kết luận</a:t>
-            </a:r>
-          </a:p>
-        </p:txBody>
-      </p:sp>
-      <p:sp>
-        <p:nvSpPr>
-          <p:cNvPr id="45" name="TextBox 44"/>
-          <p:cNvSpPr txBox="1"/>
-          <p:nvPr/>
-        </p:nvSpPr>
-        <p:spPr>
-          <a:xfrm>
-            <a:off x="27774000" y="9180000"/>
-            <a:ext cx="7362000" cy="5922000"/>
-          </a:xfrm>
-          <a:prstGeom prst="rect">
-            <a:avLst/>
-          </a:prstGeom>
-          <a:noFill/>
-        </p:spPr>
-        <p:txBody>
-          <a:bodyPr wrap="square" anchor="t" lIns="0" rIns="0" tIns="0" bIns="0">
-            <a:spAutoFit/>
-          </a:bodyPr>
-          <a:lstStyle/>
-          <a:p>
-            <a:pPr algn="l"/>
-            <a:r>
-              <a:rPr sz="1600" b="0" i="1">
-                <a:solidFill>
-                  <a:srgbClr val="5B6570"/>
-                </a:solidFill>
-                <a:latin typeface="IBM Plex Sans"/>
-              </a:rPr>
-              <a:t>Trả lời lần lượt từng câu hỏi nghiên cứu ở mục 02.</a:t>
-            </a:r>
-          </a:p>
-        </p:txBody>
-      </p:sp>
-      <p:sp>
-        <p:nvSpPr>
-          <p:cNvPr id="46" name="Rounded Rectangle 45"/>
-          <p:cNvSpPr/>
-          <p:nvPr/>
-        </p:nvSpPr>
-        <p:spPr>
-          <a:xfrm>
-            <a:off x="27450000" y="15840000"/>
-            <a:ext cx="8010000" cy="4320000"/>
-          </a:xfrm>
-          <a:prstGeom prst="roundRect">
-            <a:avLst>
-              <a:gd name="adj" fmla="val 2500"/>
+              <a:gd name="adj" fmla="val 1111"/>
             </a:avLst>
           </a:prstGeom>
           <a:solidFill>
@@ -5519,13 +5267,13 @@
       </p:sp>
       <p:sp>
         <p:nvSpPr>
-          <p:cNvPr id="47" name="Oval 46"/>
+          <p:cNvPr id="41" name="Oval 40"/>
           <p:cNvSpPr/>
           <p:nvPr/>
         </p:nvSpPr>
         <p:spPr>
           <a:xfrm>
-            <a:off x="27774000" y="16127999"/>
+            <a:off x="9774000" y="16848000"/>
             <a:ext cx="522000" cy="522000"/>
           </a:xfrm>
           <a:prstGeom prst="ellipse">
@@ -5554,32 +5302,32 @@
           </a:fontRef>
         </p:style>
         <p:txBody>
-          <a:bodyPr rtlCol="0" anchor="ctr" lIns="0" rIns="0" tIns="0" bIns="0"/>
+          <a:bodyPr rtlCol="0" anchor="ctr" wrap="square" lIns="0" rIns="0" tIns="0" bIns="0"/>
           <a:lstStyle/>
           <a:p>
             <a:pPr algn="ctr"/>
             <a:r>
-              <a:rPr sz="1860" b="1">
+              <a:rPr sz="1860" b="1" i="0">
                 <a:solidFill>
                   <a:srgbClr val="FFFFFF"/>
                 </a:solidFill>
                 <a:latin typeface="Be Vietnam Pro"/>
               </a:rPr>
-              <a:t>09</a:t>
-            </a:r>
-          </a:p>
-        </p:txBody>
-      </p:sp>
-      <p:sp>
-        <p:nvSpPr>
-          <p:cNvPr id="48" name="TextBox 47"/>
+              <a:t>04</a:t>
+            </a:r>
+          </a:p>
+        </p:txBody>
+      </p:sp>
+      <p:sp>
+        <p:nvSpPr>
+          <p:cNvPr id="42" name="TextBox 41"/>
           <p:cNvSpPr txBox="1"/>
           <p:nvPr/>
         </p:nvSpPr>
         <p:spPr>
           <a:xfrm>
-            <a:off x="28440000" y="16127999"/>
-            <a:ext cx="6695999" cy="522000"/>
+            <a:off x="10439999" y="16848000"/>
+            <a:ext cx="15785999" cy="522000"/>
           </a:xfrm>
           <a:prstGeom prst="rect">
             <a:avLst/>
@@ -5600,21 +5348,92 @@
                 </a:solidFill>
                 <a:latin typeface="Be Vietnam Pro"/>
               </a:rPr>
-              <a:t>Hướng phát triển</a:t>
-            </a:r>
-          </a:p>
-        </p:txBody>
-      </p:sp>
-      <p:sp>
-        <p:nvSpPr>
-          <p:cNvPr id="49" name="TextBox 48"/>
+              <a:t>Cách hoạt động</a:t>
+            </a:r>
+          </a:p>
+        </p:txBody>
+      </p:sp>
+      <p:pic>
+        <p:nvPicPr>
+          <p:cNvPr id="43" name="Picture 42" descr="so_do_5_lop.png"/>
+          <p:cNvPicPr>
+            <a:picLocks noChangeAspect="1"/>
+          </p:cNvPicPr>
+          <p:nvPr/>
+        </p:nvPicPr>
+        <p:blipFill>
+          <a:blip r:embed="rId4"/>
+          <a:stretch>
+            <a:fillRect/>
+          </a:stretch>
+        </p:blipFill>
+        <p:spPr>
+          <a:xfrm>
+            <a:off x="9774000" y="17550000"/>
+            <a:ext cx="16452000" cy="6169500"/>
+          </a:xfrm>
+          <a:prstGeom prst="rect">
+            <a:avLst/>
+          </a:prstGeom>
+        </p:spPr>
+      </p:pic>
+      <p:sp>
+        <p:nvSpPr>
+          <p:cNvPr id="44" name="Rounded Rectangle 43"/>
+          <p:cNvSpPr/>
+          <p:nvPr/>
+        </p:nvSpPr>
+        <p:spPr>
+          <a:xfrm>
+            <a:off x="9774000" y="23863500"/>
+            <a:ext cx="16452000" cy="2092499"/>
+          </a:xfrm>
+          <a:prstGeom prst="roundRect">
+            <a:avLst>
+              <a:gd name="adj" fmla="val 5161"/>
+            </a:avLst>
+          </a:prstGeom>
+          <a:noFill/>
+          <a:ln w="18000">
+            <a:solidFill>
+              <a:srgbClr val="DBDCD5"/>
+            </a:solidFill>
+            <a:prstDash val="dash"/>
+          </a:ln>
+          <a:effectLst/>
+        </p:spPr>
+        <p:style>
+          <a:lnRef idx="1">
+            <a:schemeClr val="accent1"/>
+          </a:lnRef>
+          <a:fillRef idx="3">
+            <a:schemeClr val="accent1"/>
+          </a:fillRef>
+          <a:effectRef idx="2">
+            <a:schemeClr val="accent1"/>
+          </a:effectRef>
+          <a:fontRef idx="minor">
+            <a:schemeClr val="lt1"/>
+          </a:fontRef>
+        </p:style>
+        <p:txBody>
+          <a:bodyPr rtlCol="0" anchor="ctr"/>
+          <a:lstStyle/>
+          <a:p>
+            <a:pPr algn="ctr"/>
+          </a:p>
+        </p:txBody>
+      </p:sp>
+      <p:sp>
+        <p:nvSpPr>
+          <p:cNvPr id="45" name="TextBox 44"/>
           <p:cNvSpPr txBox="1"/>
           <p:nvPr/>
         </p:nvSpPr>
         <p:spPr>
           <a:xfrm>
-            <a:off x="27774000" y="16830000"/>
-            <a:ext cx="7362000" cy="3042000"/>
+            <a:off x="9954000" y="24007500"/>
+            <a:ext cx="16092000" cy="1804499"/>
           </a:xfrm>
           <a:prstGeom prst="rect">
             <a:avLst/>
@@ -5635,25 +5454,25 @@
                 </a:solidFill>
                 <a:latin typeface="IBM Plex Sans"/>
               </a:rPr>
-              <a:t>Bước tiếp theo nếu tiếp tục đề tài.</a:t>
-            </a:r>
-          </a:p>
-        </p:txBody>
-      </p:sp>
-      <p:sp>
-        <p:nvSpPr>
-          <p:cNvPr id="50" name="Rounded Rectangle 49"/>
+              <a:t>[ G2 — em viết 1–2 câu tóm tắt sơ đồ. Nhãn "Sơ đồ do AI tạo ra" đã có sẵn trong hình — giữ nguyên. ]</a:t>
+            </a:r>
+          </a:p>
+        </p:txBody>
+      </p:sp>
+      <p:sp>
+        <p:nvSpPr>
+          <p:cNvPr id="46" name="Rounded Rectangle 45"/>
           <p:cNvSpPr/>
           <p:nvPr/>
         </p:nvSpPr>
         <p:spPr>
           <a:xfrm>
-            <a:off x="27450000" y="20610000"/>
-            <a:ext cx="8010000" cy="3060000"/>
+            <a:off x="27450000" y="540000"/>
+            <a:ext cx="8010000" cy="10440000"/>
           </a:xfrm>
           <a:prstGeom prst="roundRect">
             <a:avLst>
-              <a:gd name="adj" fmla="val 3529"/>
+              <a:gd name="adj" fmla="val 1348"/>
             </a:avLst>
           </a:prstGeom>
           <a:solidFill>
@@ -5690,14 +5509,14 @@
       </p:sp>
       <p:sp>
         <p:nvSpPr>
-          <p:cNvPr id="51" name="Oval 50"/>
+          <p:cNvPr id="47" name="Oval 46"/>
           <p:cNvSpPr/>
           <p:nvPr/>
         </p:nvSpPr>
         <p:spPr>
           <a:xfrm>
-            <a:off x="27774000" y="20826000"/>
-            <a:ext cx="396000" cy="396000"/>
+            <a:off x="27774000" y="827999"/>
+            <a:ext cx="522000" cy="522000"/>
           </a:xfrm>
           <a:prstGeom prst="ellipse">
             <a:avLst/>
@@ -5725,32 +5544,32 @@
           </a:fontRef>
         </p:style>
         <p:txBody>
-          <a:bodyPr rtlCol="0" anchor="ctr" lIns="0" rIns="0" tIns="0" bIns="0"/>
+          <a:bodyPr rtlCol="0" anchor="ctr" wrap="square" lIns="0" rIns="0" tIns="0" bIns="0"/>
           <a:lstStyle/>
           <a:p>
             <a:pPr algn="ctr"/>
             <a:r>
-              <a:rPr sz="1350" b="1">
+              <a:rPr sz="1860" b="1" i="0">
                 <a:solidFill>
                   <a:srgbClr val="FFFFFF"/>
                 </a:solidFill>
                 <a:latin typeface="Be Vietnam Pro"/>
               </a:rPr>
-              <a:t>10</a:t>
-            </a:r>
-          </a:p>
-        </p:txBody>
-      </p:sp>
-      <p:sp>
-        <p:nvSpPr>
-          <p:cNvPr id="52" name="TextBox 51"/>
+              <a:t>05</a:t>
+            </a:r>
+          </a:p>
+        </p:txBody>
+      </p:sp>
+      <p:sp>
+        <p:nvSpPr>
+          <p:cNvPr id="48" name="TextBox 47"/>
           <p:cNvSpPr txBox="1"/>
           <p:nvPr/>
         </p:nvSpPr>
         <p:spPr>
           <a:xfrm>
-            <a:off x="28314000" y="20826000"/>
-            <a:ext cx="6821999" cy="396000"/>
+            <a:off x="28440000" y="827999"/>
+            <a:ext cx="6695999" cy="522000"/>
           </a:xfrm>
           <a:prstGeom prst="rect">
             <a:avLst/>
@@ -5765,27 +5584,127 @@
           <a:p>
             <a:pPr algn="l"/>
             <a:r>
-              <a:rPr sz="2100" b="1" i="0">
+              <a:rPr sz="3000" b="1" i="0">
                 <a:solidFill>
                   <a:srgbClr val="1C2321"/>
                 </a:solidFill>
                 <a:latin typeface="Be Vietnam Pro"/>
               </a:rPr>
-              <a:t>Tài liệu tham khảo</a:t>
-            </a:r>
-          </a:p>
-        </p:txBody>
-      </p:sp>
-      <p:sp>
-        <p:nvSpPr>
-          <p:cNvPr id="53" name="TextBox 52"/>
+              <a:t>Lợi ích</a:t>
+            </a:r>
+          </a:p>
+        </p:txBody>
+      </p:sp>
+      <p:sp>
+        <p:nvSpPr>
+          <p:cNvPr id="49" name="Oval 48"/>
+          <p:cNvSpPr/>
+          <p:nvPr/>
+        </p:nvSpPr>
+        <p:spPr>
+          <a:xfrm>
+            <a:off x="27774000" y="1548000"/>
+            <a:ext cx="432000" cy="432000"/>
+          </a:xfrm>
+          <a:prstGeom prst="ellipse">
+            <a:avLst/>
+          </a:prstGeom>
+          <a:solidFill>
+            <a:srgbClr val="27805A"/>
+          </a:solidFill>
+          <a:ln>
+            <a:noFill/>
+          </a:ln>
+          <a:effectLst/>
+        </p:spPr>
+        <p:style>
+          <a:lnRef idx="1">
+            <a:schemeClr val="accent1"/>
+          </a:lnRef>
+          <a:fillRef idx="3">
+            <a:schemeClr val="accent1"/>
+          </a:fillRef>
+          <a:effectRef idx="2">
+            <a:schemeClr val="accent1"/>
+          </a:effectRef>
+          <a:fontRef idx="minor">
+            <a:schemeClr val="lt1"/>
+          </a:fontRef>
+        </p:style>
+        <p:txBody>
+          <a:bodyPr rtlCol="0" anchor="ctr" wrap="square" lIns="0" rIns="0" tIns="0" bIns="0"/>
+          <a:lstStyle/>
+          <a:p>
+            <a:pPr algn="ctr"/>
+            <a:r>
+              <a:rPr sz="1500" b="1" i="0">
+                <a:solidFill>
+                  <a:srgbClr val="FFFFFF"/>
+                </a:solidFill>
+                <a:latin typeface="Be Vietnam Pro"/>
+              </a:rPr>
+              <a:t>1</a:t>
+            </a:r>
+          </a:p>
+        </p:txBody>
+      </p:sp>
+      <p:sp>
+        <p:nvSpPr>
+          <p:cNvPr id="50" name="Rounded Rectangle 49"/>
+          <p:cNvSpPr/>
+          <p:nvPr/>
+        </p:nvSpPr>
+        <p:spPr>
+          <a:xfrm>
+            <a:off x="28350000" y="1530000"/>
+            <a:ext cx="6785999" cy="2137500"/>
+          </a:xfrm>
+          <a:prstGeom prst="roundRect">
+            <a:avLst>
+              <a:gd name="adj" fmla="val 5052"/>
+            </a:avLst>
+          </a:prstGeom>
+          <a:noFill/>
+          <a:ln w="18000">
+            <a:solidFill>
+              <a:srgbClr val="DBDCD5"/>
+            </a:solidFill>
+            <a:prstDash val="dash"/>
+          </a:ln>
+          <a:effectLst/>
+        </p:spPr>
+        <p:style>
+          <a:lnRef idx="1">
+            <a:schemeClr val="accent1"/>
+          </a:lnRef>
+          <a:fillRef idx="3">
+            <a:schemeClr val="accent1"/>
+          </a:fillRef>
+          <a:effectRef idx="2">
+            <a:schemeClr val="accent1"/>
+          </a:effectRef>
+          <a:fontRef idx="minor">
+            <a:schemeClr val="lt1"/>
+          </a:fontRef>
+        </p:style>
+        <p:txBody>
+          <a:bodyPr rtlCol="0" anchor="ctr"/>
+          <a:lstStyle/>
+          <a:p>
+            <a:pPr algn="ctr"/>
+          </a:p>
+        </p:txBody>
+      </p:sp>
+      <p:sp>
+        <p:nvSpPr>
+          <p:cNvPr id="51" name="TextBox 50"/>
           <p:cNvSpPr txBox="1"/>
           <p:nvPr/>
         </p:nvSpPr>
         <p:spPr>
           <a:xfrm>
-            <a:off x="27774000" y="21330000"/>
-            <a:ext cx="7362000" cy="2124000"/>
+            <a:off x="28530000" y="1674000"/>
+            <a:ext cx="6425999" cy="1849500"/>
           </a:xfrm>
           <a:prstGeom prst="rect">
             <a:avLst/>
@@ -5800,31 +5719,702 @@
           <a:p>
             <a:pPr algn="l"/>
             <a:r>
-              <a:rPr sz="1300" b="0" i="1">
+              <a:rPr sz="1600" b="0" i="1">
                 <a:solidFill>
                   <a:srgbClr val="5B6570"/>
                 </a:solidFill>
                 <a:latin typeface="IBM Plex Sans"/>
               </a:rPr>
-              <a:t>Theo một chuẩn trích dẫn thống nhất.</a:t>
-            </a:r>
-          </a:p>
-        </p:txBody>
-      </p:sp>
-      <p:sp>
-        <p:nvSpPr>
-          <p:cNvPr id="54" name="Rounded Rectangle 53"/>
+              <a:t>[ P1 — một lợi ích, tối đa 2 dòng ]</a:t>
+            </a:r>
+          </a:p>
+        </p:txBody>
+      </p:sp>
+      <p:sp>
+        <p:nvSpPr>
+          <p:cNvPr id="52" name="Oval 51"/>
           <p:cNvSpPr/>
           <p:nvPr/>
         </p:nvSpPr>
         <p:spPr>
           <a:xfrm>
-            <a:off x="27450000" y="24120000"/>
-            <a:ext cx="8010000" cy="2160000"/>
+            <a:off x="27774000" y="3829500"/>
+            <a:ext cx="432000" cy="432000"/>
+          </a:xfrm>
+          <a:prstGeom prst="ellipse">
+            <a:avLst/>
+          </a:prstGeom>
+          <a:solidFill>
+            <a:srgbClr val="27805A"/>
+          </a:solidFill>
+          <a:ln>
+            <a:noFill/>
+          </a:ln>
+          <a:effectLst/>
+        </p:spPr>
+        <p:style>
+          <a:lnRef idx="1">
+            <a:schemeClr val="accent1"/>
+          </a:lnRef>
+          <a:fillRef idx="3">
+            <a:schemeClr val="accent1"/>
+          </a:fillRef>
+          <a:effectRef idx="2">
+            <a:schemeClr val="accent1"/>
+          </a:effectRef>
+          <a:fontRef idx="minor">
+            <a:schemeClr val="lt1"/>
+          </a:fontRef>
+        </p:style>
+        <p:txBody>
+          <a:bodyPr rtlCol="0" anchor="ctr" wrap="square" lIns="0" rIns="0" tIns="0" bIns="0"/>
+          <a:lstStyle/>
+          <a:p>
+            <a:pPr algn="ctr"/>
+            <a:r>
+              <a:rPr sz="1500" b="1" i="0">
+                <a:solidFill>
+                  <a:srgbClr val="FFFFFF"/>
+                </a:solidFill>
+                <a:latin typeface="Be Vietnam Pro"/>
+              </a:rPr>
+              <a:t>2</a:t>
+            </a:r>
+          </a:p>
+        </p:txBody>
+      </p:sp>
+      <p:sp>
+        <p:nvSpPr>
+          <p:cNvPr id="53" name="Rounded Rectangle 52"/>
+          <p:cNvSpPr/>
+          <p:nvPr/>
+        </p:nvSpPr>
+        <p:spPr>
+          <a:xfrm>
+            <a:off x="28350000" y="3811500"/>
+            <a:ext cx="6785999" cy="2137500"/>
           </a:xfrm>
           <a:prstGeom prst="roundRect">
             <a:avLst>
-              <a:gd name="adj" fmla="val 5000"/>
+              <a:gd name="adj" fmla="val 5052"/>
+            </a:avLst>
+          </a:prstGeom>
+          <a:noFill/>
+          <a:ln w="18000">
+            <a:solidFill>
+              <a:srgbClr val="DBDCD5"/>
+            </a:solidFill>
+            <a:prstDash val="dash"/>
+          </a:ln>
+          <a:effectLst/>
+        </p:spPr>
+        <p:style>
+          <a:lnRef idx="1">
+            <a:schemeClr val="accent1"/>
+          </a:lnRef>
+          <a:fillRef idx="3">
+            <a:schemeClr val="accent1"/>
+          </a:fillRef>
+          <a:effectRef idx="2">
+            <a:schemeClr val="accent1"/>
+          </a:effectRef>
+          <a:fontRef idx="minor">
+            <a:schemeClr val="lt1"/>
+          </a:fontRef>
+        </p:style>
+        <p:txBody>
+          <a:bodyPr rtlCol="0" anchor="ctr"/>
+          <a:lstStyle/>
+          <a:p>
+            <a:pPr algn="ctr"/>
+          </a:p>
+        </p:txBody>
+      </p:sp>
+      <p:sp>
+        <p:nvSpPr>
+          <p:cNvPr id="54" name="TextBox 53"/>
+          <p:cNvSpPr txBox="1"/>
+          <p:nvPr/>
+        </p:nvSpPr>
+        <p:spPr>
+          <a:xfrm>
+            <a:off x="28530000" y="3955500"/>
+            <a:ext cx="6425999" cy="1849500"/>
+          </a:xfrm>
+          <a:prstGeom prst="rect">
+            <a:avLst/>
+          </a:prstGeom>
+          <a:noFill/>
+        </p:spPr>
+        <p:txBody>
+          <a:bodyPr wrap="square" anchor="t" lIns="0" rIns="0" tIns="0" bIns="0">
+            <a:spAutoFit/>
+          </a:bodyPr>
+          <a:lstStyle/>
+          <a:p>
+            <a:pPr algn="l"/>
+            <a:r>
+              <a:rPr sz="1600" b="0" i="1">
+                <a:solidFill>
+                  <a:srgbClr val="5B6570"/>
+                </a:solidFill>
+                <a:latin typeface="IBM Plex Sans"/>
+              </a:rPr>
+              <a:t>[ P2 — một lợi ích, tối đa 2 dòng ]</a:t>
+            </a:r>
+          </a:p>
+        </p:txBody>
+      </p:sp>
+      <p:sp>
+        <p:nvSpPr>
+          <p:cNvPr id="55" name="Oval 54"/>
+          <p:cNvSpPr/>
+          <p:nvPr/>
+        </p:nvSpPr>
+        <p:spPr>
+          <a:xfrm>
+            <a:off x="27774000" y="6111000"/>
+            <a:ext cx="432000" cy="432000"/>
+          </a:xfrm>
+          <a:prstGeom prst="ellipse">
+            <a:avLst/>
+          </a:prstGeom>
+          <a:solidFill>
+            <a:srgbClr val="27805A"/>
+          </a:solidFill>
+          <a:ln>
+            <a:noFill/>
+          </a:ln>
+          <a:effectLst/>
+        </p:spPr>
+        <p:style>
+          <a:lnRef idx="1">
+            <a:schemeClr val="accent1"/>
+          </a:lnRef>
+          <a:fillRef idx="3">
+            <a:schemeClr val="accent1"/>
+          </a:fillRef>
+          <a:effectRef idx="2">
+            <a:schemeClr val="accent1"/>
+          </a:effectRef>
+          <a:fontRef idx="minor">
+            <a:schemeClr val="lt1"/>
+          </a:fontRef>
+        </p:style>
+        <p:txBody>
+          <a:bodyPr rtlCol="0" anchor="ctr" wrap="square" lIns="0" rIns="0" tIns="0" bIns="0"/>
+          <a:lstStyle/>
+          <a:p>
+            <a:pPr algn="ctr"/>
+            <a:r>
+              <a:rPr sz="1500" b="1" i="0">
+                <a:solidFill>
+                  <a:srgbClr val="FFFFFF"/>
+                </a:solidFill>
+                <a:latin typeface="Be Vietnam Pro"/>
+              </a:rPr>
+              <a:t>3</a:t>
+            </a:r>
+          </a:p>
+        </p:txBody>
+      </p:sp>
+      <p:sp>
+        <p:nvSpPr>
+          <p:cNvPr id="56" name="Rounded Rectangle 55"/>
+          <p:cNvSpPr/>
+          <p:nvPr/>
+        </p:nvSpPr>
+        <p:spPr>
+          <a:xfrm>
+            <a:off x="28350000" y="6093000"/>
+            <a:ext cx="6785999" cy="2137500"/>
+          </a:xfrm>
+          <a:prstGeom prst="roundRect">
+            <a:avLst>
+              <a:gd name="adj" fmla="val 5052"/>
+            </a:avLst>
+          </a:prstGeom>
+          <a:noFill/>
+          <a:ln w="18000">
+            <a:solidFill>
+              <a:srgbClr val="DBDCD5"/>
+            </a:solidFill>
+            <a:prstDash val="dash"/>
+          </a:ln>
+          <a:effectLst/>
+        </p:spPr>
+        <p:style>
+          <a:lnRef idx="1">
+            <a:schemeClr val="accent1"/>
+          </a:lnRef>
+          <a:fillRef idx="3">
+            <a:schemeClr val="accent1"/>
+          </a:fillRef>
+          <a:effectRef idx="2">
+            <a:schemeClr val="accent1"/>
+          </a:effectRef>
+          <a:fontRef idx="minor">
+            <a:schemeClr val="lt1"/>
+          </a:fontRef>
+        </p:style>
+        <p:txBody>
+          <a:bodyPr rtlCol="0" anchor="ctr"/>
+          <a:lstStyle/>
+          <a:p>
+            <a:pPr algn="ctr"/>
+          </a:p>
+        </p:txBody>
+      </p:sp>
+      <p:sp>
+        <p:nvSpPr>
+          <p:cNvPr id="57" name="TextBox 56"/>
+          <p:cNvSpPr txBox="1"/>
+          <p:nvPr/>
+        </p:nvSpPr>
+        <p:spPr>
+          <a:xfrm>
+            <a:off x="28530000" y="6237000"/>
+            <a:ext cx="6425999" cy="1849500"/>
+          </a:xfrm>
+          <a:prstGeom prst="rect">
+            <a:avLst/>
+          </a:prstGeom>
+          <a:noFill/>
+        </p:spPr>
+        <p:txBody>
+          <a:bodyPr wrap="square" anchor="t" lIns="0" rIns="0" tIns="0" bIns="0">
+            <a:spAutoFit/>
+          </a:bodyPr>
+          <a:lstStyle/>
+          <a:p>
+            <a:pPr algn="l"/>
+            <a:r>
+              <a:rPr sz="1600" b="0" i="1">
+                <a:solidFill>
+                  <a:srgbClr val="5B6570"/>
+                </a:solidFill>
+                <a:latin typeface="IBM Plex Sans"/>
+              </a:rPr>
+              <a:t>[ P3 — một lợi ích, tối đa 2 dòng ]</a:t>
+            </a:r>
+          </a:p>
+        </p:txBody>
+      </p:sp>
+      <p:sp>
+        <p:nvSpPr>
+          <p:cNvPr id="58" name="Oval 57"/>
+          <p:cNvSpPr/>
+          <p:nvPr/>
+        </p:nvSpPr>
+        <p:spPr>
+          <a:xfrm>
+            <a:off x="27774000" y="8392500"/>
+            <a:ext cx="432000" cy="432000"/>
+          </a:xfrm>
+          <a:prstGeom prst="ellipse">
+            <a:avLst/>
+          </a:prstGeom>
+          <a:solidFill>
+            <a:srgbClr val="27805A"/>
+          </a:solidFill>
+          <a:ln>
+            <a:noFill/>
+          </a:ln>
+          <a:effectLst/>
+        </p:spPr>
+        <p:style>
+          <a:lnRef idx="1">
+            <a:schemeClr val="accent1"/>
+          </a:lnRef>
+          <a:fillRef idx="3">
+            <a:schemeClr val="accent1"/>
+          </a:fillRef>
+          <a:effectRef idx="2">
+            <a:schemeClr val="accent1"/>
+          </a:effectRef>
+          <a:fontRef idx="minor">
+            <a:schemeClr val="lt1"/>
+          </a:fontRef>
+        </p:style>
+        <p:txBody>
+          <a:bodyPr rtlCol="0" anchor="ctr" wrap="square" lIns="0" rIns="0" tIns="0" bIns="0"/>
+          <a:lstStyle/>
+          <a:p>
+            <a:pPr algn="ctr"/>
+            <a:r>
+              <a:rPr sz="1500" b="1" i="0">
+                <a:solidFill>
+                  <a:srgbClr val="FFFFFF"/>
+                </a:solidFill>
+                <a:latin typeface="Be Vietnam Pro"/>
+              </a:rPr>
+              <a:t>4</a:t>
+            </a:r>
+          </a:p>
+        </p:txBody>
+      </p:sp>
+      <p:sp>
+        <p:nvSpPr>
+          <p:cNvPr id="59" name="Rounded Rectangle 58"/>
+          <p:cNvSpPr/>
+          <p:nvPr/>
+        </p:nvSpPr>
+        <p:spPr>
+          <a:xfrm>
+            <a:off x="28350000" y="8374500"/>
+            <a:ext cx="6785999" cy="2137500"/>
+          </a:xfrm>
+          <a:prstGeom prst="roundRect">
+            <a:avLst>
+              <a:gd name="adj" fmla="val 5052"/>
+            </a:avLst>
+          </a:prstGeom>
+          <a:noFill/>
+          <a:ln w="18000">
+            <a:solidFill>
+              <a:srgbClr val="DBDCD5"/>
+            </a:solidFill>
+            <a:prstDash val="dash"/>
+          </a:ln>
+          <a:effectLst/>
+        </p:spPr>
+        <p:style>
+          <a:lnRef idx="1">
+            <a:schemeClr val="accent1"/>
+          </a:lnRef>
+          <a:fillRef idx="3">
+            <a:schemeClr val="accent1"/>
+          </a:fillRef>
+          <a:effectRef idx="2">
+            <a:schemeClr val="accent1"/>
+          </a:effectRef>
+          <a:fontRef idx="minor">
+            <a:schemeClr val="lt1"/>
+          </a:fontRef>
+        </p:style>
+        <p:txBody>
+          <a:bodyPr rtlCol="0" anchor="ctr"/>
+          <a:lstStyle/>
+          <a:p>
+            <a:pPr algn="ctr"/>
+          </a:p>
+        </p:txBody>
+      </p:sp>
+      <p:sp>
+        <p:nvSpPr>
+          <p:cNvPr id="60" name="TextBox 59"/>
+          <p:cNvSpPr txBox="1"/>
+          <p:nvPr/>
+        </p:nvSpPr>
+        <p:spPr>
+          <a:xfrm>
+            <a:off x="28530000" y="8518500"/>
+            <a:ext cx="6425999" cy="1849500"/>
+          </a:xfrm>
+          <a:prstGeom prst="rect">
+            <a:avLst/>
+          </a:prstGeom>
+          <a:noFill/>
+        </p:spPr>
+        <p:txBody>
+          <a:bodyPr wrap="square" anchor="t" lIns="0" rIns="0" tIns="0" bIns="0">
+            <a:spAutoFit/>
+          </a:bodyPr>
+          <a:lstStyle/>
+          <a:p>
+            <a:pPr algn="l"/>
+            <a:r>
+              <a:rPr sz="1600" b="0" i="1">
+                <a:solidFill>
+                  <a:srgbClr val="5B6570"/>
+                </a:solidFill>
+                <a:latin typeface="IBM Plex Sans"/>
+              </a:rPr>
+              <a:t>[ P4 — một lợi ích, tối đa 2 dòng ]</a:t>
+            </a:r>
+          </a:p>
+        </p:txBody>
+      </p:sp>
+      <p:sp>
+        <p:nvSpPr>
+          <p:cNvPr id="61" name="Rounded Rectangle 60"/>
+          <p:cNvSpPr/>
+          <p:nvPr/>
+        </p:nvSpPr>
+        <p:spPr>
+          <a:xfrm>
+            <a:off x="27450000" y="11430000"/>
+            <a:ext cx="8010000" cy="11880000"/>
+          </a:xfrm>
+          <a:prstGeom prst="roundRect">
+            <a:avLst>
+              <a:gd name="adj" fmla="val 1348"/>
+            </a:avLst>
+          </a:prstGeom>
+          <a:solidFill>
+            <a:srgbClr val="FFFFFF"/>
+          </a:solidFill>
+          <a:ln w="14400">
+            <a:solidFill>
+              <a:srgbClr val="DBDCD5"/>
+            </a:solidFill>
+          </a:ln>
+          <a:effectLst/>
+        </p:spPr>
+        <p:style>
+          <a:lnRef idx="1">
+            <a:schemeClr val="accent1"/>
+          </a:lnRef>
+          <a:fillRef idx="3">
+            <a:schemeClr val="accent1"/>
+          </a:fillRef>
+          <a:effectRef idx="2">
+            <a:schemeClr val="accent1"/>
+          </a:effectRef>
+          <a:fontRef idx="minor">
+            <a:schemeClr val="lt1"/>
+          </a:fontRef>
+        </p:style>
+        <p:txBody>
+          <a:bodyPr rtlCol="0" anchor="ctr"/>
+          <a:lstStyle/>
+          <a:p>
+            <a:pPr algn="ctr"/>
+          </a:p>
+        </p:txBody>
+      </p:sp>
+      <p:sp>
+        <p:nvSpPr>
+          <p:cNvPr id="62" name="Oval 61"/>
+          <p:cNvSpPr/>
+          <p:nvPr/>
+        </p:nvSpPr>
+        <p:spPr>
+          <a:xfrm>
+            <a:off x="27774000" y="11717999"/>
+            <a:ext cx="522000" cy="522000"/>
+          </a:xfrm>
+          <a:prstGeom prst="ellipse">
+            <a:avLst/>
+          </a:prstGeom>
+          <a:solidFill>
+            <a:srgbClr val="C98A1F"/>
+          </a:solidFill>
+          <a:ln>
+            <a:noFill/>
+          </a:ln>
+          <a:effectLst/>
+        </p:spPr>
+        <p:style>
+          <a:lnRef idx="1">
+            <a:schemeClr val="accent1"/>
+          </a:lnRef>
+          <a:fillRef idx="3">
+            <a:schemeClr val="accent1"/>
+          </a:fillRef>
+          <a:effectRef idx="2">
+            <a:schemeClr val="accent1"/>
+          </a:effectRef>
+          <a:fontRef idx="minor">
+            <a:schemeClr val="lt1"/>
+          </a:fontRef>
+        </p:style>
+        <p:txBody>
+          <a:bodyPr rtlCol="0" anchor="ctr" wrap="square" lIns="0" rIns="0" tIns="0" bIns="0"/>
+          <a:lstStyle/>
+          <a:p>
+            <a:pPr algn="ctr"/>
+            <a:r>
+              <a:rPr sz="1860" b="1" i="0">
+                <a:solidFill>
+                  <a:srgbClr val="FFFFFF"/>
+                </a:solidFill>
+                <a:latin typeface="Be Vietnam Pro"/>
+              </a:rPr>
+              <a:t>06</a:t>
+            </a:r>
+          </a:p>
+        </p:txBody>
+      </p:sp>
+      <p:sp>
+        <p:nvSpPr>
+          <p:cNvPr id="63" name="TextBox 62"/>
+          <p:cNvSpPr txBox="1"/>
+          <p:nvPr/>
+        </p:nvSpPr>
+        <p:spPr>
+          <a:xfrm>
+            <a:off x="28440000" y="11717999"/>
+            <a:ext cx="6695999" cy="522000"/>
+          </a:xfrm>
+          <a:prstGeom prst="rect">
+            <a:avLst/>
+          </a:prstGeom>
+          <a:noFill/>
+        </p:spPr>
+        <p:txBody>
+          <a:bodyPr wrap="square" anchor="ctr" lIns="0" rIns="0" tIns="0" bIns="0">
+            <a:spAutoFit/>
+          </a:bodyPr>
+          <a:lstStyle/>
+          <a:p>
+            <a:pPr algn="l"/>
+            <a:r>
+              <a:rPr sz="3000" b="1" i="0">
+                <a:solidFill>
+                  <a:srgbClr val="1C2321"/>
+                </a:solidFill>
+                <a:latin typeface="Be Vietnam Pro"/>
+              </a:rPr>
+              <a:t>Đã kiểm chứng</a:t>
+            </a:r>
+          </a:p>
+        </p:txBody>
+      </p:sp>
+      <p:pic>
+        <p:nvPicPr>
+          <p:cNvPr id="64" name="Picture 63" descr="bieu_do_khai_gian.png"/>
+          <p:cNvPicPr>
+            <a:picLocks noChangeAspect="1"/>
+          </p:cNvPicPr>
+          <p:nvPr/>
+        </p:nvPicPr>
+        <p:blipFill>
+          <a:blip r:embed="rId5"/>
+          <a:stretch>
+            <a:fillRect/>
+          </a:stretch>
+        </p:blipFill>
+        <p:spPr>
+          <a:xfrm>
+            <a:off x="27774000" y="12420000"/>
+            <a:ext cx="7362000" cy="3496949"/>
+          </a:xfrm>
+          <a:prstGeom prst="rect">
+            <a:avLst/>
+          </a:prstGeom>
+        </p:spPr>
+      </p:pic>
+      <p:pic>
+        <p:nvPicPr>
+          <p:cNvPr id="65" name="Picture 64" descr="bieu_do_nguyen_vong.png"/>
+          <p:cNvPicPr>
+            <a:picLocks noChangeAspect="1"/>
+          </p:cNvPicPr>
+          <p:nvPr/>
+        </p:nvPicPr>
+        <p:blipFill>
+          <a:blip r:embed="rId6"/>
+          <a:stretch>
+            <a:fillRect/>
+          </a:stretch>
+        </p:blipFill>
+        <p:spPr>
+          <a:xfrm>
+            <a:off x="27774000" y="16060949"/>
+            <a:ext cx="7362000" cy="4601250"/>
+          </a:xfrm>
+          <a:prstGeom prst="rect">
+            <a:avLst/>
+          </a:prstGeom>
+        </p:spPr>
+      </p:pic>
+      <p:sp>
+        <p:nvSpPr>
+          <p:cNvPr id="66" name="Rounded Rectangle 65"/>
+          <p:cNvSpPr/>
+          <p:nvPr/>
+        </p:nvSpPr>
+        <p:spPr>
+          <a:xfrm>
+            <a:off x="27774000" y="20806199"/>
+            <a:ext cx="7362000" cy="2179800"/>
+          </a:xfrm>
+          <a:prstGeom prst="roundRect">
+            <a:avLst>
+              <a:gd name="adj" fmla="val 4954"/>
+            </a:avLst>
+          </a:prstGeom>
+          <a:noFill/>
+          <a:ln w="18000">
+            <a:solidFill>
+              <a:srgbClr val="DBDCD5"/>
+            </a:solidFill>
+            <a:prstDash val="dash"/>
+          </a:ln>
+          <a:effectLst/>
+        </p:spPr>
+        <p:style>
+          <a:lnRef idx="1">
+            <a:schemeClr val="accent1"/>
+          </a:lnRef>
+          <a:fillRef idx="3">
+            <a:schemeClr val="accent1"/>
+          </a:fillRef>
+          <a:effectRef idx="2">
+            <a:schemeClr val="accent1"/>
+          </a:effectRef>
+          <a:fontRef idx="minor">
+            <a:schemeClr val="lt1"/>
+          </a:fontRef>
+        </p:style>
+        <p:txBody>
+          <a:bodyPr rtlCol="0" anchor="ctr"/>
+          <a:lstStyle/>
+          <a:p>
+            <a:pPr algn="ctr"/>
+          </a:p>
+        </p:txBody>
+      </p:sp>
+      <p:sp>
+        <p:nvSpPr>
+          <p:cNvPr id="67" name="TextBox 66"/>
+          <p:cNvSpPr txBox="1"/>
+          <p:nvPr/>
+        </p:nvSpPr>
+        <p:spPr>
+          <a:xfrm>
+            <a:off x="27954000" y="20950199"/>
+            <a:ext cx="7002000" cy="1891800"/>
+          </a:xfrm>
+          <a:prstGeom prst="rect">
+            <a:avLst/>
+          </a:prstGeom>
+          <a:noFill/>
+        </p:spPr>
+        <p:txBody>
+          <a:bodyPr wrap="square" anchor="t" lIns="0" rIns="0" tIns="0" bIns="0">
+            <a:spAutoFit/>
+          </a:bodyPr>
+          <a:lstStyle/>
+          <a:p>
+            <a:pPr algn="l"/>
+            <a:r>
+              <a:rPr sz="1600" b="0" i="1">
+                <a:solidFill>
+                  <a:srgbClr val="5B6570"/>
+                </a:solidFill>
+                <a:latin typeface="IBM Plex Sans"/>
+              </a:rPr>
+              <a:t>[ P5 — em viết 1–2 câu: hai biểu đồ này nói gì với học sinh? ]</a:t>
+            </a:r>
+          </a:p>
+        </p:txBody>
+      </p:sp>
+      <p:sp>
+        <p:nvSpPr>
+          <p:cNvPr id="68" name="Rounded Rectangle 67"/>
+          <p:cNvSpPr/>
+          <p:nvPr/>
+        </p:nvSpPr>
+        <p:spPr>
+          <a:xfrm>
+            <a:off x="27450000" y="23760000"/>
+            <a:ext cx="8010000" cy="2520000"/>
+          </a:xfrm>
+          <a:prstGeom prst="roundRect">
+            <a:avLst>
+              <a:gd name="adj" fmla="val 4285"/>
             </a:avLst>
           </a:prstGeom>
           <a:solidFill>
@@ -5861,14 +6451,14 @@
       </p:sp>
       <p:sp>
         <p:nvSpPr>
-          <p:cNvPr id="55" name="TextBox 54"/>
+          <p:cNvPr id="69" name="TextBox 68"/>
           <p:cNvSpPr txBox="1"/>
           <p:nvPr/>
         </p:nvSpPr>
         <p:spPr>
           <a:xfrm>
-            <a:off x="27774000" y="24335999"/>
-            <a:ext cx="7361999" cy="396000"/>
+            <a:off x="27774000" y="23975999"/>
+            <a:ext cx="7362000" cy="360000"/>
           </a:xfrm>
           <a:prstGeom prst="rect">
             <a:avLst/>
@@ -5883,7 +6473,7 @@
           <a:p>
             <a:pPr algn="l"/>
             <a:r>
-              <a:rPr sz="2100" b="1" i="0">
+              <a:rPr sz="1800" b="1" i="0">
                 <a:solidFill>
                   <a:srgbClr val="3F6B52"/>
                 </a:solidFill>
@@ -5896,14 +6486,61 @@
       </p:sp>
       <p:sp>
         <p:nvSpPr>
-          <p:cNvPr id="56" name="TextBox 55"/>
+          <p:cNvPr id="70" name="Rounded Rectangle 69"/>
+          <p:cNvSpPr/>
+          <p:nvPr/>
+        </p:nvSpPr>
+        <p:spPr>
+          <a:xfrm>
+            <a:off x="27774000" y="24443999"/>
+            <a:ext cx="7362000" cy="1656000"/>
+          </a:xfrm>
+          <a:prstGeom prst="roundRect">
+            <a:avLst>
+              <a:gd name="adj" fmla="val 6521"/>
+            </a:avLst>
+          </a:prstGeom>
+          <a:noFill/>
+          <a:ln w="18000">
+            <a:solidFill>
+              <a:srgbClr val="DBDCD5"/>
+            </a:solidFill>
+            <a:prstDash val="dash"/>
+          </a:ln>
+          <a:effectLst/>
+        </p:spPr>
+        <p:style>
+          <a:lnRef idx="1">
+            <a:schemeClr val="accent1"/>
+          </a:lnRef>
+          <a:fillRef idx="3">
+            <a:schemeClr val="accent1"/>
+          </a:fillRef>
+          <a:effectRef idx="2">
+            <a:schemeClr val="accent1"/>
+          </a:effectRef>
+          <a:fontRef idx="minor">
+            <a:schemeClr val="lt1"/>
+          </a:fontRef>
+        </p:style>
+        <p:txBody>
+          <a:bodyPr rtlCol="0" anchor="ctr"/>
+          <a:lstStyle/>
+          <a:p>
+            <a:pPr algn="ctr"/>
+          </a:p>
+        </p:txBody>
+      </p:sp>
+      <p:sp>
+        <p:nvSpPr>
+          <p:cNvPr id="71" name="TextBox 70"/>
           <p:cNvSpPr txBox="1"/>
           <p:nvPr/>
         </p:nvSpPr>
         <p:spPr>
           <a:xfrm>
-            <a:off x="27774000" y="24839999"/>
-            <a:ext cx="7362000" cy="1224000"/>
+            <a:off x="27954000" y="24588000"/>
+            <a:ext cx="7002000" cy="1368000"/>
           </a:xfrm>
           <a:prstGeom prst="rect">
             <a:avLst/>
@@ -5918,13 +6555,13 @@
           <a:p>
             <a:pPr algn="l"/>
             <a:r>
-              <a:rPr sz="1300" b="0" i="1">
+              <a:rPr sz="1200" b="0" i="1">
                 <a:solidFill>
                   <a:srgbClr val="5B6570"/>
                 </a:solidFill>
                 <a:latin typeface="IBM Plex Sans"/>
               </a:rPr>
-              <a:t>Phần nào có AI hỗ trợ, theo Phụ lục 1.</a:t>
+              <a:t>[ P6 — theo Phụ lục 1: phần nào có AI hỗ trợ ]</a:t>
             </a:r>
           </a:p>
         </p:txBody>

--- a/poster/poster_khung_1-2.pptx
+++ b/poster/poster_khung_1-2.pptx
@@ -105,6 +105,552 @@
     </a:lvl9pPr>
   </p:defaultTextStyle>
 </p:presentation>
+</file>
+
+<file path=ppt/charts/chart1.xml><?xml version="1.0" encoding="utf-8"?>
+<c:chartSpace xmlns:c="http://schemas.openxmlformats.org/drawingml/2006/chart" xmlns:a="http://schemas.openxmlformats.org/drawingml/2006/main" xmlns:r="http://schemas.openxmlformats.org/officeDocument/2006/relationships">
+  <c:date1904 val="0"/>
+  <c:chart>
+    <c:autoTitleDeleted val="1"/>
+    <c:plotArea>
+      <c:barChart>
+        <c:barDir val="bar"/>
+        <c:grouping val="clustered"/>
+        <c:ser>
+          <c:idx val="0"/>
+          <c:order val="0"/>
+          <c:tx>
+            <c:strRef>
+              <c:f>Sheet1!$B$1</c:f>
+              <c:strCache>
+                <c:ptCount val="1"/>
+                <c:pt idx="0">
+                  <c:v>Số em</c:v>
+                </c:pt>
+              </c:strCache>
+            </c:strRef>
+          </c:tx>
+          <c:dPt>
+            <c:idx val="0"/>
+            <c:spPr>
+              <a:solidFill>
+                <a:srgbClr val="27805A"/>
+              </a:solidFill>
+            </c:spPr>
+          </c:dPt>
+          <c:dPt>
+            <c:idx val="1"/>
+            <c:spPr>
+              <a:solidFill>
+                <a:srgbClr val="B9BEC3"/>
+              </a:solidFill>
+            </c:spPr>
+          </c:dPt>
+          <c:dLbls>
+            <c:dLbl>
+              <c:idx val="0"/>
+              <c:tx>
+                <c:rich>
+                  <a:bodyPr/>
+                  <a:lstStyle/>
+                  <a:p>
+                    <a:r>
+                      <a:rPr sz="1231" b="1">
+                        <a:solidFill>
+                          <a:srgbClr val="1C2321"/>
+                        </a:solidFill>
+                      </a:rPr>
+                      <a:t>0 / 1 400 em</a:t>
+                    </a:r>
+                  </a:p>
+                </c:rich>
+              </c:tx>
+              <c:dLblPos val="outEnd"/>
+              <c:showLegendKey val="0"/>
+              <c:showVal val="1"/>
+              <c:showCatName val="0"/>
+              <c:showSerName val="0"/>
+              <c:showPercent val="0"/>
+              <c:showBubbleSize val="0"/>
+            </c:dLbl>
+            <c:dLbl>
+              <c:idx val="1"/>
+              <c:tx>
+                <c:rich>
+                  <a:bodyPr/>
+                  <a:lstStyle/>
+                  <a:p>
+                    <a:r>
+                      <a:rPr sz="1231" b="1">
+                        <a:solidFill>
+                          <a:srgbClr val="1C2321"/>
+                        </a:solidFill>
+                      </a:rPr>
+                      <a:t>258 / 1 400 em (18,43%)</a:t>
+                    </a:r>
+                  </a:p>
+                </c:rich>
+              </c:tx>
+              <c:dLblPos val="outEnd"/>
+              <c:showLegendKey val="0"/>
+              <c:showVal val="1"/>
+              <c:showCatName val="0"/>
+              <c:showSerName val="0"/>
+              <c:showPercent val="0"/>
+              <c:showBubbleSize val="0"/>
+            </c:dLbl>
+            <c:showLegendKey val="0"/>
+            <c:showVal val="0"/>
+            <c:showCatName val="0"/>
+            <c:showSerName val="0"/>
+            <c:showPercent val="0"/>
+            <c:showBubbleSize val="0"/>
+            <c:showLeaderLines val="1"/>
+          </c:dLbls>
+          <c:cat>
+            <c:strRef>
+              <c:f>Sheet1!$A$2:$A$3</c:f>
+              <c:strCache>
+                <c:ptCount val="2"/>
+                <c:pt idx="0">
+                  <c:v>Phần mềm (RB-DA)</c:v>
+                </c:pt>
+                <c:pt idx="1">
+                  <c:v>Cơ chế Boston</c:v>
+                </c:pt>
+              </c:strCache>
+            </c:strRef>
+          </c:cat>
+          <c:val>
+            <c:numRef>
+              <c:f>Sheet1!$B$2:$B$3</c:f>
+              <c:numCache>
+                <c:formatCode>General</c:formatCode>
+                <c:ptCount val="2"/>
+                <c:pt idx="0">
+                  <c:v>0</c:v>
+                </c:pt>
+                <c:pt idx="1">
+                  <c:v>258</c:v>
+                </c:pt>
+              </c:numCache>
+            </c:numRef>
+          </c:val>
+        </c:ser>
+        <c:gapWidth val="70"/>
+        <c:axId val="-2068027336"/>
+        <c:axId val="-2113994440"/>
+      </c:barChart>
+      <c:catAx>
+        <c:axId val="-2068027336"/>
+        <c:scaling>
+          <c:orientation val="maxMin"/>
+        </c:scaling>
+        <c:delete val="0"/>
+        <c:axPos val="l"/>
+        <c:majorTickMark val="out"/>
+        <c:minorTickMark val="none"/>
+        <c:tickLblPos val="nextTo"/>
+        <c:spPr>
+          <a:ln>
+            <a:solidFill>
+              <a:srgbClr val="5B6570"/>
+            </a:solidFill>
+          </a:ln>
+        </c:spPr>
+        <c:txPr>
+          <a:bodyPr/>
+          <a:lstStyle/>
+          <a:p>
+            <a:pPr>
+              <a:defRPr b="1" sz="1159"/>
+            </a:pPr>
+          </a:p>
+        </c:txPr>
+        <c:crossAx val="-2113994440"/>
+        <c:crosses val="autoZero"/>
+        <c:auto val="1"/>
+        <c:lblAlgn val="ctr"/>
+        <c:lblOffset val="100"/>
+        <c:noMultiLvlLbl val="0"/>
+      </c:catAx>
+      <c:valAx>
+        <c:axId val="-2113994440"/>
+        <c:scaling>
+          <c:max val="400.0"/>
+          <c:min val="0.0"/>
+        </c:scaling>
+        <c:delete val="0"/>
+        <c:axPos val="b"/>
+        <c:majorGridlines>
+          <c:spPr>
+            <a:ln>
+              <a:solidFill>
+                <a:srgbClr val="DBDCD5"/>
+              </a:solidFill>
+            </a:ln>
+          </c:spPr>
+        </c:majorGridlines>
+        <c:majorTickMark val="out"/>
+        <c:minorTickMark val="none"/>
+        <c:tickLblPos val="nextTo"/>
+        <c:spPr>
+          <a:ln>
+            <a:noFill/>
+          </a:ln>
+        </c:spPr>
+        <c:txPr>
+          <a:bodyPr/>
+          <a:lstStyle/>
+          <a:p>
+            <a:pPr>
+              <a:defRPr>
+                <a:solidFill>
+                  <a:srgbClr val="8A929A"/>
+                </a:solidFill>
+              </a:defRPr>
+            </a:pPr>
+          </a:p>
+        </c:txPr>
+        <c:crossAx val="-2068027336"/>
+        <c:crosses val="autoZero"/>
+        <c:majorUnit val="100.0"/>
+      </c:valAx>
+    </c:plotArea>
+    <c:dispBlanksAs val="gap"/>
+  </c:chart>
+  <c:txPr>
+    <a:bodyPr/>
+    <a:lstStyle/>
+    <a:p>
+      <a:pPr>
+        <a:defRPr sz="941">
+          <a:solidFill>
+            <a:srgbClr val="1C2321"/>
+          </a:solidFill>
+          <a:latin typeface="IBM Plex Sans"/>
+        </a:defRPr>
+      </a:pPr>
+      <a:endParaRPr lang="en-US"/>
+    </a:p>
+  </c:txPr>
+  <c:externalData r:id="rId1">
+    <c:autoUpdate val="0"/>
+  </c:externalData>
+</c:chartSpace>
+</file>
+
+<file path=ppt/charts/chart2.xml><?xml version="1.0" encoding="utf-8"?>
+<c:chartSpace xmlns:c="http://schemas.openxmlformats.org/drawingml/2006/chart" xmlns:a="http://schemas.openxmlformats.org/drawingml/2006/main" xmlns:r="http://schemas.openxmlformats.org/officeDocument/2006/relationships">
+  <c:date1904 val="0"/>
+  <c:chart>
+    <c:autoTitleDeleted val="1"/>
+    <c:plotArea>
+      <c:barChart>
+        <c:barDir val="col"/>
+        <c:grouping val="clustered"/>
+        <c:ser>
+          <c:idx val="0"/>
+          <c:order val="0"/>
+          <c:tx>
+            <c:strRef>
+              <c:f>Sheet1!$B$1</c:f>
+              <c:strCache>
+                <c:ptCount val="1"/>
+                <c:pt idx="0">
+                  <c:v>Số em</c:v>
+                </c:pt>
+              </c:strCache>
+            </c:strRef>
+          </c:tx>
+          <c:dPt>
+            <c:idx val="0"/>
+            <c:spPr>
+              <a:solidFill>
+                <a:srgbClr val="27805A"/>
+              </a:solidFill>
+            </c:spPr>
+          </c:dPt>
+          <c:dPt>
+            <c:idx val="1"/>
+            <c:spPr>
+              <a:solidFill>
+                <a:srgbClr val="7FAE95"/>
+              </a:solidFill>
+            </c:spPr>
+          </c:dPt>
+          <c:dPt>
+            <c:idx val="2"/>
+            <c:spPr>
+              <a:solidFill>
+                <a:srgbClr val="7FAE95"/>
+              </a:solidFill>
+            </c:spPr>
+          </c:dPt>
+          <c:dPt>
+            <c:idx val="3"/>
+            <c:spPr>
+              <a:solidFill>
+                <a:srgbClr val="7FAE95"/>
+              </a:solidFill>
+            </c:spPr>
+          </c:dPt>
+          <c:dLbls>
+            <c:dLbl>
+              <c:idx val="0"/>
+              <c:tx>
+                <c:rich>
+                  <a:bodyPr/>
+                  <a:lstStyle/>
+                  <a:p>
+                    <a:r>
+                      <a:rPr sz="1231" b="1">
+                        <a:solidFill>
+                          <a:srgbClr val="1C2321"/>
+                        </a:solidFill>
+                      </a:rPr>
+                      <a:t>64 em · 59%</a:t>
+                    </a:r>
+                  </a:p>
+                </c:rich>
+              </c:tx>
+              <c:dLblPos val="outEnd"/>
+              <c:showLegendKey val="0"/>
+              <c:showVal val="1"/>
+              <c:showCatName val="0"/>
+              <c:showSerName val="0"/>
+              <c:showPercent val="0"/>
+              <c:showBubbleSize val="0"/>
+            </c:dLbl>
+            <c:dLbl>
+              <c:idx val="1"/>
+              <c:tx>
+                <c:rich>
+                  <a:bodyPr/>
+                  <a:lstStyle/>
+                  <a:p>
+                    <a:r>
+                      <a:rPr sz="1231" b="1">
+                        <a:solidFill>
+                          <a:srgbClr val="1C2321"/>
+                        </a:solidFill>
+                      </a:rPr>
+                      <a:t>28 em · 26%</a:t>
+                    </a:r>
+                  </a:p>
+                </c:rich>
+              </c:tx>
+              <c:dLblPos val="outEnd"/>
+              <c:showLegendKey val="0"/>
+              <c:showVal val="1"/>
+              <c:showCatName val="0"/>
+              <c:showSerName val="0"/>
+              <c:showPercent val="0"/>
+              <c:showBubbleSize val="0"/>
+            </c:dLbl>
+            <c:dLbl>
+              <c:idx val="2"/>
+              <c:tx>
+                <c:rich>
+                  <a:bodyPr/>
+                  <a:lstStyle/>
+                  <a:p>
+                    <a:r>
+                      <a:rPr sz="1231" b="1">
+                        <a:solidFill>
+                          <a:srgbClr val="1C2321"/>
+                        </a:solidFill>
+                      </a:rPr>
+                      <a:t>10 em · 9%</a:t>
+                    </a:r>
+                  </a:p>
+                </c:rich>
+              </c:tx>
+              <c:dLblPos val="outEnd"/>
+              <c:showLegendKey val="0"/>
+              <c:showVal val="1"/>
+              <c:showCatName val="0"/>
+              <c:showSerName val="0"/>
+              <c:showPercent val="0"/>
+              <c:showBubbleSize val="0"/>
+            </c:dLbl>
+            <c:dLbl>
+              <c:idx val="3"/>
+              <c:tx>
+                <c:rich>
+                  <a:bodyPr/>
+                  <a:lstStyle/>
+                  <a:p>
+                    <a:r>
+                      <a:rPr sz="1231" b="1">
+                        <a:solidFill>
+                          <a:srgbClr val="1C2321"/>
+                        </a:solidFill>
+                      </a:rPr>
+                      <a:t>6 em · 6%</a:t>
+                    </a:r>
+                  </a:p>
+                </c:rich>
+              </c:tx>
+              <c:dLblPos val="outEnd"/>
+              <c:showLegendKey val="0"/>
+              <c:showVal val="1"/>
+              <c:showCatName val="0"/>
+              <c:showSerName val="0"/>
+              <c:showPercent val="0"/>
+              <c:showBubbleSize val="0"/>
+            </c:dLbl>
+            <c:showLegendKey val="0"/>
+            <c:showVal val="0"/>
+            <c:showCatName val="0"/>
+            <c:showSerName val="0"/>
+            <c:showPercent val="0"/>
+            <c:showBubbleSize val="0"/>
+            <c:showLeaderLines val="1"/>
+          </c:dLbls>
+          <c:cat>
+            <c:strRef>
+              <c:f>Sheet1!$A$2:$A$5</c:f>
+              <c:strCache>
+                <c:ptCount val="4"/>
+                <c:pt idx="0">
+                  <c:v>NV 1</c:v>
+                </c:pt>
+                <c:pt idx="1">
+                  <c:v>NV 2</c:v>
+                </c:pt>
+                <c:pt idx="2">
+                  <c:v>NV 3</c:v>
+                </c:pt>
+                <c:pt idx="3">
+                  <c:v>NV 4</c:v>
+                </c:pt>
+              </c:strCache>
+            </c:strRef>
+          </c:cat>
+          <c:val>
+            <c:numRef>
+              <c:f>Sheet1!$B$2:$B$5</c:f>
+              <c:numCache>
+                <c:formatCode>General</c:formatCode>
+                <c:ptCount val="4"/>
+                <c:pt idx="0">
+                  <c:v>64</c:v>
+                </c:pt>
+                <c:pt idx="1">
+                  <c:v>28</c:v>
+                </c:pt>
+                <c:pt idx="2">
+                  <c:v>10</c:v>
+                </c:pt>
+                <c:pt idx="3">
+                  <c:v>6</c:v>
+                </c:pt>
+              </c:numCache>
+            </c:numRef>
+          </c:val>
+        </c:ser>
+        <c:gapWidth val="70"/>
+        <c:axId val="-2068027336"/>
+        <c:axId val="-2113994440"/>
+      </c:barChart>
+      <c:catAx>
+        <c:axId val="-2068027336"/>
+        <c:scaling>
+          <c:orientation val="minMax"/>
+        </c:scaling>
+        <c:delete val="0"/>
+        <c:axPos val="b"/>
+        <c:majorTickMark val="out"/>
+        <c:minorTickMark val="none"/>
+        <c:tickLblPos val="nextTo"/>
+        <c:spPr>
+          <a:ln>
+            <a:solidFill>
+              <a:srgbClr val="5B6570"/>
+            </a:solidFill>
+          </a:ln>
+        </c:spPr>
+        <c:txPr>
+          <a:bodyPr/>
+          <a:lstStyle/>
+          <a:p>
+            <a:pPr>
+              <a:defRPr b="1" sz="1159"/>
+            </a:pPr>
+          </a:p>
+        </c:txPr>
+        <c:crossAx val="-2113994440"/>
+        <c:crosses val="autoZero"/>
+        <c:auto val="1"/>
+        <c:lblAlgn val="ctr"/>
+        <c:lblOffset val="100"/>
+        <c:noMultiLvlLbl val="0"/>
+      </c:catAx>
+      <c:valAx>
+        <c:axId val="-2113994440"/>
+        <c:scaling>
+          <c:max val="70.0"/>
+          <c:min val="0.0"/>
+        </c:scaling>
+        <c:delete val="0"/>
+        <c:axPos val="l"/>
+        <c:majorGridlines>
+          <c:spPr>
+            <a:ln>
+              <a:solidFill>
+                <a:srgbClr val="DBDCD5"/>
+              </a:solidFill>
+            </a:ln>
+          </c:spPr>
+        </c:majorGridlines>
+        <c:majorTickMark val="out"/>
+        <c:minorTickMark val="none"/>
+        <c:tickLblPos val="nextTo"/>
+        <c:spPr>
+          <a:ln>
+            <a:noFill/>
+          </a:ln>
+        </c:spPr>
+        <c:txPr>
+          <a:bodyPr/>
+          <a:lstStyle/>
+          <a:p>
+            <a:pPr>
+              <a:defRPr>
+                <a:solidFill>
+                  <a:srgbClr val="8A929A"/>
+                </a:solidFill>
+              </a:defRPr>
+            </a:pPr>
+          </a:p>
+        </c:txPr>
+        <c:crossAx val="-2068027336"/>
+        <c:crosses val="autoZero"/>
+        <c:majorUnit val="20.0"/>
+      </c:valAx>
+    </c:plotArea>
+    <c:dispBlanksAs val="gap"/>
+  </c:chart>
+  <c:txPr>
+    <a:bodyPr/>
+    <a:lstStyle/>
+    <a:p>
+      <a:pPr>
+        <a:defRPr sz="941">
+          <a:solidFill>
+            <a:srgbClr val="1C2321"/>
+          </a:solidFill>
+          <a:latin typeface="IBM Plex Sans"/>
+        </a:defRPr>
+      </a:pPr>
+      <a:endParaRPr lang="en-US"/>
+    </a:p>
+  </c:txPr>
+  <c:externalData r:id="rId1">
+    <c:autoUpdate val="0"/>
+  </c:externalData>
+</c:chartSpace>
 </file>
 
 <file path=ppt/notesMasters/notesMaster1.xml><?xml version="1.0" encoding="utf-8"?>
@@ -5353,33 +5899,1921 @@
           </a:p>
         </p:txBody>
       </p:sp>
-      <p:pic>
-        <p:nvPicPr>
-          <p:cNvPr id="43" name="Picture 42" descr="so_do_5_lop.png"/>
-          <p:cNvPicPr>
-            <a:picLocks noChangeAspect="1"/>
-          </p:cNvPicPr>
-          <p:nvPr/>
-        </p:nvPicPr>
-        <p:blipFill>
-          <a:blip r:embed="rId4"/>
-          <a:stretch>
-            <a:fillRect/>
-          </a:stretch>
-        </p:blipFill>
-        <p:spPr>
-          <a:xfrm>
-            <a:off x="9774000" y="17550000"/>
-            <a:ext cx="16452000" cy="6169500"/>
+      <p:grpSp>
+        <p:nvGrpSpPr>
+          <p:cNvPr id="43" name="So do 5 lop"/>
+          <p:cNvGrpSpPr/>
+          <p:nvPr/>
+        </p:nvGrpSpPr>
+        <p:grpSpPr>
+          <a:xfrm>
+            <a:off x="0" y="0"/>
+            <a:ext cx="0" cy="0"/>
+            <a:chOff x="0" y="0"/>
+            <a:chExt cx="0" cy="0"/>
+          </a:xfrm>
+        </p:grpSpPr>
+      </p:grpSp>
+      <p:sp>
+        <p:nvSpPr>
+          <p:cNvPr id="44" name="Rounded Rectangle 43"/>
+          <p:cNvSpPr/>
+          <p:nvPr/>
+        </p:nvSpPr>
+        <p:spPr>
+          <a:xfrm>
+            <a:off x="10048200" y="18715350"/>
+            <a:ext cx="2742000" cy="3838800"/>
+          </a:xfrm>
+          <a:prstGeom prst="roundRect">
+            <a:avLst>
+              <a:gd name="adj" fmla="val 4500"/>
+            </a:avLst>
+          </a:prstGeom>
+          <a:solidFill>
+            <a:srgbClr val="F3F4F1"/>
+          </a:solidFill>
+          <a:ln w="20565">
+            <a:solidFill>
+              <a:srgbClr val="DBDCD5"/>
+            </a:solidFill>
+          </a:ln>
+          <a:effectLst/>
+        </p:spPr>
+        <p:style>
+          <a:lnRef idx="1">
+            <a:schemeClr val="accent1"/>
+          </a:lnRef>
+          <a:fillRef idx="3">
+            <a:schemeClr val="accent1"/>
+          </a:fillRef>
+          <a:effectRef idx="2">
+            <a:schemeClr val="accent1"/>
+          </a:effectRef>
+          <a:fontRef idx="minor">
+            <a:schemeClr val="lt1"/>
+          </a:fontRef>
+        </p:style>
+        <p:txBody>
+          <a:bodyPr rtlCol="0" anchor="ctr"/>
+          <a:lstStyle/>
+          <a:p>
+            <a:pPr algn="ctr"/>
+          </a:p>
+        </p:txBody>
+      </p:sp>
+      <p:sp>
+        <p:nvSpPr>
+          <p:cNvPr id="45" name="TextBox 44"/>
+          <p:cNvSpPr txBox="1"/>
+          <p:nvPr/>
+        </p:nvSpPr>
+        <p:spPr>
+          <a:xfrm>
+            <a:off x="10267559" y="18959388"/>
+            <a:ext cx="180000" cy="320814"/>
           </a:xfrm>
           <a:prstGeom prst="rect">
             <a:avLst/>
           </a:prstGeom>
-        </p:spPr>
-      </p:pic>
-      <p:sp>
-        <p:nvSpPr>
-          <p:cNvPr id="44" name="Rounded Rectangle 43"/>
+          <a:noFill/>
+        </p:spPr>
+        <p:txBody>
+          <a:bodyPr wrap="none" anchor="t" lIns="0" rIns="0" tIns="0" bIns="0">
+            <a:spAutoFit/>
+          </a:bodyPr>
+          <a:lstStyle/>
+          <a:p>
+            <a:pPr algn="l"/>
+            <a:r>
+              <a:rPr sz="1943" b="1" i="0">
+                <a:solidFill>
+                  <a:srgbClr val="1C2321"/>
+                </a:solidFill>
+                <a:latin typeface="Be Vietnam Pro"/>
+              </a:rPr>
+              <a:t>Đầu vào</a:t>
+            </a:r>
+          </a:p>
+        </p:txBody>
+      </p:sp>
+      <p:sp>
+        <p:nvSpPr>
+          <p:cNvPr id="46" name="TextBox 45"/>
+          <p:cNvSpPr txBox="1"/>
+          <p:nvPr/>
+        </p:nvSpPr>
+        <p:spPr>
+          <a:xfrm>
+            <a:off x="10267559" y="19433754"/>
+            <a:ext cx="180000" cy="249522"/>
+          </a:xfrm>
+          <a:prstGeom prst="rect">
+            <a:avLst/>
+          </a:prstGeom>
+          <a:noFill/>
+        </p:spPr>
+        <p:txBody>
+          <a:bodyPr wrap="none" anchor="t" lIns="0" rIns="0" tIns="0" bIns="0">
+            <a:spAutoFit/>
+          </a:bodyPr>
+          <a:lstStyle/>
+          <a:p>
+            <a:pPr algn="l"/>
+            <a:r>
+              <a:rPr sz="1511" b="0" i="0">
+                <a:solidFill>
+                  <a:srgbClr val="5B6570"/>
+                </a:solidFill>
+                <a:latin typeface="IBM Plex Sans"/>
+              </a:rPr>
+              <a:t>Danh sách CLB</a:t>
+            </a:r>
+          </a:p>
+        </p:txBody>
+      </p:sp>
+      <p:sp>
+        <p:nvSpPr>
+          <p:cNvPr id="47" name="TextBox 46"/>
+          <p:cNvSpPr txBox="1"/>
+          <p:nvPr/>
+        </p:nvSpPr>
+        <p:spPr>
+          <a:xfrm>
+            <a:off x="10267559" y="19735374"/>
+            <a:ext cx="180000" cy="249522"/>
+          </a:xfrm>
+          <a:prstGeom prst="rect">
+            <a:avLst/>
+          </a:prstGeom>
+          <a:noFill/>
+        </p:spPr>
+        <p:txBody>
+          <a:bodyPr wrap="none" anchor="t" lIns="0" rIns="0" tIns="0" bIns="0">
+            <a:spAutoFit/>
+          </a:bodyPr>
+          <a:lstStyle/>
+          <a:p>
+            <a:pPr algn="l"/>
+            <a:r>
+              <a:rPr sz="1511" b="0" i="0">
+                <a:solidFill>
+                  <a:srgbClr val="5B6570"/>
+                </a:solidFill>
+                <a:latin typeface="IBM Plex Sans"/>
+              </a:rPr>
+              <a:t>· sức chứa</a:t>
+            </a:r>
+          </a:p>
+        </p:txBody>
+      </p:sp>
+      <p:sp>
+        <p:nvSpPr>
+          <p:cNvPr id="48" name="TextBox 47"/>
+          <p:cNvSpPr txBox="1"/>
+          <p:nvPr/>
+        </p:nvSpPr>
+        <p:spPr>
+          <a:xfrm>
+            <a:off x="10267559" y="20036994"/>
+            <a:ext cx="180000" cy="249522"/>
+          </a:xfrm>
+          <a:prstGeom prst="rect">
+            <a:avLst/>
+          </a:prstGeom>
+          <a:noFill/>
+        </p:spPr>
+        <p:txBody>
+          <a:bodyPr wrap="none" anchor="t" lIns="0" rIns="0" tIns="0" bIns="0">
+            <a:spAutoFit/>
+          </a:bodyPr>
+          <a:lstStyle/>
+          <a:p>
+            <a:pPr algn="l"/>
+            <a:r>
+              <a:rPr sz="1511" b="0" i="0">
+                <a:solidFill>
+                  <a:srgbClr val="5B6570"/>
+                </a:solidFill>
+                <a:latin typeface="IBM Plex Sans"/>
+              </a:rPr>
+              <a:t>· suất dự trữ</a:t>
+            </a:r>
+          </a:p>
+        </p:txBody>
+      </p:sp>
+      <p:sp>
+        <p:nvSpPr>
+          <p:cNvPr id="49" name="TextBox 48"/>
+          <p:cNvSpPr txBox="1"/>
+          <p:nvPr/>
+        </p:nvSpPr>
+        <p:spPr>
+          <a:xfrm>
+            <a:off x="10267559" y="20338614"/>
+            <a:ext cx="180000" cy="249522"/>
+          </a:xfrm>
+          <a:prstGeom prst="rect">
+            <a:avLst/>
+          </a:prstGeom>
+          <a:noFill/>
+        </p:spPr>
+        <p:txBody>
+          <a:bodyPr wrap="none" anchor="t" lIns="0" rIns="0" tIns="0" bIns="0">
+            <a:spAutoFit/>
+          </a:bodyPr>
+          <a:lstStyle/>
+          <a:p>
+            <a:pPr algn="l"/>
+            <a:r>
+              <a:rPr sz="1511" b="0" i="0">
+                <a:solidFill>
+                  <a:srgbClr val="5B6570"/>
+                </a:solidFill>
+                <a:latin typeface="IBM Plex Sans"/>
+              </a:rPr>
+              <a:t/>
+            </a:r>
+          </a:p>
+        </p:txBody>
+      </p:sp>
+      <p:sp>
+        <p:nvSpPr>
+          <p:cNvPr id="50" name="TextBox 49"/>
+          <p:cNvSpPr txBox="1"/>
+          <p:nvPr/>
+        </p:nvSpPr>
+        <p:spPr>
+          <a:xfrm>
+            <a:off x="10267559" y="20640234"/>
+            <a:ext cx="180000" cy="249522"/>
+          </a:xfrm>
+          <a:prstGeom prst="rect">
+            <a:avLst/>
+          </a:prstGeom>
+          <a:noFill/>
+        </p:spPr>
+        <p:txBody>
+          <a:bodyPr wrap="none" anchor="t" lIns="0" rIns="0" tIns="0" bIns="0">
+            <a:spAutoFit/>
+          </a:bodyPr>
+          <a:lstStyle/>
+          <a:p>
+            <a:pPr algn="l"/>
+            <a:r>
+              <a:rPr sz="1511" b="0" i="0">
+                <a:solidFill>
+                  <a:srgbClr val="5B6570"/>
+                </a:solidFill>
+                <a:latin typeface="IBM Plex Sans"/>
+              </a:rPr>
+              <a:t>CLB muốn thi</a:t>
+            </a:r>
+          </a:p>
+        </p:txBody>
+      </p:sp>
+      <p:sp>
+        <p:nvSpPr>
+          <p:cNvPr id="51" name="TextBox 50"/>
+          <p:cNvSpPr txBox="1"/>
+          <p:nvPr/>
+        </p:nvSpPr>
+        <p:spPr>
+          <a:xfrm>
+            <a:off x="10267559" y="20941854"/>
+            <a:ext cx="180000" cy="249522"/>
+          </a:xfrm>
+          <a:prstGeom prst="rect">
+            <a:avLst/>
+          </a:prstGeom>
+          <a:noFill/>
+        </p:spPr>
+        <p:txBody>
+          <a:bodyPr wrap="none" anchor="t" lIns="0" rIns="0" tIns="0" bIns="0">
+            <a:spAutoFit/>
+          </a:bodyPr>
+          <a:lstStyle/>
+          <a:p>
+            <a:pPr algn="l"/>
+            <a:r>
+              <a:rPr sz="1511" b="0" i="0">
+                <a:solidFill>
+                  <a:srgbClr val="5B6570"/>
+                </a:solidFill>
+                <a:latin typeface="IBM Plex Sans"/>
+              </a:rPr>
+              <a:t>· điểm chấm mù</a:t>
+            </a:r>
+          </a:p>
+        </p:txBody>
+      </p:sp>
+      <p:sp>
+        <p:nvSpPr>
+          <p:cNvPr id="52" name="TextBox 51"/>
+          <p:cNvSpPr txBox="1"/>
+          <p:nvPr/>
+        </p:nvSpPr>
+        <p:spPr>
+          <a:xfrm>
+            <a:off x="10267559" y="21243474"/>
+            <a:ext cx="180000" cy="249522"/>
+          </a:xfrm>
+          <a:prstGeom prst="rect">
+            <a:avLst/>
+          </a:prstGeom>
+          <a:noFill/>
+        </p:spPr>
+        <p:txBody>
+          <a:bodyPr wrap="none" anchor="t" lIns="0" rIns="0" tIns="0" bIns="0">
+            <a:spAutoFit/>
+          </a:bodyPr>
+          <a:lstStyle/>
+          <a:p>
+            <a:pPr algn="l"/>
+            <a:r>
+              <a:rPr sz="1511" b="0" i="0">
+                <a:solidFill>
+                  <a:srgbClr val="5B6570"/>
+                </a:solidFill>
+                <a:latin typeface="IBM Plex Sans"/>
+              </a:rPr>
+              <a:t/>
+            </a:r>
+          </a:p>
+        </p:txBody>
+      </p:sp>
+      <p:sp>
+        <p:nvSpPr>
+          <p:cNvPr id="53" name="TextBox 52"/>
+          <p:cNvSpPr txBox="1"/>
+          <p:nvPr/>
+        </p:nvSpPr>
+        <p:spPr>
+          <a:xfrm>
+            <a:off x="10267559" y="21545094"/>
+            <a:ext cx="180000" cy="249522"/>
+          </a:xfrm>
+          <a:prstGeom prst="rect">
+            <a:avLst/>
+          </a:prstGeom>
+          <a:noFill/>
+        </p:spPr>
+        <p:txBody>
+          <a:bodyPr wrap="none" anchor="t" lIns="0" rIns="0" tIns="0" bIns="0">
+            <a:spAutoFit/>
+          </a:bodyPr>
+          <a:lstStyle/>
+          <a:p>
+            <a:pPr algn="l"/>
+            <a:r>
+              <a:rPr sz="1511" b="0" i="0">
+                <a:solidFill>
+                  <a:srgbClr val="5B6570"/>
+                </a:solidFill>
+                <a:latin typeface="IBM Plex Sans"/>
+              </a:rPr>
+              <a:t>Nguyện vọng</a:t>
+            </a:r>
+          </a:p>
+        </p:txBody>
+      </p:sp>
+      <p:sp>
+        <p:nvSpPr>
+          <p:cNvPr id="54" name="TextBox 53"/>
+          <p:cNvSpPr txBox="1"/>
+          <p:nvPr/>
+        </p:nvSpPr>
+        <p:spPr>
+          <a:xfrm>
+            <a:off x="10267559" y="21846714"/>
+            <a:ext cx="180000" cy="249522"/>
+          </a:xfrm>
+          <a:prstGeom prst="rect">
+            <a:avLst/>
+          </a:prstGeom>
+          <a:noFill/>
+        </p:spPr>
+        <p:txBody>
+          <a:bodyPr wrap="none" anchor="t" lIns="0" rIns="0" tIns="0" bIns="0">
+            <a:spAutoFit/>
+          </a:bodyPr>
+          <a:lstStyle/>
+          <a:p>
+            <a:pPr algn="l"/>
+            <a:r>
+              <a:rPr sz="1511" b="0" i="0">
+                <a:solidFill>
+                  <a:srgbClr val="5B6570"/>
+                </a:solidFill>
+                <a:latin typeface="IBM Plex Sans"/>
+              </a:rPr>
+              <a:t>· xếp hạng CLB</a:t>
+            </a:r>
+          </a:p>
+        </p:txBody>
+      </p:sp>
+      <p:sp>
+        <p:nvSpPr>
+          <p:cNvPr id="55" name="Right Arrow 54"/>
+          <p:cNvSpPr/>
+          <p:nvPr/>
+        </p:nvSpPr>
+        <p:spPr>
+          <a:xfrm>
+            <a:off x="12790200" y="20525070"/>
+            <a:ext cx="616950" cy="219360"/>
+          </a:xfrm>
+          <a:prstGeom prst="rightArrow">
+            <a:avLst/>
+          </a:prstGeom>
+          <a:solidFill>
+            <a:srgbClr val="5B6570"/>
+          </a:solidFill>
+          <a:ln>
+            <a:noFill/>
+          </a:ln>
+          <a:effectLst/>
+        </p:spPr>
+        <p:style>
+          <a:lnRef idx="1">
+            <a:schemeClr val="accent1"/>
+          </a:lnRef>
+          <a:fillRef idx="3">
+            <a:schemeClr val="accent1"/>
+          </a:fillRef>
+          <a:effectRef idx="2">
+            <a:schemeClr val="accent1"/>
+          </a:effectRef>
+          <a:fontRef idx="minor">
+            <a:schemeClr val="lt1"/>
+          </a:fontRef>
+        </p:style>
+        <p:txBody>
+          <a:bodyPr rtlCol="0" anchor="ctr"/>
+          <a:lstStyle/>
+          <a:p>
+            <a:pPr algn="ctr"/>
+          </a:p>
+        </p:txBody>
+      </p:sp>
+      <p:sp>
+        <p:nvSpPr>
+          <p:cNvPr id="56" name="Rounded Rectangle 55"/>
+          <p:cNvSpPr/>
+          <p:nvPr/>
+        </p:nvSpPr>
+        <p:spPr>
+          <a:xfrm>
+            <a:off x="13407150" y="18715350"/>
+            <a:ext cx="3564600" cy="1816575"/>
+          </a:xfrm>
+          <a:prstGeom prst="roundRect">
+            <a:avLst>
+              <a:gd name="adj" fmla="val 6792"/>
+            </a:avLst>
+          </a:prstGeom>
+          <a:solidFill>
+            <a:srgbClr val="FFFFFF"/>
+          </a:solidFill>
+          <a:ln w="20565">
+            <a:solidFill>
+              <a:srgbClr val="27805A"/>
+            </a:solidFill>
+          </a:ln>
+          <a:effectLst/>
+        </p:spPr>
+        <p:style>
+          <a:lnRef idx="1">
+            <a:schemeClr val="accent1"/>
+          </a:lnRef>
+          <a:fillRef idx="3">
+            <a:schemeClr val="accent1"/>
+          </a:fillRef>
+          <a:effectRef idx="2">
+            <a:schemeClr val="accent1"/>
+          </a:effectRef>
+          <a:fontRef idx="minor">
+            <a:schemeClr val="lt1"/>
+          </a:fontRef>
+        </p:style>
+        <p:txBody>
+          <a:bodyPr rtlCol="0" anchor="ctr"/>
+          <a:lstStyle/>
+          <a:p>
+            <a:pPr algn="ctr"/>
+          </a:p>
+        </p:txBody>
+      </p:sp>
+      <p:sp>
+        <p:nvSpPr>
+          <p:cNvPr id="57" name="Oval 56"/>
+          <p:cNvSpPr/>
+          <p:nvPr/>
+        </p:nvSpPr>
+        <p:spPr>
+          <a:xfrm>
+            <a:off x="13557960" y="18893580"/>
+            <a:ext cx="411300" cy="411300"/>
+          </a:xfrm>
+          <a:prstGeom prst="ellipse">
+            <a:avLst/>
+          </a:prstGeom>
+          <a:solidFill>
+            <a:srgbClr val="B8781A"/>
+          </a:solidFill>
+          <a:ln>
+            <a:noFill/>
+          </a:ln>
+          <a:effectLst/>
+        </p:spPr>
+        <p:style>
+          <a:lnRef idx="1">
+            <a:schemeClr val="accent1"/>
+          </a:lnRef>
+          <a:fillRef idx="3">
+            <a:schemeClr val="accent1"/>
+          </a:fillRef>
+          <a:effectRef idx="2">
+            <a:schemeClr val="accent1"/>
+          </a:effectRef>
+          <a:fontRef idx="minor">
+            <a:schemeClr val="lt1"/>
+          </a:fontRef>
+        </p:style>
+        <p:txBody>
+          <a:bodyPr rtlCol="0" anchor="ctr" wrap="square" lIns="0" rIns="0" tIns="0" bIns="0"/>
+          <a:lstStyle/>
+          <a:p>
+            <a:pPr algn="ctr"/>
+            <a:r>
+              <a:rPr sz="1619" b="1" i="0">
+                <a:solidFill>
+                  <a:srgbClr val="FFFFFF"/>
+                </a:solidFill>
+                <a:latin typeface="Be Vietnam Pro"/>
+              </a:rPr>
+              <a:t>4</a:t>
+            </a:r>
+          </a:p>
+        </p:txBody>
+      </p:sp>
+      <p:sp>
+        <p:nvSpPr>
+          <p:cNvPr id="58" name="TextBox 57"/>
+          <p:cNvSpPr txBox="1"/>
+          <p:nvPr/>
+        </p:nvSpPr>
+        <p:spPr>
+          <a:xfrm>
+            <a:off x="14092650" y="18959388"/>
+            <a:ext cx="180000" cy="320814"/>
+          </a:xfrm>
+          <a:prstGeom prst="rect">
+            <a:avLst/>
+          </a:prstGeom>
+          <a:noFill/>
+        </p:spPr>
+        <p:txBody>
+          <a:bodyPr wrap="none" anchor="t" lIns="0" rIns="0" tIns="0" bIns="0">
+            <a:spAutoFit/>
+          </a:bodyPr>
+          <a:lstStyle/>
+          <a:p>
+            <a:pPr algn="l"/>
+            <a:r>
+              <a:rPr sz="1943" b="1" i="0">
+                <a:solidFill>
+                  <a:srgbClr val="1C2321"/>
+                </a:solidFill>
+                <a:latin typeface="Be Vietnam Pro"/>
+              </a:rPr>
+              <a:t>Ưu tiên hai tầng</a:t>
+            </a:r>
+          </a:p>
+        </p:txBody>
+      </p:sp>
+      <p:sp>
+        <p:nvSpPr>
+          <p:cNvPr id="59" name="TextBox 58"/>
+          <p:cNvSpPr txBox="1"/>
+          <p:nvPr/>
+        </p:nvSpPr>
+        <p:spPr>
+          <a:xfrm>
+            <a:off x="13626510" y="19433754"/>
+            <a:ext cx="180000" cy="249522"/>
+          </a:xfrm>
+          <a:prstGeom prst="rect">
+            <a:avLst/>
+          </a:prstGeom>
+          <a:noFill/>
+        </p:spPr>
+        <p:txBody>
+          <a:bodyPr wrap="none" anchor="t" lIns="0" rIns="0" tIns="0" bIns="0">
+            <a:spAutoFit/>
+          </a:bodyPr>
+          <a:lstStyle/>
+          <a:p>
+            <a:pPr algn="l"/>
+            <a:r>
+              <a:rPr sz="1511" b="0" i="0">
+                <a:solidFill>
+                  <a:srgbClr val="5B6570"/>
+                </a:solidFill>
+                <a:latin typeface="IBM Plex Sans"/>
+              </a:rPr>
+              <a:t>Tầng 1: đã thi → theo điểm</a:t>
+            </a:r>
+          </a:p>
+        </p:txBody>
+      </p:sp>
+      <p:sp>
+        <p:nvSpPr>
+          <p:cNvPr id="60" name="TextBox 59"/>
+          <p:cNvSpPr txBox="1"/>
+          <p:nvPr/>
+        </p:nvSpPr>
+        <p:spPr>
+          <a:xfrm>
+            <a:off x="13626510" y="19735374"/>
+            <a:ext cx="180000" cy="249522"/>
+          </a:xfrm>
+          <a:prstGeom prst="rect">
+            <a:avLst/>
+          </a:prstGeom>
+          <a:noFill/>
+        </p:spPr>
+        <p:txBody>
+          <a:bodyPr wrap="none" anchor="t" lIns="0" rIns="0" tIns="0" bIns="0">
+            <a:spAutoFit/>
+          </a:bodyPr>
+          <a:lstStyle/>
+          <a:p>
+            <a:pPr algn="l"/>
+            <a:r>
+              <a:rPr sz="1511" b="0" i="0">
+                <a:solidFill>
+                  <a:srgbClr val="5B6570"/>
+                </a:solidFill>
+                <a:latin typeface="IBM Plex Sans"/>
+              </a:rPr>
+              <a:t>Tầng 2: không thi</a:t>
+            </a:r>
+          </a:p>
+        </p:txBody>
+      </p:sp>
+      <p:sp>
+        <p:nvSpPr>
+          <p:cNvPr id="61" name="Rounded Rectangle 60"/>
+          <p:cNvSpPr/>
+          <p:nvPr/>
+        </p:nvSpPr>
+        <p:spPr>
+          <a:xfrm>
+            <a:off x="13407150" y="20737575"/>
+            <a:ext cx="3564600" cy="1816575"/>
+          </a:xfrm>
+          <a:prstGeom prst="roundRect">
+            <a:avLst>
+              <a:gd name="adj" fmla="val 6792"/>
+            </a:avLst>
+          </a:prstGeom>
+          <a:solidFill>
+            <a:srgbClr val="FFFFFF"/>
+          </a:solidFill>
+          <a:ln w="20565">
+            <a:solidFill>
+              <a:srgbClr val="27805A"/>
+            </a:solidFill>
+          </a:ln>
+          <a:effectLst/>
+        </p:spPr>
+        <p:style>
+          <a:lnRef idx="1">
+            <a:schemeClr val="accent1"/>
+          </a:lnRef>
+          <a:fillRef idx="3">
+            <a:schemeClr val="accent1"/>
+          </a:fillRef>
+          <a:effectRef idx="2">
+            <a:schemeClr val="accent1"/>
+          </a:effectRef>
+          <a:fontRef idx="minor">
+            <a:schemeClr val="lt1"/>
+          </a:fontRef>
+        </p:style>
+        <p:txBody>
+          <a:bodyPr rtlCol="0" anchor="ctr"/>
+          <a:lstStyle/>
+          <a:p>
+            <a:pPr algn="ctr"/>
+          </a:p>
+        </p:txBody>
+      </p:sp>
+      <p:sp>
+        <p:nvSpPr>
+          <p:cNvPr id="62" name="Oval 61"/>
+          <p:cNvSpPr/>
+          <p:nvPr/>
+        </p:nvSpPr>
+        <p:spPr>
+          <a:xfrm>
+            <a:off x="13557960" y="20915805"/>
+            <a:ext cx="411300" cy="411300"/>
+          </a:xfrm>
+          <a:prstGeom prst="ellipse">
+            <a:avLst/>
+          </a:prstGeom>
+          <a:solidFill>
+            <a:srgbClr val="B8781A"/>
+          </a:solidFill>
+          <a:ln>
+            <a:noFill/>
+          </a:ln>
+          <a:effectLst/>
+        </p:spPr>
+        <p:style>
+          <a:lnRef idx="1">
+            <a:schemeClr val="accent1"/>
+          </a:lnRef>
+          <a:fillRef idx="3">
+            <a:schemeClr val="accent1"/>
+          </a:fillRef>
+          <a:effectRef idx="2">
+            <a:schemeClr val="accent1"/>
+          </a:effectRef>
+          <a:fontRef idx="minor">
+            <a:schemeClr val="lt1"/>
+          </a:fontRef>
+        </p:style>
+        <p:txBody>
+          <a:bodyPr rtlCol="0" anchor="ctr" wrap="square" lIns="0" rIns="0" tIns="0" bIns="0"/>
+          <a:lstStyle/>
+          <a:p>
+            <a:pPr algn="ctr"/>
+            <a:r>
+              <a:rPr sz="1619" b="1" i="0">
+                <a:solidFill>
+                  <a:srgbClr val="FFFFFF"/>
+                </a:solidFill>
+                <a:latin typeface="Be Vietnam Pro"/>
+              </a:rPr>
+              <a:t>3</a:t>
+            </a:r>
+          </a:p>
+        </p:txBody>
+      </p:sp>
+      <p:sp>
+        <p:nvSpPr>
+          <p:cNvPr id="63" name="TextBox 62"/>
+          <p:cNvSpPr txBox="1"/>
+          <p:nvPr/>
+        </p:nvSpPr>
+        <p:spPr>
+          <a:xfrm>
+            <a:off x="14092650" y="20981613"/>
+            <a:ext cx="180000" cy="320814"/>
+          </a:xfrm>
+          <a:prstGeom prst="rect">
+            <a:avLst/>
+          </a:prstGeom>
+          <a:noFill/>
+        </p:spPr>
+        <p:txBody>
+          <a:bodyPr wrap="none" anchor="t" lIns="0" rIns="0" tIns="0" bIns="0">
+            <a:spAutoFit/>
+          </a:bodyPr>
+          <a:lstStyle/>
+          <a:p>
+            <a:pPr algn="l"/>
+            <a:r>
+              <a:rPr sz="1943" b="1" i="0">
+                <a:solidFill>
+                  <a:srgbClr val="1C2321"/>
+                </a:solidFill>
+                <a:latin typeface="Be Vietnam Pro"/>
+              </a:rPr>
+              <a:t>Bốc thăm dùng chung</a:t>
+            </a:r>
+          </a:p>
+        </p:txBody>
+      </p:sp>
+      <p:sp>
+        <p:nvSpPr>
+          <p:cNvPr id="64" name="TextBox 63"/>
+          <p:cNvSpPr txBox="1"/>
+          <p:nvPr/>
+        </p:nvSpPr>
+        <p:spPr>
+          <a:xfrm>
+            <a:off x="13626510" y="21455979"/>
+            <a:ext cx="180000" cy="249522"/>
+          </a:xfrm>
+          <a:prstGeom prst="rect">
+            <a:avLst/>
+          </a:prstGeom>
+          <a:noFill/>
+        </p:spPr>
+        <p:txBody>
+          <a:bodyPr wrap="none" anchor="t" lIns="0" rIns="0" tIns="0" bIns="0">
+            <a:spAutoFit/>
+          </a:bodyPr>
+          <a:lstStyle/>
+          <a:p>
+            <a:pPr algn="l"/>
+            <a:r>
+              <a:rPr sz="1511" b="0" i="0">
+                <a:solidFill>
+                  <a:srgbClr val="5B6570"/>
+                </a:solidFill>
+                <a:latin typeface="IBM Plex Sans"/>
+              </a:rPr>
+              <a:t>Một số cho mỗi em, mọi CLB</a:t>
+            </a:r>
+          </a:p>
+        </p:txBody>
+      </p:sp>
+      <p:sp>
+        <p:nvSpPr>
+          <p:cNvPr id="65" name="TextBox 64"/>
+          <p:cNvSpPr txBox="1"/>
+          <p:nvPr/>
+        </p:nvSpPr>
+        <p:spPr>
+          <a:xfrm>
+            <a:off x="13626510" y="21757599"/>
+            <a:ext cx="180000" cy="249522"/>
+          </a:xfrm>
+          <a:prstGeom prst="rect">
+            <a:avLst/>
+          </a:prstGeom>
+          <a:noFill/>
+        </p:spPr>
+        <p:txBody>
+          <a:bodyPr wrap="none" anchor="t" lIns="0" rIns="0" tIns="0" bIns="0">
+            <a:spAutoFit/>
+          </a:bodyPr>
+          <a:lstStyle/>
+          <a:p>
+            <a:pPr algn="l"/>
+            <a:r>
+              <a:rPr sz="1511" b="0" i="0">
+                <a:solidFill>
+                  <a:srgbClr val="5B6570"/>
+                </a:solidFill>
+                <a:latin typeface="IBM Plex Sans"/>
+              </a:rPr>
+              <a:t>Chỉ phá hoà · khoá theo seed</a:t>
+            </a:r>
+          </a:p>
+        </p:txBody>
+      </p:sp>
+      <p:sp>
+        <p:nvSpPr>
+          <p:cNvPr id="66" name="Right Arrow 65"/>
+          <p:cNvSpPr/>
+          <p:nvPr/>
+        </p:nvSpPr>
+        <p:spPr>
+          <a:xfrm>
+            <a:off x="16971750" y="20525070"/>
+            <a:ext cx="616950" cy="219360"/>
+          </a:xfrm>
+          <a:prstGeom prst="rightArrow">
+            <a:avLst/>
+          </a:prstGeom>
+          <a:solidFill>
+            <a:srgbClr val="5B6570"/>
+          </a:solidFill>
+          <a:ln>
+            <a:noFill/>
+          </a:ln>
+          <a:effectLst/>
+        </p:spPr>
+        <p:style>
+          <a:lnRef idx="1">
+            <a:schemeClr val="accent1"/>
+          </a:lnRef>
+          <a:fillRef idx="3">
+            <a:schemeClr val="accent1"/>
+          </a:fillRef>
+          <a:effectRef idx="2">
+            <a:schemeClr val="accent1"/>
+          </a:effectRef>
+          <a:fontRef idx="minor">
+            <a:schemeClr val="lt1"/>
+          </a:fontRef>
+        </p:style>
+        <p:txBody>
+          <a:bodyPr rtlCol="0" anchor="ctr"/>
+          <a:lstStyle/>
+          <a:p>
+            <a:pPr algn="ctr"/>
+          </a:p>
+        </p:txBody>
+      </p:sp>
+      <p:sp>
+        <p:nvSpPr>
+          <p:cNvPr id="67" name="Rounded Rectangle 66"/>
+          <p:cNvSpPr/>
+          <p:nvPr/>
+        </p:nvSpPr>
+        <p:spPr>
+          <a:xfrm>
+            <a:off x="17588700" y="18441150"/>
+            <a:ext cx="4387200" cy="4387200"/>
+          </a:xfrm>
+          <a:prstGeom prst="roundRect">
+            <a:avLst>
+              <a:gd name="adj" fmla="val 2812"/>
+            </a:avLst>
+          </a:prstGeom>
+          <a:solidFill>
+            <a:srgbClr val="DCE9E0"/>
+          </a:solidFill>
+          <a:ln w="27420">
+            <a:solidFill>
+              <a:srgbClr val="27805A"/>
+            </a:solidFill>
+          </a:ln>
+          <a:effectLst/>
+        </p:spPr>
+        <p:style>
+          <a:lnRef idx="1">
+            <a:schemeClr val="accent1"/>
+          </a:lnRef>
+          <a:fillRef idx="3">
+            <a:schemeClr val="accent1"/>
+          </a:fillRef>
+          <a:effectRef idx="2">
+            <a:schemeClr val="accent1"/>
+          </a:effectRef>
+          <a:fontRef idx="minor">
+            <a:schemeClr val="lt1"/>
+          </a:fontRef>
+        </p:style>
+        <p:txBody>
+          <a:bodyPr rtlCol="0" anchor="ctr"/>
+          <a:lstStyle/>
+          <a:p>
+            <a:pPr algn="ctr"/>
+          </a:p>
+        </p:txBody>
+      </p:sp>
+      <p:sp>
+        <p:nvSpPr>
+          <p:cNvPr id="68" name="Oval 67"/>
+          <p:cNvSpPr/>
+          <p:nvPr/>
+        </p:nvSpPr>
+        <p:spPr>
+          <a:xfrm>
+            <a:off x="17739510" y="18619380"/>
+            <a:ext cx="411300" cy="411300"/>
+          </a:xfrm>
+          <a:prstGeom prst="ellipse">
+            <a:avLst/>
+          </a:prstGeom>
+          <a:solidFill>
+            <a:srgbClr val="B8781A"/>
+          </a:solidFill>
+          <a:ln>
+            <a:noFill/>
+          </a:ln>
+          <a:effectLst/>
+        </p:spPr>
+        <p:style>
+          <a:lnRef idx="1">
+            <a:schemeClr val="accent1"/>
+          </a:lnRef>
+          <a:fillRef idx="3">
+            <a:schemeClr val="accent1"/>
+          </a:fillRef>
+          <a:effectRef idx="2">
+            <a:schemeClr val="accent1"/>
+          </a:effectRef>
+          <a:fontRef idx="minor">
+            <a:schemeClr val="lt1"/>
+          </a:fontRef>
+        </p:style>
+        <p:txBody>
+          <a:bodyPr rtlCol="0" anchor="ctr" wrap="square" lIns="0" rIns="0" tIns="0" bIns="0"/>
+          <a:lstStyle/>
+          <a:p>
+            <a:pPr algn="ctr"/>
+            <a:r>
+              <a:rPr sz="1619" b="1" i="0">
+                <a:solidFill>
+                  <a:srgbClr val="FFFFFF"/>
+                </a:solidFill>
+                <a:latin typeface="Be Vietnam Pro"/>
+              </a:rPr>
+              <a:t>1</a:t>
+            </a:r>
+          </a:p>
+        </p:txBody>
+      </p:sp>
+      <p:sp>
+        <p:nvSpPr>
+          <p:cNvPr id="69" name="TextBox 68"/>
+          <p:cNvSpPr txBox="1"/>
+          <p:nvPr/>
+        </p:nvSpPr>
+        <p:spPr>
+          <a:xfrm>
+            <a:off x="18274200" y="18672849"/>
+            <a:ext cx="180000" cy="338637"/>
+          </a:xfrm>
+          <a:prstGeom prst="rect">
+            <a:avLst/>
+          </a:prstGeom>
+          <a:noFill/>
+        </p:spPr>
+        <p:txBody>
+          <a:bodyPr wrap="none" anchor="t" lIns="0" rIns="0" tIns="0" bIns="0">
+            <a:spAutoFit/>
+          </a:bodyPr>
+          <a:lstStyle/>
+          <a:p>
+            <a:pPr algn="l"/>
+            <a:r>
+              <a:rPr sz="2051" b="1" i="0">
+                <a:solidFill>
+                  <a:srgbClr val="1C2321"/>
+                </a:solidFill>
+                <a:latin typeface="Be Vietnam Pro"/>
+              </a:rPr>
+              <a:t>Deferred Acceptance</a:t>
+            </a:r>
+          </a:p>
+        </p:txBody>
+      </p:sp>
+      <p:sp>
+        <p:nvSpPr>
+          <p:cNvPr id="70" name="TextBox 69"/>
+          <p:cNvSpPr txBox="1"/>
+          <p:nvPr/>
+        </p:nvSpPr>
+        <p:spPr>
+          <a:xfrm>
+            <a:off x="17808060" y="19132134"/>
+            <a:ext cx="180000" cy="249522"/>
+          </a:xfrm>
+          <a:prstGeom prst="rect">
+            <a:avLst/>
+          </a:prstGeom>
+          <a:noFill/>
+        </p:spPr>
+        <p:txBody>
+          <a:bodyPr wrap="none" anchor="t" lIns="0" rIns="0" tIns="0" bIns="0">
+            <a:spAutoFit/>
+          </a:bodyPr>
+          <a:lstStyle/>
+          <a:p>
+            <a:pPr algn="l"/>
+            <a:r>
+              <a:rPr sz="1511" b="0" i="0">
+                <a:solidFill>
+                  <a:srgbClr val="5B6570"/>
+                </a:solidFill>
+                <a:latin typeface="IBM Plex Sans"/>
+              </a:rPr>
+              <a:t>Học sinh đề xuất theo nguyện vọng</a:t>
+            </a:r>
+          </a:p>
+        </p:txBody>
+      </p:sp>
+      <p:sp>
+        <p:nvSpPr>
+          <p:cNvPr id="71" name="TextBox 70"/>
+          <p:cNvSpPr txBox="1"/>
+          <p:nvPr/>
+        </p:nvSpPr>
+        <p:spPr>
+          <a:xfrm>
+            <a:off x="17808060" y="19433754"/>
+            <a:ext cx="180000" cy="249522"/>
+          </a:xfrm>
+          <a:prstGeom prst="rect">
+            <a:avLst/>
+          </a:prstGeom>
+          <a:noFill/>
+        </p:spPr>
+        <p:txBody>
+          <a:bodyPr wrap="none" anchor="t" lIns="0" rIns="0" tIns="0" bIns="0">
+            <a:spAutoFit/>
+          </a:bodyPr>
+          <a:lstStyle/>
+          <a:p>
+            <a:pPr algn="l"/>
+            <a:r>
+              <a:rPr sz="1511" b="0" i="0">
+                <a:solidFill>
+                  <a:srgbClr val="5B6570"/>
+                </a:solidFill>
+                <a:latin typeface="IBM Plex Sans"/>
+              </a:rPr>
+              <a:t>CLB giữ tạm, từ chối phần còn lại</a:t>
+            </a:r>
+          </a:p>
+        </p:txBody>
+      </p:sp>
+      <p:sp>
+        <p:nvSpPr>
+          <p:cNvPr id="72" name="TextBox 71"/>
+          <p:cNvSpPr txBox="1"/>
+          <p:nvPr/>
+        </p:nvSpPr>
+        <p:spPr>
+          <a:xfrm>
+            <a:off x="17808060" y="19735374"/>
+            <a:ext cx="180000" cy="249522"/>
+          </a:xfrm>
+          <a:prstGeom prst="rect">
+            <a:avLst/>
+          </a:prstGeom>
+          <a:noFill/>
+        </p:spPr>
+        <p:txBody>
+          <a:bodyPr wrap="none" anchor="t" lIns="0" rIns="0" tIns="0" bIns="0">
+            <a:spAutoFit/>
+          </a:bodyPr>
+          <a:lstStyle/>
+          <a:p>
+            <a:pPr algn="l"/>
+            <a:r>
+              <a:rPr sz="1511" b="0" i="0">
+                <a:solidFill>
+                  <a:srgbClr val="5B6570"/>
+                </a:solidFill>
+                <a:latin typeface="IBM Plex Sans"/>
+              </a:rPr>
+              <a:t>Lặp tới khi không còn đề xuất</a:t>
+            </a:r>
+          </a:p>
+        </p:txBody>
+      </p:sp>
+      <p:sp>
+        <p:nvSpPr>
+          <p:cNvPr id="73" name="Rounded Rectangle 72"/>
+          <p:cNvSpPr/>
+          <p:nvPr/>
+        </p:nvSpPr>
+        <p:spPr>
+          <a:xfrm>
+            <a:off x="17862900" y="20292000"/>
+            <a:ext cx="3838800" cy="2262150"/>
+          </a:xfrm>
+          <a:prstGeom prst="roundRect">
+            <a:avLst>
+              <a:gd name="adj" fmla="val 5454"/>
+            </a:avLst>
+          </a:prstGeom>
+          <a:solidFill>
+            <a:srgbClr val="FFFFFF"/>
+          </a:solidFill>
+          <a:ln w="20565">
+            <a:solidFill>
+              <a:srgbClr val="B8781A"/>
+            </a:solidFill>
+          </a:ln>
+          <a:effectLst/>
+        </p:spPr>
+        <p:style>
+          <a:lnRef idx="1">
+            <a:schemeClr val="accent1"/>
+          </a:lnRef>
+          <a:fillRef idx="3">
+            <a:schemeClr val="accent1"/>
+          </a:fillRef>
+          <a:effectRef idx="2">
+            <a:schemeClr val="accent1"/>
+          </a:effectRef>
+          <a:fontRef idx="minor">
+            <a:schemeClr val="lt1"/>
+          </a:fontRef>
+        </p:style>
+        <p:txBody>
+          <a:bodyPr rtlCol="0" anchor="ctr"/>
+          <a:lstStyle/>
+          <a:p>
+            <a:pPr algn="ctr"/>
+          </a:p>
+        </p:txBody>
+      </p:sp>
+      <p:sp>
+        <p:nvSpPr>
+          <p:cNvPr id="74" name="Oval 73"/>
+          <p:cNvSpPr/>
+          <p:nvPr/>
+        </p:nvSpPr>
+        <p:spPr>
+          <a:xfrm>
+            <a:off x="18013710" y="20470230"/>
+            <a:ext cx="411300" cy="411300"/>
+          </a:xfrm>
+          <a:prstGeom prst="ellipse">
+            <a:avLst/>
+          </a:prstGeom>
+          <a:solidFill>
+            <a:srgbClr val="B8781A"/>
+          </a:solidFill>
+          <a:ln>
+            <a:noFill/>
+          </a:ln>
+          <a:effectLst/>
+        </p:spPr>
+        <p:style>
+          <a:lnRef idx="1">
+            <a:schemeClr val="accent1"/>
+          </a:lnRef>
+          <a:fillRef idx="3">
+            <a:schemeClr val="accent1"/>
+          </a:fillRef>
+          <a:effectRef idx="2">
+            <a:schemeClr val="accent1"/>
+          </a:effectRef>
+          <a:fontRef idx="minor">
+            <a:schemeClr val="lt1"/>
+          </a:fontRef>
+        </p:style>
+        <p:txBody>
+          <a:bodyPr rtlCol="0" anchor="ctr" wrap="square" lIns="0" rIns="0" tIns="0" bIns="0"/>
+          <a:lstStyle/>
+          <a:p>
+            <a:pPr algn="ctr"/>
+            <a:r>
+              <a:rPr sz="1619" b="1" i="0">
+                <a:solidFill>
+                  <a:srgbClr val="FFFFFF"/>
+                </a:solidFill>
+                <a:latin typeface="Be Vietnam Pro"/>
+              </a:rPr>
+              <a:t>2</a:t>
+            </a:r>
+          </a:p>
+        </p:txBody>
+      </p:sp>
+      <p:sp>
+        <p:nvSpPr>
+          <p:cNvPr id="75" name="TextBox 74"/>
+          <p:cNvSpPr txBox="1"/>
+          <p:nvPr/>
+        </p:nvSpPr>
+        <p:spPr>
+          <a:xfrm>
+            <a:off x="18548400" y="20536038"/>
+            <a:ext cx="180000" cy="320814"/>
+          </a:xfrm>
+          <a:prstGeom prst="rect">
+            <a:avLst/>
+          </a:prstGeom>
+          <a:noFill/>
+        </p:spPr>
+        <p:txBody>
+          <a:bodyPr wrap="none" anchor="t" lIns="0" rIns="0" tIns="0" bIns="0">
+            <a:spAutoFit/>
+          </a:bodyPr>
+          <a:lstStyle/>
+          <a:p>
+            <a:pPr algn="l"/>
+            <a:r>
+              <a:rPr sz="1943" b="1" i="0">
+                <a:solidFill>
+                  <a:srgbClr val="1C2321"/>
+                </a:solidFill>
+                <a:latin typeface="Be Vietnam Pro"/>
+              </a:rPr>
+              <a:t>Dự trữ mềm, hai lượt</a:t>
+            </a:r>
+          </a:p>
+        </p:txBody>
+      </p:sp>
+      <p:sp>
+        <p:nvSpPr>
+          <p:cNvPr id="76" name="TextBox 75"/>
+          <p:cNvSpPr txBox="1"/>
+          <p:nvPr/>
+        </p:nvSpPr>
+        <p:spPr>
+          <a:xfrm>
+            <a:off x="18082260" y="21010404"/>
+            <a:ext cx="180000" cy="249522"/>
+          </a:xfrm>
+          <a:prstGeom prst="rect">
+            <a:avLst/>
+          </a:prstGeom>
+          <a:noFill/>
+        </p:spPr>
+        <p:txBody>
+          <a:bodyPr wrap="none" anchor="t" lIns="0" rIns="0" tIns="0" bIns="0">
+            <a:spAutoFit/>
+          </a:bodyPr>
+          <a:lstStyle/>
+          <a:p>
+            <a:pPr algn="l"/>
+            <a:r>
+              <a:rPr sz="1511" b="0" i="0">
+                <a:solidFill>
+                  <a:srgbClr val="5B6570"/>
+                </a:solidFill>
+                <a:latin typeface="IBM Plex Sans"/>
+              </a:rPr>
+              <a:t>Lượt 1: suất dự trữ</a:t>
+            </a:r>
+          </a:p>
+        </p:txBody>
+      </p:sp>
+      <p:sp>
+        <p:nvSpPr>
+          <p:cNvPr id="77" name="TextBox 76"/>
+          <p:cNvSpPr txBox="1"/>
+          <p:nvPr/>
+        </p:nvSpPr>
+        <p:spPr>
+          <a:xfrm>
+            <a:off x="18082260" y="21312024"/>
+            <a:ext cx="180000" cy="249522"/>
+          </a:xfrm>
+          <a:prstGeom prst="rect">
+            <a:avLst/>
+          </a:prstGeom>
+          <a:noFill/>
+        </p:spPr>
+        <p:txBody>
+          <a:bodyPr wrap="none" anchor="t" lIns="0" rIns="0" tIns="0" bIns="0">
+            <a:spAutoFit/>
+          </a:bodyPr>
+          <a:lstStyle/>
+          <a:p>
+            <a:pPr algn="l"/>
+            <a:r>
+              <a:rPr sz="1511" b="0" i="0">
+                <a:solidFill>
+                  <a:srgbClr val="5B6570"/>
+                </a:solidFill>
+                <a:latin typeface="IBM Plex Sans"/>
+              </a:rPr>
+              <a:t>  → chỉ em thuộc diện</a:t>
+            </a:r>
+          </a:p>
+        </p:txBody>
+      </p:sp>
+      <p:sp>
+        <p:nvSpPr>
+          <p:cNvPr id="78" name="TextBox 77"/>
+          <p:cNvSpPr txBox="1"/>
+          <p:nvPr/>
+        </p:nvSpPr>
+        <p:spPr>
+          <a:xfrm>
+            <a:off x="18082260" y="21613644"/>
+            <a:ext cx="180000" cy="249522"/>
+          </a:xfrm>
+          <a:prstGeom prst="rect">
+            <a:avLst/>
+          </a:prstGeom>
+          <a:noFill/>
+        </p:spPr>
+        <p:txBody>
+          <a:bodyPr wrap="none" anchor="t" lIns="0" rIns="0" tIns="0" bIns="0">
+            <a:spAutoFit/>
+          </a:bodyPr>
+          <a:lstStyle/>
+          <a:p>
+            <a:pPr algn="l"/>
+            <a:r>
+              <a:rPr sz="1511" b="0" i="0">
+                <a:solidFill>
+                  <a:srgbClr val="5B6570"/>
+                </a:solidFill>
+                <a:latin typeface="IBM Plex Sans"/>
+              </a:rPr>
+              <a:t>Lượt 2: lượt chung</a:t>
+            </a:r>
+          </a:p>
+        </p:txBody>
+      </p:sp>
+      <p:sp>
+        <p:nvSpPr>
+          <p:cNvPr id="79" name="TextBox 78"/>
+          <p:cNvSpPr txBox="1"/>
+          <p:nvPr/>
+        </p:nvSpPr>
+        <p:spPr>
+          <a:xfrm>
+            <a:off x="18082260" y="21915264"/>
+            <a:ext cx="180000" cy="249522"/>
+          </a:xfrm>
+          <a:prstGeom prst="rect">
+            <a:avLst/>
+          </a:prstGeom>
+          <a:noFill/>
+        </p:spPr>
+        <p:txBody>
+          <a:bodyPr wrap="none" anchor="t" lIns="0" rIns="0" tIns="0" bIns="0">
+            <a:spAutoFit/>
+          </a:bodyPr>
+          <a:lstStyle/>
+          <a:p>
+            <a:pPr algn="l"/>
+            <a:r>
+              <a:rPr sz="1511" b="0" i="0">
+                <a:solidFill>
+                  <a:srgbClr val="5B6570"/>
+                </a:solidFill>
+                <a:latin typeface="IBM Plex Sans"/>
+              </a:rPr>
+              <a:t>  → suất thừa tự chuyển sang</a:t>
+            </a:r>
+          </a:p>
+        </p:txBody>
+      </p:sp>
+      <p:sp>
+        <p:nvSpPr>
+          <p:cNvPr id="80" name="Right Arrow 79"/>
+          <p:cNvSpPr/>
+          <p:nvPr/>
+        </p:nvSpPr>
+        <p:spPr>
+          <a:xfrm>
+            <a:off x="21975900" y="20525070"/>
+            <a:ext cx="616950" cy="219360"/>
+          </a:xfrm>
+          <a:prstGeom prst="rightArrow">
+            <a:avLst/>
+          </a:prstGeom>
+          <a:solidFill>
+            <a:srgbClr val="5B6570"/>
+          </a:solidFill>
+          <a:ln>
+            <a:noFill/>
+          </a:ln>
+          <a:effectLst/>
+        </p:spPr>
+        <p:style>
+          <a:lnRef idx="1">
+            <a:schemeClr val="accent1"/>
+          </a:lnRef>
+          <a:fillRef idx="3">
+            <a:schemeClr val="accent1"/>
+          </a:fillRef>
+          <a:effectRef idx="2">
+            <a:schemeClr val="accent1"/>
+          </a:effectRef>
+          <a:fontRef idx="minor">
+            <a:schemeClr val="lt1"/>
+          </a:fontRef>
+        </p:style>
+        <p:txBody>
+          <a:bodyPr rtlCol="0" anchor="ctr"/>
+          <a:lstStyle/>
+          <a:p>
+            <a:pPr algn="ctr"/>
+          </a:p>
+        </p:txBody>
+      </p:sp>
+      <p:sp>
+        <p:nvSpPr>
+          <p:cNvPr id="81" name="Rounded Rectangle 80"/>
+          <p:cNvSpPr/>
+          <p:nvPr/>
+        </p:nvSpPr>
+        <p:spPr>
+          <a:xfrm>
+            <a:off x="22592850" y="18715350"/>
+            <a:ext cx="3358950" cy="1816575"/>
+          </a:xfrm>
+          <a:prstGeom prst="roundRect">
+            <a:avLst>
+              <a:gd name="adj" fmla="val 6792"/>
+            </a:avLst>
+          </a:prstGeom>
+          <a:solidFill>
+            <a:srgbClr val="FFFFFF"/>
+          </a:solidFill>
+          <a:ln w="20565">
+            <a:solidFill>
+              <a:srgbClr val="27805A"/>
+            </a:solidFill>
+          </a:ln>
+          <a:effectLst/>
+        </p:spPr>
+        <p:style>
+          <a:lnRef idx="1">
+            <a:schemeClr val="accent1"/>
+          </a:lnRef>
+          <a:fillRef idx="3">
+            <a:schemeClr val="accent1"/>
+          </a:fillRef>
+          <a:effectRef idx="2">
+            <a:schemeClr val="accent1"/>
+          </a:effectRef>
+          <a:fontRef idx="minor">
+            <a:schemeClr val="lt1"/>
+          </a:fontRef>
+        </p:style>
+        <p:txBody>
+          <a:bodyPr rtlCol="0" anchor="ctr"/>
+          <a:lstStyle/>
+          <a:p>
+            <a:pPr algn="ctr"/>
+          </a:p>
+        </p:txBody>
+      </p:sp>
+      <p:sp>
+        <p:nvSpPr>
+          <p:cNvPr id="82" name="Oval 81"/>
+          <p:cNvSpPr/>
+          <p:nvPr/>
+        </p:nvSpPr>
+        <p:spPr>
+          <a:xfrm>
+            <a:off x="22743660" y="18893580"/>
+            <a:ext cx="411300" cy="411300"/>
+          </a:xfrm>
+          <a:prstGeom prst="ellipse">
+            <a:avLst/>
+          </a:prstGeom>
+          <a:solidFill>
+            <a:srgbClr val="B8781A"/>
+          </a:solidFill>
+          <a:ln>
+            <a:noFill/>
+          </a:ln>
+          <a:effectLst/>
+        </p:spPr>
+        <p:style>
+          <a:lnRef idx="1">
+            <a:schemeClr val="accent1"/>
+          </a:lnRef>
+          <a:fillRef idx="3">
+            <a:schemeClr val="accent1"/>
+          </a:fillRef>
+          <a:effectRef idx="2">
+            <a:schemeClr val="accent1"/>
+          </a:effectRef>
+          <a:fontRef idx="minor">
+            <a:schemeClr val="lt1"/>
+          </a:fontRef>
+        </p:style>
+        <p:txBody>
+          <a:bodyPr rtlCol="0" anchor="ctr" wrap="square" lIns="0" rIns="0" tIns="0" bIns="0"/>
+          <a:lstStyle/>
+          <a:p>
+            <a:pPr algn="ctr"/>
+            <a:r>
+              <a:rPr sz="1619" b="1" i="0">
+                <a:solidFill>
+                  <a:srgbClr val="FFFFFF"/>
+                </a:solidFill>
+                <a:latin typeface="Be Vietnam Pro"/>
+              </a:rPr>
+              <a:t>5</a:t>
+            </a:r>
+          </a:p>
+        </p:txBody>
+      </p:sp>
+      <p:sp>
+        <p:nvSpPr>
+          <p:cNvPr id="83" name="TextBox 82"/>
+          <p:cNvSpPr txBox="1"/>
+          <p:nvPr/>
+        </p:nvSpPr>
+        <p:spPr>
+          <a:xfrm>
+            <a:off x="23278349" y="18959388"/>
+            <a:ext cx="180000" cy="320814"/>
+          </a:xfrm>
+          <a:prstGeom prst="rect">
+            <a:avLst/>
+          </a:prstGeom>
+          <a:noFill/>
+        </p:spPr>
+        <p:txBody>
+          <a:bodyPr wrap="none" anchor="t" lIns="0" rIns="0" tIns="0" bIns="0">
+            <a:spAutoFit/>
+          </a:bodyPr>
+          <a:lstStyle/>
+          <a:p>
+            <a:pPr algn="l"/>
+            <a:r>
+              <a:rPr sz="1943" b="1" i="0">
+                <a:solidFill>
+                  <a:srgbClr val="1C2321"/>
+                </a:solidFill>
+                <a:latin typeface="Be Vietnam Pro"/>
+              </a:rPr>
+              <a:t>Kiểm tra ổn định</a:t>
+            </a:r>
+          </a:p>
+        </p:txBody>
+      </p:sp>
+      <p:sp>
+        <p:nvSpPr>
+          <p:cNvPr id="84" name="TextBox 83"/>
+          <p:cNvSpPr txBox="1"/>
+          <p:nvPr/>
+        </p:nvSpPr>
+        <p:spPr>
+          <a:xfrm>
+            <a:off x="22812210" y="19433754"/>
+            <a:ext cx="180000" cy="249522"/>
+          </a:xfrm>
+          <a:prstGeom prst="rect">
+            <a:avLst/>
+          </a:prstGeom>
+          <a:noFill/>
+        </p:spPr>
+        <p:txBody>
+          <a:bodyPr wrap="none" anchor="t" lIns="0" rIns="0" tIns="0" bIns="0">
+            <a:spAutoFit/>
+          </a:bodyPr>
+          <a:lstStyle/>
+          <a:p>
+            <a:pPr algn="l"/>
+            <a:r>
+              <a:rPr sz="1511" b="0" i="0">
+                <a:solidFill>
+                  <a:srgbClr val="5B6570"/>
+                </a:solidFill>
+                <a:latin typeface="IBM Plex Sans"/>
+              </a:rPr>
+              <a:t>Tìm cặp phá vỡ bằng</a:t>
+            </a:r>
+          </a:p>
+        </p:txBody>
+      </p:sp>
+      <p:sp>
+        <p:nvSpPr>
+          <p:cNvPr id="85" name="TextBox 84"/>
+          <p:cNvSpPr txBox="1"/>
+          <p:nvPr/>
+        </p:nvSpPr>
+        <p:spPr>
+          <a:xfrm>
+            <a:off x="22812210" y="19735374"/>
+            <a:ext cx="180000" cy="249522"/>
+          </a:xfrm>
+          <a:prstGeom prst="rect">
+            <a:avLst/>
+          </a:prstGeom>
+          <a:noFill/>
+        </p:spPr>
+        <p:txBody>
+          <a:bodyPr wrap="none" anchor="t" lIns="0" rIns="0" tIns="0" bIns="0">
+            <a:spAutoFit/>
+          </a:bodyPr>
+          <a:lstStyle/>
+          <a:p>
+            <a:pPr algn="l"/>
+            <a:r>
+              <a:rPr sz="1511" b="0" i="0">
+                <a:solidFill>
+                  <a:srgbClr val="5B6570"/>
+                </a:solidFill>
+                <a:latin typeface="IBM Plex Sans"/>
+              </a:rPr>
+              <a:t>chính hàm lựa chọn</a:t>
+            </a:r>
+          </a:p>
+        </p:txBody>
+      </p:sp>
+      <p:sp>
+        <p:nvSpPr>
+          <p:cNvPr id="86" name="Down Arrow 85"/>
+          <p:cNvSpPr/>
+          <p:nvPr/>
+        </p:nvSpPr>
+        <p:spPr>
+          <a:xfrm>
+            <a:off x="24162645" y="20531925"/>
+            <a:ext cx="219360" cy="205650"/>
+          </a:xfrm>
+          <a:prstGeom prst="downArrow">
+            <a:avLst/>
+          </a:prstGeom>
+          <a:solidFill>
+            <a:srgbClr val="5B6570"/>
+          </a:solidFill>
+          <a:ln>
+            <a:noFill/>
+          </a:ln>
+          <a:effectLst/>
+        </p:spPr>
+        <p:style>
+          <a:lnRef idx="1">
+            <a:schemeClr val="accent1"/>
+          </a:lnRef>
+          <a:fillRef idx="3">
+            <a:schemeClr val="accent1"/>
+          </a:fillRef>
+          <a:effectRef idx="2">
+            <a:schemeClr val="accent1"/>
+          </a:effectRef>
+          <a:fontRef idx="minor">
+            <a:schemeClr val="lt1"/>
+          </a:fontRef>
+        </p:style>
+        <p:txBody>
+          <a:bodyPr rtlCol="0" anchor="ctr"/>
+          <a:lstStyle/>
+          <a:p>
+            <a:pPr algn="ctr"/>
+          </a:p>
+        </p:txBody>
+      </p:sp>
+      <p:sp>
+        <p:nvSpPr>
+          <p:cNvPr id="87" name="Rounded Rectangle 86"/>
+          <p:cNvSpPr/>
+          <p:nvPr/>
+        </p:nvSpPr>
+        <p:spPr>
+          <a:xfrm>
+            <a:off x="22592850" y="20737575"/>
+            <a:ext cx="3358950" cy="1816575"/>
+          </a:xfrm>
+          <a:prstGeom prst="roundRect">
+            <a:avLst>
+              <a:gd name="adj" fmla="val 6792"/>
+            </a:avLst>
+          </a:prstGeom>
+          <a:solidFill>
+            <a:srgbClr val="F3F4F1"/>
+          </a:solidFill>
+          <a:ln w="20565">
+            <a:solidFill>
+              <a:srgbClr val="DBDCD5"/>
+            </a:solidFill>
+          </a:ln>
+          <a:effectLst/>
+        </p:spPr>
+        <p:style>
+          <a:lnRef idx="1">
+            <a:schemeClr val="accent1"/>
+          </a:lnRef>
+          <a:fillRef idx="3">
+            <a:schemeClr val="accent1"/>
+          </a:fillRef>
+          <a:effectRef idx="2">
+            <a:schemeClr val="accent1"/>
+          </a:effectRef>
+          <a:fontRef idx="minor">
+            <a:schemeClr val="lt1"/>
+          </a:fontRef>
+        </p:style>
+        <p:txBody>
+          <a:bodyPr rtlCol="0" anchor="ctr"/>
+          <a:lstStyle/>
+          <a:p>
+            <a:pPr algn="ctr"/>
+          </a:p>
+        </p:txBody>
+      </p:sp>
+      <p:sp>
+        <p:nvSpPr>
+          <p:cNvPr id="88" name="TextBox 87"/>
+          <p:cNvSpPr txBox="1"/>
+          <p:nvPr/>
+        </p:nvSpPr>
+        <p:spPr>
+          <a:xfrm>
+            <a:off x="22812210" y="20981613"/>
+            <a:ext cx="180000" cy="320814"/>
+          </a:xfrm>
+          <a:prstGeom prst="rect">
+            <a:avLst/>
+          </a:prstGeom>
+          <a:noFill/>
+        </p:spPr>
+        <p:txBody>
+          <a:bodyPr wrap="none" anchor="t" lIns="0" rIns="0" tIns="0" bIns="0">
+            <a:spAutoFit/>
+          </a:bodyPr>
+          <a:lstStyle/>
+          <a:p>
+            <a:pPr algn="l"/>
+            <a:r>
+              <a:rPr sz="1943" b="1" i="0">
+                <a:solidFill>
+                  <a:srgbClr val="1C2321"/>
+                </a:solidFill>
+                <a:latin typeface="Be Vietnam Pro"/>
+              </a:rPr>
+              <a:t>Kết quả</a:t>
+            </a:r>
+          </a:p>
+        </p:txBody>
+      </p:sp>
+      <p:sp>
+        <p:nvSpPr>
+          <p:cNvPr id="89" name="TextBox 88"/>
+          <p:cNvSpPr txBox="1"/>
+          <p:nvPr/>
+        </p:nvSpPr>
+        <p:spPr>
+          <a:xfrm>
+            <a:off x="22812210" y="21455979"/>
+            <a:ext cx="180000" cy="249522"/>
+          </a:xfrm>
+          <a:prstGeom prst="rect">
+            <a:avLst/>
+          </a:prstGeom>
+          <a:noFill/>
+        </p:spPr>
+        <p:txBody>
+          <a:bodyPr wrap="none" anchor="t" lIns="0" rIns="0" tIns="0" bIns="0">
+            <a:spAutoFit/>
+          </a:bodyPr>
+          <a:lstStyle/>
+          <a:p>
+            <a:pPr algn="l"/>
+            <a:r>
+              <a:rPr sz="1511" b="0" i="0">
+                <a:solidFill>
+                  <a:srgbClr val="5B6570"/>
+                </a:solidFill>
+                <a:latin typeface="IBM Plex Sans"/>
+              </a:rPr>
+              <a:t>Mỗi em một CLB</a:t>
+            </a:r>
+          </a:p>
+        </p:txBody>
+      </p:sp>
+      <p:sp>
+        <p:nvSpPr>
+          <p:cNvPr id="90" name="TextBox 89"/>
+          <p:cNvSpPr txBox="1"/>
+          <p:nvPr/>
+        </p:nvSpPr>
+        <p:spPr>
+          <a:xfrm>
+            <a:off x="22812210" y="21757599"/>
+            <a:ext cx="180000" cy="249522"/>
+          </a:xfrm>
+          <a:prstGeom prst="rect">
+            <a:avLst/>
+          </a:prstGeom>
+          <a:noFill/>
+        </p:spPr>
+        <p:txBody>
+          <a:bodyPr wrap="none" anchor="t" lIns="0" rIns="0" tIns="0" bIns="0">
+            <a:spAutoFit/>
+          </a:bodyPr>
+          <a:lstStyle/>
+          <a:p>
+            <a:pPr algn="l"/>
+            <a:r>
+              <a:rPr sz="1511" b="0" i="0">
+                <a:solidFill>
+                  <a:srgbClr val="5B6570"/>
+                </a:solidFill>
+                <a:latin typeface="IBM Plex Sans"/>
+              </a:rPr>
+              <a:t>Xuất Excel / CSV theo CLB</a:t>
+            </a:r>
+          </a:p>
+        </p:txBody>
+      </p:sp>
+      <p:sp>
+        <p:nvSpPr>
+          <p:cNvPr id="91" name="TextBox 90"/>
+          <p:cNvSpPr txBox="1"/>
+          <p:nvPr/>
+        </p:nvSpPr>
+        <p:spPr>
+          <a:xfrm>
+            <a:off x="10048200" y="23216343"/>
+            <a:ext cx="180000" cy="231699"/>
+          </a:xfrm>
+          <a:prstGeom prst="rect">
+            <a:avLst/>
+          </a:prstGeom>
+          <a:noFill/>
+        </p:spPr>
+        <p:txBody>
+          <a:bodyPr wrap="none" anchor="t" lIns="0" rIns="0" tIns="0" bIns="0">
+            <a:spAutoFit/>
+          </a:bodyPr>
+          <a:lstStyle/>
+          <a:p>
+            <a:pPr algn="l"/>
+            <a:r>
+              <a:rPr sz="1403" b="0" i="0">
+                <a:solidFill>
+                  <a:srgbClr val="8A929A"/>
+                </a:solidFill>
+                <a:latin typeface="IBM Plex Sans"/>
+              </a:rPr>
+              <a:t>Sơ đồ do AI tạo ra — theo CO_CHE_THUAT_TOAN.md (năm lớp cơ chế của phần mềm)</a:t>
+            </a:r>
+          </a:p>
+        </p:txBody>
+      </p:sp>
+      <p:sp>
+        <p:nvSpPr>
+          <p:cNvPr id="92" name="Rounded Rectangle 91"/>
           <p:cNvSpPr/>
           <p:nvPr/>
         </p:nvSpPr>
@@ -5426,7 +7860,7 @@
       </p:sp>
       <p:sp>
         <p:nvSpPr>
-          <p:cNvPr id="45" name="TextBox 44"/>
+          <p:cNvPr id="93" name="TextBox 92"/>
           <p:cNvSpPr txBox="1"/>
           <p:nvPr/>
         </p:nvSpPr>
@@ -5461,7 +7895,7 @@
       </p:sp>
       <p:sp>
         <p:nvSpPr>
-          <p:cNvPr id="46" name="Rounded Rectangle 45"/>
+          <p:cNvPr id="94" name="Rounded Rectangle 93"/>
           <p:cNvSpPr/>
           <p:nvPr/>
         </p:nvSpPr>
@@ -5509,7 +7943,7 @@
       </p:sp>
       <p:sp>
         <p:nvSpPr>
-          <p:cNvPr id="47" name="Oval 46"/>
+          <p:cNvPr id="95" name="Oval 94"/>
           <p:cNvSpPr/>
           <p:nvPr/>
         </p:nvSpPr>
@@ -5562,7 +7996,7 @@
       </p:sp>
       <p:sp>
         <p:nvSpPr>
-          <p:cNvPr id="48" name="TextBox 47"/>
+          <p:cNvPr id="96" name="TextBox 95"/>
           <p:cNvSpPr txBox="1"/>
           <p:nvPr/>
         </p:nvSpPr>
@@ -5597,7 +8031,7 @@
       </p:sp>
       <p:sp>
         <p:nvSpPr>
-          <p:cNvPr id="49" name="Oval 48"/>
+          <p:cNvPr id="97" name="Oval 96"/>
           <p:cNvSpPr/>
           <p:nvPr/>
         </p:nvSpPr>
@@ -5650,7 +8084,7 @@
       </p:sp>
       <p:sp>
         <p:nvSpPr>
-          <p:cNvPr id="50" name="Rounded Rectangle 49"/>
+          <p:cNvPr id="98" name="Rounded Rectangle 97"/>
           <p:cNvSpPr/>
           <p:nvPr/>
         </p:nvSpPr>
@@ -5697,7 +8131,7 @@
       </p:sp>
       <p:sp>
         <p:nvSpPr>
-          <p:cNvPr id="51" name="TextBox 50"/>
+          <p:cNvPr id="99" name="TextBox 98"/>
           <p:cNvSpPr txBox="1"/>
           <p:nvPr/>
         </p:nvSpPr>
@@ -5732,7 +8166,7 @@
       </p:sp>
       <p:sp>
         <p:nvSpPr>
-          <p:cNvPr id="52" name="Oval 51"/>
+          <p:cNvPr id="100" name="Oval 99"/>
           <p:cNvSpPr/>
           <p:nvPr/>
         </p:nvSpPr>
@@ -5785,7 +8219,7 @@
       </p:sp>
       <p:sp>
         <p:nvSpPr>
-          <p:cNvPr id="53" name="Rounded Rectangle 52"/>
+          <p:cNvPr id="101" name="Rounded Rectangle 100"/>
           <p:cNvSpPr/>
           <p:nvPr/>
         </p:nvSpPr>
@@ -5832,7 +8266,7 @@
       </p:sp>
       <p:sp>
         <p:nvSpPr>
-          <p:cNvPr id="54" name="TextBox 53"/>
+          <p:cNvPr id="102" name="TextBox 101"/>
           <p:cNvSpPr txBox="1"/>
           <p:nvPr/>
         </p:nvSpPr>
@@ -5867,7 +8301,7 @@
       </p:sp>
       <p:sp>
         <p:nvSpPr>
-          <p:cNvPr id="55" name="Oval 54"/>
+          <p:cNvPr id="103" name="Oval 102"/>
           <p:cNvSpPr/>
           <p:nvPr/>
         </p:nvSpPr>
@@ -5920,7 +8354,7 @@
       </p:sp>
       <p:sp>
         <p:nvSpPr>
-          <p:cNvPr id="56" name="Rounded Rectangle 55"/>
+          <p:cNvPr id="104" name="Rounded Rectangle 103"/>
           <p:cNvSpPr/>
           <p:nvPr/>
         </p:nvSpPr>
@@ -5967,7 +8401,7 @@
       </p:sp>
       <p:sp>
         <p:nvSpPr>
-          <p:cNvPr id="57" name="TextBox 56"/>
+          <p:cNvPr id="105" name="TextBox 104"/>
           <p:cNvSpPr txBox="1"/>
           <p:nvPr/>
         </p:nvSpPr>
@@ -6002,7 +8436,7 @@
       </p:sp>
       <p:sp>
         <p:nvSpPr>
-          <p:cNvPr id="58" name="Oval 57"/>
+          <p:cNvPr id="106" name="Oval 105"/>
           <p:cNvSpPr/>
           <p:nvPr/>
         </p:nvSpPr>
@@ -6055,7 +8489,7 @@
       </p:sp>
       <p:sp>
         <p:nvSpPr>
-          <p:cNvPr id="59" name="Rounded Rectangle 58"/>
+          <p:cNvPr id="107" name="Rounded Rectangle 106"/>
           <p:cNvSpPr/>
           <p:nvPr/>
         </p:nvSpPr>
@@ -6102,7 +8536,7 @@
       </p:sp>
       <p:sp>
         <p:nvSpPr>
-          <p:cNvPr id="60" name="TextBox 59"/>
+          <p:cNvPr id="108" name="TextBox 107"/>
           <p:cNvSpPr txBox="1"/>
           <p:nvPr/>
         </p:nvSpPr>
@@ -6137,7 +8571,7 @@
       </p:sp>
       <p:sp>
         <p:nvSpPr>
-          <p:cNvPr id="61" name="Rounded Rectangle 60"/>
+          <p:cNvPr id="109" name="Rounded Rectangle 108"/>
           <p:cNvSpPr/>
           <p:nvPr/>
         </p:nvSpPr>
@@ -6185,7 +8619,7 @@
       </p:sp>
       <p:sp>
         <p:nvSpPr>
-          <p:cNvPr id="62" name="Oval 61"/>
+          <p:cNvPr id="110" name="Oval 109"/>
           <p:cNvSpPr/>
           <p:nvPr/>
         </p:nvSpPr>
@@ -6238,7 +8672,7 @@
       </p:sp>
       <p:sp>
         <p:nvSpPr>
-          <p:cNvPr id="63" name="TextBox 62"/>
+          <p:cNvPr id="111" name="TextBox 110"/>
           <p:cNvSpPr txBox="1"/>
           <p:nvPr/>
         </p:nvSpPr>
@@ -6271,57 +8705,285 @@
           </a:p>
         </p:txBody>
       </p:sp>
-      <p:pic>
-        <p:nvPicPr>
-          <p:cNvPr id="64" name="Picture 63" descr="bieu_do_khai_gian.png"/>
-          <p:cNvPicPr>
-            <a:picLocks noChangeAspect="1"/>
-          </p:cNvPicPr>
-          <p:nvPr/>
-        </p:nvPicPr>
-        <p:blipFill>
-          <a:blip r:embed="rId5"/>
-          <a:stretch>
-            <a:fillRect/>
-          </a:stretch>
-        </p:blipFill>
-        <p:spPr>
-          <a:xfrm>
-            <a:off x="27774000" y="12420000"/>
-            <a:ext cx="7362000" cy="3496949"/>
+      <p:grpSp>
+        <p:nvGrpSpPr>
+          <p:cNvPr id="112" name="Bieu do khai gian"/>
+          <p:cNvGrpSpPr/>
+          <p:nvPr/>
+        </p:nvGrpSpPr>
+        <p:grpSpPr>
+          <a:xfrm>
+            <a:off x="27958050" y="13202212"/>
+            <a:ext cx="6993899" cy="2208600"/>
+            <a:chOff x="27958050" y="13202212"/>
+            <a:chExt cx="6993899" cy="2208600"/>
+          </a:xfrm>
+        </p:grpSpPr>
+        <p:graphicFrame>
+          <p:nvGraphicFramePr>
+            <p:cNvPr id="116" name="Chart 115"/>
+            <p:cNvGraphicFramePr>
+              <a:graphicFrameLocks noGrp="1"/>
+            </p:cNvGraphicFramePr>
+            <p:nvPr/>
+          </p:nvGraphicFramePr>
+          <p:xfrm>
+            <a:off x="27958050" y="13202212"/>
+            <a:ext cx="6993899" cy="2208600"/>
+          </p:xfrm>
+          <a:graphic>
+            <a:graphicData uri="http://schemas.openxmlformats.org/drawingml/2006/chart">
+              <c:chart xmlns:c="http://schemas.openxmlformats.org/drawingml/2006/chart" r:id="rId4"/>
+            </a:graphicData>
+          </a:graphic>
+        </p:graphicFrame>
+      </p:grpSp>
+      <p:sp>
+        <p:nvSpPr>
+          <p:cNvPr id="113" name="TextBox 112"/>
+          <p:cNvSpPr txBox="1"/>
+          <p:nvPr/>
+        </p:nvSpPr>
+        <p:spPr>
+          <a:xfrm>
+            <a:off x="28050075" y="12605890"/>
+            <a:ext cx="180000" cy="263191"/>
           </a:xfrm>
           <a:prstGeom prst="rect">
             <a:avLst/>
           </a:prstGeom>
-        </p:spPr>
-      </p:pic>
-      <p:pic>
-        <p:nvPicPr>
-          <p:cNvPr id="65" name="Picture 64" descr="bieu_do_nguyen_vong.png"/>
-          <p:cNvPicPr>
-            <a:picLocks noChangeAspect="1"/>
-          </p:cNvPicPr>
-          <p:nvPr/>
-        </p:nvPicPr>
-        <p:blipFill>
-          <a:blip r:embed="rId6"/>
-          <a:stretch>
-            <a:fillRect/>
-          </a:stretch>
-        </p:blipFill>
-        <p:spPr>
-          <a:xfrm>
-            <a:off x="27774000" y="16060949"/>
-            <a:ext cx="7362000" cy="4601250"/>
+          <a:noFill/>
+        </p:spPr>
+        <p:txBody>
+          <a:bodyPr wrap="none" anchor="t" lIns="0" rIns="0" tIns="0" bIns="0">
+            <a:spAutoFit/>
+          </a:bodyPr>
+          <a:lstStyle/>
+          <a:p>
+            <a:pPr algn="l"/>
+            <a:r>
+              <a:rPr sz="1594" b="1" i="0">
+                <a:solidFill>
+                  <a:srgbClr val="1C2321"/>
+                </a:solidFill>
+                <a:latin typeface="Be Vietnam Pro"/>
+              </a:rPr>
+              <a:t>Số em khai sai nguyện vọng mà được lợi</a:t>
+            </a:r>
+          </a:p>
+        </p:txBody>
+      </p:sp>
+      <p:sp>
+        <p:nvSpPr>
+          <p:cNvPr id="114" name="TextBox 113"/>
+          <p:cNvSpPr txBox="1"/>
+          <p:nvPr/>
+        </p:nvSpPr>
+        <p:spPr>
+          <a:xfrm>
+            <a:off x="28050075" y="12893008"/>
+            <a:ext cx="180000" cy="167485"/>
           </a:xfrm>
           <a:prstGeom prst="rect">
             <a:avLst/>
           </a:prstGeom>
-        </p:spPr>
-      </p:pic>
-      <p:sp>
-        <p:nvSpPr>
-          <p:cNvPr id="66" name="Rounded Rectangle 65"/>
+          <a:noFill/>
+        </p:spPr>
+        <p:txBody>
+          <a:bodyPr wrap="none" anchor="t" lIns="0" rIns="0" tIns="0" bIns="0">
+            <a:spAutoFit/>
+          </a:bodyPr>
+          <a:lstStyle/>
+          <a:p>
+            <a:pPr algn="l"/>
+            <a:r>
+              <a:rPr sz="1014" b="0" i="0">
+                <a:solidFill>
+                  <a:srgbClr val="5B6570"/>
+                </a:solidFill>
+                <a:latin typeface="IBM Plex Sans"/>
+              </a:rPr>
+              <a:t>Vét cạn mọi cách khai của từng em · 200 thể hiện, 1 400 lượt học sinh</a:t>
+            </a:r>
+          </a:p>
+        </p:txBody>
+      </p:sp>
+      <p:sp>
+        <p:nvSpPr>
+          <p:cNvPr id="115" name="TextBox 114"/>
+          <p:cNvSpPr txBox="1"/>
+          <p:nvPr/>
+        </p:nvSpPr>
+        <p:spPr>
+          <a:xfrm>
+            <a:off x="28050075" y="15541488"/>
+            <a:ext cx="180000" cy="143559"/>
+          </a:xfrm>
+          <a:prstGeom prst="rect">
+            <a:avLst/>
+          </a:prstGeom>
+          <a:noFill/>
+        </p:spPr>
+        <p:txBody>
+          <a:bodyPr wrap="none" anchor="t" lIns="0" rIns="0" tIns="0" bIns="0">
+            <a:spAutoFit/>
+          </a:bodyPr>
+          <a:lstStyle/>
+          <a:p>
+            <a:pPr algn="l"/>
+            <a:r>
+              <a:rPr sz="869" b="0" i="0">
+                <a:solidFill>
+                  <a:srgbClr val="8A929A"/>
+                </a:solidFill>
+                <a:latin typeface="IBM Plex Sans"/>
+              </a:rPr>
+              <a:t>Dữ liệu mô phỏng — nguồn: NGHIEN_CUU_TOI_UU.md, TN3</a:t>
+            </a:r>
+          </a:p>
+        </p:txBody>
+      </p:sp>
+      <p:grpSp>
+        <p:nvGrpSpPr>
+          <p:cNvPr id="117" name="Bieu do nguyen vong"/>
+          <p:cNvGrpSpPr/>
+          <p:nvPr/>
+        </p:nvGrpSpPr>
+        <p:grpSpPr>
+          <a:xfrm>
+            <a:off x="27958050" y="16797150"/>
+            <a:ext cx="6993899" cy="3404924"/>
+            <a:chOff x="27958050" y="16797150"/>
+            <a:chExt cx="6993899" cy="3404924"/>
+          </a:xfrm>
+        </p:grpSpPr>
+        <p:graphicFrame>
+          <p:nvGraphicFramePr>
+            <p:cNvPr id="121" name="Chart 120"/>
+            <p:cNvGraphicFramePr>
+              <a:graphicFrameLocks noGrp="1"/>
+            </p:cNvGraphicFramePr>
+            <p:nvPr/>
+          </p:nvGraphicFramePr>
+          <p:xfrm>
+            <a:off x="27958050" y="16797150"/>
+            <a:ext cx="6993899" cy="3404924"/>
+          </p:xfrm>
+          <a:graphic>
+            <a:graphicData uri="http://schemas.openxmlformats.org/drawingml/2006/chart">
+              <c:chart xmlns:c="http://schemas.openxmlformats.org/drawingml/2006/chart" r:id="rId5"/>
+            </a:graphicData>
+          </a:graphic>
+        </p:graphicFrame>
+      </p:grpSp>
+      <p:sp>
+        <p:nvSpPr>
+          <p:cNvPr id="118" name="TextBox 117"/>
+          <p:cNvSpPr txBox="1"/>
+          <p:nvPr/>
+        </p:nvSpPr>
+        <p:spPr>
+          <a:xfrm>
+            <a:off x="28050075" y="16246840"/>
+            <a:ext cx="180000" cy="263191"/>
+          </a:xfrm>
+          <a:prstGeom prst="rect">
+            <a:avLst/>
+          </a:prstGeom>
+          <a:noFill/>
+        </p:spPr>
+        <p:txBody>
+          <a:bodyPr wrap="none" anchor="t" lIns="0" rIns="0" tIns="0" bIns="0">
+            <a:spAutoFit/>
+          </a:bodyPr>
+          <a:lstStyle/>
+          <a:p>
+            <a:pPr algn="l"/>
+            <a:r>
+              <a:rPr sz="1594" b="1" i="0">
+                <a:solidFill>
+                  <a:srgbClr val="1C2321"/>
+                </a:solidFill>
+                <a:latin typeface="Be Vietnam Pro"/>
+              </a:rPr>
+              <a:t>Được xếp vào nguyện vọng thứ mấy</a:t>
+            </a:r>
+          </a:p>
+        </p:txBody>
+      </p:sp>
+      <p:sp>
+        <p:nvSpPr>
+          <p:cNvPr id="119" name="TextBox 118"/>
+          <p:cNvSpPr txBox="1"/>
+          <p:nvPr/>
+        </p:nvSpPr>
+        <p:spPr>
+          <a:xfrm>
+            <a:off x="28050075" y="16533958"/>
+            <a:ext cx="180000" cy="167485"/>
+          </a:xfrm>
+          <a:prstGeom prst="rect">
+            <a:avLst/>
+          </a:prstGeom>
+          <a:noFill/>
+        </p:spPr>
+        <p:txBody>
+          <a:bodyPr wrap="none" anchor="t" lIns="0" rIns="0" tIns="0" bIns="0">
+            <a:spAutoFit/>
+          </a:bodyPr>
+          <a:lstStyle/>
+          <a:p>
+            <a:pPr algn="l"/>
+            <a:r>
+              <a:rPr sz="1014" b="0" i="0">
+                <a:solidFill>
+                  <a:srgbClr val="5B6570"/>
+                </a:solidFill>
+                <a:latin typeface="IBM Plex Sans"/>
+              </a:rPr>
+              <a:t>108 em được xếp · bộ 120 học sinh, 10 CLB · seed 42</a:t>
+            </a:r>
+          </a:p>
+        </p:txBody>
+      </p:sp>
+      <p:sp>
+        <p:nvSpPr>
+          <p:cNvPr id="120" name="TextBox 119"/>
+          <p:cNvSpPr txBox="1"/>
+          <p:nvPr/>
+        </p:nvSpPr>
+        <p:spPr>
+          <a:xfrm>
+            <a:off x="28050075" y="20378762"/>
+            <a:ext cx="180000" cy="143559"/>
+          </a:xfrm>
+          <a:prstGeom prst="rect">
+            <a:avLst/>
+          </a:prstGeom>
+          <a:noFill/>
+        </p:spPr>
+        <p:txBody>
+          <a:bodyPr wrap="none" anchor="t" lIns="0" rIns="0" tIns="0" bIns="0">
+            <a:spAutoFit/>
+          </a:bodyPr>
+          <a:lstStyle/>
+          <a:p>
+            <a:pPr algn="l"/>
+            <a:r>
+              <a:rPr sz="869" b="0" i="0">
+                <a:solidFill>
+                  <a:srgbClr val="8A929A"/>
+                </a:solidFill>
+                <a:latin typeface="IBM Plex Sans"/>
+              </a:rPr>
+              <a:t>Dữ liệu mô phỏng — nguồn: du_lieu_test/SO_LIEU_DA_KIEM_CHUNG.md, mục 2</a:t>
+            </a:r>
+          </a:p>
+        </p:txBody>
+      </p:sp>
+      <p:sp>
+        <p:nvSpPr>
+          <p:cNvPr id="122" name="Rounded Rectangle 121"/>
           <p:cNvSpPr/>
           <p:nvPr/>
         </p:nvSpPr>
@@ -6368,7 +9030,7 @@
       </p:sp>
       <p:sp>
         <p:nvSpPr>
-          <p:cNvPr id="67" name="TextBox 66"/>
+          <p:cNvPr id="123" name="TextBox 122"/>
           <p:cNvSpPr txBox="1"/>
           <p:nvPr/>
         </p:nvSpPr>
@@ -6403,7 +9065,7 @@
       </p:sp>
       <p:sp>
         <p:nvSpPr>
-          <p:cNvPr id="68" name="Rounded Rectangle 67"/>
+          <p:cNvPr id="124" name="Rounded Rectangle 123"/>
           <p:cNvSpPr/>
           <p:nvPr/>
         </p:nvSpPr>
@@ -6451,7 +9113,7 @@
       </p:sp>
       <p:sp>
         <p:nvSpPr>
-          <p:cNvPr id="69" name="TextBox 68"/>
+          <p:cNvPr id="125" name="TextBox 124"/>
           <p:cNvSpPr txBox="1"/>
           <p:nvPr/>
         </p:nvSpPr>
@@ -6486,7 +9148,7 @@
       </p:sp>
       <p:sp>
         <p:nvSpPr>
-          <p:cNvPr id="70" name="Rounded Rectangle 69"/>
+          <p:cNvPr id="126" name="Rounded Rectangle 125"/>
           <p:cNvSpPr/>
           <p:nvPr/>
         </p:nvSpPr>
@@ -6533,7 +9195,7 @@
       </p:sp>
       <p:sp>
         <p:nvSpPr>
-          <p:cNvPr id="71" name="TextBox 70"/>
+          <p:cNvPr id="127" name="TextBox 126"/>
           <p:cNvSpPr txBox="1"/>
           <p:nvPr/>
         </p:nvSpPr>

--- a/poster/poster_khung_1-2.pptx
+++ b/poster/poster_khung_1-2.pptx
@@ -5922,12 +5922,12 @@
         </p:nvSpPr>
         <p:spPr>
           <a:xfrm>
-            <a:off x="10048200" y="18715350"/>
-            <a:ext cx="2742000" cy="3838800"/>
+            <a:off x="10048200" y="19537950"/>
+            <a:ext cx="2604900" cy="2056500"/>
           </a:xfrm>
           <a:prstGeom prst="roundRect">
             <a:avLst>
-              <a:gd name="adj" fmla="val 4500"/>
+              <a:gd name="adj" fmla="val 6000"/>
             </a:avLst>
           </a:prstGeom>
           <a:solidFill>
@@ -5970,8 +5970,8 @@
         </p:nvSpPr>
         <p:spPr>
           <a:xfrm>
-            <a:off x="10267559" y="18959388"/>
-            <a:ext cx="180000" cy="320814"/>
+            <a:off x="10294980" y="19801182"/>
+            <a:ext cx="180000" cy="392106"/>
           </a:xfrm>
           <a:prstGeom prst="rect">
             <a:avLst/>
@@ -5986,7 +5986,7 @@
           <a:p>
             <a:pPr algn="l"/>
             <a:r>
-              <a:rPr sz="1943" b="1" i="0">
+              <a:rPr sz="2374" b="1" i="0">
                 <a:solidFill>
                   <a:srgbClr val="1C2321"/>
                 </a:solidFill>
@@ -6005,8 +6005,8 @@
         </p:nvSpPr>
         <p:spPr>
           <a:xfrm>
-            <a:off x="10267559" y="19433754"/>
-            <a:ext cx="180000" cy="249522"/>
+            <a:off x="10294980" y="20356437"/>
+            <a:ext cx="180000" cy="302991"/>
           </a:xfrm>
           <a:prstGeom prst="rect">
             <a:avLst/>
@@ -6021,7 +6021,7 @@
           <a:p>
             <a:pPr algn="l"/>
             <a:r>
-              <a:rPr sz="1511" b="0" i="0">
+              <a:rPr sz="1835" b="0" i="0">
                 <a:solidFill>
                   <a:srgbClr val="5B6570"/>
                 </a:solidFill>
@@ -6040,8 +6040,8 @@
         </p:nvSpPr>
         <p:spPr>
           <a:xfrm>
-            <a:off x="10267559" y="19735374"/>
-            <a:ext cx="180000" cy="249522"/>
+            <a:off x="10294980" y="20726607"/>
+            <a:ext cx="180000" cy="302991"/>
           </a:xfrm>
           <a:prstGeom prst="rect">
             <a:avLst/>
@@ -6056,13 +6056,13 @@
           <a:p>
             <a:pPr algn="l"/>
             <a:r>
-              <a:rPr sz="1511" b="0" i="0">
+              <a:rPr sz="1835" b="0" i="0">
                 <a:solidFill>
                   <a:srgbClr val="5B6570"/>
                 </a:solidFill>
                 <a:latin typeface="IBM Plex Sans"/>
               </a:rPr>
-              <a:t>· sức chứa</a:t>
+              <a:t>Điểm thi</a:t>
             </a:r>
           </a:p>
         </p:txBody>
@@ -6075,8 +6075,8 @@
         </p:nvSpPr>
         <p:spPr>
           <a:xfrm>
-            <a:off x="10267559" y="20036994"/>
-            <a:ext cx="180000" cy="249522"/>
+            <a:off x="10294980" y="21096777"/>
+            <a:ext cx="180000" cy="302991"/>
           </a:xfrm>
           <a:prstGeom prst="rect">
             <a:avLst/>
@@ -6091,182 +6091,7 @@
           <a:p>
             <a:pPr algn="l"/>
             <a:r>
-              <a:rPr sz="1511" b="0" i="0">
-                <a:solidFill>
-                  <a:srgbClr val="5B6570"/>
-                </a:solidFill>
-                <a:latin typeface="IBM Plex Sans"/>
-              </a:rPr>
-              <a:t>· suất dự trữ</a:t>
-            </a:r>
-          </a:p>
-        </p:txBody>
-      </p:sp>
-      <p:sp>
-        <p:nvSpPr>
-          <p:cNvPr id="49" name="TextBox 48"/>
-          <p:cNvSpPr txBox="1"/>
-          <p:nvPr/>
-        </p:nvSpPr>
-        <p:spPr>
-          <a:xfrm>
-            <a:off x="10267559" y="20338614"/>
-            <a:ext cx="180000" cy="249522"/>
-          </a:xfrm>
-          <a:prstGeom prst="rect">
-            <a:avLst/>
-          </a:prstGeom>
-          <a:noFill/>
-        </p:spPr>
-        <p:txBody>
-          <a:bodyPr wrap="none" anchor="t" lIns="0" rIns="0" tIns="0" bIns="0">
-            <a:spAutoFit/>
-          </a:bodyPr>
-          <a:lstStyle/>
-          <a:p>
-            <a:pPr algn="l"/>
-            <a:r>
-              <a:rPr sz="1511" b="0" i="0">
-                <a:solidFill>
-                  <a:srgbClr val="5B6570"/>
-                </a:solidFill>
-                <a:latin typeface="IBM Plex Sans"/>
-              </a:rPr>
-              <a:t/>
-            </a:r>
-          </a:p>
-        </p:txBody>
-      </p:sp>
-      <p:sp>
-        <p:nvSpPr>
-          <p:cNvPr id="50" name="TextBox 49"/>
-          <p:cNvSpPr txBox="1"/>
-          <p:nvPr/>
-        </p:nvSpPr>
-        <p:spPr>
-          <a:xfrm>
-            <a:off x="10267559" y="20640234"/>
-            <a:ext cx="180000" cy="249522"/>
-          </a:xfrm>
-          <a:prstGeom prst="rect">
-            <a:avLst/>
-          </a:prstGeom>
-          <a:noFill/>
-        </p:spPr>
-        <p:txBody>
-          <a:bodyPr wrap="none" anchor="t" lIns="0" rIns="0" tIns="0" bIns="0">
-            <a:spAutoFit/>
-          </a:bodyPr>
-          <a:lstStyle/>
-          <a:p>
-            <a:pPr algn="l"/>
-            <a:r>
-              <a:rPr sz="1511" b="0" i="0">
-                <a:solidFill>
-                  <a:srgbClr val="5B6570"/>
-                </a:solidFill>
-                <a:latin typeface="IBM Plex Sans"/>
-              </a:rPr>
-              <a:t>CLB muốn thi</a:t>
-            </a:r>
-          </a:p>
-        </p:txBody>
-      </p:sp>
-      <p:sp>
-        <p:nvSpPr>
-          <p:cNvPr id="51" name="TextBox 50"/>
-          <p:cNvSpPr txBox="1"/>
-          <p:nvPr/>
-        </p:nvSpPr>
-        <p:spPr>
-          <a:xfrm>
-            <a:off x="10267559" y="20941854"/>
-            <a:ext cx="180000" cy="249522"/>
-          </a:xfrm>
-          <a:prstGeom prst="rect">
-            <a:avLst/>
-          </a:prstGeom>
-          <a:noFill/>
-        </p:spPr>
-        <p:txBody>
-          <a:bodyPr wrap="none" anchor="t" lIns="0" rIns="0" tIns="0" bIns="0">
-            <a:spAutoFit/>
-          </a:bodyPr>
-          <a:lstStyle/>
-          <a:p>
-            <a:pPr algn="l"/>
-            <a:r>
-              <a:rPr sz="1511" b="0" i="0">
-                <a:solidFill>
-                  <a:srgbClr val="5B6570"/>
-                </a:solidFill>
-                <a:latin typeface="IBM Plex Sans"/>
-              </a:rPr>
-              <a:t>· điểm chấm mù</a:t>
-            </a:r>
-          </a:p>
-        </p:txBody>
-      </p:sp>
-      <p:sp>
-        <p:nvSpPr>
-          <p:cNvPr id="52" name="TextBox 51"/>
-          <p:cNvSpPr txBox="1"/>
-          <p:nvPr/>
-        </p:nvSpPr>
-        <p:spPr>
-          <a:xfrm>
-            <a:off x="10267559" y="21243474"/>
-            <a:ext cx="180000" cy="249522"/>
-          </a:xfrm>
-          <a:prstGeom prst="rect">
-            <a:avLst/>
-          </a:prstGeom>
-          <a:noFill/>
-        </p:spPr>
-        <p:txBody>
-          <a:bodyPr wrap="none" anchor="t" lIns="0" rIns="0" tIns="0" bIns="0">
-            <a:spAutoFit/>
-          </a:bodyPr>
-          <a:lstStyle/>
-          <a:p>
-            <a:pPr algn="l"/>
-            <a:r>
-              <a:rPr sz="1511" b="0" i="0">
-                <a:solidFill>
-                  <a:srgbClr val="5B6570"/>
-                </a:solidFill>
-                <a:latin typeface="IBM Plex Sans"/>
-              </a:rPr>
-              <a:t/>
-            </a:r>
-          </a:p>
-        </p:txBody>
-      </p:sp>
-      <p:sp>
-        <p:nvSpPr>
-          <p:cNvPr id="53" name="TextBox 52"/>
-          <p:cNvSpPr txBox="1"/>
-          <p:nvPr/>
-        </p:nvSpPr>
-        <p:spPr>
-          <a:xfrm>
-            <a:off x="10267559" y="21545094"/>
-            <a:ext cx="180000" cy="249522"/>
-          </a:xfrm>
-          <a:prstGeom prst="rect">
-            <a:avLst/>
-          </a:prstGeom>
-          <a:noFill/>
-        </p:spPr>
-        <p:txBody>
-          <a:bodyPr wrap="none" anchor="t" lIns="0" rIns="0" tIns="0" bIns="0">
-            <a:spAutoFit/>
-          </a:bodyPr>
-          <a:lstStyle/>
-          <a:p>
-            <a:pPr algn="l"/>
-            <a:r>
-              <a:rPr sz="1511" b="0" i="0">
+              <a:rPr sz="1835" b="0" i="0">
                 <a:solidFill>
                   <a:srgbClr val="5B6570"/>
                 </a:solidFill>
@@ -6279,49 +6104,14 @@
       </p:sp>
       <p:sp>
         <p:nvSpPr>
-          <p:cNvPr id="54" name="TextBox 53"/>
-          <p:cNvSpPr txBox="1"/>
-          <p:nvPr/>
-        </p:nvSpPr>
-        <p:spPr>
-          <a:xfrm>
-            <a:off x="10267559" y="21846714"/>
-            <a:ext cx="180000" cy="249522"/>
-          </a:xfrm>
-          <a:prstGeom prst="rect">
-            <a:avLst/>
-          </a:prstGeom>
-          <a:noFill/>
-        </p:spPr>
-        <p:txBody>
-          <a:bodyPr wrap="none" anchor="t" lIns="0" rIns="0" tIns="0" bIns="0">
-            <a:spAutoFit/>
-          </a:bodyPr>
-          <a:lstStyle/>
-          <a:p>
-            <a:pPr algn="l"/>
-            <a:r>
-              <a:rPr sz="1511" b="0" i="0">
-                <a:solidFill>
-                  <a:srgbClr val="5B6570"/>
-                </a:solidFill>
-                <a:latin typeface="IBM Plex Sans"/>
-              </a:rPr>
-              <a:t>· xếp hạng CLB</a:t>
-            </a:r>
-          </a:p>
-        </p:txBody>
-      </p:sp>
-      <p:sp>
-        <p:nvSpPr>
-          <p:cNvPr id="55" name="Right Arrow 54"/>
+          <p:cNvPr id="49" name="Right Arrow 48"/>
           <p:cNvSpPr/>
           <p:nvPr/>
         </p:nvSpPr>
         <p:spPr>
           <a:xfrm>
-            <a:off x="12790200" y="20525070"/>
-            <a:ext cx="616950" cy="219360"/>
+            <a:off x="12653100" y="20456520"/>
+            <a:ext cx="479850" cy="219360"/>
           </a:xfrm>
           <a:prstGeom prst="rightArrow">
             <a:avLst/>
@@ -6358,18 +6148,18 @@
       </p:sp>
       <p:sp>
         <p:nvSpPr>
-          <p:cNvPr id="56" name="Rounded Rectangle 55"/>
+          <p:cNvPr id="50" name="Rounded Rectangle 49"/>
           <p:cNvSpPr/>
           <p:nvPr/>
         </p:nvSpPr>
         <p:spPr>
           <a:xfrm>
-            <a:off x="13407150" y="18715350"/>
-            <a:ext cx="3564600" cy="1816575"/>
+            <a:off x="13132950" y="19537950"/>
+            <a:ext cx="3290400" cy="2056500"/>
           </a:xfrm>
           <a:prstGeom prst="roundRect">
             <a:avLst>
-              <a:gd name="adj" fmla="val 6792"/>
+              <a:gd name="adj" fmla="val 6000"/>
             </a:avLst>
           </a:prstGeom>
           <a:solidFill>
@@ -6406,14 +6196,14 @@
       </p:sp>
       <p:sp>
         <p:nvSpPr>
-          <p:cNvPr id="57" name="Oval 56"/>
+          <p:cNvPr id="51" name="Oval 50"/>
           <p:cNvSpPr/>
           <p:nvPr/>
         </p:nvSpPr>
         <p:spPr>
           <a:xfrm>
-            <a:off x="13557960" y="18893580"/>
-            <a:ext cx="411300" cy="411300"/>
+            <a:off x="13324889" y="19743600"/>
+            <a:ext cx="438720" cy="438720"/>
           </a:xfrm>
           <a:prstGeom prst="ellipse">
             <a:avLst/>
@@ -6452,21 +6242,21 @@
                 </a:solidFill>
                 <a:latin typeface="Be Vietnam Pro"/>
               </a:rPr>
-              <a:t>4</a:t>
-            </a:r>
-          </a:p>
-        </p:txBody>
-      </p:sp>
-      <p:sp>
-        <p:nvSpPr>
-          <p:cNvPr id="58" name="TextBox 57"/>
+              <a:t>1</a:t>
+            </a:r>
+          </a:p>
+        </p:txBody>
+      </p:sp>
+      <p:sp>
+        <p:nvSpPr>
+          <p:cNvPr id="52" name="TextBox 51"/>
           <p:cNvSpPr txBox="1"/>
           <p:nvPr/>
         </p:nvSpPr>
         <p:spPr>
           <a:xfrm>
-            <a:off x="14092650" y="18959388"/>
-            <a:ext cx="180000" cy="320814"/>
+            <a:off x="13900710" y="19801182"/>
+            <a:ext cx="180000" cy="392106"/>
           </a:xfrm>
           <a:prstGeom prst="rect">
             <a:avLst/>
@@ -6481,27 +6271,27 @@
           <a:p>
             <a:pPr algn="l"/>
             <a:r>
-              <a:rPr sz="1943" b="1" i="0">
+              <a:rPr sz="2374" b="1" i="0">
                 <a:solidFill>
                   <a:srgbClr val="1C2321"/>
                 </a:solidFill>
                 <a:latin typeface="Be Vietnam Pro"/>
               </a:rPr>
-              <a:t>Ưu tiên hai tầng</a:t>
-            </a:r>
-          </a:p>
-        </p:txBody>
-      </p:sp>
-      <p:sp>
-        <p:nvSpPr>
-          <p:cNvPr id="59" name="TextBox 58"/>
+              <a:t>Xếp ưu tiên</a:t>
+            </a:r>
+          </a:p>
+        </p:txBody>
+      </p:sp>
+      <p:sp>
+        <p:nvSpPr>
+          <p:cNvPr id="53" name="TextBox 52"/>
           <p:cNvSpPr txBox="1"/>
           <p:nvPr/>
         </p:nvSpPr>
         <p:spPr>
           <a:xfrm>
-            <a:off x="13626510" y="19433754"/>
-            <a:ext cx="180000" cy="249522"/>
+            <a:off x="13379730" y="20356437"/>
+            <a:ext cx="180000" cy="302991"/>
           </a:xfrm>
           <a:prstGeom prst="rect">
             <a:avLst/>
@@ -6516,27 +6306,27 @@
           <a:p>
             <a:pPr algn="l"/>
             <a:r>
-              <a:rPr sz="1511" b="0" i="0">
+              <a:rPr sz="1835" b="0" i="0">
                 <a:solidFill>
                   <a:srgbClr val="5B6570"/>
                 </a:solidFill>
                 <a:latin typeface="IBM Plex Sans"/>
               </a:rPr>
-              <a:t>Tầng 1: đã thi → theo điểm</a:t>
-            </a:r>
-          </a:p>
-        </p:txBody>
-      </p:sp>
-      <p:sp>
-        <p:nvSpPr>
-          <p:cNvPr id="60" name="TextBox 59"/>
+              <a:t>Đã thi → theo điểm</a:t>
+            </a:r>
+          </a:p>
+        </p:txBody>
+      </p:sp>
+      <p:sp>
+        <p:nvSpPr>
+          <p:cNvPr id="54" name="TextBox 53"/>
           <p:cNvSpPr txBox="1"/>
           <p:nvPr/>
         </p:nvSpPr>
         <p:spPr>
           <a:xfrm>
-            <a:off x="13626510" y="19735374"/>
-            <a:ext cx="180000" cy="249522"/>
+            <a:off x="13379730" y="20726607"/>
+            <a:ext cx="180000" cy="302991"/>
           </a:xfrm>
           <a:prstGeom prst="rect">
             <a:avLst/>
@@ -6551,31 +6341,548 @@
           <a:p>
             <a:pPr algn="l"/>
             <a:r>
-              <a:rPr sz="1511" b="0" i="0">
+              <a:rPr sz="1835" b="0" i="0">
                 <a:solidFill>
                   <a:srgbClr val="5B6570"/>
                 </a:solidFill>
                 <a:latin typeface="IBM Plex Sans"/>
               </a:rPr>
-              <a:t>Tầng 2: không thi</a:t>
-            </a:r>
-          </a:p>
-        </p:txBody>
-      </p:sp>
-      <p:sp>
-        <p:nvSpPr>
-          <p:cNvPr id="61" name="Rounded Rectangle 60"/>
+              <a:t>Bằng điểm → bốc thăm</a:t>
+            </a:r>
+          </a:p>
+        </p:txBody>
+      </p:sp>
+      <p:sp>
+        <p:nvSpPr>
+          <p:cNvPr id="55" name="TextBox 54"/>
+          <p:cNvSpPr txBox="1"/>
+          <p:nvPr/>
+        </p:nvSpPr>
+        <p:spPr>
+          <a:xfrm>
+            <a:off x="13379730" y="21096777"/>
+            <a:ext cx="180000" cy="302991"/>
+          </a:xfrm>
+          <a:prstGeom prst="rect">
+            <a:avLst/>
+          </a:prstGeom>
+          <a:noFill/>
+        </p:spPr>
+        <p:txBody>
+          <a:bodyPr wrap="none" anchor="t" lIns="0" rIns="0" tIns="0" bIns="0">
+            <a:spAutoFit/>
+          </a:bodyPr>
+          <a:lstStyle/>
+          <a:p>
+            <a:pPr algn="l"/>
+            <a:r>
+              <a:rPr sz="1835" b="0" i="0">
+                <a:solidFill>
+                  <a:srgbClr val="5B6570"/>
+                </a:solidFill>
+                <a:latin typeface="IBM Plex Sans"/>
+              </a:rPr>
+              <a:t>Không thi → bốc thăm</a:t>
+            </a:r>
+          </a:p>
+        </p:txBody>
+      </p:sp>
+      <p:sp>
+        <p:nvSpPr>
+          <p:cNvPr id="56" name="Right Arrow 55"/>
           <p:cNvSpPr/>
           <p:nvPr/>
         </p:nvSpPr>
         <p:spPr>
           <a:xfrm>
-            <a:off x="13407150" y="20737575"/>
-            <a:ext cx="3564600" cy="1816575"/>
+            <a:off x="16423350" y="20456520"/>
+            <a:ext cx="479850" cy="219360"/>
+          </a:xfrm>
+          <a:prstGeom prst="rightArrow">
+            <a:avLst/>
+          </a:prstGeom>
+          <a:solidFill>
+            <a:srgbClr val="5B6570"/>
+          </a:solidFill>
+          <a:ln>
+            <a:noFill/>
+          </a:ln>
+          <a:effectLst/>
+        </p:spPr>
+        <p:style>
+          <a:lnRef idx="1">
+            <a:schemeClr val="accent1"/>
+          </a:lnRef>
+          <a:fillRef idx="3">
+            <a:schemeClr val="accent1"/>
+          </a:fillRef>
+          <a:effectRef idx="2">
+            <a:schemeClr val="accent1"/>
+          </a:effectRef>
+          <a:fontRef idx="minor">
+            <a:schemeClr val="lt1"/>
+          </a:fontRef>
+        </p:style>
+        <p:txBody>
+          <a:bodyPr rtlCol="0" anchor="ctr"/>
+          <a:lstStyle/>
+          <a:p>
+            <a:pPr algn="ctr"/>
+          </a:p>
+        </p:txBody>
+      </p:sp>
+      <p:sp>
+        <p:nvSpPr>
+          <p:cNvPr id="57" name="Rounded Rectangle 56"/>
+          <p:cNvSpPr/>
+          <p:nvPr/>
+        </p:nvSpPr>
+        <p:spPr>
+          <a:xfrm>
+            <a:off x="16903200" y="18372600"/>
+            <a:ext cx="5346900" cy="4387200"/>
           </a:xfrm>
           <a:prstGeom prst="roundRect">
             <a:avLst>
-              <a:gd name="adj" fmla="val 6792"/>
+              <a:gd name="adj" fmla="val 2812"/>
+            </a:avLst>
+          </a:prstGeom>
+          <a:solidFill>
+            <a:srgbClr val="DCE9E0"/>
+          </a:solidFill>
+          <a:ln w="27420">
+            <a:solidFill>
+              <a:srgbClr val="27805A"/>
+            </a:solidFill>
+          </a:ln>
+          <a:effectLst/>
+        </p:spPr>
+        <p:style>
+          <a:lnRef idx="1">
+            <a:schemeClr val="accent1"/>
+          </a:lnRef>
+          <a:fillRef idx="3">
+            <a:schemeClr val="accent1"/>
+          </a:fillRef>
+          <a:effectRef idx="2">
+            <a:schemeClr val="accent1"/>
+          </a:effectRef>
+          <a:fontRef idx="minor">
+            <a:schemeClr val="lt1"/>
+          </a:fontRef>
+        </p:style>
+        <p:txBody>
+          <a:bodyPr rtlCol="0" anchor="ctr"/>
+          <a:lstStyle/>
+          <a:p>
+            <a:pPr algn="ctr"/>
+          </a:p>
+        </p:txBody>
+      </p:sp>
+      <p:sp>
+        <p:nvSpPr>
+          <p:cNvPr id="58" name="Oval 57"/>
+          <p:cNvSpPr/>
+          <p:nvPr/>
+        </p:nvSpPr>
+        <p:spPr>
+          <a:xfrm>
+            <a:off x="17095140" y="18578250"/>
+            <a:ext cx="438720" cy="438720"/>
+          </a:xfrm>
+          <a:prstGeom prst="ellipse">
+            <a:avLst/>
+          </a:prstGeom>
+          <a:solidFill>
+            <a:srgbClr val="B8781A"/>
+          </a:solidFill>
+          <a:ln>
+            <a:noFill/>
+          </a:ln>
+          <a:effectLst/>
+        </p:spPr>
+        <p:style>
+          <a:lnRef idx="1">
+            <a:schemeClr val="accent1"/>
+          </a:lnRef>
+          <a:fillRef idx="3">
+            <a:schemeClr val="accent1"/>
+          </a:fillRef>
+          <a:effectRef idx="2">
+            <a:schemeClr val="accent1"/>
+          </a:effectRef>
+          <a:fontRef idx="minor">
+            <a:schemeClr val="lt1"/>
+          </a:fontRef>
+        </p:style>
+        <p:txBody>
+          <a:bodyPr rtlCol="0" anchor="ctr" wrap="square" lIns="0" rIns="0" tIns="0" bIns="0"/>
+          <a:lstStyle/>
+          <a:p>
+            <a:pPr algn="ctr"/>
+            <a:r>
+              <a:rPr sz="1619" b="1" i="0">
+                <a:solidFill>
+                  <a:srgbClr val="FFFFFF"/>
+                </a:solidFill>
+                <a:latin typeface="Be Vietnam Pro"/>
+              </a:rPr>
+              <a:t>2</a:t>
+            </a:r>
+          </a:p>
+        </p:txBody>
+      </p:sp>
+      <p:sp>
+        <p:nvSpPr>
+          <p:cNvPr id="59" name="TextBox 58"/>
+          <p:cNvSpPr txBox="1"/>
+          <p:nvPr/>
+        </p:nvSpPr>
+        <p:spPr>
+          <a:xfrm>
+            <a:off x="17670960" y="18635832"/>
+            <a:ext cx="180000" cy="392106"/>
+          </a:xfrm>
+          <a:prstGeom prst="rect">
+            <a:avLst/>
+          </a:prstGeom>
+          <a:noFill/>
+        </p:spPr>
+        <p:txBody>
+          <a:bodyPr wrap="none" anchor="t" lIns="0" rIns="0" tIns="0" bIns="0">
+            <a:spAutoFit/>
+          </a:bodyPr>
+          <a:lstStyle/>
+          <a:p>
+            <a:pPr algn="l"/>
+            <a:r>
+              <a:rPr sz="2374" b="1" i="0">
+                <a:solidFill>
+                  <a:srgbClr val="1C2321"/>
+                </a:solidFill>
+                <a:latin typeface="Be Vietnam Pro"/>
+              </a:rPr>
+              <a:t>Xét duyệt nhiều vòng</a:t>
+            </a:r>
+          </a:p>
+        </p:txBody>
+      </p:sp>
+      <p:sp>
+        <p:nvSpPr>
+          <p:cNvPr id="60" name="TextBox 59"/>
+          <p:cNvSpPr txBox="1"/>
+          <p:nvPr/>
+        </p:nvSpPr>
+        <p:spPr>
+          <a:xfrm>
+            <a:off x="17149980" y="19191087"/>
+            <a:ext cx="180000" cy="302991"/>
+          </a:xfrm>
+          <a:prstGeom prst="rect">
+            <a:avLst/>
+          </a:prstGeom>
+          <a:noFill/>
+        </p:spPr>
+        <p:txBody>
+          <a:bodyPr wrap="none" anchor="t" lIns="0" rIns="0" tIns="0" bIns="0">
+            <a:spAutoFit/>
+          </a:bodyPr>
+          <a:lstStyle/>
+          <a:p>
+            <a:pPr algn="l"/>
+            <a:r>
+              <a:rPr sz="1835" b="0" i="0">
+                <a:solidFill>
+                  <a:srgbClr val="5B6570"/>
+                </a:solidFill>
+                <a:latin typeface="IBM Plex Sans"/>
+              </a:rPr>
+              <a:t>Học sinh nộp theo nguyện vọng</a:t>
+            </a:r>
+          </a:p>
+        </p:txBody>
+      </p:sp>
+      <p:sp>
+        <p:nvSpPr>
+          <p:cNvPr id="61" name="TextBox 60"/>
+          <p:cNvSpPr txBox="1"/>
+          <p:nvPr/>
+        </p:nvSpPr>
+        <p:spPr>
+          <a:xfrm>
+            <a:off x="17149980" y="19561257"/>
+            <a:ext cx="180000" cy="302991"/>
+          </a:xfrm>
+          <a:prstGeom prst="rect">
+            <a:avLst/>
+          </a:prstGeom>
+          <a:noFill/>
+        </p:spPr>
+        <p:txBody>
+          <a:bodyPr wrap="none" anchor="t" lIns="0" rIns="0" tIns="0" bIns="0">
+            <a:spAutoFit/>
+          </a:bodyPr>
+          <a:lstStyle/>
+          <a:p>
+            <a:pPr algn="l"/>
+            <a:r>
+              <a:rPr sz="1835" b="0" i="0">
+                <a:solidFill>
+                  <a:srgbClr val="5B6570"/>
+                </a:solidFill>
+                <a:latin typeface="IBM Plex Sans"/>
+              </a:rPr>
+              <a:t>CLB giữ tạm các em ưu tiên cao nhất</a:t>
+            </a:r>
+          </a:p>
+        </p:txBody>
+      </p:sp>
+      <p:sp>
+        <p:nvSpPr>
+          <p:cNvPr id="62" name="TextBox 61"/>
+          <p:cNvSpPr txBox="1"/>
+          <p:nvPr/>
+        </p:nvSpPr>
+        <p:spPr>
+          <a:xfrm>
+            <a:off x="17149980" y="19931427"/>
+            <a:ext cx="180000" cy="302991"/>
+          </a:xfrm>
+          <a:prstGeom prst="rect">
+            <a:avLst/>
+          </a:prstGeom>
+          <a:noFill/>
+        </p:spPr>
+        <p:txBody>
+          <a:bodyPr wrap="none" anchor="t" lIns="0" rIns="0" tIns="0" bIns="0">
+            <a:spAutoFit/>
+          </a:bodyPr>
+          <a:lstStyle/>
+          <a:p>
+            <a:pPr algn="l"/>
+            <a:r>
+              <a:rPr sz="1835" b="0" i="0">
+                <a:solidFill>
+                  <a:srgbClr val="5B6570"/>
+                </a:solidFill>
+                <a:latin typeface="IBM Plex Sans"/>
+              </a:rPr>
+              <a:t>Em bị trả lại nộp nguyện vọng kế tiếp</a:t>
+            </a:r>
+          </a:p>
+        </p:txBody>
+      </p:sp>
+      <p:sp>
+        <p:nvSpPr>
+          <p:cNvPr id="63" name="Rounded Rectangle 62"/>
+          <p:cNvSpPr/>
+          <p:nvPr/>
+        </p:nvSpPr>
+        <p:spPr>
+          <a:xfrm>
+            <a:off x="17149980" y="20771850"/>
+            <a:ext cx="4853340" cy="1713750"/>
+          </a:xfrm>
+          <a:prstGeom prst="roundRect">
+            <a:avLst>
+              <a:gd name="adj" fmla="val 7200"/>
+            </a:avLst>
+          </a:prstGeom>
+          <a:solidFill>
+            <a:srgbClr val="FFFFFF"/>
+          </a:solidFill>
+          <a:ln w="20565">
+            <a:solidFill>
+              <a:srgbClr val="B8781A"/>
+            </a:solidFill>
+          </a:ln>
+          <a:effectLst/>
+        </p:spPr>
+        <p:style>
+          <a:lnRef idx="1">
+            <a:schemeClr val="accent1"/>
+          </a:lnRef>
+          <a:fillRef idx="3">
+            <a:schemeClr val="accent1"/>
+          </a:fillRef>
+          <a:effectRef idx="2">
+            <a:schemeClr val="accent1"/>
+          </a:effectRef>
+          <a:fontRef idx="minor">
+            <a:schemeClr val="lt1"/>
+          </a:fontRef>
+        </p:style>
+        <p:txBody>
+          <a:bodyPr rtlCol="0" anchor="ctr"/>
+          <a:lstStyle/>
+          <a:p>
+            <a:pPr algn="ctr"/>
+          </a:p>
+        </p:txBody>
+      </p:sp>
+      <p:sp>
+        <p:nvSpPr>
+          <p:cNvPr id="64" name="TextBox 63"/>
+          <p:cNvSpPr txBox="1"/>
+          <p:nvPr/>
+        </p:nvSpPr>
+        <p:spPr>
+          <a:xfrm>
+            <a:off x="17396760" y="21035082"/>
+            <a:ext cx="180000" cy="392106"/>
+          </a:xfrm>
+          <a:prstGeom prst="rect">
+            <a:avLst/>
+          </a:prstGeom>
+          <a:noFill/>
+        </p:spPr>
+        <p:txBody>
+          <a:bodyPr wrap="none" anchor="t" lIns="0" rIns="0" tIns="0" bIns="0">
+            <a:spAutoFit/>
+          </a:bodyPr>
+          <a:lstStyle/>
+          <a:p>
+            <a:pPr algn="l"/>
+            <a:r>
+              <a:rPr sz="2374" b="1" i="0">
+                <a:solidFill>
+                  <a:srgbClr val="1C2321"/>
+                </a:solidFill>
+                <a:latin typeface="Be Vietnam Pro"/>
+              </a:rPr>
+              <a:t>Suất dự trữ</a:t>
+            </a:r>
+          </a:p>
+        </p:txBody>
+      </p:sp>
+      <p:sp>
+        <p:nvSpPr>
+          <p:cNvPr id="65" name="TextBox 64"/>
+          <p:cNvSpPr txBox="1"/>
+          <p:nvPr/>
+        </p:nvSpPr>
+        <p:spPr>
+          <a:xfrm>
+            <a:off x="17396760" y="21590337"/>
+            <a:ext cx="180000" cy="302991"/>
+          </a:xfrm>
+          <a:prstGeom prst="rect">
+            <a:avLst/>
+          </a:prstGeom>
+          <a:noFill/>
+        </p:spPr>
+        <p:txBody>
+          <a:bodyPr wrap="none" anchor="t" lIns="0" rIns="0" tIns="0" bIns="0">
+            <a:spAutoFit/>
+          </a:bodyPr>
+          <a:lstStyle/>
+          <a:p>
+            <a:pPr algn="l"/>
+            <a:r>
+              <a:rPr sz="1835" b="0" i="0">
+                <a:solidFill>
+                  <a:srgbClr val="5B6570"/>
+                </a:solidFill>
+                <a:latin typeface="IBM Plex Sans"/>
+              </a:rPr>
+              <a:t>Giữ chỗ cho nhóm ưu tiên</a:t>
+            </a:r>
+          </a:p>
+        </p:txBody>
+      </p:sp>
+      <p:sp>
+        <p:nvSpPr>
+          <p:cNvPr id="66" name="TextBox 65"/>
+          <p:cNvSpPr txBox="1"/>
+          <p:nvPr/>
+        </p:nvSpPr>
+        <p:spPr>
+          <a:xfrm>
+            <a:off x="17396760" y="21960507"/>
+            <a:ext cx="180000" cy="302991"/>
+          </a:xfrm>
+          <a:prstGeom prst="rect">
+            <a:avLst/>
+          </a:prstGeom>
+          <a:noFill/>
+        </p:spPr>
+        <p:txBody>
+          <a:bodyPr wrap="none" anchor="t" lIns="0" rIns="0" tIns="0" bIns="0">
+            <a:spAutoFit/>
+          </a:bodyPr>
+          <a:lstStyle/>
+          <a:p>
+            <a:pPr algn="l"/>
+            <a:r>
+              <a:rPr sz="1835" b="0" i="0">
+                <a:solidFill>
+                  <a:srgbClr val="5B6570"/>
+                </a:solidFill>
+                <a:latin typeface="IBM Plex Sans"/>
+              </a:rPr>
+              <a:t>Không đủ người → trả về xét chung</a:t>
+            </a:r>
+          </a:p>
+        </p:txBody>
+      </p:sp>
+      <p:sp>
+        <p:nvSpPr>
+          <p:cNvPr id="67" name="Right Arrow 66"/>
+          <p:cNvSpPr/>
+          <p:nvPr/>
+        </p:nvSpPr>
+        <p:spPr>
+          <a:xfrm>
+            <a:off x="22250100" y="20456520"/>
+            <a:ext cx="479850" cy="219360"/>
+          </a:xfrm>
+          <a:prstGeom prst="rightArrow">
+            <a:avLst/>
+          </a:prstGeom>
+          <a:solidFill>
+            <a:srgbClr val="5B6570"/>
+          </a:solidFill>
+          <a:ln>
+            <a:noFill/>
+          </a:ln>
+          <a:effectLst/>
+        </p:spPr>
+        <p:style>
+          <a:lnRef idx="1">
+            <a:schemeClr val="accent1"/>
+          </a:lnRef>
+          <a:fillRef idx="3">
+            <a:schemeClr val="accent1"/>
+          </a:fillRef>
+          <a:effectRef idx="2">
+            <a:schemeClr val="accent1"/>
+          </a:effectRef>
+          <a:fontRef idx="minor">
+            <a:schemeClr val="lt1"/>
+          </a:fontRef>
+        </p:style>
+        <p:txBody>
+          <a:bodyPr rtlCol="0" anchor="ctr"/>
+          <a:lstStyle/>
+          <a:p>
+            <a:pPr algn="ctr"/>
+          </a:p>
+        </p:txBody>
+      </p:sp>
+      <p:sp>
+        <p:nvSpPr>
+          <p:cNvPr id="68" name="Rounded Rectangle 67"/>
+          <p:cNvSpPr/>
+          <p:nvPr/>
+        </p:nvSpPr>
+        <p:spPr>
+          <a:xfrm>
+            <a:off x="22729950" y="18921000"/>
+            <a:ext cx="3290400" cy="1371000"/>
+          </a:xfrm>
+          <a:prstGeom prst="roundRect">
+            <a:avLst>
+              <a:gd name="adj" fmla="val 9000"/>
             </a:avLst>
           </a:prstGeom>
           <a:solidFill>
@@ -6612,14 +6919,14 @@
       </p:sp>
       <p:sp>
         <p:nvSpPr>
-          <p:cNvPr id="62" name="Oval 61"/>
+          <p:cNvPr id="69" name="Oval 68"/>
           <p:cNvSpPr/>
           <p:nvPr/>
         </p:nvSpPr>
         <p:spPr>
           <a:xfrm>
-            <a:off x="13557960" y="20915805"/>
-            <a:ext cx="411300" cy="411300"/>
+            <a:off x="22921890" y="19126650"/>
+            <a:ext cx="438720" cy="438720"/>
           </a:xfrm>
           <a:prstGeom prst="ellipse">
             <a:avLst/>
@@ -6665,14 +6972,14 @@
       </p:sp>
       <p:sp>
         <p:nvSpPr>
-          <p:cNvPr id="63" name="TextBox 62"/>
+          <p:cNvPr id="70" name="TextBox 69"/>
           <p:cNvSpPr txBox="1"/>
           <p:nvPr/>
         </p:nvSpPr>
         <p:spPr>
           <a:xfrm>
-            <a:off x="14092650" y="20981613"/>
-            <a:ext cx="180000" cy="320814"/>
+            <a:off x="23497710" y="19184232"/>
+            <a:ext cx="180000" cy="392106"/>
           </a:xfrm>
           <a:prstGeom prst="rect">
             <a:avLst/>
@@ -6687,27 +6994,27 @@
           <a:p>
             <a:pPr algn="l"/>
             <a:r>
-              <a:rPr sz="1943" b="1" i="0">
+              <a:rPr sz="2374" b="1" i="0">
                 <a:solidFill>
                   <a:srgbClr val="1C2321"/>
                 </a:solidFill>
                 <a:latin typeface="Be Vietnam Pro"/>
               </a:rPr>
-              <a:t>Bốc thăm dùng chung</a:t>
-            </a:r>
-          </a:p>
-        </p:txBody>
-      </p:sp>
-      <p:sp>
-        <p:nvSpPr>
-          <p:cNvPr id="64" name="TextBox 63"/>
+              <a:t>Kiểm tra</a:t>
+            </a:r>
+          </a:p>
+        </p:txBody>
+      </p:sp>
+      <p:sp>
+        <p:nvSpPr>
+          <p:cNvPr id="71" name="TextBox 70"/>
           <p:cNvSpPr txBox="1"/>
           <p:nvPr/>
         </p:nvSpPr>
         <p:spPr>
           <a:xfrm>
-            <a:off x="13626510" y="21455979"/>
-            <a:ext cx="180000" cy="249522"/>
+            <a:off x="22976730" y="19739487"/>
+            <a:ext cx="180000" cy="302991"/>
           </a:xfrm>
           <a:prstGeom prst="rect">
             <a:avLst/>
@@ -6722,64 +7029,29 @@
           <a:p>
             <a:pPr algn="l"/>
             <a:r>
-              <a:rPr sz="1511" b="0" i="0">
+              <a:rPr sz="1835" b="0" i="0">
                 <a:solidFill>
                   <a:srgbClr val="5B6570"/>
                 </a:solidFill>
                 <a:latin typeface="IBM Plex Sans"/>
               </a:rPr>
-              <a:t>Một số cho mỗi em, mọi CLB</a:t>
-            </a:r>
-          </a:p>
-        </p:txBody>
-      </p:sp>
-      <p:sp>
-        <p:nvSpPr>
-          <p:cNvPr id="65" name="TextBox 64"/>
-          <p:cNvSpPr txBox="1"/>
-          <p:nvPr/>
-        </p:nvSpPr>
-        <p:spPr>
-          <a:xfrm>
-            <a:off x="13626510" y="21757599"/>
-            <a:ext cx="180000" cy="249522"/>
-          </a:xfrm>
-          <a:prstGeom prst="rect">
-            <a:avLst/>
-          </a:prstGeom>
-          <a:noFill/>
-        </p:spPr>
-        <p:txBody>
-          <a:bodyPr wrap="none" anchor="t" lIns="0" rIns="0" tIns="0" bIns="0">
-            <a:spAutoFit/>
-          </a:bodyPr>
-          <a:lstStyle/>
-          <a:p>
-            <a:pPr algn="l"/>
-            <a:r>
-              <a:rPr sz="1511" b="0" i="0">
-                <a:solidFill>
-                  <a:srgbClr val="5B6570"/>
-                </a:solidFill>
-                <a:latin typeface="IBM Plex Sans"/>
-              </a:rPr>
-              <a:t>Chỉ phá hoà · khoá theo seed</a:t>
-            </a:r>
-          </a:p>
-        </p:txBody>
-      </p:sp>
-      <p:sp>
-        <p:nvSpPr>
-          <p:cNvPr id="66" name="Right Arrow 65"/>
+              <a:t>Không còn cặp phá vỡ</a:t>
+            </a:r>
+          </a:p>
+        </p:txBody>
+      </p:sp>
+      <p:sp>
+        <p:nvSpPr>
+          <p:cNvPr id="72" name="Down Arrow 71"/>
           <p:cNvSpPr/>
           <p:nvPr/>
         </p:nvSpPr>
         <p:spPr>
           <a:xfrm>
-            <a:off x="16971750" y="20525070"/>
-            <a:ext cx="616950" cy="219360"/>
-          </a:xfrm>
-          <a:prstGeom prst="rightArrow">
+            <a:off x="24265470" y="20292000"/>
+            <a:ext cx="219360" cy="479850"/>
+          </a:xfrm>
+          <a:prstGeom prst="downArrow">
             <a:avLst/>
           </a:prstGeom>
           <a:solidFill>
@@ -6814,829 +7086,18 @@
       </p:sp>
       <p:sp>
         <p:nvSpPr>
-          <p:cNvPr id="67" name="Rounded Rectangle 66"/>
+          <p:cNvPr id="73" name="Rounded Rectangle 72"/>
           <p:cNvSpPr/>
           <p:nvPr/>
         </p:nvSpPr>
         <p:spPr>
           <a:xfrm>
-            <a:off x="17588700" y="18441150"/>
-            <a:ext cx="4387200" cy="4387200"/>
+            <a:off x="22729950" y="20771850"/>
+            <a:ext cx="3290400" cy="1713750"/>
           </a:xfrm>
           <a:prstGeom prst="roundRect">
             <a:avLst>
-              <a:gd name="adj" fmla="val 2812"/>
-            </a:avLst>
-          </a:prstGeom>
-          <a:solidFill>
-            <a:srgbClr val="DCE9E0"/>
-          </a:solidFill>
-          <a:ln w="27420">
-            <a:solidFill>
-              <a:srgbClr val="27805A"/>
-            </a:solidFill>
-          </a:ln>
-          <a:effectLst/>
-        </p:spPr>
-        <p:style>
-          <a:lnRef idx="1">
-            <a:schemeClr val="accent1"/>
-          </a:lnRef>
-          <a:fillRef idx="3">
-            <a:schemeClr val="accent1"/>
-          </a:fillRef>
-          <a:effectRef idx="2">
-            <a:schemeClr val="accent1"/>
-          </a:effectRef>
-          <a:fontRef idx="minor">
-            <a:schemeClr val="lt1"/>
-          </a:fontRef>
-        </p:style>
-        <p:txBody>
-          <a:bodyPr rtlCol="0" anchor="ctr"/>
-          <a:lstStyle/>
-          <a:p>
-            <a:pPr algn="ctr"/>
-          </a:p>
-        </p:txBody>
-      </p:sp>
-      <p:sp>
-        <p:nvSpPr>
-          <p:cNvPr id="68" name="Oval 67"/>
-          <p:cNvSpPr/>
-          <p:nvPr/>
-        </p:nvSpPr>
-        <p:spPr>
-          <a:xfrm>
-            <a:off x="17739510" y="18619380"/>
-            <a:ext cx="411300" cy="411300"/>
-          </a:xfrm>
-          <a:prstGeom prst="ellipse">
-            <a:avLst/>
-          </a:prstGeom>
-          <a:solidFill>
-            <a:srgbClr val="B8781A"/>
-          </a:solidFill>
-          <a:ln>
-            <a:noFill/>
-          </a:ln>
-          <a:effectLst/>
-        </p:spPr>
-        <p:style>
-          <a:lnRef idx="1">
-            <a:schemeClr val="accent1"/>
-          </a:lnRef>
-          <a:fillRef idx="3">
-            <a:schemeClr val="accent1"/>
-          </a:fillRef>
-          <a:effectRef idx="2">
-            <a:schemeClr val="accent1"/>
-          </a:effectRef>
-          <a:fontRef idx="minor">
-            <a:schemeClr val="lt1"/>
-          </a:fontRef>
-        </p:style>
-        <p:txBody>
-          <a:bodyPr rtlCol="0" anchor="ctr" wrap="square" lIns="0" rIns="0" tIns="0" bIns="0"/>
-          <a:lstStyle/>
-          <a:p>
-            <a:pPr algn="ctr"/>
-            <a:r>
-              <a:rPr sz="1619" b="1" i="0">
-                <a:solidFill>
-                  <a:srgbClr val="FFFFFF"/>
-                </a:solidFill>
-                <a:latin typeface="Be Vietnam Pro"/>
-              </a:rPr>
-              <a:t>1</a:t>
-            </a:r>
-          </a:p>
-        </p:txBody>
-      </p:sp>
-      <p:sp>
-        <p:nvSpPr>
-          <p:cNvPr id="69" name="TextBox 68"/>
-          <p:cNvSpPr txBox="1"/>
-          <p:nvPr/>
-        </p:nvSpPr>
-        <p:spPr>
-          <a:xfrm>
-            <a:off x="18274200" y="18672849"/>
-            <a:ext cx="180000" cy="338637"/>
-          </a:xfrm>
-          <a:prstGeom prst="rect">
-            <a:avLst/>
-          </a:prstGeom>
-          <a:noFill/>
-        </p:spPr>
-        <p:txBody>
-          <a:bodyPr wrap="none" anchor="t" lIns="0" rIns="0" tIns="0" bIns="0">
-            <a:spAutoFit/>
-          </a:bodyPr>
-          <a:lstStyle/>
-          <a:p>
-            <a:pPr algn="l"/>
-            <a:r>
-              <a:rPr sz="2051" b="1" i="0">
-                <a:solidFill>
-                  <a:srgbClr val="1C2321"/>
-                </a:solidFill>
-                <a:latin typeface="Be Vietnam Pro"/>
-              </a:rPr>
-              <a:t>Deferred Acceptance</a:t>
-            </a:r>
-          </a:p>
-        </p:txBody>
-      </p:sp>
-      <p:sp>
-        <p:nvSpPr>
-          <p:cNvPr id="70" name="TextBox 69"/>
-          <p:cNvSpPr txBox="1"/>
-          <p:nvPr/>
-        </p:nvSpPr>
-        <p:spPr>
-          <a:xfrm>
-            <a:off x="17808060" y="19132134"/>
-            <a:ext cx="180000" cy="249522"/>
-          </a:xfrm>
-          <a:prstGeom prst="rect">
-            <a:avLst/>
-          </a:prstGeom>
-          <a:noFill/>
-        </p:spPr>
-        <p:txBody>
-          <a:bodyPr wrap="none" anchor="t" lIns="0" rIns="0" tIns="0" bIns="0">
-            <a:spAutoFit/>
-          </a:bodyPr>
-          <a:lstStyle/>
-          <a:p>
-            <a:pPr algn="l"/>
-            <a:r>
-              <a:rPr sz="1511" b="0" i="0">
-                <a:solidFill>
-                  <a:srgbClr val="5B6570"/>
-                </a:solidFill>
-                <a:latin typeface="IBM Plex Sans"/>
-              </a:rPr>
-              <a:t>Học sinh đề xuất theo nguyện vọng</a:t>
-            </a:r>
-          </a:p>
-        </p:txBody>
-      </p:sp>
-      <p:sp>
-        <p:nvSpPr>
-          <p:cNvPr id="71" name="TextBox 70"/>
-          <p:cNvSpPr txBox="1"/>
-          <p:nvPr/>
-        </p:nvSpPr>
-        <p:spPr>
-          <a:xfrm>
-            <a:off x="17808060" y="19433754"/>
-            <a:ext cx="180000" cy="249522"/>
-          </a:xfrm>
-          <a:prstGeom prst="rect">
-            <a:avLst/>
-          </a:prstGeom>
-          <a:noFill/>
-        </p:spPr>
-        <p:txBody>
-          <a:bodyPr wrap="none" anchor="t" lIns="0" rIns="0" tIns="0" bIns="0">
-            <a:spAutoFit/>
-          </a:bodyPr>
-          <a:lstStyle/>
-          <a:p>
-            <a:pPr algn="l"/>
-            <a:r>
-              <a:rPr sz="1511" b="0" i="0">
-                <a:solidFill>
-                  <a:srgbClr val="5B6570"/>
-                </a:solidFill>
-                <a:latin typeface="IBM Plex Sans"/>
-              </a:rPr>
-              <a:t>CLB giữ tạm, từ chối phần còn lại</a:t>
-            </a:r>
-          </a:p>
-        </p:txBody>
-      </p:sp>
-      <p:sp>
-        <p:nvSpPr>
-          <p:cNvPr id="72" name="TextBox 71"/>
-          <p:cNvSpPr txBox="1"/>
-          <p:nvPr/>
-        </p:nvSpPr>
-        <p:spPr>
-          <a:xfrm>
-            <a:off x="17808060" y="19735374"/>
-            <a:ext cx="180000" cy="249522"/>
-          </a:xfrm>
-          <a:prstGeom prst="rect">
-            <a:avLst/>
-          </a:prstGeom>
-          <a:noFill/>
-        </p:spPr>
-        <p:txBody>
-          <a:bodyPr wrap="none" anchor="t" lIns="0" rIns="0" tIns="0" bIns="0">
-            <a:spAutoFit/>
-          </a:bodyPr>
-          <a:lstStyle/>
-          <a:p>
-            <a:pPr algn="l"/>
-            <a:r>
-              <a:rPr sz="1511" b="0" i="0">
-                <a:solidFill>
-                  <a:srgbClr val="5B6570"/>
-                </a:solidFill>
-                <a:latin typeface="IBM Plex Sans"/>
-              </a:rPr>
-              <a:t>Lặp tới khi không còn đề xuất</a:t>
-            </a:r>
-          </a:p>
-        </p:txBody>
-      </p:sp>
-      <p:sp>
-        <p:nvSpPr>
-          <p:cNvPr id="73" name="Rounded Rectangle 72"/>
-          <p:cNvSpPr/>
-          <p:nvPr/>
-        </p:nvSpPr>
-        <p:spPr>
-          <a:xfrm>
-            <a:off x="17862900" y="20292000"/>
-            <a:ext cx="3838800" cy="2262150"/>
-          </a:xfrm>
-          <a:prstGeom prst="roundRect">
-            <a:avLst>
-              <a:gd name="adj" fmla="val 5454"/>
-            </a:avLst>
-          </a:prstGeom>
-          <a:solidFill>
-            <a:srgbClr val="FFFFFF"/>
-          </a:solidFill>
-          <a:ln w="20565">
-            <a:solidFill>
-              <a:srgbClr val="B8781A"/>
-            </a:solidFill>
-          </a:ln>
-          <a:effectLst/>
-        </p:spPr>
-        <p:style>
-          <a:lnRef idx="1">
-            <a:schemeClr val="accent1"/>
-          </a:lnRef>
-          <a:fillRef idx="3">
-            <a:schemeClr val="accent1"/>
-          </a:fillRef>
-          <a:effectRef idx="2">
-            <a:schemeClr val="accent1"/>
-          </a:effectRef>
-          <a:fontRef idx="minor">
-            <a:schemeClr val="lt1"/>
-          </a:fontRef>
-        </p:style>
-        <p:txBody>
-          <a:bodyPr rtlCol="0" anchor="ctr"/>
-          <a:lstStyle/>
-          <a:p>
-            <a:pPr algn="ctr"/>
-          </a:p>
-        </p:txBody>
-      </p:sp>
-      <p:sp>
-        <p:nvSpPr>
-          <p:cNvPr id="74" name="Oval 73"/>
-          <p:cNvSpPr/>
-          <p:nvPr/>
-        </p:nvSpPr>
-        <p:spPr>
-          <a:xfrm>
-            <a:off x="18013710" y="20470230"/>
-            <a:ext cx="411300" cy="411300"/>
-          </a:xfrm>
-          <a:prstGeom prst="ellipse">
-            <a:avLst/>
-          </a:prstGeom>
-          <a:solidFill>
-            <a:srgbClr val="B8781A"/>
-          </a:solidFill>
-          <a:ln>
-            <a:noFill/>
-          </a:ln>
-          <a:effectLst/>
-        </p:spPr>
-        <p:style>
-          <a:lnRef idx="1">
-            <a:schemeClr val="accent1"/>
-          </a:lnRef>
-          <a:fillRef idx="3">
-            <a:schemeClr val="accent1"/>
-          </a:fillRef>
-          <a:effectRef idx="2">
-            <a:schemeClr val="accent1"/>
-          </a:effectRef>
-          <a:fontRef idx="minor">
-            <a:schemeClr val="lt1"/>
-          </a:fontRef>
-        </p:style>
-        <p:txBody>
-          <a:bodyPr rtlCol="0" anchor="ctr" wrap="square" lIns="0" rIns="0" tIns="0" bIns="0"/>
-          <a:lstStyle/>
-          <a:p>
-            <a:pPr algn="ctr"/>
-            <a:r>
-              <a:rPr sz="1619" b="1" i="0">
-                <a:solidFill>
-                  <a:srgbClr val="FFFFFF"/>
-                </a:solidFill>
-                <a:latin typeface="Be Vietnam Pro"/>
-              </a:rPr>
-              <a:t>2</a:t>
-            </a:r>
-          </a:p>
-        </p:txBody>
-      </p:sp>
-      <p:sp>
-        <p:nvSpPr>
-          <p:cNvPr id="75" name="TextBox 74"/>
-          <p:cNvSpPr txBox="1"/>
-          <p:nvPr/>
-        </p:nvSpPr>
-        <p:spPr>
-          <a:xfrm>
-            <a:off x="18548400" y="20536038"/>
-            <a:ext cx="180000" cy="320814"/>
-          </a:xfrm>
-          <a:prstGeom prst="rect">
-            <a:avLst/>
-          </a:prstGeom>
-          <a:noFill/>
-        </p:spPr>
-        <p:txBody>
-          <a:bodyPr wrap="none" anchor="t" lIns="0" rIns="0" tIns="0" bIns="0">
-            <a:spAutoFit/>
-          </a:bodyPr>
-          <a:lstStyle/>
-          <a:p>
-            <a:pPr algn="l"/>
-            <a:r>
-              <a:rPr sz="1943" b="1" i="0">
-                <a:solidFill>
-                  <a:srgbClr val="1C2321"/>
-                </a:solidFill>
-                <a:latin typeface="Be Vietnam Pro"/>
-              </a:rPr>
-              <a:t>Dự trữ mềm, hai lượt</a:t>
-            </a:r>
-          </a:p>
-        </p:txBody>
-      </p:sp>
-      <p:sp>
-        <p:nvSpPr>
-          <p:cNvPr id="76" name="TextBox 75"/>
-          <p:cNvSpPr txBox="1"/>
-          <p:nvPr/>
-        </p:nvSpPr>
-        <p:spPr>
-          <a:xfrm>
-            <a:off x="18082260" y="21010404"/>
-            <a:ext cx="180000" cy="249522"/>
-          </a:xfrm>
-          <a:prstGeom prst="rect">
-            <a:avLst/>
-          </a:prstGeom>
-          <a:noFill/>
-        </p:spPr>
-        <p:txBody>
-          <a:bodyPr wrap="none" anchor="t" lIns="0" rIns="0" tIns="0" bIns="0">
-            <a:spAutoFit/>
-          </a:bodyPr>
-          <a:lstStyle/>
-          <a:p>
-            <a:pPr algn="l"/>
-            <a:r>
-              <a:rPr sz="1511" b="0" i="0">
-                <a:solidFill>
-                  <a:srgbClr val="5B6570"/>
-                </a:solidFill>
-                <a:latin typeface="IBM Plex Sans"/>
-              </a:rPr>
-              <a:t>Lượt 1: suất dự trữ</a:t>
-            </a:r>
-          </a:p>
-        </p:txBody>
-      </p:sp>
-      <p:sp>
-        <p:nvSpPr>
-          <p:cNvPr id="77" name="TextBox 76"/>
-          <p:cNvSpPr txBox="1"/>
-          <p:nvPr/>
-        </p:nvSpPr>
-        <p:spPr>
-          <a:xfrm>
-            <a:off x="18082260" y="21312024"/>
-            <a:ext cx="180000" cy="249522"/>
-          </a:xfrm>
-          <a:prstGeom prst="rect">
-            <a:avLst/>
-          </a:prstGeom>
-          <a:noFill/>
-        </p:spPr>
-        <p:txBody>
-          <a:bodyPr wrap="none" anchor="t" lIns="0" rIns="0" tIns="0" bIns="0">
-            <a:spAutoFit/>
-          </a:bodyPr>
-          <a:lstStyle/>
-          <a:p>
-            <a:pPr algn="l"/>
-            <a:r>
-              <a:rPr sz="1511" b="0" i="0">
-                <a:solidFill>
-                  <a:srgbClr val="5B6570"/>
-                </a:solidFill>
-                <a:latin typeface="IBM Plex Sans"/>
-              </a:rPr>
-              <a:t>  → chỉ em thuộc diện</a:t>
-            </a:r>
-          </a:p>
-        </p:txBody>
-      </p:sp>
-      <p:sp>
-        <p:nvSpPr>
-          <p:cNvPr id="78" name="TextBox 77"/>
-          <p:cNvSpPr txBox="1"/>
-          <p:nvPr/>
-        </p:nvSpPr>
-        <p:spPr>
-          <a:xfrm>
-            <a:off x="18082260" y="21613644"/>
-            <a:ext cx="180000" cy="249522"/>
-          </a:xfrm>
-          <a:prstGeom prst="rect">
-            <a:avLst/>
-          </a:prstGeom>
-          <a:noFill/>
-        </p:spPr>
-        <p:txBody>
-          <a:bodyPr wrap="none" anchor="t" lIns="0" rIns="0" tIns="0" bIns="0">
-            <a:spAutoFit/>
-          </a:bodyPr>
-          <a:lstStyle/>
-          <a:p>
-            <a:pPr algn="l"/>
-            <a:r>
-              <a:rPr sz="1511" b="0" i="0">
-                <a:solidFill>
-                  <a:srgbClr val="5B6570"/>
-                </a:solidFill>
-                <a:latin typeface="IBM Plex Sans"/>
-              </a:rPr>
-              <a:t>Lượt 2: lượt chung</a:t>
-            </a:r>
-          </a:p>
-        </p:txBody>
-      </p:sp>
-      <p:sp>
-        <p:nvSpPr>
-          <p:cNvPr id="79" name="TextBox 78"/>
-          <p:cNvSpPr txBox="1"/>
-          <p:nvPr/>
-        </p:nvSpPr>
-        <p:spPr>
-          <a:xfrm>
-            <a:off x="18082260" y="21915264"/>
-            <a:ext cx="180000" cy="249522"/>
-          </a:xfrm>
-          <a:prstGeom prst="rect">
-            <a:avLst/>
-          </a:prstGeom>
-          <a:noFill/>
-        </p:spPr>
-        <p:txBody>
-          <a:bodyPr wrap="none" anchor="t" lIns="0" rIns="0" tIns="0" bIns="0">
-            <a:spAutoFit/>
-          </a:bodyPr>
-          <a:lstStyle/>
-          <a:p>
-            <a:pPr algn="l"/>
-            <a:r>
-              <a:rPr sz="1511" b="0" i="0">
-                <a:solidFill>
-                  <a:srgbClr val="5B6570"/>
-                </a:solidFill>
-                <a:latin typeface="IBM Plex Sans"/>
-              </a:rPr>
-              <a:t>  → suất thừa tự chuyển sang</a:t>
-            </a:r>
-          </a:p>
-        </p:txBody>
-      </p:sp>
-      <p:sp>
-        <p:nvSpPr>
-          <p:cNvPr id="80" name="Right Arrow 79"/>
-          <p:cNvSpPr/>
-          <p:nvPr/>
-        </p:nvSpPr>
-        <p:spPr>
-          <a:xfrm>
-            <a:off x="21975900" y="20525070"/>
-            <a:ext cx="616950" cy="219360"/>
-          </a:xfrm>
-          <a:prstGeom prst="rightArrow">
-            <a:avLst/>
-          </a:prstGeom>
-          <a:solidFill>
-            <a:srgbClr val="5B6570"/>
-          </a:solidFill>
-          <a:ln>
-            <a:noFill/>
-          </a:ln>
-          <a:effectLst/>
-        </p:spPr>
-        <p:style>
-          <a:lnRef idx="1">
-            <a:schemeClr val="accent1"/>
-          </a:lnRef>
-          <a:fillRef idx="3">
-            <a:schemeClr val="accent1"/>
-          </a:fillRef>
-          <a:effectRef idx="2">
-            <a:schemeClr val="accent1"/>
-          </a:effectRef>
-          <a:fontRef idx="minor">
-            <a:schemeClr val="lt1"/>
-          </a:fontRef>
-        </p:style>
-        <p:txBody>
-          <a:bodyPr rtlCol="0" anchor="ctr"/>
-          <a:lstStyle/>
-          <a:p>
-            <a:pPr algn="ctr"/>
-          </a:p>
-        </p:txBody>
-      </p:sp>
-      <p:sp>
-        <p:nvSpPr>
-          <p:cNvPr id="81" name="Rounded Rectangle 80"/>
-          <p:cNvSpPr/>
-          <p:nvPr/>
-        </p:nvSpPr>
-        <p:spPr>
-          <a:xfrm>
-            <a:off x="22592850" y="18715350"/>
-            <a:ext cx="3358950" cy="1816575"/>
-          </a:xfrm>
-          <a:prstGeom prst="roundRect">
-            <a:avLst>
-              <a:gd name="adj" fmla="val 6792"/>
-            </a:avLst>
-          </a:prstGeom>
-          <a:solidFill>
-            <a:srgbClr val="FFFFFF"/>
-          </a:solidFill>
-          <a:ln w="20565">
-            <a:solidFill>
-              <a:srgbClr val="27805A"/>
-            </a:solidFill>
-          </a:ln>
-          <a:effectLst/>
-        </p:spPr>
-        <p:style>
-          <a:lnRef idx="1">
-            <a:schemeClr val="accent1"/>
-          </a:lnRef>
-          <a:fillRef idx="3">
-            <a:schemeClr val="accent1"/>
-          </a:fillRef>
-          <a:effectRef idx="2">
-            <a:schemeClr val="accent1"/>
-          </a:effectRef>
-          <a:fontRef idx="minor">
-            <a:schemeClr val="lt1"/>
-          </a:fontRef>
-        </p:style>
-        <p:txBody>
-          <a:bodyPr rtlCol="0" anchor="ctr"/>
-          <a:lstStyle/>
-          <a:p>
-            <a:pPr algn="ctr"/>
-          </a:p>
-        </p:txBody>
-      </p:sp>
-      <p:sp>
-        <p:nvSpPr>
-          <p:cNvPr id="82" name="Oval 81"/>
-          <p:cNvSpPr/>
-          <p:nvPr/>
-        </p:nvSpPr>
-        <p:spPr>
-          <a:xfrm>
-            <a:off x="22743660" y="18893580"/>
-            <a:ext cx="411300" cy="411300"/>
-          </a:xfrm>
-          <a:prstGeom prst="ellipse">
-            <a:avLst/>
-          </a:prstGeom>
-          <a:solidFill>
-            <a:srgbClr val="B8781A"/>
-          </a:solidFill>
-          <a:ln>
-            <a:noFill/>
-          </a:ln>
-          <a:effectLst/>
-        </p:spPr>
-        <p:style>
-          <a:lnRef idx="1">
-            <a:schemeClr val="accent1"/>
-          </a:lnRef>
-          <a:fillRef idx="3">
-            <a:schemeClr val="accent1"/>
-          </a:fillRef>
-          <a:effectRef idx="2">
-            <a:schemeClr val="accent1"/>
-          </a:effectRef>
-          <a:fontRef idx="minor">
-            <a:schemeClr val="lt1"/>
-          </a:fontRef>
-        </p:style>
-        <p:txBody>
-          <a:bodyPr rtlCol="0" anchor="ctr" wrap="square" lIns="0" rIns="0" tIns="0" bIns="0"/>
-          <a:lstStyle/>
-          <a:p>
-            <a:pPr algn="ctr"/>
-            <a:r>
-              <a:rPr sz="1619" b="1" i="0">
-                <a:solidFill>
-                  <a:srgbClr val="FFFFFF"/>
-                </a:solidFill>
-                <a:latin typeface="Be Vietnam Pro"/>
-              </a:rPr>
-              <a:t>5</a:t>
-            </a:r>
-          </a:p>
-        </p:txBody>
-      </p:sp>
-      <p:sp>
-        <p:nvSpPr>
-          <p:cNvPr id="83" name="TextBox 82"/>
-          <p:cNvSpPr txBox="1"/>
-          <p:nvPr/>
-        </p:nvSpPr>
-        <p:spPr>
-          <a:xfrm>
-            <a:off x="23278349" y="18959388"/>
-            <a:ext cx="180000" cy="320814"/>
-          </a:xfrm>
-          <a:prstGeom prst="rect">
-            <a:avLst/>
-          </a:prstGeom>
-          <a:noFill/>
-        </p:spPr>
-        <p:txBody>
-          <a:bodyPr wrap="none" anchor="t" lIns="0" rIns="0" tIns="0" bIns="0">
-            <a:spAutoFit/>
-          </a:bodyPr>
-          <a:lstStyle/>
-          <a:p>
-            <a:pPr algn="l"/>
-            <a:r>
-              <a:rPr sz="1943" b="1" i="0">
-                <a:solidFill>
-                  <a:srgbClr val="1C2321"/>
-                </a:solidFill>
-                <a:latin typeface="Be Vietnam Pro"/>
-              </a:rPr>
-              <a:t>Kiểm tra ổn định</a:t>
-            </a:r>
-          </a:p>
-        </p:txBody>
-      </p:sp>
-      <p:sp>
-        <p:nvSpPr>
-          <p:cNvPr id="84" name="TextBox 83"/>
-          <p:cNvSpPr txBox="1"/>
-          <p:nvPr/>
-        </p:nvSpPr>
-        <p:spPr>
-          <a:xfrm>
-            <a:off x="22812210" y="19433754"/>
-            <a:ext cx="180000" cy="249522"/>
-          </a:xfrm>
-          <a:prstGeom prst="rect">
-            <a:avLst/>
-          </a:prstGeom>
-          <a:noFill/>
-        </p:spPr>
-        <p:txBody>
-          <a:bodyPr wrap="none" anchor="t" lIns="0" rIns="0" tIns="0" bIns="0">
-            <a:spAutoFit/>
-          </a:bodyPr>
-          <a:lstStyle/>
-          <a:p>
-            <a:pPr algn="l"/>
-            <a:r>
-              <a:rPr sz="1511" b="0" i="0">
-                <a:solidFill>
-                  <a:srgbClr val="5B6570"/>
-                </a:solidFill>
-                <a:latin typeface="IBM Plex Sans"/>
-              </a:rPr>
-              <a:t>Tìm cặp phá vỡ bằng</a:t>
-            </a:r>
-          </a:p>
-        </p:txBody>
-      </p:sp>
-      <p:sp>
-        <p:nvSpPr>
-          <p:cNvPr id="85" name="TextBox 84"/>
-          <p:cNvSpPr txBox="1"/>
-          <p:nvPr/>
-        </p:nvSpPr>
-        <p:spPr>
-          <a:xfrm>
-            <a:off x="22812210" y="19735374"/>
-            <a:ext cx="180000" cy="249522"/>
-          </a:xfrm>
-          <a:prstGeom prst="rect">
-            <a:avLst/>
-          </a:prstGeom>
-          <a:noFill/>
-        </p:spPr>
-        <p:txBody>
-          <a:bodyPr wrap="none" anchor="t" lIns="0" rIns="0" tIns="0" bIns="0">
-            <a:spAutoFit/>
-          </a:bodyPr>
-          <a:lstStyle/>
-          <a:p>
-            <a:pPr algn="l"/>
-            <a:r>
-              <a:rPr sz="1511" b="0" i="0">
-                <a:solidFill>
-                  <a:srgbClr val="5B6570"/>
-                </a:solidFill>
-                <a:latin typeface="IBM Plex Sans"/>
-              </a:rPr>
-              <a:t>chính hàm lựa chọn</a:t>
-            </a:r>
-          </a:p>
-        </p:txBody>
-      </p:sp>
-      <p:sp>
-        <p:nvSpPr>
-          <p:cNvPr id="86" name="Down Arrow 85"/>
-          <p:cNvSpPr/>
-          <p:nvPr/>
-        </p:nvSpPr>
-        <p:spPr>
-          <a:xfrm>
-            <a:off x="24162645" y="20531925"/>
-            <a:ext cx="219360" cy="205650"/>
-          </a:xfrm>
-          <a:prstGeom prst="downArrow">
-            <a:avLst/>
-          </a:prstGeom>
-          <a:solidFill>
-            <a:srgbClr val="5B6570"/>
-          </a:solidFill>
-          <a:ln>
-            <a:noFill/>
-          </a:ln>
-          <a:effectLst/>
-        </p:spPr>
-        <p:style>
-          <a:lnRef idx="1">
-            <a:schemeClr val="accent1"/>
-          </a:lnRef>
-          <a:fillRef idx="3">
-            <a:schemeClr val="accent1"/>
-          </a:fillRef>
-          <a:effectRef idx="2">
-            <a:schemeClr val="accent1"/>
-          </a:effectRef>
-          <a:fontRef idx="minor">
-            <a:schemeClr val="lt1"/>
-          </a:fontRef>
-        </p:style>
-        <p:txBody>
-          <a:bodyPr rtlCol="0" anchor="ctr"/>
-          <a:lstStyle/>
-          <a:p>
-            <a:pPr algn="ctr"/>
-          </a:p>
-        </p:txBody>
-      </p:sp>
-      <p:sp>
-        <p:nvSpPr>
-          <p:cNvPr id="87" name="Rounded Rectangle 86"/>
-          <p:cNvSpPr/>
-          <p:nvPr/>
-        </p:nvSpPr>
-        <p:spPr>
-          <a:xfrm>
-            <a:off x="22592850" y="20737575"/>
-            <a:ext cx="3358950" cy="1816575"/>
-          </a:xfrm>
-          <a:prstGeom prst="roundRect">
-            <a:avLst>
-              <a:gd name="adj" fmla="val 6792"/>
+              <a:gd name="adj" fmla="val 7200"/>
             </a:avLst>
           </a:prstGeom>
           <a:solidFill>
@@ -7673,14 +7134,14 @@
       </p:sp>
       <p:sp>
         <p:nvSpPr>
-          <p:cNvPr id="88" name="TextBox 87"/>
+          <p:cNvPr id="74" name="TextBox 73"/>
           <p:cNvSpPr txBox="1"/>
           <p:nvPr/>
         </p:nvSpPr>
         <p:spPr>
           <a:xfrm>
-            <a:off x="22812210" y="20981613"/>
-            <a:ext cx="180000" cy="320814"/>
+            <a:off x="22976730" y="21035082"/>
+            <a:ext cx="180000" cy="392106"/>
           </a:xfrm>
           <a:prstGeom prst="rect">
             <a:avLst/>
@@ -7695,7 +7156,7 @@
           <a:p>
             <a:pPr algn="l"/>
             <a:r>
-              <a:rPr sz="1943" b="1" i="0">
+              <a:rPr sz="2374" b="1" i="0">
                 <a:solidFill>
                   <a:srgbClr val="1C2321"/>
                 </a:solidFill>
@@ -7708,14 +7169,14 @@
       </p:sp>
       <p:sp>
         <p:nvSpPr>
-          <p:cNvPr id="89" name="TextBox 88"/>
+          <p:cNvPr id="75" name="TextBox 74"/>
           <p:cNvSpPr txBox="1"/>
           <p:nvPr/>
         </p:nvSpPr>
         <p:spPr>
           <a:xfrm>
-            <a:off x="22812210" y="21455979"/>
-            <a:ext cx="180000" cy="249522"/>
+            <a:off x="22976730" y="21590337"/>
+            <a:ext cx="180000" cy="302991"/>
           </a:xfrm>
           <a:prstGeom prst="rect">
             <a:avLst/>
@@ -7730,7 +7191,7 @@
           <a:p>
             <a:pPr algn="l"/>
             <a:r>
-              <a:rPr sz="1511" b="0" i="0">
+              <a:rPr sz="1835" b="0" i="0">
                 <a:solidFill>
                   <a:srgbClr val="5B6570"/>
                 </a:solidFill>
@@ -7743,14 +7204,14 @@
       </p:sp>
       <p:sp>
         <p:nvSpPr>
-          <p:cNvPr id="90" name="TextBox 89"/>
+          <p:cNvPr id="76" name="TextBox 75"/>
           <p:cNvSpPr txBox="1"/>
           <p:nvPr/>
         </p:nvSpPr>
         <p:spPr>
           <a:xfrm>
-            <a:off x="22812210" y="21757599"/>
-            <a:ext cx="180000" cy="249522"/>
+            <a:off x="22976730" y="21960507"/>
+            <a:ext cx="180000" cy="302991"/>
           </a:xfrm>
           <a:prstGeom prst="rect">
             <a:avLst/>
@@ -7765,20 +7226,20 @@
           <a:p>
             <a:pPr algn="l"/>
             <a:r>
-              <a:rPr sz="1511" b="0" i="0">
+              <a:rPr sz="1835" b="0" i="0">
                 <a:solidFill>
                   <a:srgbClr val="5B6570"/>
                 </a:solidFill>
                 <a:latin typeface="IBM Plex Sans"/>
               </a:rPr>
-              <a:t>Xuất Excel / CSV theo CLB</a:t>
-            </a:r>
-          </a:p>
-        </p:txBody>
-      </p:sp>
-      <p:sp>
-        <p:nvSpPr>
-          <p:cNvPr id="91" name="TextBox 90"/>
+              <a:t>Danh sách từng CLB</a:t>
+            </a:r>
+          </a:p>
+        </p:txBody>
+      </p:sp>
+      <p:sp>
+        <p:nvSpPr>
+          <p:cNvPr id="77" name="TextBox 76"/>
           <p:cNvSpPr txBox="1"/>
           <p:nvPr/>
         </p:nvSpPr>
@@ -7806,14 +7267,14 @@
                 </a:solidFill>
                 <a:latin typeface="IBM Plex Sans"/>
               </a:rPr>
-              <a:t>Sơ đồ do AI tạo ra — theo CO_CHE_THUAT_TOAN.md (năm lớp cơ chế của phần mềm)</a:t>
-            </a:r>
-          </a:p>
-        </p:txBody>
-      </p:sp>
-      <p:sp>
-        <p:nvSpPr>
-          <p:cNvPr id="92" name="Rounded Rectangle 91"/>
+              <a:t>Sơ đồ do AI tạo ra</a:t>
+            </a:r>
+          </a:p>
+        </p:txBody>
+      </p:sp>
+      <p:sp>
+        <p:nvSpPr>
+          <p:cNvPr id="78" name="Rounded Rectangle 77"/>
           <p:cNvSpPr/>
           <p:nvPr/>
         </p:nvSpPr>
@@ -7860,7 +7321,7 @@
       </p:sp>
       <p:sp>
         <p:nvSpPr>
-          <p:cNvPr id="93" name="TextBox 92"/>
+          <p:cNvPr id="79" name="TextBox 78"/>
           <p:cNvSpPr txBox="1"/>
           <p:nvPr/>
         </p:nvSpPr>
@@ -7895,7 +7356,7 @@
       </p:sp>
       <p:sp>
         <p:nvSpPr>
-          <p:cNvPr id="94" name="Rounded Rectangle 93"/>
+          <p:cNvPr id="80" name="Rounded Rectangle 79"/>
           <p:cNvSpPr/>
           <p:nvPr/>
         </p:nvSpPr>
@@ -7943,7 +7404,7 @@
       </p:sp>
       <p:sp>
         <p:nvSpPr>
-          <p:cNvPr id="95" name="Oval 94"/>
+          <p:cNvPr id="81" name="Oval 80"/>
           <p:cNvSpPr/>
           <p:nvPr/>
         </p:nvSpPr>
@@ -7996,7 +7457,7 @@
       </p:sp>
       <p:sp>
         <p:nvSpPr>
-          <p:cNvPr id="96" name="TextBox 95"/>
+          <p:cNvPr id="82" name="TextBox 81"/>
           <p:cNvSpPr txBox="1"/>
           <p:nvPr/>
         </p:nvSpPr>
@@ -8031,7 +7492,7 @@
       </p:sp>
       <p:sp>
         <p:nvSpPr>
-          <p:cNvPr id="97" name="Oval 96"/>
+          <p:cNvPr id="83" name="Oval 82"/>
           <p:cNvSpPr/>
           <p:nvPr/>
         </p:nvSpPr>
@@ -8084,7 +7545,7 @@
       </p:sp>
       <p:sp>
         <p:nvSpPr>
-          <p:cNvPr id="98" name="Rounded Rectangle 97"/>
+          <p:cNvPr id="84" name="Rounded Rectangle 83"/>
           <p:cNvSpPr/>
           <p:nvPr/>
         </p:nvSpPr>
@@ -8131,7 +7592,7 @@
       </p:sp>
       <p:sp>
         <p:nvSpPr>
-          <p:cNvPr id="99" name="TextBox 98"/>
+          <p:cNvPr id="85" name="TextBox 84"/>
           <p:cNvSpPr txBox="1"/>
           <p:nvPr/>
         </p:nvSpPr>
@@ -8166,7 +7627,7 @@
       </p:sp>
       <p:sp>
         <p:nvSpPr>
-          <p:cNvPr id="100" name="Oval 99"/>
+          <p:cNvPr id="86" name="Oval 85"/>
           <p:cNvSpPr/>
           <p:nvPr/>
         </p:nvSpPr>
@@ -8219,7 +7680,7 @@
       </p:sp>
       <p:sp>
         <p:nvSpPr>
-          <p:cNvPr id="101" name="Rounded Rectangle 100"/>
+          <p:cNvPr id="87" name="Rounded Rectangle 86"/>
           <p:cNvSpPr/>
           <p:nvPr/>
         </p:nvSpPr>
@@ -8266,7 +7727,7 @@
       </p:sp>
       <p:sp>
         <p:nvSpPr>
-          <p:cNvPr id="102" name="TextBox 101"/>
+          <p:cNvPr id="88" name="TextBox 87"/>
           <p:cNvSpPr txBox="1"/>
           <p:nvPr/>
         </p:nvSpPr>
@@ -8301,7 +7762,7 @@
       </p:sp>
       <p:sp>
         <p:nvSpPr>
-          <p:cNvPr id="103" name="Oval 102"/>
+          <p:cNvPr id="89" name="Oval 88"/>
           <p:cNvSpPr/>
           <p:nvPr/>
         </p:nvSpPr>
@@ -8354,7 +7815,7 @@
       </p:sp>
       <p:sp>
         <p:nvSpPr>
-          <p:cNvPr id="104" name="Rounded Rectangle 103"/>
+          <p:cNvPr id="90" name="Rounded Rectangle 89"/>
           <p:cNvSpPr/>
           <p:nvPr/>
         </p:nvSpPr>
@@ -8401,7 +7862,7 @@
       </p:sp>
       <p:sp>
         <p:nvSpPr>
-          <p:cNvPr id="105" name="TextBox 104"/>
+          <p:cNvPr id="91" name="TextBox 90"/>
           <p:cNvSpPr txBox="1"/>
           <p:nvPr/>
         </p:nvSpPr>
@@ -8436,7 +7897,7 @@
       </p:sp>
       <p:sp>
         <p:nvSpPr>
-          <p:cNvPr id="106" name="Oval 105"/>
+          <p:cNvPr id="92" name="Oval 91"/>
           <p:cNvSpPr/>
           <p:nvPr/>
         </p:nvSpPr>
@@ -8489,7 +7950,7 @@
       </p:sp>
       <p:sp>
         <p:nvSpPr>
-          <p:cNvPr id="107" name="Rounded Rectangle 106"/>
+          <p:cNvPr id="93" name="Rounded Rectangle 92"/>
           <p:cNvSpPr/>
           <p:nvPr/>
         </p:nvSpPr>
@@ -8536,7 +7997,7 @@
       </p:sp>
       <p:sp>
         <p:nvSpPr>
-          <p:cNvPr id="108" name="TextBox 107"/>
+          <p:cNvPr id="94" name="TextBox 93"/>
           <p:cNvSpPr txBox="1"/>
           <p:nvPr/>
         </p:nvSpPr>
@@ -8571,7 +8032,7 @@
       </p:sp>
       <p:sp>
         <p:nvSpPr>
-          <p:cNvPr id="109" name="Rounded Rectangle 108"/>
+          <p:cNvPr id="95" name="Rounded Rectangle 94"/>
           <p:cNvSpPr/>
           <p:nvPr/>
         </p:nvSpPr>
@@ -8619,7 +8080,7 @@
       </p:sp>
       <p:sp>
         <p:nvSpPr>
-          <p:cNvPr id="110" name="Oval 109"/>
+          <p:cNvPr id="96" name="Oval 95"/>
           <p:cNvSpPr/>
           <p:nvPr/>
         </p:nvSpPr>
@@ -8672,7 +8133,7 @@
       </p:sp>
       <p:sp>
         <p:nvSpPr>
-          <p:cNvPr id="111" name="TextBox 110"/>
+          <p:cNvPr id="97" name="TextBox 96"/>
           <p:cNvSpPr txBox="1"/>
           <p:nvPr/>
         </p:nvSpPr>
@@ -8707,7 +8168,7 @@
       </p:sp>
       <p:grpSp>
         <p:nvGrpSpPr>
-          <p:cNvPr id="112" name="Bieu do khai gian"/>
+          <p:cNvPr id="98" name="Bieu do khai gian"/>
           <p:cNvGrpSpPr/>
           <p:nvPr/>
         </p:nvGrpSpPr>
@@ -8721,7 +8182,7 @@
         </p:grpSpPr>
         <p:graphicFrame>
           <p:nvGraphicFramePr>
-            <p:cNvPr id="116" name="Chart 115"/>
+            <p:cNvPr id="102" name="Chart 101"/>
             <p:cNvGraphicFramePr>
               <a:graphicFrameLocks noGrp="1"/>
             </p:cNvGraphicFramePr>
@@ -8740,7 +8201,7 @@
       </p:grpSp>
       <p:sp>
         <p:nvSpPr>
-          <p:cNvPr id="113" name="TextBox 112"/>
+          <p:cNvPr id="99" name="TextBox 98"/>
           <p:cNvSpPr txBox="1"/>
           <p:nvPr/>
         </p:nvSpPr>
@@ -8775,7 +8236,7 @@
       </p:sp>
       <p:sp>
         <p:nvSpPr>
-          <p:cNvPr id="114" name="TextBox 113"/>
+          <p:cNvPr id="100" name="TextBox 99"/>
           <p:cNvSpPr txBox="1"/>
           <p:nvPr/>
         </p:nvSpPr>
@@ -8810,7 +8271,7 @@
       </p:sp>
       <p:sp>
         <p:nvSpPr>
-          <p:cNvPr id="115" name="TextBox 114"/>
+          <p:cNvPr id="101" name="TextBox 100"/>
           <p:cNvSpPr txBox="1"/>
           <p:nvPr/>
         </p:nvSpPr>
@@ -8845,7 +8306,7 @@
       </p:sp>
       <p:grpSp>
         <p:nvGrpSpPr>
-          <p:cNvPr id="117" name="Bieu do nguyen vong"/>
+          <p:cNvPr id="103" name="Bieu do nguyen vong"/>
           <p:cNvGrpSpPr/>
           <p:nvPr/>
         </p:nvGrpSpPr>
@@ -8859,7 +8320,7 @@
         </p:grpSpPr>
         <p:graphicFrame>
           <p:nvGraphicFramePr>
-            <p:cNvPr id="121" name="Chart 120"/>
+            <p:cNvPr id="107" name="Chart 106"/>
             <p:cNvGraphicFramePr>
               <a:graphicFrameLocks noGrp="1"/>
             </p:cNvGraphicFramePr>
@@ -8878,7 +8339,7 @@
       </p:grpSp>
       <p:sp>
         <p:nvSpPr>
-          <p:cNvPr id="118" name="TextBox 117"/>
+          <p:cNvPr id="104" name="TextBox 103"/>
           <p:cNvSpPr txBox="1"/>
           <p:nvPr/>
         </p:nvSpPr>
@@ -8913,7 +8374,7 @@
       </p:sp>
       <p:sp>
         <p:nvSpPr>
-          <p:cNvPr id="119" name="TextBox 118"/>
+          <p:cNvPr id="105" name="TextBox 104"/>
           <p:cNvSpPr txBox="1"/>
           <p:nvPr/>
         </p:nvSpPr>
@@ -8948,7 +8409,7 @@
       </p:sp>
       <p:sp>
         <p:nvSpPr>
-          <p:cNvPr id="120" name="TextBox 119"/>
+          <p:cNvPr id="106" name="TextBox 105"/>
           <p:cNvSpPr txBox="1"/>
           <p:nvPr/>
         </p:nvSpPr>
@@ -8983,7 +8444,7 @@
       </p:sp>
       <p:sp>
         <p:nvSpPr>
-          <p:cNvPr id="122" name="Rounded Rectangle 121"/>
+          <p:cNvPr id="108" name="Rounded Rectangle 107"/>
           <p:cNvSpPr/>
           <p:nvPr/>
         </p:nvSpPr>
@@ -9030,7 +8491,7 @@
       </p:sp>
       <p:sp>
         <p:nvSpPr>
-          <p:cNvPr id="123" name="TextBox 122"/>
+          <p:cNvPr id="109" name="TextBox 108"/>
           <p:cNvSpPr txBox="1"/>
           <p:nvPr/>
         </p:nvSpPr>
@@ -9065,7 +8526,7 @@
       </p:sp>
       <p:sp>
         <p:nvSpPr>
-          <p:cNvPr id="124" name="Rounded Rectangle 123"/>
+          <p:cNvPr id="110" name="Rounded Rectangle 109"/>
           <p:cNvSpPr/>
           <p:nvPr/>
         </p:nvSpPr>
@@ -9113,7 +8574,7 @@
       </p:sp>
       <p:sp>
         <p:nvSpPr>
-          <p:cNvPr id="125" name="TextBox 124"/>
+          <p:cNvPr id="111" name="TextBox 110"/>
           <p:cNvSpPr txBox="1"/>
           <p:nvPr/>
         </p:nvSpPr>
@@ -9148,7 +8609,7 @@
       </p:sp>
       <p:sp>
         <p:nvSpPr>
-          <p:cNvPr id="126" name="Rounded Rectangle 125"/>
+          <p:cNvPr id="112" name="Rounded Rectangle 111"/>
           <p:cNvSpPr/>
           <p:nvPr/>
         </p:nvSpPr>
@@ -9195,7 +8656,7 @@
       </p:sp>
       <p:sp>
         <p:nvSpPr>
-          <p:cNvPr id="127" name="TextBox 126"/>
+          <p:cNvPr id="113" name="TextBox 112"/>
           <p:cNvSpPr txBox="1"/>
           <p:nvPr/>
         </p:nvSpPr>

--- a/poster/poster_khung_1-2.pptx
+++ b/poster/poster_khung_1-2.pptx
@@ -5444,7 +5444,7 @@
                 </a:solidFill>
                 <a:latin typeface="IBM Plex Sans"/>
               </a:rPr>
-              <a:t>cặp phá vỡ · mọi seed, mọi bộ dữ liệu mô phỏng</a:t>
+              <a:t>cặp phá vỡ · mọi lần bốc thăm, mọi bộ dữ liệu mô phỏng</a:t>
             </a:r>
           </a:p>
           <a:p>
@@ -8402,7 +8402,7 @@
                 </a:solidFill>
                 <a:latin typeface="IBM Plex Sans"/>
               </a:rPr>
-              <a:t>108 em được xếp · bộ 120 học sinh, 10 CLB · seed 42</a:t>
+              <a:t>108 em được xếp · bộ 120 học sinh, 10 CLB · hạt giống bốc thăm 42</a:t>
             </a:r>
           </a:p>
         </p:txBody>

--- a/poster/poster_khung_1-2.pptx
+++ b/poster/poster_khung_1-2.pptx
@@ -5922,8 +5922,8 @@
         </p:nvSpPr>
         <p:spPr>
           <a:xfrm>
-            <a:off x="10048200" y="19537950"/>
-            <a:ext cx="2604900" cy="2056500"/>
+            <a:off x="9979650" y="17755650"/>
+            <a:ext cx="2056500" cy="3838800"/>
           </a:xfrm>
           <a:prstGeom prst="roundRect">
             <a:avLst>
@@ -5970,8 +5970,8 @@
         </p:nvSpPr>
         <p:spPr>
           <a:xfrm>
-            <a:off x="10294980" y="19801182"/>
-            <a:ext cx="180000" cy="392106"/>
+            <a:off x="10199010" y="17988720"/>
+            <a:ext cx="180000" cy="356460"/>
           </a:xfrm>
           <a:prstGeom prst="rect">
             <a:avLst/>
@@ -5986,7 +5986,7 @@
           <a:p>
             <a:pPr algn="l"/>
             <a:r>
-              <a:rPr sz="2374" b="1" i="0">
+              <a:rPr sz="2159" b="1" i="0">
                 <a:solidFill>
                   <a:srgbClr val="1C2321"/>
                 </a:solidFill>
@@ -6005,8 +6005,8 @@
         </p:nvSpPr>
         <p:spPr>
           <a:xfrm>
-            <a:off x="10294980" y="20356437"/>
-            <a:ext cx="180000" cy="302991"/>
+            <a:off x="10199010" y="18487764"/>
+            <a:ext cx="180000" cy="249522"/>
           </a:xfrm>
           <a:prstGeom prst="rect">
             <a:avLst/>
@@ -6021,7 +6021,7 @@
           <a:p>
             <a:pPr algn="l"/>
             <a:r>
-              <a:rPr sz="1835" b="0" i="0">
+              <a:rPr sz="1511" b="0" i="0">
                 <a:solidFill>
                   <a:srgbClr val="5B6570"/>
                 </a:solidFill>
@@ -6040,8 +6040,8 @@
         </p:nvSpPr>
         <p:spPr>
           <a:xfrm>
-            <a:off x="10294980" y="20726607"/>
-            <a:ext cx="180000" cy="302991"/>
+            <a:off x="10199010" y="18775674"/>
+            <a:ext cx="180000" cy="249522"/>
           </a:xfrm>
           <a:prstGeom prst="rect">
             <a:avLst/>
@@ -6056,7 +6056,112 @@
           <a:p>
             <a:pPr algn="l"/>
             <a:r>
-              <a:rPr sz="1835" b="0" i="0">
+              <a:rPr sz="1511" b="0" i="0">
+                <a:solidFill>
+                  <a:srgbClr val="5B6570"/>
+                </a:solidFill>
+                <a:latin typeface="IBM Plex Sans"/>
+              </a:rPr>
+              <a:t>· số chỗ</a:t>
+            </a:r>
+          </a:p>
+        </p:txBody>
+      </p:sp>
+      <p:sp>
+        <p:nvSpPr>
+          <p:cNvPr id="48" name="TextBox 47"/>
+          <p:cNvSpPr txBox="1"/>
+          <p:nvPr/>
+        </p:nvSpPr>
+        <p:spPr>
+          <a:xfrm>
+            <a:off x="10199010" y="19063584"/>
+            <a:ext cx="180000" cy="249522"/>
+          </a:xfrm>
+          <a:prstGeom prst="rect">
+            <a:avLst/>
+          </a:prstGeom>
+          <a:noFill/>
+        </p:spPr>
+        <p:txBody>
+          <a:bodyPr wrap="none" anchor="t" lIns="0" rIns="0" tIns="0" bIns="0">
+            <a:spAutoFit/>
+          </a:bodyPr>
+          <a:lstStyle/>
+          <a:p>
+            <a:pPr algn="l"/>
+            <a:r>
+              <a:rPr sz="1511" b="0" i="0">
+                <a:solidFill>
+                  <a:srgbClr val="5B6570"/>
+                </a:solidFill>
+                <a:latin typeface="IBM Plex Sans"/>
+              </a:rPr>
+              <a:t>· suất dự trữ</a:t>
+            </a:r>
+          </a:p>
+        </p:txBody>
+      </p:sp>
+      <p:sp>
+        <p:nvSpPr>
+          <p:cNvPr id="49" name="TextBox 48"/>
+          <p:cNvSpPr txBox="1"/>
+          <p:nvPr/>
+        </p:nvSpPr>
+        <p:spPr>
+          <a:xfrm>
+            <a:off x="10199010" y="19351494"/>
+            <a:ext cx="180000" cy="249522"/>
+          </a:xfrm>
+          <a:prstGeom prst="rect">
+            <a:avLst/>
+          </a:prstGeom>
+          <a:noFill/>
+        </p:spPr>
+        <p:txBody>
+          <a:bodyPr wrap="none" anchor="t" lIns="0" rIns="0" tIns="0" bIns="0">
+            <a:spAutoFit/>
+          </a:bodyPr>
+          <a:lstStyle/>
+          <a:p>
+            <a:pPr algn="l"/>
+            <a:r>
+              <a:rPr sz="1511" b="0" i="0">
+                <a:solidFill>
+                  <a:srgbClr val="5B6570"/>
+                </a:solidFill>
+                <a:latin typeface="IBM Plex Sans"/>
+              </a:rPr>
+              <a:t/>
+            </a:r>
+          </a:p>
+        </p:txBody>
+      </p:sp>
+      <p:sp>
+        <p:nvSpPr>
+          <p:cNvPr id="50" name="TextBox 49"/>
+          <p:cNvSpPr txBox="1"/>
+          <p:nvPr/>
+        </p:nvSpPr>
+        <p:spPr>
+          <a:xfrm>
+            <a:off x="10199010" y="19639404"/>
+            <a:ext cx="180000" cy="249522"/>
+          </a:xfrm>
+          <a:prstGeom prst="rect">
+            <a:avLst/>
+          </a:prstGeom>
+          <a:noFill/>
+        </p:spPr>
+        <p:txBody>
+          <a:bodyPr wrap="none" anchor="t" lIns="0" rIns="0" tIns="0" bIns="0">
+            <a:spAutoFit/>
+          </a:bodyPr>
+          <a:lstStyle/>
+          <a:p>
+            <a:pPr algn="l"/>
+            <a:r>
+              <a:rPr sz="1511" b="0" i="0">
                 <a:solidFill>
                   <a:srgbClr val="5B6570"/>
                 </a:solidFill>
@@ -6069,14 +6174,14 @@
       </p:sp>
       <p:sp>
         <p:nvSpPr>
-          <p:cNvPr id="48" name="TextBox 47"/>
+          <p:cNvPr id="51" name="TextBox 50"/>
           <p:cNvSpPr txBox="1"/>
           <p:nvPr/>
         </p:nvSpPr>
         <p:spPr>
           <a:xfrm>
-            <a:off x="10294980" y="21096777"/>
-            <a:ext cx="180000" cy="302991"/>
+            <a:off x="10199010" y="19927314"/>
+            <a:ext cx="180000" cy="249522"/>
           </a:xfrm>
           <a:prstGeom prst="rect">
             <a:avLst/>
@@ -6091,7 +6196,77 @@
           <a:p>
             <a:pPr algn="l"/>
             <a:r>
-              <a:rPr sz="1835" b="0" i="0">
+              <a:rPr sz="1511" b="0" i="0">
+                <a:solidFill>
+                  <a:srgbClr val="5B6570"/>
+                </a:solidFill>
+                <a:latin typeface="IBM Plex Sans"/>
+              </a:rPr>
+              <a:t>· chấm mù</a:t>
+            </a:r>
+          </a:p>
+        </p:txBody>
+      </p:sp>
+      <p:sp>
+        <p:nvSpPr>
+          <p:cNvPr id="52" name="TextBox 51"/>
+          <p:cNvSpPr txBox="1"/>
+          <p:nvPr/>
+        </p:nvSpPr>
+        <p:spPr>
+          <a:xfrm>
+            <a:off x="10199010" y="20215224"/>
+            <a:ext cx="180000" cy="249522"/>
+          </a:xfrm>
+          <a:prstGeom prst="rect">
+            <a:avLst/>
+          </a:prstGeom>
+          <a:noFill/>
+        </p:spPr>
+        <p:txBody>
+          <a:bodyPr wrap="none" anchor="t" lIns="0" rIns="0" tIns="0" bIns="0">
+            <a:spAutoFit/>
+          </a:bodyPr>
+          <a:lstStyle/>
+          <a:p>
+            <a:pPr algn="l"/>
+            <a:r>
+              <a:rPr sz="1511" b="0" i="0">
+                <a:solidFill>
+                  <a:srgbClr val="5B6570"/>
+                </a:solidFill>
+                <a:latin typeface="IBM Plex Sans"/>
+              </a:rPr>
+              <a:t/>
+            </a:r>
+          </a:p>
+        </p:txBody>
+      </p:sp>
+      <p:sp>
+        <p:nvSpPr>
+          <p:cNvPr id="53" name="TextBox 52"/>
+          <p:cNvSpPr txBox="1"/>
+          <p:nvPr/>
+        </p:nvSpPr>
+        <p:spPr>
+          <a:xfrm>
+            <a:off x="10199010" y="20503134"/>
+            <a:ext cx="180000" cy="249522"/>
+          </a:xfrm>
+          <a:prstGeom prst="rect">
+            <a:avLst/>
+          </a:prstGeom>
+          <a:noFill/>
+        </p:spPr>
+        <p:txBody>
+          <a:bodyPr wrap="none" anchor="t" lIns="0" rIns="0" tIns="0" bIns="0">
+            <a:spAutoFit/>
+          </a:bodyPr>
+          <a:lstStyle/>
+          <a:p>
+            <a:pPr algn="l"/>
+            <a:r>
+              <a:rPr sz="1511" b="0" i="0">
                 <a:solidFill>
                   <a:srgbClr val="5B6570"/>
                 </a:solidFill>
@@ -6104,14 +6279,49 @@
       </p:sp>
       <p:sp>
         <p:nvSpPr>
-          <p:cNvPr id="49" name="Right Arrow 48"/>
+          <p:cNvPr id="54" name="TextBox 53"/>
+          <p:cNvSpPr txBox="1"/>
+          <p:nvPr/>
+        </p:nvSpPr>
+        <p:spPr>
+          <a:xfrm>
+            <a:off x="10199010" y="20791044"/>
+            <a:ext cx="180000" cy="249522"/>
+          </a:xfrm>
+          <a:prstGeom prst="rect">
+            <a:avLst/>
+          </a:prstGeom>
+          <a:noFill/>
+        </p:spPr>
+        <p:txBody>
+          <a:bodyPr wrap="none" anchor="t" lIns="0" rIns="0" tIns="0" bIns="0">
+            <a:spAutoFit/>
+          </a:bodyPr>
+          <a:lstStyle/>
+          <a:p>
+            <a:pPr algn="l"/>
+            <a:r>
+              <a:rPr sz="1511" b="0" i="0">
+                <a:solidFill>
+                  <a:srgbClr val="5B6570"/>
+                </a:solidFill>
+                <a:latin typeface="IBM Plex Sans"/>
+              </a:rPr>
+              <a:t>· xếp hạng CLB</a:t>
+            </a:r>
+          </a:p>
+        </p:txBody>
+      </p:sp>
+      <p:sp>
+        <p:nvSpPr>
+          <p:cNvPr id="55" name="Right Arrow 54"/>
           <p:cNvSpPr/>
           <p:nvPr/>
         </p:nvSpPr>
         <p:spPr>
           <a:xfrm>
-            <a:off x="12653100" y="20456520"/>
-            <a:ext cx="479850" cy="219360"/>
+            <a:off x="12036149" y="19565370"/>
+            <a:ext cx="411300" cy="219360"/>
           </a:xfrm>
           <a:prstGeom prst="rightArrow">
             <a:avLst/>
@@ -6148,18 +6358,18 @@
       </p:sp>
       <p:sp>
         <p:nvSpPr>
-          <p:cNvPr id="50" name="Rounded Rectangle 49"/>
+          <p:cNvPr id="56" name="Rounded Rectangle 55"/>
           <p:cNvSpPr/>
           <p:nvPr/>
         </p:nvSpPr>
         <p:spPr>
           <a:xfrm>
-            <a:off x="13132950" y="19537950"/>
-            <a:ext cx="3290400" cy="2056500"/>
+            <a:off x="12447450" y="17755650"/>
+            <a:ext cx="3975900" cy="3838800"/>
           </a:xfrm>
           <a:prstGeom prst="roundRect">
             <a:avLst>
-              <a:gd name="adj" fmla="val 6000"/>
+              <a:gd name="adj" fmla="val 3214"/>
             </a:avLst>
           </a:prstGeom>
           <a:solidFill>
@@ -6196,14 +6406,14 @@
       </p:sp>
       <p:sp>
         <p:nvSpPr>
-          <p:cNvPr id="51" name="Oval 50"/>
+          <p:cNvPr id="57" name="Oval 56"/>
           <p:cNvSpPr/>
           <p:nvPr/>
         </p:nvSpPr>
         <p:spPr>
           <a:xfrm>
-            <a:off x="13324889" y="19743600"/>
-            <a:ext cx="438720" cy="438720"/>
+            <a:off x="12625680" y="17947590"/>
+            <a:ext cx="411300" cy="411300"/>
           </a:xfrm>
           <a:prstGeom prst="ellipse">
             <a:avLst/>
@@ -6249,14 +6459,14 @@
       </p:sp>
       <p:sp>
         <p:nvSpPr>
-          <p:cNvPr id="52" name="TextBox 51"/>
+          <p:cNvPr id="58" name="TextBox 57"/>
           <p:cNvSpPr txBox="1"/>
           <p:nvPr/>
         </p:nvSpPr>
         <p:spPr>
           <a:xfrm>
-            <a:off x="13900710" y="19801182"/>
-            <a:ext cx="180000" cy="392106"/>
+            <a:off x="13160370" y="17988720"/>
+            <a:ext cx="180000" cy="356460"/>
           </a:xfrm>
           <a:prstGeom prst="rect">
             <a:avLst/>
@@ -6271,27 +6481,27 @@
           <a:p>
             <a:pPr algn="l"/>
             <a:r>
-              <a:rPr sz="2374" b="1" i="0">
+              <a:rPr sz="2159" b="1" i="0">
                 <a:solidFill>
                   <a:srgbClr val="1C2321"/>
                 </a:solidFill>
                 <a:latin typeface="Be Vietnam Pro"/>
               </a:rPr>
-              <a:t>Xếp ưu tiên</a:t>
-            </a:r>
-          </a:p>
-        </p:txBody>
-      </p:sp>
-      <p:sp>
-        <p:nvSpPr>
-          <p:cNvPr id="53" name="TextBox 52"/>
+              <a:t>Xếp ưu tiên ở mỗi CLB</a:t>
+            </a:r>
+          </a:p>
+        </p:txBody>
+      </p:sp>
+      <p:sp>
+        <p:nvSpPr>
+          <p:cNvPr id="59" name="TextBox 58"/>
           <p:cNvSpPr txBox="1"/>
           <p:nvPr/>
         </p:nvSpPr>
         <p:spPr>
           <a:xfrm>
-            <a:off x="13379730" y="20356437"/>
-            <a:ext cx="180000" cy="302991"/>
+            <a:off x="12666810" y="18487764"/>
+            <a:ext cx="180000" cy="249522"/>
           </a:xfrm>
           <a:prstGeom prst="rect">
             <a:avLst/>
@@ -6306,27 +6516,27 @@
           <a:p>
             <a:pPr algn="l"/>
             <a:r>
-              <a:rPr sz="1835" b="0" i="0">
+              <a:rPr sz="1511" b="0" i="0">
                 <a:solidFill>
                   <a:srgbClr val="5B6570"/>
                 </a:solidFill>
                 <a:latin typeface="IBM Plex Sans"/>
               </a:rPr>
-              <a:t>Đã thi → theo điểm</a:t>
-            </a:r>
-          </a:p>
-        </p:txBody>
-      </p:sp>
-      <p:sp>
-        <p:nvSpPr>
-          <p:cNvPr id="54" name="TextBox 53"/>
+              <a:t>Tầng 1 · em đã thi CLB đó</a:t>
+            </a:r>
+          </a:p>
+        </p:txBody>
+      </p:sp>
+      <p:sp>
+        <p:nvSpPr>
+          <p:cNvPr id="60" name="TextBox 59"/>
           <p:cNvSpPr txBox="1"/>
           <p:nvPr/>
         </p:nvSpPr>
         <p:spPr>
           <a:xfrm>
-            <a:off x="13379730" y="20726607"/>
-            <a:ext cx="180000" cy="302991"/>
+            <a:off x="12666810" y="18775674"/>
+            <a:ext cx="180000" cy="249522"/>
           </a:xfrm>
           <a:prstGeom prst="rect">
             <a:avLst/>
@@ -6341,27 +6551,27 @@
           <a:p>
             <a:pPr algn="l"/>
             <a:r>
-              <a:rPr sz="1835" b="0" i="0">
+              <a:rPr sz="1511" b="0" i="0">
                 <a:solidFill>
                   <a:srgbClr val="5B6570"/>
                 </a:solidFill>
                 <a:latin typeface="IBM Plex Sans"/>
               </a:rPr>
-              <a:t>Bằng điểm → bốc thăm</a:t>
-            </a:r>
-          </a:p>
-        </p:txBody>
-      </p:sp>
-      <p:sp>
-        <p:nvSpPr>
-          <p:cNvPr id="55" name="TextBox 54"/>
+              <a:t>· điểm cao xếp trước</a:t>
+            </a:r>
+          </a:p>
+        </p:txBody>
+      </p:sp>
+      <p:sp>
+        <p:nvSpPr>
+          <p:cNvPr id="61" name="TextBox 60"/>
           <p:cNvSpPr txBox="1"/>
           <p:nvPr/>
         </p:nvSpPr>
         <p:spPr>
           <a:xfrm>
-            <a:off x="13379730" y="21096777"/>
-            <a:ext cx="180000" cy="302991"/>
+            <a:off x="12666810" y="19063584"/>
+            <a:ext cx="180000" cy="249522"/>
           </a:xfrm>
           <a:prstGeom prst="rect">
             <a:avLst/>
@@ -6376,27 +6586,237 @@
           <a:p>
             <a:pPr algn="l"/>
             <a:r>
-              <a:rPr sz="1835" b="0" i="0">
+              <a:rPr sz="1511" b="0" i="0">
                 <a:solidFill>
                   <a:srgbClr val="5B6570"/>
                 </a:solidFill>
                 <a:latin typeface="IBM Plex Sans"/>
               </a:rPr>
-              <a:t>Không thi → bốc thăm</a:t>
-            </a:r>
-          </a:p>
-        </p:txBody>
-      </p:sp>
-      <p:sp>
-        <p:nvSpPr>
-          <p:cNvPr id="56" name="Right Arrow 55"/>
+              <a:t>· bằng điểm → số bốc thăm nhỏ trước</a:t>
+            </a:r>
+          </a:p>
+        </p:txBody>
+      </p:sp>
+      <p:sp>
+        <p:nvSpPr>
+          <p:cNvPr id="62" name="TextBox 61"/>
+          <p:cNvSpPr txBox="1"/>
+          <p:nvPr/>
+        </p:nvSpPr>
+        <p:spPr>
+          <a:xfrm>
+            <a:off x="12666810" y="19351494"/>
+            <a:ext cx="180000" cy="249522"/>
+          </a:xfrm>
+          <a:prstGeom prst="rect">
+            <a:avLst/>
+          </a:prstGeom>
+          <a:noFill/>
+        </p:spPr>
+        <p:txBody>
+          <a:bodyPr wrap="none" anchor="t" lIns="0" rIns="0" tIns="0" bIns="0">
+            <a:spAutoFit/>
+          </a:bodyPr>
+          <a:lstStyle/>
+          <a:p>
+            <a:pPr algn="l"/>
+            <a:r>
+              <a:rPr sz="1511" b="0" i="0">
+                <a:solidFill>
+                  <a:srgbClr val="5B6570"/>
+                </a:solidFill>
+                <a:latin typeface="IBM Plex Sans"/>
+              </a:rPr>
+              <a:t>Tầng 2 · em không thi CLB đó</a:t>
+            </a:r>
+          </a:p>
+        </p:txBody>
+      </p:sp>
+      <p:sp>
+        <p:nvSpPr>
+          <p:cNvPr id="63" name="TextBox 62"/>
+          <p:cNvSpPr txBox="1"/>
+          <p:nvPr/>
+        </p:nvSpPr>
+        <p:spPr>
+          <a:xfrm>
+            <a:off x="12666810" y="19639404"/>
+            <a:ext cx="180000" cy="249522"/>
+          </a:xfrm>
+          <a:prstGeom prst="rect">
+            <a:avLst/>
+          </a:prstGeom>
+          <a:noFill/>
+        </p:spPr>
+        <p:txBody>
+          <a:bodyPr wrap="none" anchor="t" lIns="0" rIns="0" tIns="0" bIns="0">
+            <a:spAutoFit/>
+          </a:bodyPr>
+          <a:lstStyle/>
+          <a:p>
+            <a:pPr algn="l"/>
+            <a:r>
+              <a:rPr sz="1511" b="0" i="0">
+                <a:solidFill>
+                  <a:srgbClr val="5B6570"/>
+                </a:solidFill>
+                <a:latin typeface="IBM Plex Sans"/>
+              </a:rPr>
+              <a:t>· xếp theo số bốc thăm</a:t>
+            </a:r>
+          </a:p>
+        </p:txBody>
+      </p:sp>
+      <p:sp>
+        <p:nvSpPr>
+          <p:cNvPr id="64" name="TextBox 63"/>
+          <p:cNvSpPr txBox="1"/>
+          <p:nvPr/>
+        </p:nvSpPr>
+        <p:spPr>
+          <a:xfrm>
+            <a:off x="12666810" y="19927314"/>
+            <a:ext cx="180000" cy="249522"/>
+          </a:xfrm>
+          <a:prstGeom prst="rect">
+            <a:avLst/>
+          </a:prstGeom>
+          <a:noFill/>
+        </p:spPr>
+        <p:txBody>
+          <a:bodyPr wrap="none" anchor="t" lIns="0" rIns="0" tIns="0" bIns="0">
+            <a:spAutoFit/>
+          </a:bodyPr>
+          <a:lstStyle/>
+          <a:p>
+            <a:pPr algn="l"/>
+            <a:r>
+              <a:rPr sz="1511" b="0" i="0">
+                <a:solidFill>
+                  <a:srgbClr val="5B6570"/>
+                </a:solidFill>
+                <a:latin typeface="IBM Plex Sans"/>
+              </a:rPr>
+              <a:t>Tầng 1 luôn đứng trước tầng 2</a:t>
+            </a:r>
+          </a:p>
+        </p:txBody>
+      </p:sp>
+      <p:sp>
+        <p:nvSpPr>
+          <p:cNvPr id="65" name="TextBox 64"/>
+          <p:cNvSpPr txBox="1"/>
+          <p:nvPr/>
+        </p:nvSpPr>
+        <p:spPr>
+          <a:xfrm>
+            <a:off x="12666810" y="20215224"/>
+            <a:ext cx="180000" cy="249522"/>
+          </a:xfrm>
+          <a:prstGeom prst="rect">
+            <a:avLst/>
+          </a:prstGeom>
+          <a:noFill/>
+        </p:spPr>
+        <p:txBody>
+          <a:bodyPr wrap="none" anchor="t" lIns="0" rIns="0" tIns="0" bIns="0">
+            <a:spAutoFit/>
+          </a:bodyPr>
+          <a:lstStyle/>
+          <a:p>
+            <a:pPr algn="l"/>
+            <a:r>
+              <a:rPr sz="1511" b="0" i="0">
+                <a:solidFill>
+                  <a:srgbClr val="5B6570"/>
+                </a:solidFill>
+                <a:latin typeface="IBM Plex Sans"/>
+              </a:rPr>
+              <a:t/>
+            </a:r>
+          </a:p>
+        </p:txBody>
+      </p:sp>
+      <p:sp>
+        <p:nvSpPr>
+          <p:cNvPr id="66" name="TextBox 65"/>
+          <p:cNvSpPr txBox="1"/>
+          <p:nvPr/>
+        </p:nvSpPr>
+        <p:spPr>
+          <a:xfrm>
+            <a:off x="12666810" y="20503134"/>
+            <a:ext cx="180000" cy="249522"/>
+          </a:xfrm>
+          <a:prstGeom prst="rect">
+            <a:avLst/>
+          </a:prstGeom>
+          <a:noFill/>
+        </p:spPr>
+        <p:txBody>
+          <a:bodyPr wrap="none" anchor="t" lIns="0" rIns="0" tIns="0" bIns="0">
+            <a:spAutoFit/>
+          </a:bodyPr>
+          <a:lstStyle/>
+          <a:p>
+            <a:pPr algn="l"/>
+            <a:r>
+              <a:rPr sz="1511" b="0" i="0">
+                <a:solidFill>
+                  <a:srgbClr val="5B6570"/>
+                </a:solidFill>
+                <a:latin typeface="IBM Plex Sans"/>
+              </a:rPr>
+              <a:t>CLB không biết em chọn mình</a:t>
+            </a:r>
+          </a:p>
+        </p:txBody>
+      </p:sp>
+      <p:sp>
+        <p:nvSpPr>
+          <p:cNvPr id="67" name="TextBox 66"/>
+          <p:cNvSpPr txBox="1"/>
+          <p:nvPr/>
+        </p:nvSpPr>
+        <p:spPr>
+          <a:xfrm>
+            <a:off x="12666810" y="20791044"/>
+            <a:ext cx="180000" cy="249522"/>
+          </a:xfrm>
+          <a:prstGeom prst="rect">
+            <a:avLst/>
+          </a:prstGeom>
+          <a:noFill/>
+        </p:spPr>
+        <p:txBody>
+          <a:bodyPr wrap="none" anchor="t" lIns="0" rIns="0" tIns="0" bIns="0">
+            <a:spAutoFit/>
+          </a:bodyPr>
+          <a:lstStyle/>
+          <a:p>
+            <a:pPr algn="l"/>
+            <a:r>
+              <a:rPr sz="1511" b="0" i="0">
+                <a:solidFill>
+                  <a:srgbClr val="5B6570"/>
+                </a:solidFill>
+                <a:latin typeface="IBM Plex Sans"/>
+              </a:rPr>
+              <a:t>là nguyện vọng thứ mấy</a:t>
+            </a:r>
+          </a:p>
+        </p:txBody>
+      </p:sp>
+      <p:sp>
+        <p:nvSpPr>
+          <p:cNvPr id="68" name="Right Arrow 67"/>
           <p:cNvSpPr/>
           <p:nvPr/>
         </p:nvSpPr>
         <p:spPr>
           <a:xfrm>
-            <a:off x="16423350" y="20456520"/>
-            <a:ext cx="479850" cy="219360"/>
+            <a:off x="16423350" y="19565370"/>
+            <a:ext cx="411300" cy="219360"/>
           </a:xfrm>
           <a:prstGeom prst="rightArrow">
             <a:avLst/>
@@ -6433,18 +6853,18 @@
       </p:sp>
       <p:sp>
         <p:nvSpPr>
-          <p:cNvPr id="57" name="Rounded Rectangle 56"/>
+          <p:cNvPr id="69" name="Rounded Rectangle 68"/>
           <p:cNvSpPr/>
           <p:nvPr/>
         </p:nvSpPr>
         <p:spPr>
           <a:xfrm>
-            <a:off x="16903200" y="18372600"/>
-            <a:ext cx="5346900" cy="4387200"/>
+            <a:off x="16834650" y="17755650"/>
+            <a:ext cx="5278350" cy="3838800"/>
           </a:xfrm>
           <a:prstGeom prst="roundRect">
             <a:avLst>
-              <a:gd name="adj" fmla="val 2812"/>
+              <a:gd name="adj" fmla="val 3214"/>
             </a:avLst>
           </a:prstGeom>
           <a:solidFill>
@@ -6481,14 +6901,14 @@
       </p:sp>
       <p:sp>
         <p:nvSpPr>
-          <p:cNvPr id="58" name="Oval 57"/>
+          <p:cNvPr id="70" name="Oval 69"/>
           <p:cNvSpPr/>
           <p:nvPr/>
         </p:nvSpPr>
         <p:spPr>
           <a:xfrm>
-            <a:off x="17095140" y="18578250"/>
-            <a:ext cx="438720" cy="438720"/>
+            <a:off x="17012880" y="17947590"/>
+            <a:ext cx="411300" cy="411300"/>
           </a:xfrm>
           <a:prstGeom prst="ellipse">
             <a:avLst/>
@@ -6534,14 +6954,14 @@
       </p:sp>
       <p:sp>
         <p:nvSpPr>
-          <p:cNvPr id="59" name="TextBox 58"/>
+          <p:cNvPr id="71" name="TextBox 70"/>
           <p:cNvSpPr txBox="1"/>
           <p:nvPr/>
         </p:nvSpPr>
         <p:spPr>
           <a:xfrm>
-            <a:off x="17670960" y="18635832"/>
-            <a:ext cx="180000" cy="392106"/>
+            <a:off x="17547570" y="18002430"/>
+            <a:ext cx="180000" cy="356460"/>
           </a:xfrm>
           <a:prstGeom prst="rect">
             <a:avLst/>
@@ -6556,7 +6976,7 @@
           <a:p>
             <a:pPr algn="l"/>
             <a:r>
-              <a:rPr sz="2374" b="1" i="0">
+              <a:rPr sz="2159" b="1" i="0">
                 <a:solidFill>
                   <a:srgbClr val="1C2321"/>
                 </a:solidFill>
@@ -6569,14 +6989,14 @@
       </p:sp>
       <p:sp>
         <p:nvSpPr>
-          <p:cNvPr id="60" name="TextBox 59"/>
+          <p:cNvPr id="72" name="TextBox 71"/>
           <p:cNvSpPr txBox="1"/>
           <p:nvPr/>
         </p:nvSpPr>
         <p:spPr>
           <a:xfrm>
-            <a:off x="17149980" y="19191087"/>
-            <a:ext cx="180000" cy="302991"/>
+            <a:off x="17054010" y="18501474"/>
+            <a:ext cx="180000" cy="249522"/>
           </a:xfrm>
           <a:prstGeom prst="rect">
             <a:avLst/>
@@ -6591,27 +7011,27 @@
           <a:p>
             <a:pPr algn="l"/>
             <a:r>
-              <a:rPr sz="1835" b="0" i="0">
+              <a:rPr sz="1511" b="0" i="0">
                 <a:solidFill>
                   <a:srgbClr val="5B6570"/>
                 </a:solidFill>
                 <a:latin typeface="IBM Plex Sans"/>
               </a:rPr>
-              <a:t>Học sinh nộp theo nguyện vọng</a:t>
-            </a:r>
-          </a:p>
-        </p:txBody>
-      </p:sp>
-      <p:sp>
-        <p:nvSpPr>
-          <p:cNvPr id="61" name="TextBox 60"/>
+              <a:t>1. Em nộp vào nguyện vọng cao nhất còn mở</a:t>
+            </a:r>
+          </a:p>
+        </p:txBody>
+      </p:sp>
+      <p:sp>
+        <p:nvSpPr>
+          <p:cNvPr id="73" name="TextBox 72"/>
           <p:cNvSpPr txBox="1"/>
           <p:nvPr/>
         </p:nvSpPr>
         <p:spPr>
           <a:xfrm>
-            <a:off x="17149980" y="19561257"/>
-            <a:ext cx="180000" cy="302991"/>
+            <a:off x="17054010" y="18789384"/>
+            <a:ext cx="180000" cy="249522"/>
           </a:xfrm>
           <a:prstGeom prst="rect">
             <a:avLst/>
@@ -6626,27 +7046,27 @@
           <a:p>
             <a:pPr algn="l"/>
             <a:r>
-              <a:rPr sz="1835" b="0" i="0">
+              <a:rPr sz="1511" b="0" i="0">
                 <a:solidFill>
                   <a:srgbClr val="5B6570"/>
                 </a:solidFill>
                 <a:latin typeface="IBM Plex Sans"/>
               </a:rPr>
-              <a:t>CLB giữ tạm các em ưu tiên cao nhất</a:t>
-            </a:r>
-          </a:p>
-        </p:txBody>
-      </p:sp>
-      <p:sp>
-        <p:nvSpPr>
-          <p:cNvPr id="62" name="TextBox 61"/>
+              <a:t>2. CLB giữ tạm các em ưu tiên cao nhất</a:t>
+            </a:r>
+          </a:p>
+        </p:txBody>
+      </p:sp>
+      <p:sp>
+        <p:nvSpPr>
+          <p:cNvPr id="74" name="TextBox 73"/>
           <p:cNvSpPr txBox="1"/>
           <p:nvPr/>
         </p:nvSpPr>
         <p:spPr>
           <a:xfrm>
-            <a:off x="17149980" y="19931427"/>
-            <a:ext cx="180000" cy="302991"/>
+            <a:off x="17054010" y="19077294"/>
+            <a:ext cx="180000" cy="249522"/>
           </a:xfrm>
           <a:prstGeom prst="rect">
             <a:avLst/>
@@ -6661,31 +7081,66 @@
           <a:p>
             <a:pPr algn="l"/>
             <a:r>
-              <a:rPr sz="1835" b="0" i="0">
+              <a:rPr sz="1511" b="0" i="0">
                 <a:solidFill>
                   <a:srgbClr val="5B6570"/>
                 </a:solidFill>
                 <a:latin typeface="IBM Plex Sans"/>
               </a:rPr>
-              <a:t>Em bị trả lại nộp nguyện vọng kế tiếp</a:t>
-            </a:r>
-          </a:p>
-        </p:txBody>
-      </p:sp>
-      <p:sp>
-        <p:nvSpPr>
-          <p:cNvPr id="63" name="Rounded Rectangle 62"/>
+              <a:t>3. Em bị trả lại nộp nguyện vọng kế tiếp</a:t>
+            </a:r>
+          </a:p>
+        </p:txBody>
+      </p:sp>
+      <p:sp>
+        <p:nvSpPr>
+          <p:cNvPr id="75" name="TextBox 74"/>
+          <p:cNvSpPr txBox="1"/>
+          <p:nvPr/>
+        </p:nvSpPr>
+        <p:spPr>
+          <a:xfrm>
+            <a:off x="17054010" y="19365204"/>
+            <a:ext cx="180000" cy="249522"/>
+          </a:xfrm>
+          <a:prstGeom prst="rect">
+            <a:avLst/>
+          </a:prstGeom>
+          <a:noFill/>
+        </p:spPr>
+        <p:txBody>
+          <a:bodyPr wrap="none" anchor="t" lIns="0" rIns="0" tIns="0" bIns="0">
+            <a:spAutoFit/>
+          </a:bodyPr>
+          <a:lstStyle/>
+          <a:p>
+            <a:pPr algn="l"/>
+            <a:r>
+              <a:rPr sz="1511" b="0" i="0">
+                <a:solidFill>
+                  <a:srgbClr val="5B6570"/>
+                </a:solidFill>
+                <a:latin typeface="IBM Plex Sans"/>
+              </a:rPr>
+              <a:t>4. Lặp đến khi không còn ai phải nộp lại</a:t>
+            </a:r>
+          </a:p>
+        </p:txBody>
+      </p:sp>
+      <p:sp>
+        <p:nvSpPr>
+          <p:cNvPr id="76" name="Rounded Rectangle 75"/>
           <p:cNvSpPr/>
           <p:nvPr/>
         </p:nvSpPr>
         <p:spPr>
           <a:xfrm>
-            <a:off x="17149980" y="20771850"/>
-            <a:ext cx="4853340" cy="1713750"/>
+            <a:off x="17054010" y="19949250"/>
+            <a:ext cx="4839630" cy="1466970"/>
           </a:xfrm>
           <a:prstGeom prst="roundRect">
             <a:avLst>
-              <a:gd name="adj" fmla="val 7200"/>
+              <a:gd name="adj" fmla="val 8411"/>
             </a:avLst>
           </a:prstGeom>
           <a:solidFill>
@@ -6722,14 +7177,14 @@
       </p:sp>
       <p:sp>
         <p:nvSpPr>
-          <p:cNvPr id="64" name="TextBox 63"/>
+          <p:cNvPr id="77" name="TextBox 76"/>
           <p:cNvSpPr txBox="1"/>
           <p:nvPr/>
         </p:nvSpPr>
         <p:spPr>
           <a:xfrm>
-            <a:off x="17396760" y="21035082"/>
-            <a:ext cx="180000" cy="392106"/>
+            <a:off x="17273370" y="20176836"/>
+            <a:ext cx="180000" cy="285168"/>
           </a:xfrm>
           <a:prstGeom prst="rect">
             <a:avLst/>
@@ -6744,27 +7199,27 @@
           <a:p>
             <a:pPr algn="l"/>
             <a:r>
-              <a:rPr sz="2374" b="1" i="0">
+              <a:rPr sz="1727" b="1" i="0">
                 <a:solidFill>
                   <a:srgbClr val="1C2321"/>
                 </a:solidFill>
                 <a:latin typeface="Be Vietnam Pro"/>
               </a:rPr>
-              <a:t>Suất dự trữ</a:t>
-            </a:r>
-          </a:p>
-        </p:txBody>
-      </p:sp>
-      <p:sp>
-        <p:nvSpPr>
-          <p:cNvPr id="65" name="TextBox 64"/>
+              <a:t>Suất dự trữ — xét hai lượt</a:t>
+            </a:r>
+          </a:p>
+        </p:txBody>
+      </p:sp>
+      <p:sp>
+        <p:nvSpPr>
+          <p:cNvPr id="78" name="TextBox 77"/>
           <p:cNvSpPr txBox="1"/>
           <p:nvPr/>
         </p:nvSpPr>
         <p:spPr>
           <a:xfrm>
-            <a:off x="17396760" y="21590337"/>
-            <a:ext cx="180000" cy="302991"/>
+            <a:off x="17273370" y="20611443"/>
+            <a:ext cx="180000" cy="231699"/>
           </a:xfrm>
           <a:prstGeom prst="rect">
             <a:avLst/>
@@ -6779,27 +7234,27 @@
           <a:p>
             <a:pPr algn="l"/>
             <a:r>
-              <a:rPr sz="1835" b="0" i="0">
+              <a:rPr sz="1403" b="0" i="0">
                 <a:solidFill>
                   <a:srgbClr val="5B6570"/>
                 </a:solidFill>
                 <a:latin typeface="IBM Plex Sans"/>
               </a:rPr>
-              <a:t>Giữ chỗ cho nhóm ưu tiên</a:t>
-            </a:r>
-          </a:p>
-        </p:txBody>
-      </p:sp>
-      <p:sp>
-        <p:nvSpPr>
-          <p:cNvPr id="66" name="TextBox 65"/>
+              <a:t>Lượt 1 · chỉ xét em thuộc diện dự trữ</a:t>
+            </a:r>
+          </a:p>
+        </p:txBody>
+      </p:sp>
+      <p:sp>
+        <p:nvSpPr>
+          <p:cNvPr id="79" name="TextBox 78"/>
           <p:cNvSpPr txBox="1"/>
           <p:nvPr/>
         </p:nvSpPr>
         <p:spPr>
           <a:xfrm>
-            <a:off x="17396760" y="21960507"/>
-            <a:ext cx="180000" cy="302991"/>
+            <a:off x="17273370" y="20871933"/>
+            <a:ext cx="180000" cy="231699"/>
           </a:xfrm>
           <a:prstGeom prst="rect">
             <a:avLst/>
@@ -6814,27 +7269,62 @@
           <a:p>
             <a:pPr algn="l"/>
             <a:r>
-              <a:rPr sz="1835" b="0" i="0">
+              <a:rPr sz="1403" b="0" i="0">
                 <a:solidFill>
                   <a:srgbClr val="5B6570"/>
                 </a:solidFill>
                 <a:latin typeface="IBM Plex Sans"/>
               </a:rPr>
-              <a:t>Không đủ người → trả về xét chung</a:t>
-            </a:r>
-          </a:p>
-        </p:txBody>
-      </p:sp>
-      <p:sp>
-        <p:nvSpPr>
-          <p:cNvPr id="67" name="Right Arrow 66"/>
+              <a:t>Lượt 2 · xét chung phần chỗ còn lại</a:t>
+            </a:r>
+          </a:p>
+        </p:txBody>
+      </p:sp>
+      <p:sp>
+        <p:nvSpPr>
+          <p:cNvPr id="80" name="TextBox 79"/>
+          <p:cNvSpPr txBox="1"/>
+          <p:nvPr/>
+        </p:nvSpPr>
+        <p:spPr>
+          <a:xfrm>
+            <a:off x="17273370" y="21132423"/>
+            <a:ext cx="180000" cy="231699"/>
+          </a:xfrm>
+          <a:prstGeom prst="rect">
+            <a:avLst/>
+          </a:prstGeom>
+          <a:noFill/>
+        </p:spPr>
+        <p:txBody>
+          <a:bodyPr wrap="none" anchor="t" lIns="0" rIns="0" tIns="0" bIns="0">
+            <a:spAutoFit/>
+          </a:bodyPr>
+          <a:lstStyle/>
+          <a:p>
+            <a:pPr algn="l"/>
+            <a:r>
+              <a:rPr sz="1403" b="0" i="0">
+                <a:solidFill>
+                  <a:srgbClr val="5B6570"/>
+                </a:solidFill>
+                <a:latin typeface="IBM Plex Sans"/>
+              </a:rPr>
+              <a:t>Dư suất dự trữ → tự chuyển sang xét chung</a:t>
+            </a:r>
+          </a:p>
+        </p:txBody>
+      </p:sp>
+      <p:sp>
+        <p:nvSpPr>
+          <p:cNvPr id="81" name="Right Arrow 80"/>
           <p:cNvSpPr/>
           <p:nvPr/>
         </p:nvSpPr>
         <p:spPr>
           <a:xfrm>
-            <a:off x="22250100" y="20456520"/>
-            <a:ext cx="479850" cy="219360"/>
+            <a:off x="22113000" y="19565370"/>
+            <a:ext cx="411300" cy="219360"/>
           </a:xfrm>
           <a:prstGeom prst="rightArrow">
             <a:avLst/>
@@ -6871,18 +7361,18 @@
       </p:sp>
       <p:sp>
         <p:nvSpPr>
-          <p:cNvPr id="68" name="Rounded Rectangle 67"/>
+          <p:cNvPr id="82" name="Rounded Rectangle 81"/>
           <p:cNvSpPr/>
           <p:nvPr/>
         </p:nvSpPr>
         <p:spPr>
           <a:xfrm>
-            <a:off x="22729950" y="18921000"/>
-            <a:ext cx="3290400" cy="1371000"/>
+            <a:off x="22524300" y="17755650"/>
+            <a:ext cx="3496050" cy="2056500"/>
           </a:xfrm>
           <a:prstGeom prst="roundRect">
             <a:avLst>
-              <a:gd name="adj" fmla="val 9000"/>
+              <a:gd name="adj" fmla="val 6000"/>
             </a:avLst>
           </a:prstGeom>
           <a:solidFill>
@@ -6919,14 +7409,14 @@
       </p:sp>
       <p:sp>
         <p:nvSpPr>
-          <p:cNvPr id="69" name="Oval 68"/>
+          <p:cNvPr id="83" name="Oval 82"/>
           <p:cNvSpPr/>
           <p:nvPr/>
         </p:nvSpPr>
         <p:spPr>
           <a:xfrm>
-            <a:off x="22921890" y="19126650"/>
-            <a:ext cx="438720" cy="438720"/>
+            <a:off x="22702530" y="17947590"/>
+            <a:ext cx="411300" cy="411300"/>
           </a:xfrm>
           <a:prstGeom prst="ellipse">
             <a:avLst/>
@@ -6972,14 +7462,14 @@
       </p:sp>
       <p:sp>
         <p:nvSpPr>
-          <p:cNvPr id="70" name="TextBox 69"/>
+          <p:cNvPr id="84" name="TextBox 83"/>
           <p:cNvSpPr txBox="1"/>
           <p:nvPr/>
         </p:nvSpPr>
         <p:spPr>
           <a:xfrm>
-            <a:off x="23497710" y="19184232"/>
-            <a:ext cx="180000" cy="392106"/>
+            <a:off x="23237220" y="17988720"/>
+            <a:ext cx="180000" cy="356460"/>
           </a:xfrm>
           <a:prstGeom prst="rect">
             <a:avLst/>
@@ -6994,7 +7484,7 @@
           <a:p>
             <a:pPr algn="l"/>
             <a:r>
-              <a:rPr sz="2374" b="1" i="0">
+              <a:rPr sz="2159" b="1" i="0">
                 <a:solidFill>
                   <a:srgbClr val="1C2321"/>
                 </a:solidFill>
@@ -7007,14 +7497,14 @@
       </p:sp>
       <p:sp>
         <p:nvSpPr>
-          <p:cNvPr id="71" name="TextBox 70"/>
+          <p:cNvPr id="85" name="TextBox 84"/>
           <p:cNvSpPr txBox="1"/>
           <p:nvPr/>
         </p:nvSpPr>
         <p:spPr>
           <a:xfrm>
-            <a:off x="22976730" y="19739487"/>
-            <a:ext cx="180000" cy="302991"/>
+            <a:off x="22743660" y="18487764"/>
+            <a:ext cx="180000" cy="249522"/>
           </a:xfrm>
           <a:prstGeom prst="rect">
             <a:avLst/>
@@ -7029,27 +7519,97 @@
           <a:p>
             <a:pPr algn="l"/>
             <a:r>
-              <a:rPr sz="1835" b="0" i="0">
+              <a:rPr sz="1511" b="0" i="0">
                 <a:solidFill>
                   <a:srgbClr val="5B6570"/>
                 </a:solidFill>
                 <a:latin typeface="IBM Plex Sans"/>
               </a:rPr>
-              <a:t>Không còn cặp phá vỡ</a:t>
-            </a:r>
-          </a:p>
-        </p:txBody>
-      </p:sp>
-      <p:sp>
-        <p:nvSpPr>
-          <p:cNvPr id="72" name="Down Arrow 71"/>
+              <a:t>Tìm cặp phá vỡ: em thích CLB</a:t>
+            </a:r>
+          </a:p>
+        </p:txBody>
+      </p:sp>
+      <p:sp>
+        <p:nvSpPr>
+          <p:cNvPr id="86" name="TextBox 85"/>
+          <p:cNvSpPr txBox="1"/>
+          <p:nvPr/>
+        </p:nvSpPr>
+        <p:spPr>
+          <a:xfrm>
+            <a:off x="22743660" y="18775674"/>
+            <a:ext cx="180000" cy="249522"/>
+          </a:xfrm>
+          <a:prstGeom prst="rect">
+            <a:avLst/>
+          </a:prstGeom>
+          <a:noFill/>
+        </p:spPr>
+        <p:txBody>
+          <a:bodyPr wrap="none" anchor="t" lIns="0" rIns="0" tIns="0" bIns="0">
+            <a:spAutoFit/>
+          </a:bodyPr>
+          <a:lstStyle/>
+          <a:p>
+            <a:pPr algn="l"/>
+            <a:r>
+              <a:rPr sz="1511" b="0" i="0">
+                <a:solidFill>
+                  <a:srgbClr val="5B6570"/>
+                </a:solidFill>
+                <a:latin typeface="IBM Plex Sans"/>
+              </a:rPr>
+              <a:t>khác hơn và CLB đó cũng nhận em</a:t>
+            </a:r>
+          </a:p>
+        </p:txBody>
+      </p:sp>
+      <p:sp>
+        <p:nvSpPr>
+          <p:cNvPr id="87" name="TextBox 86"/>
+          <p:cNvSpPr txBox="1"/>
+          <p:nvPr/>
+        </p:nvSpPr>
+        <p:spPr>
+          <a:xfrm>
+            <a:off x="22743660" y="19063584"/>
+            <a:ext cx="180000" cy="249522"/>
+          </a:xfrm>
+          <a:prstGeom prst="rect">
+            <a:avLst/>
+          </a:prstGeom>
+          <a:noFill/>
+        </p:spPr>
+        <p:txBody>
+          <a:bodyPr wrap="none" anchor="t" lIns="0" rIns="0" tIns="0" bIns="0">
+            <a:spAutoFit/>
+          </a:bodyPr>
+          <a:lstStyle/>
+          <a:p>
+            <a:pPr algn="l"/>
+            <a:r>
+              <a:rPr sz="1511" b="0" i="0">
+                <a:solidFill>
+                  <a:srgbClr val="5B6570"/>
+                </a:solidFill>
+                <a:latin typeface="IBM Plex Sans"/>
+              </a:rPr>
+              <a:t>Yêu cầu: 0 cặp</a:t>
+            </a:r>
+          </a:p>
+        </p:txBody>
+      </p:sp>
+      <p:sp>
+        <p:nvSpPr>
+          <p:cNvPr id="88" name="Down Arrow 87"/>
           <p:cNvSpPr/>
           <p:nvPr/>
         </p:nvSpPr>
         <p:spPr>
           <a:xfrm>
-            <a:off x="24265470" y="20292000"/>
-            <a:ext cx="219360" cy="479850"/>
+            <a:off x="24162645" y="19812150"/>
+            <a:ext cx="219360" cy="342750"/>
           </a:xfrm>
           <a:prstGeom prst="downArrow">
             <a:avLst/>
@@ -7086,18 +7646,18 @@
       </p:sp>
       <p:sp>
         <p:nvSpPr>
-          <p:cNvPr id="73" name="Rounded Rectangle 72"/>
+          <p:cNvPr id="89" name="Rounded Rectangle 88"/>
           <p:cNvSpPr/>
           <p:nvPr/>
         </p:nvSpPr>
         <p:spPr>
           <a:xfrm>
-            <a:off x="22729950" y="20771850"/>
-            <a:ext cx="3290400" cy="1713750"/>
+            <a:off x="22524300" y="20154900"/>
+            <a:ext cx="3496050" cy="1439550"/>
           </a:xfrm>
           <a:prstGeom prst="roundRect">
             <a:avLst>
-              <a:gd name="adj" fmla="val 7200"/>
+              <a:gd name="adj" fmla="val 8571"/>
             </a:avLst>
           </a:prstGeom>
           <a:solidFill>
@@ -7134,14 +7694,14 @@
       </p:sp>
       <p:sp>
         <p:nvSpPr>
-          <p:cNvPr id="74" name="TextBox 73"/>
+          <p:cNvPr id="90" name="TextBox 89"/>
           <p:cNvSpPr txBox="1"/>
           <p:nvPr/>
         </p:nvSpPr>
         <p:spPr>
           <a:xfrm>
-            <a:off x="22976730" y="21035082"/>
-            <a:ext cx="180000" cy="392106"/>
+            <a:off x="22743660" y="20387970"/>
+            <a:ext cx="180000" cy="356460"/>
           </a:xfrm>
           <a:prstGeom prst="rect">
             <a:avLst/>
@@ -7156,7 +7716,7 @@
           <a:p>
             <a:pPr algn="l"/>
             <a:r>
-              <a:rPr sz="2374" b="1" i="0">
+              <a:rPr sz="2159" b="1" i="0">
                 <a:solidFill>
                   <a:srgbClr val="1C2321"/>
                 </a:solidFill>
@@ -7169,14 +7729,14 @@
       </p:sp>
       <p:sp>
         <p:nvSpPr>
-          <p:cNvPr id="75" name="TextBox 74"/>
+          <p:cNvPr id="91" name="TextBox 90"/>
           <p:cNvSpPr txBox="1"/>
           <p:nvPr/>
         </p:nvSpPr>
         <p:spPr>
           <a:xfrm>
-            <a:off x="22976730" y="21590337"/>
-            <a:ext cx="180000" cy="302991"/>
+            <a:off x="22743660" y="20887014"/>
+            <a:ext cx="180000" cy="249522"/>
           </a:xfrm>
           <a:prstGeom prst="rect">
             <a:avLst/>
@@ -7191,7 +7751,7 @@
           <a:p>
             <a:pPr algn="l"/>
             <a:r>
-              <a:rPr sz="1835" b="0" i="0">
+              <a:rPr sz="1511" b="0" i="0">
                 <a:solidFill>
                   <a:srgbClr val="5B6570"/>
                 </a:solidFill>
@@ -7204,14 +7764,14 @@
       </p:sp>
       <p:sp>
         <p:nvSpPr>
-          <p:cNvPr id="76" name="TextBox 75"/>
+          <p:cNvPr id="92" name="TextBox 91"/>
           <p:cNvSpPr txBox="1"/>
           <p:nvPr/>
         </p:nvSpPr>
         <p:spPr>
           <a:xfrm>
-            <a:off x="22976730" y="21960507"/>
-            <a:ext cx="180000" cy="302991"/>
+            <a:off x="22743660" y="21174924"/>
+            <a:ext cx="180000" cy="249522"/>
           </a:xfrm>
           <a:prstGeom prst="rect">
             <a:avLst/>
@@ -7226,27 +7786,119 @@
           <a:p>
             <a:pPr algn="l"/>
             <a:r>
-              <a:rPr sz="1835" b="0" i="0">
+              <a:rPr sz="1511" b="0" i="0">
                 <a:solidFill>
                   <a:srgbClr val="5B6570"/>
                 </a:solidFill>
                 <a:latin typeface="IBM Plex Sans"/>
               </a:rPr>
-              <a:t>Danh sách từng CLB</a:t>
-            </a:r>
-          </a:p>
-        </p:txBody>
-      </p:sp>
-      <p:sp>
-        <p:nvSpPr>
-          <p:cNvPr id="77" name="TextBox 76"/>
+              <a:t>Xuất danh sách từng CLB</a:t>
+            </a:r>
+          </a:p>
+        </p:txBody>
+      </p:sp>
+      <p:sp>
+        <p:nvSpPr>
+          <p:cNvPr id="93" name="Down Arrow 92"/>
+          <p:cNvSpPr/>
+          <p:nvPr/>
+        </p:nvSpPr>
+        <p:spPr>
+          <a:xfrm>
+            <a:off x="14325720" y="21594450"/>
+            <a:ext cx="219360" cy="411300"/>
+          </a:xfrm>
+          <a:prstGeom prst="downArrow">
+            <a:avLst/>
+          </a:prstGeom>
+          <a:solidFill>
+            <a:srgbClr val="5B6570"/>
+          </a:solidFill>
+          <a:ln>
+            <a:noFill/>
+          </a:ln>
+          <a:effectLst/>
+        </p:spPr>
+        <p:style>
+          <a:lnRef idx="1">
+            <a:schemeClr val="accent1"/>
+          </a:lnRef>
+          <a:fillRef idx="3">
+            <a:schemeClr val="accent1"/>
+          </a:fillRef>
+          <a:effectRef idx="2">
+            <a:schemeClr val="accent1"/>
+          </a:effectRef>
+          <a:fontRef idx="minor">
+            <a:schemeClr val="lt1"/>
+          </a:fontRef>
+        </p:style>
+        <p:txBody>
+          <a:bodyPr rtlCol="0" anchor="ctr"/>
+          <a:lstStyle/>
+          <a:p>
+            <a:pPr algn="ctr"/>
+          </a:p>
+        </p:txBody>
+      </p:sp>
+      <p:sp>
+        <p:nvSpPr>
+          <p:cNvPr id="94" name="Rounded Rectangle 93"/>
+          <p:cNvSpPr/>
+          <p:nvPr/>
+        </p:nvSpPr>
+        <p:spPr>
+          <a:xfrm>
+            <a:off x="9979650" y="22005750"/>
+            <a:ext cx="16040700" cy="2193600"/>
+          </a:xfrm>
+          <a:prstGeom prst="roundRect">
+            <a:avLst>
+              <a:gd name="adj" fmla="val 5625"/>
+            </a:avLst>
+          </a:prstGeom>
+          <a:solidFill>
+            <a:srgbClr val="F1DFB8"/>
+          </a:solidFill>
+          <a:ln w="20565">
+            <a:solidFill>
+              <a:srgbClr val="B8781A"/>
+            </a:solidFill>
+          </a:ln>
+          <a:effectLst/>
+        </p:spPr>
+        <p:style>
+          <a:lnRef idx="1">
+            <a:schemeClr val="accent1"/>
+          </a:lnRef>
+          <a:fillRef idx="3">
+            <a:schemeClr val="accent1"/>
+          </a:fillRef>
+          <a:effectRef idx="2">
+            <a:schemeClr val="accent1"/>
+          </a:effectRef>
+          <a:fontRef idx="minor">
+            <a:schemeClr val="lt1"/>
+          </a:fontRef>
+        </p:style>
+        <p:txBody>
+          <a:bodyPr rtlCol="0" anchor="ctr"/>
+          <a:lstStyle/>
+          <a:p>
+            <a:pPr algn="ctr"/>
+          </a:p>
+        </p:txBody>
+      </p:sp>
+      <p:sp>
+        <p:nvSpPr>
+          <p:cNvPr id="95" name="TextBox 94"/>
           <p:cNvSpPr txBox="1"/>
           <p:nvPr/>
         </p:nvSpPr>
         <p:spPr>
           <a:xfrm>
-            <a:off x="10048200" y="23216343"/>
-            <a:ext cx="180000" cy="231699"/>
+            <a:off x="10199010" y="22208658"/>
+            <a:ext cx="180000" cy="320814"/>
           </a:xfrm>
           <a:prstGeom prst="rect">
             <a:avLst/>
@@ -7261,7 +7913,794 @@
           <a:p>
             <a:pPr algn="l"/>
             <a:r>
-              <a:rPr sz="1403" b="0" i="0">
+              <a:rPr sz="1943" b="1" i="0">
+                <a:solidFill>
+                  <a:srgbClr val="1C2321"/>
+                </a:solidFill>
+                <a:latin typeface="Be Vietnam Pro"/>
+              </a:rPr>
+              <a:t>Bốc thăm hoạt động thế nào</a:t>
+            </a:r>
+          </a:p>
+        </p:txBody>
+      </p:sp>
+      <p:sp>
+        <p:nvSpPr>
+          <p:cNvPr id="96" name="Rounded Rectangle 95"/>
+          <p:cNvSpPr/>
+          <p:nvPr/>
+        </p:nvSpPr>
+        <p:spPr>
+          <a:xfrm>
+            <a:off x="10199010" y="22622700"/>
+            <a:ext cx="3756540" cy="1371000"/>
+          </a:xfrm>
+          <a:prstGeom prst="roundRect">
+            <a:avLst>
+              <a:gd name="adj" fmla="val 9000"/>
+            </a:avLst>
+          </a:prstGeom>
+          <a:solidFill>
+            <a:srgbClr val="FFFFFF"/>
+          </a:solidFill>
+          <a:ln w="13710">
+            <a:solidFill>
+              <a:srgbClr val="B8781A"/>
+            </a:solidFill>
+          </a:ln>
+          <a:effectLst/>
+        </p:spPr>
+        <p:style>
+          <a:lnRef idx="1">
+            <a:schemeClr val="accent1"/>
+          </a:lnRef>
+          <a:fillRef idx="3">
+            <a:schemeClr val="accent1"/>
+          </a:fillRef>
+          <a:effectRef idx="2">
+            <a:schemeClr val="accent1"/>
+          </a:effectRef>
+          <a:fontRef idx="minor">
+            <a:schemeClr val="lt1"/>
+          </a:fontRef>
+        </p:style>
+        <p:txBody>
+          <a:bodyPr rtlCol="0" anchor="ctr"/>
+          <a:lstStyle/>
+          <a:p>
+            <a:pPr algn="ctr"/>
+          </a:p>
+        </p:txBody>
+      </p:sp>
+      <p:sp>
+        <p:nvSpPr>
+          <p:cNvPr id="97" name="TextBox 96"/>
+          <p:cNvSpPr txBox="1"/>
+          <p:nvPr/>
+        </p:nvSpPr>
+        <p:spPr>
+          <a:xfrm>
+            <a:off x="10418370" y="22848915"/>
+            <a:ext cx="180000" cy="267345"/>
+          </a:xfrm>
+          <a:prstGeom prst="rect">
+            <a:avLst/>
+          </a:prstGeom>
+          <a:noFill/>
+        </p:spPr>
+        <p:txBody>
+          <a:bodyPr wrap="none" anchor="t" lIns="0" rIns="0" tIns="0" bIns="0">
+            <a:spAutoFit/>
+          </a:bodyPr>
+          <a:lstStyle/>
+          <a:p>
+            <a:pPr algn="l"/>
+            <a:r>
+              <a:rPr sz="1619" b="1" i="0">
+                <a:solidFill>
+                  <a:srgbClr val="1C2321"/>
+                </a:solidFill>
+                <a:latin typeface="Be Vietnam Pro"/>
+              </a:rPr>
+              <a:t>Một em · một số</a:t>
+            </a:r>
+          </a:p>
+        </p:txBody>
+      </p:sp>
+      <p:sp>
+        <p:nvSpPr>
+          <p:cNvPr id="98" name="TextBox 97"/>
+          <p:cNvSpPr txBox="1"/>
+          <p:nvPr/>
+        </p:nvSpPr>
+        <p:spPr>
+          <a:xfrm>
+            <a:off x="10418370" y="23263642"/>
+            <a:ext cx="180000" cy="222787"/>
+          </a:xfrm>
+          <a:prstGeom prst="rect">
+            <a:avLst/>
+          </a:prstGeom>
+          <a:noFill/>
+        </p:spPr>
+        <p:txBody>
+          <a:bodyPr wrap="none" anchor="t" lIns="0" rIns="0" tIns="0" bIns="0">
+            <a:spAutoFit/>
+          </a:bodyPr>
+          <a:lstStyle/>
+          <a:p>
+            <a:pPr algn="l"/>
+            <a:r>
+              <a:rPr sz="1349" b="0" i="0">
+                <a:solidFill>
+                  <a:srgbClr val="5B6570"/>
+                </a:solidFill>
+                <a:latin typeface="IBM Plex Sans"/>
+              </a:rPr>
+              <a:t>Bốc một lần cho mỗi học sinh</a:t>
+            </a:r>
+          </a:p>
+        </p:txBody>
+      </p:sp>
+      <p:sp>
+        <p:nvSpPr>
+          <p:cNvPr id="99" name="TextBox 98"/>
+          <p:cNvSpPr txBox="1"/>
+          <p:nvPr/>
+        </p:nvSpPr>
+        <p:spPr>
+          <a:xfrm>
+            <a:off x="10418370" y="23510422"/>
+            <a:ext cx="180000" cy="222787"/>
+          </a:xfrm>
+          <a:prstGeom prst="rect">
+            <a:avLst/>
+          </a:prstGeom>
+          <a:noFill/>
+        </p:spPr>
+        <p:txBody>
+          <a:bodyPr wrap="none" anchor="t" lIns="0" rIns="0" tIns="0" bIns="0">
+            <a:spAutoFit/>
+          </a:bodyPr>
+          <a:lstStyle/>
+          <a:p>
+            <a:pPr algn="l"/>
+            <a:r>
+              <a:rPr sz="1349" b="0" i="0">
+                <a:solidFill>
+                  <a:srgbClr val="5B6570"/>
+                </a:solidFill>
+                <a:latin typeface="IBM Plex Sans"/>
+              </a:rPr>
+              <a:t>Dùng chung cho mọi CLB</a:t>
+            </a:r>
+          </a:p>
+        </p:txBody>
+      </p:sp>
+      <p:sp>
+        <p:nvSpPr>
+          <p:cNvPr id="100" name="TextBox 99"/>
+          <p:cNvSpPr txBox="1"/>
+          <p:nvPr/>
+        </p:nvSpPr>
+        <p:spPr>
+          <a:xfrm>
+            <a:off x="10418370" y="23757202"/>
+            <a:ext cx="180000" cy="222787"/>
+          </a:xfrm>
+          <a:prstGeom prst="rect">
+            <a:avLst/>
+          </a:prstGeom>
+          <a:noFill/>
+        </p:spPr>
+        <p:txBody>
+          <a:bodyPr wrap="none" anchor="t" lIns="0" rIns="0" tIns="0" bIns="0">
+            <a:spAutoFit/>
+          </a:bodyPr>
+          <a:lstStyle/>
+          <a:p>
+            <a:pPr algn="l"/>
+            <a:r>
+              <a:rPr sz="1349" b="0" i="0">
+                <a:solidFill>
+                  <a:srgbClr val="5B6570"/>
+                </a:solidFill>
+                <a:latin typeface="IBM Plex Sans"/>
+              </a:rPr>
+              <a:t>Số nhỏ hơn → ưu tiên hơn</a:t>
+            </a:r>
+          </a:p>
+        </p:txBody>
+      </p:sp>
+      <p:sp>
+        <p:nvSpPr>
+          <p:cNvPr id="101" name="Rounded Rectangle 100"/>
+          <p:cNvSpPr/>
+          <p:nvPr/>
+        </p:nvSpPr>
+        <p:spPr>
+          <a:xfrm>
+            <a:off x="14147490" y="22622700"/>
+            <a:ext cx="3756540" cy="1371000"/>
+          </a:xfrm>
+          <a:prstGeom prst="roundRect">
+            <a:avLst>
+              <a:gd name="adj" fmla="val 9000"/>
+            </a:avLst>
+          </a:prstGeom>
+          <a:solidFill>
+            <a:srgbClr val="FFFFFF"/>
+          </a:solidFill>
+          <a:ln w="13710">
+            <a:solidFill>
+              <a:srgbClr val="B8781A"/>
+            </a:solidFill>
+          </a:ln>
+          <a:effectLst/>
+        </p:spPr>
+        <p:style>
+          <a:lnRef idx="1">
+            <a:schemeClr val="accent1"/>
+          </a:lnRef>
+          <a:fillRef idx="3">
+            <a:schemeClr val="accent1"/>
+          </a:fillRef>
+          <a:effectRef idx="2">
+            <a:schemeClr val="accent1"/>
+          </a:effectRef>
+          <a:fontRef idx="minor">
+            <a:schemeClr val="lt1"/>
+          </a:fontRef>
+        </p:style>
+        <p:txBody>
+          <a:bodyPr rtlCol="0" anchor="ctr"/>
+          <a:lstStyle/>
+          <a:p>
+            <a:pPr algn="ctr"/>
+          </a:p>
+        </p:txBody>
+      </p:sp>
+      <p:sp>
+        <p:nvSpPr>
+          <p:cNvPr id="102" name="TextBox 101"/>
+          <p:cNvSpPr txBox="1"/>
+          <p:nvPr/>
+        </p:nvSpPr>
+        <p:spPr>
+          <a:xfrm>
+            <a:off x="14366850" y="22848915"/>
+            <a:ext cx="180000" cy="267345"/>
+          </a:xfrm>
+          <a:prstGeom prst="rect">
+            <a:avLst/>
+          </a:prstGeom>
+          <a:noFill/>
+        </p:spPr>
+        <p:txBody>
+          <a:bodyPr wrap="none" anchor="t" lIns="0" rIns="0" tIns="0" bIns="0">
+            <a:spAutoFit/>
+          </a:bodyPr>
+          <a:lstStyle/>
+          <a:p>
+            <a:pPr algn="l"/>
+            <a:r>
+              <a:rPr sz="1619" b="1" i="0">
+                <a:solidFill>
+                  <a:srgbClr val="1C2321"/>
+                </a:solidFill>
+                <a:latin typeface="Be Vietnam Pro"/>
+              </a:rPr>
+              <a:t>Chỉ dùng khi hoà</a:t>
+            </a:r>
+          </a:p>
+        </p:txBody>
+      </p:sp>
+      <p:sp>
+        <p:nvSpPr>
+          <p:cNvPr id="103" name="TextBox 102"/>
+          <p:cNvSpPr txBox="1"/>
+          <p:nvPr/>
+        </p:nvSpPr>
+        <p:spPr>
+          <a:xfrm>
+            <a:off x="14366850" y="23263642"/>
+            <a:ext cx="180000" cy="222787"/>
+          </a:xfrm>
+          <a:prstGeom prst="rect">
+            <a:avLst/>
+          </a:prstGeom>
+          <a:noFill/>
+        </p:spPr>
+        <p:txBody>
+          <a:bodyPr wrap="none" anchor="t" lIns="0" rIns="0" tIns="0" bIns="0">
+            <a:spAutoFit/>
+          </a:bodyPr>
+          <a:lstStyle/>
+          <a:p>
+            <a:pPr algn="l"/>
+            <a:r>
+              <a:rPr sz="1349" b="0" i="0">
+                <a:solidFill>
+                  <a:srgbClr val="5B6570"/>
+                </a:solidFill>
+                <a:latin typeface="IBM Plex Sans"/>
+              </a:rPr>
+              <a:t>Hai em bằng điểm ở cùng CLB</a:t>
+            </a:r>
+          </a:p>
+        </p:txBody>
+      </p:sp>
+      <p:sp>
+        <p:nvSpPr>
+          <p:cNvPr id="104" name="TextBox 103"/>
+          <p:cNvSpPr txBox="1"/>
+          <p:nvPr/>
+        </p:nvSpPr>
+        <p:spPr>
+          <a:xfrm>
+            <a:off x="14366850" y="23510422"/>
+            <a:ext cx="180000" cy="222787"/>
+          </a:xfrm>
+          <a:prstGeom prst="rect">
+            <a:avLst/>
+          </a:prstGeom>
+          <a:noFill/>
+        </p:spPr>
+        <p:txBody>
+          <a:bodyPr wrap="none" anchor="t" lIns="0" rIns="0" tIns="0" bIns="0">
+            <a:spAutoFit/>
+          </a:bodyPr>
+          <a:lstStyle/>
+          <a:p>
+            <a:pPr algn="l"/>
+            <a:r>
+              <a:rPr sz="1349" b="0" i="0">
+                <a:solidFill>
+                  <a:srgbClr val="5B6570"/>
+                </a:solidFill>
+                <a:latin typeface="IBM Plex Sans"/>
+              </a:rPr>
+              <a:t>hoặc em không thi CLB đó</a:t>
+            </a:r>
+          </a:p>
+        </p:txBody>
+      </p:sp>
+      <p:sp>
+        <p:nvSpPr>
+          <p:cNvPr id="105" name="TextBox 104"/>
+          <p:cNvSpPr txBox="1"/>
+          <p:nvPr/>
+        </p:nvSpPr>
+        <p:spPr>
+          <a:xfrm>
+            <a:off x="14366850" y="23757202"/>
+            <a:ext cx="180000" cy="222787"/>
+          </a:xfrm>
+          <a:prstGeom prst="rect">
+            <a:avLst/>
+          </a:prstGeom>
+          <a:noFill/>
+        </p:spPr>
+        <p:txBody>
+          <a:bodyPr wrap="none" anchor="t" lIns="0" rIns="0" tIns="0" bIns="0">
+            <a:spAutoFit/>
+          </a:bodyPr>
+          <a:lstStyle/>
+          <a:p>
+            <a:pPr algn="l"/>
+            <a:r>
+              <a:rPr sz="1349" b="0" i="0">
+                <a:solidFill>
+                  <a:srgbClr val="5B6570"/>
+                </a:solidFill>
+                <a:latin typeface="IBM Plex Sans"/>
+              </a:rPr>
+              <a:t>Điểm luôn quyết định trước</a:t>
+            </a:r>
+          </a:p>
+        </p:txBody>
+      </p:sp>
+      <p:sp>
+        <p:nvSpPr>
+          <p:cNvPr id="106" name="Rounded Rectangle 105"/>
+          <p:cNvSpPr/>
+          <p:nvPr/>
+        </p:nvSpPr>
+        <p:spPr>
+          <a:xfrm>
+            <a:off x="18095970" y="22622700"/>
+            <a:ext cx="3756540" cy="1371000"/>
+          </a:xfrm>
+          <a:prstGeom prst="roundRect">
+            <a:avLst>
+              <a:gd name="adj" fmla="val 9000"/>
+            </a:avLst>
+          </a:prstGeom>
+          <a:solidFill>
+            <a:srgbClr val="FFFFFF"/>
+          </a:solidFill>
+          <a:ln w="13710">
+            <a:solidFill>
+              <a:srgbClr val="B8781A"/>
+            </a:solidFill>
+          </a:ln>
+          <a:effectLst/>
+        </p:spPr>
+        <p:style>
+          <a:lnRef idx="1">
+            <a:schemeClr val="accent1"/>
+          </a:lnRef>
+          <a:fillRef idx="3">
+            <a:schemeClr val="accent1"/>
+          </a:fillRef>
+          <a:effectRef idx="2">
+            <a:schemeClr val="accent1"/>
+          </a:effectRef>
+          <a:fontRef idx="minor">
+            <a:schemeClr val="lt1"/>
+          </a:fontRef>
+        </p:style>
+        <p:txBody>
+          <a:bodyPr rtlCol="0" anchor="ctr"/>
+          <a:lstStyle/>
+          <a:p>
+            <a:pPr algn="ctr"/>
+          </a:p>
+        </p:txBody>
+      </p:sp>
+      <p:sp>
+        <p:nvSpPr>
+          <p:cNvPr id="107" name="TextBox 106"/>
+          <p:cNvSpPr txBox="1"/>
+          <p:nvPr/>
+        </p:nvSpPr>
+        <p:spPr>
+          <a:xfrm>
+            <a:off x="18315330" y="22848915"/>
+            <a:ext cx="180000" cy="267345"/>
+          </a:xfrm>
+          <a:prstGeom prst="rect">
+            <a:avLst/>
+          </a:prstGeom>
+          <a:noFill/>
+        </p:spPr>
+        <p:txBody>
+          <a:bodyPr wrap="none" anchor="t" lIns="0" rIns="0" tIns="0" bIns="0">
+            <a:spAutoFit/>
+          </a:bodyPr>
+          <a:lstStyle/>
+          <a:p>
+            <a:pPr algn="l"/>
+            <a:r>
+              <a:rPr sz="1619" b="1" i="0">
+                <a:solidFill>
+                  <a:srgbClr val="1C2321"/>
+                </a:solidFill>
+                <a:latin typeface="Be Vietnam Pro"/>
+              </a:rPr>
+              <a:t>Kiểm tra lại được</a:t>
+            </a:r>
+          </a:p>
+        </p:txBody>
+      </p:sp>
+      <p:sp>
+        <p:nvSpPr>
+          <p:cNvPr id="108" name="TextBox 107"/>
+          <p:cNvSpPr txBox="1"/>
+          <p:nvPr/>
+        </p:nvSpPr>
+        <p:spPr>
+          <a:xfrm>
+            <a:off x="18315330" y="23263642"/>
+            <a:ext cx="180000" cy="222787"/>
+          </a:xfrm>
+          <a:prstGeom prst="rect">
+            <a:avLst/>
+          </a:prstGeom>
+          <a:noFill/>
+        </p:spPr>
+        <p:txBody>
+          <a:bodyPr wrap="none" anchor="t" lIns="0" rIns="0" tIns="0" bIns="0">
+            <a:spAutoFit/>
+          </a:bodyPr>
+          <a:lstStyle/>
+          <a:p>
+            <a:pPr algn="l"/>
+            <a:r>
+              <a:rPr sz="1349" b="0" i="0">
+                <a:solidFill>
+                  <a:srgbClr val="5B6570"/>
+                </a:solidFill>
+                <a:latin typeface="IBM Plex Sans"/>
+              </a:rPr>
+              <a:t>Không phụ thuộc thứ tự nhập tên</a:t>
+            </a:r>
+          </a:p>
+        </p:txBody>
+      </p:sp>
+      <p:sp>
+        <p:nvSpPr>
+          <p:cNvPr id="109" name="TextBox 108"/>
+          <p:cNvSpPr txBox="1"/>
+          <p:nvPr/>
+        </p:nvSpPr>
+        <p:spPr>
+          <a:xfrm>
+            <a:off x="18315330" y="23510422"/>
+            <a:ext cx="180000" cy="222787"/>
+          </a:xfrm>
+          <a:prstGeom prst="rect">
+            <a:avLst/>
+          </a:prstGeom>
+          <a:noFill/>
+        </p:spPr>
+        <p:txBody>
+          <a:bodyPr wrap="none" anchor="t" lIns="0" rIns="0" tIns="0" bIns="0">
+            <a:spAutoFit/>
+          </a:bodyPr>
+          <a:lstStyle/>
+          <a:p>
+            <a:pPr algn="l"/>
+            <a:r>
+              <a:rPr sz="1349" b="0" i="0">
+                <a:solidFill>
+                  <a:srgbClr val="5B6570"/>
+                </a:solidFill>
+                <a:latin typeface="IBM Plex Sans"/>
+              </a:rPr>
+              <a:t>Cùng dữ liệu + cùng hạt giống</a:t>
+            </a:r>
+          </a:p>
+        </p:txBody>
+      </p:sp>
+      <p:sp>
+        <p:nvSpPr>
+          <p:cNvPr id="110" name="TextBox 109"/>
+          <p:cNvSpPr txBox="1"/>
+          <p:nvPr/>
+        </p:nvSpPr>
+        <p:spPr>
+          <a:xfrm>
+            <a:off x="18315330" y="23757202"/>
+            <a:ext cx="180000" cy="222787"/>
+          </a:xfrm>
+          <a:prstGeom prst="rect">
+            <a:avLst/>
+          </a:prstGeom>
+          <a:noFill/>
+        </p:spPr>
+        <p:txBody>
+          <a:bodyPr wrap="none" anchor="t" lIns="0" rIns="0" tIns="0" bIns="0">
+            <a:spAutoFit/>
+          </a:bodyPr>
+          <a:lstStyle/>
+          <a:p>
+            <a:pPr algn="l"/>
+            <a:r>
+              <a:rPr sz="1349" b="0" i="0">
+                <a:solidFill>
+                  <a:srgbClr val="5B6570"/>
+                </a:solidFill>
+                <a:latin typeface="IBM Plex Sans"/>
+              </a:rPr>
+              <a:t>→ ra đúng một kết quả</a:t>
+            </a:r>
+          </a:p>
+        </p:txBody>
+      </p:sp>
+      <p:sp>
+        <p:nvSpPr>
+          <p:cNvPr id="111" name="Rounded Rectangle 110"/>
+          <p:cNvSpPr/>
+          <p:nvPr/>
+        </p:nvSpPr>
+        <p:spPr>
+          <a:xfrm>
+            <a:off x="22044450" y="22622700"/>
+            <a:ext cx="3756540" cy="1371000"/>
+          </a:xfrm>
+          <a:prstGeom prst="roundRect">
+            <a:avLst>
+              <a:gd name="adj" fmla="val 9000"/>
+            </a:avLst>
+          </a:prstGeom>
+          <a:solidFill>
+            <a:srgbClr val="FFFFFF"/>
+          </a:solidFill>
+          <a:ln w="13710">
+            <a:solidFill>
+              <a:srgbClr val="B8781A"/>
+            </a:solidFill>
+          </a:ln>
+          <a:effectLst/>
+        </p:spPr>
+        <p:style>
+          <a:lnRef idx="1">
+            <a:schemeClr val="accent1"/>
+          </a:lnRef>
+          <a:fillRef idx="3">
+            <a:schemeClr val="accent1"/>
+          </a:fillRef>
+          <a:effectRef idx="2">
+            <a:schemeClr val="accent1"/>
+          </a:effectRef>
+          <a:fontRef idx="minor">
+            <a:schemeClr val="lt1"/>
+          </a:fontRef>
+        </p:style>
+        <p:txBody>
+          <a:bodyPr rtlCol="0" anchor="ctr"/>
+          <a:lstStyle/>
+          <a:p>
+            <a:pPr algn="ctr"/>
+          </a:p>
+        </p:txBody>
+      </p:sp>
+      <p:sp>
+        <p:nvSpPr>
+          <p:cNvPr id="112" name="TextBox 111"/>
+          <p:cNvSpPr txBox="1"/>
+          <p:nvPr/>
+        </p:nvSpPr>
+        <p:spPr>
+          <a:xfrm>
+            <a:off x="22263810" y="22848915"/>
+            <a:ext cx="180000" cy="267345"/>
+          </a:xfrm>
+          <a:prstGeom prst="rect">
+            <a:avLst/>
+          </a:prstGeom>
+          <a:noFill/>
+        </p:spPr>
+        <p:txBody>
+          <a:bodyPr wrap="none" anchor="t" lIns="0" rIns="0" tIns="0" bIns="0">
+            <a:spAutoFit/>
+          </a:bodyPr>
+          <a:lstStyle/>
+          <a:p>
+            <a:pPr algn="l"/>
+            <a:r>
+              <a:rPr sz="1619" b="1" i="0">
+                <a:solidFill>
+                  <a:srgbClr val="1C2321"/>
+                </a:solidFill>
+                <a:latin typeface="Be Vietnam Pro"/>
+              </a:rPr>
+              <a:t>Khoá sau khi bốc</a:t>
+            </a:r>
+          </a:p>
+        </p:txBody>
+      </p:sp>
+      <p:sp>
+        <p:nvSpPr>
+          <p:cNvPr id="113" name="TextBox 112"/>
+          <p:cNvSpPr txBox="1"/>
+          <p:nvPr/>
+        </p:nvSpPr>
+        <p:spPr>
+          <a:xfrm>
+            <a:off x="22263810" y="23263642"/>
+            <a:ext cx="180000" cy="222787"/>
+          </a:xfrm>
+          <a:prstGeom prst="rect">
+            <a:avLst/>
+          </a:prstGeom>
+          <a:noFill/>
+        </p:spPr>
+        <p:txBody>
+          <a:bodyPr wrap="none" anchor="t" lIns="0" rIns="0" tIns="0" bIns="0">
+            <a:spAutoFit/>
+          </a:bodyPr>
+          <a:lstStyle/>
+          <a:p>
+            <a:pPr algn="l"/>
+            <a:r>
+              <a:rPr sz="1349" b="0" i="0">
+                <a:solidFill>
+                  <a:srgbClr val="5B6570"/>
+                </a:solidFill>
+                <a:latin typeface="IBM Plex Sans"/>
+              </a:rPr>
+              <a:t>Em thêm muộn chèn vào vị trí ngẫu nhiên</a:t>
+            </a:r>
+          </a:p>
+        </p:txBody>
+      </p:sp>
+      <p:sp>
+        <p:nvSpPr>
+          <p:cNvPr id="114" name="TextBox 113"/>
+          <p:cNvSpPr txBox="1"/>
+          <p:nvPr/>
+        </p:nvSpPr>
+        <p:spPr>
+          <a:xfrm>
+            <a:off x="22263810" y="23510422"/>
+            <a:ext cx="180000" cy="222787"/>
+          </a:xfrm>
+          <a:prstGeom prst="rect">
+            <a:avLst/>
+          </a:prstGeom>
+          <a:noFill/>
+        </p:spPr>
+        <p:txBody>
+          <a:bodyPr wrap="none" anchor="t" lIns="0" rIns="0" tIns="0" bIns="0">
+            <a:spAutoFit/>
+          </a:bodyPr>
+          <a:lstStyle/>
+          <a:p>
+            <a:pPr algn="l"/>
+            <a:r>
+              <a:rPr sz="1349" b="0" i="0">
+                <a:solidFill>
+                  <a:srgbClr val="5B6570"/>
+                </a:solidFill>
+                <a:latin typeface="IBM Plex Sans"/>
+              </a:rPr>
+              <a:t>Thứ tự các em cũ giữ nguyên</a:t>
+            </a:r>
+          </a:p>
+        </p:txBody>
+      </p:sp>
+      <p:sp>
+        <p:nvSpPr>
+          <p:cNvPr id="115" name="TextBox 114"/>
+          <p:cNvSpPr txBox="1"/>
+          <p:nvPr/>
+        </p:nvSpPr>
+        <p:spPr>
+          <a:xfrm>
+            <a:off x="22263810" y="23757202"/>
+            <a:ext cx="180000" cy="222787"/>
+          </a:xfrm>
+          <a:prstGeom prst="rect">
+            <a:avLst/>
+          </a:prstGeom>
+          <a:noFill/>
+        </p:spPr>
+        <p:txBody>
+          <a:bodyPr wrap="none" anchor="t" lIns="0" rIns="0" tIns="0" bIns="0">
+            <a:spAutoFit/>
+          </a:bodyPr>
+          <a:lstStyle/>
+          <a:p>
+            <a:pPr algn="l"/>
+            <a:r>
+              <a:rPr sz="1349" b="0" i="0">
+                <a:solidFill>
+                  <a:srgbClr val="5B6570"/>
+                </a:solidFill>
+                <a:latin typeface="IBM Plex Sans"/>
+              </a:rPr>
+              <a:t>Muốn bốc lại phải bấm "Vẽ lại"</a:t>
+            </a:r>
+          </a:p>
+        </p:txBody>
+      </p:sp>
+      <p:sp>
+        <p:nvSpPr>
+          <p:cNvPr id="116" name="TextBox 115"/>
+          <p:cNvSpPr txBox="1"/>
+          <p:nvPr/>
+        </p:nvSpPr>
+        <p:spPr>
+          <a:xfrm>
+            <a:off x="9979650" y="24291207"/>
+            <a:ext cx="180000" cy="213876"/>
+          </a:xfrm>
+          <a:prstGeom prst="rect">
+            <a:avLst/>
+          </a:prstGeom>
+          <a:noFill/>
+        </p:spPr>
+        <p:txBody>
+          <a:bodyPr wrap="none" anchor="t" lIns="0" rIns="0" tIns="0" bIns="0">
+            <a:spAutoFit/>
+          </a:bodyPr>
+          <a:lstStyle/>
+          <a:p>
+            <a:pPr algn="l"/>
+            <a:r>
+              <a:rPr sz="1295" b="0" i="0">
                 <a:solidFill>
                   <a:srgbClr val="8A929A"/>
                 </a:solidFill>
@@ -7274,18 +8713,18 @@
       </p:sp>
       <p:sp>
         <p:nvSpPr>
-          <p:cNvPr id="78" name="Rounded Rectangle 77"/>
+          <p:cNvPr id="117" name="Rounded Rectangle 116"/>
           <p:cNvSpPr/>
           <p:nvPr/>
         </p:nvSpPr>
         <p:spPr>
           <a:xfrm>
-            <a:off x="9774000" y="23863500"/>
-            <a:ext cx="16452000" cy="2092499"/>
+            <a:off x="9774000" y="24686100"/>
+            <a:ext cx="16452000" cy="1269899"/>
           </a:xfrm>
           <a:prstGeom prst="roundRect">
             <a:avLst>
-              <a:gd name="adj" fmla="val 5161"/>
+              <a:gd name="adj" fmla="val 8504"/>
             </a:avLst>
           </a:prstGeom>
           <a:noFill/>
@@ -7321,14 +8760,14 @@
       </p:sp>
       <p:sp>
         <p:nvSpPr>
-          <p:cNvPr id="79" name="TextBox 78"/>
+          <p:cNvPr id="118" name="TextBox 117"/>
           <p:cNvSpPr txBox="1"/>
           <p:nvPr/>
         </p:nvSpPr>
         <p:spPr>
           <a:xfrm>
-            <a:off x="9954000" y="24007500"/>
-            <a:ext cx="16092000" cy="1804499"/>
+            <a:off x="9954000" y="24830100"/>
+            <a:ext cx="16092000" cy="981899"/>
           </a:xfrm>
           <a:prstGeom prst="rect">
             <a:avLst/>
@@ -7356,7 +8795,7 @@
       </p:sp>
       <p:sp>
         <p:nvSpPr>
-          <p:cNvPr id="80" name="Rounded Rectangle 79"/>
+          <p:cNvPr id="119" name="Rounded Rectangle 118"/>
           <p:cNvSpPr/>
           <p:nvPr/>
         </p:nvSpPr>
@@ -7404,7 +8843,7 @@
       </p:sp>
       <p:sp>
         <p:nvSpPr>
-          <p:cNvPr id="81" name="Oval 80"/>
+          <p:cNvPr id="120" name="Oval 119"/>
           <p:cNvSpPr/>
           <p:nvPr/>
         </p:nvSpPr>
@@ -7457,7 +8896,7 @@
       </p:sp>
       <p:sp>
         <p:nvSpPr>
-          <p:cNvPr id="82" name="TextBox 81"/>
+          <p:cNvPr id="121" name="TextBox 120"/>
           <p:cNvSpPr txBox="1"/>
           <p:nvPr/>
         </p:nvSpPr>
@@ -7492,7 +8931,7 @@
       </p:sp>
       <p:sp>
         <p:nvSpPr>
-          <p:cNvPr id="83" name="Oval 82"/>
+          <p:cNvPr id="122" name="Oval 121"/>
           <p:cNvSpPr/>
           <p:nvPr/>
         </p:nvSpPr>
@@ -7545,7 +8984,7 @@
       </p:sp>
       <p:sp>
         <p:nvSpPr>
-          <p:cNvPr id="84" name="Rounded Rectangle 83"/>
+          <p:cNvPr id="123" name="Rounded Rectangle 122"/>
           <p:cNvSpPr/>
           <p:nvPr/>
         </p:nvSpPr>
@@ -7592,7 +9031,7 @@
       </p:sp>
       <p:sp>
         <p:nvSpPr>
-          <p:cNvPr id="85" name="TextBox 84"/>
+          <p:cNvPr id="124" name="TextBox 123"/>
           <p:cNvSpPr txBox="1"/>
           <p:nvPr/>
         </p:nvSpPr>
@@ -7627,7 +9066,7 @@
       </p:sp>
       <p:sp>
         <p:nvSpPr>
-          <p:cNvPr id="86" name="Oval 85"/>
+          <p:cNvPr id="125" name="Oval 124"/>
           <p:cNvSpPr/>
           <p:nvPr/>
         </p:nvSpPr>
@@ -7680,7 +9119,7 @@
       </p:sp>
       <p:sp>
         <p:nvSpPr>
-          <p:cNvPr id="87" name="Rounded Rectangle 86"/>
+          <p:cNvPr id="126" name="Rounded Rectangle 125"/>
           <p:cNvSpPr/>
           <p:nvPr/>
         </p:nvSpPr>
@@ -7727,7 +9166,7 @@
       </p:sp>
       <p:sp>
         <p:nvSpPr>
-          <p:cNvPr id="88" name="TextBox 87"/>
+          <p:cNvPr id="127" name="TextBox 126"/>
           <p:cNvSpPr txBox="1"/>
           <p:nvPr/>
         </p:nvSpPr>
@@ -7762,7 +9201,7 @@
       </p:sp>
       <p:sp>
         <p:nvSpPr>
-          <p:cNvPr id="89" name="Oval 88"/>
+          <p:cNvPr id="128" name="Oval 127"/>
           <p:cNvSpPr/>
           <p:nvPr/>
         </p:nvSpPr>
@@ -7815,7 +9254,7 @@
       </p:sp>
       <p:sp>
         <p:nvSpPr>
-          <p:cNvPr id="90" name="Rounded Rectangle 89"/>
+          <p:cNvPr id="129" name="Rounded Rectangle 128"/>
           <p:cNvSpPr/>
           <p:nvPr/>
         </p:nvSpPr>
@@ -7862,7 +9301,7 @@
       </p:sp>
       <p:sp>
         <p:nvSpPr>
-          <p:cNvPr id="91" name="TextBox 90"/>
+          <p:cNvPr id="130" name="TextBox 129"/>
           <p:cNvSpPr txBox="1"/>
           <p:nvPr/>
         </p:nvSpPr>
@@ -7897,7 +9336,7 @@
       </p:sp>
       <p:sp>
         <p:nvSpPr>
-          <p:cNvPr id="92" name="Oval 91"/>
+          <p:cNvPr id="131" name="Oval 130"/>
           <p:cNvSpPr/>
           <p:nvPr/>
         </p:nvSpPr>
@@ -7950,7 +9389,7 @@
       </p:sp>
       <p:sp>
         <p:nvSpPr>
-          <p:cNvPr id="93" name="Rounded Rectangle 92"/>
+          <p:cNvPr id="132" name="Rounded Rectangle 131"/>
           <p:cNvSpPr/>
           <p:nvPr/>
         </p:nvSpPr>
@@ -7997,7 +9436,7 @@
       </p:sp>
       <p:sp>
         <p:nvSpPr>
-          <p:cNvPr id="94" name="TextBox 93"/>
+          <p:cNvPr id="133" name="TextBox 132"/>
           <p:cNvSpPr txBox="1"/>
           <p:nvPr/>
         </p:nvSpPr>
@@ -8032,7 +9471,7 @@
       </p:sp>
       <p:sp>
         <p:nvSpPr>
-          <p:cNvPr id="95" name="Rounded Rectangle 94"/>
+          <p:cNvPr id="134" name="Rounded Rectangle 133"/>
           <p:cNvSpPr/>
           <p:nvPr/>
         </p:nvSpPr>
@@ -8080,7 +9519,7 @@
       </p:sp>
       <p:sp>
         <p:nvSpPr>
-          <p:cNvPr id="96" name="Oval 95"/>
+          <p:cNvPr id="135" name="Oval 134"/>
           <p:cNvSpPr/>
           <p:nvPr/>
         </p:nvSpPr>
@@ -8133,7 +9572,7 @@
       </p:sp>
       <p:sp>
         <p:nvSpPr>
-          <p:cNvPr id="97" name="TextBox 96"/>
+          <p:cNvPr id="136" name="TextBox 135"/>
           <p:cNvSpPr txBox="1"/>
           <p:nvPr/>
         </p:nvSpPr>
@@ -8168,7 +9607,7 @@
       </p:sp>
       <p:grpSp>
         <p:nvGrpSpPr>
-          <p:cNvPr id="98" name="Bieu do khai gian"/>
+          <p:cNvPr id="137" name="Bieu do khai gian"/>
           <p:cNvGrpSpPr/>
           <p:nvPr/>
         </p:nvGrpSpPr>
@@ -8182,7 +9621,7 @@
         </p:grpSpPr>
         <p:graphicFrame>
           <p:nvGraphicFramePr>
-            <p:cNvPr id="102" name="Chart 101"/>
+            <p:cNvPr id="141" name="Chart 140"/>
             <p:cNvGraphicFramePr>
               <a:graphicFrameLocks noGrp="1"/>
             </p:cNvGraphicFramePr>
@@ -8201,7 +9640,7 @@
       </p:grpSp>
       <p:sp>
         <p:nvSpPr>
-          <p:cNvPr id="99" name="TextBox 98"/>
+          <p:cNvPr id="138" name="TextBox 137"/>
           <p:cNvSpPr txBox="1"/>
           <p:nvPr/>
         </p:nvSpPr>
@@ -8236,7 +9675,7 @@
       </p:sp>
       <p:sp>
         <p:nvSpPr>
-          <p:cNvPr id="100" name="TextBox 99"/>
+          <p:cNvPr id="139" name="TextBox 138"/>
           <p:cNvSpPr txBox="1"/>
           <p:nvPr/>
         </p:nvSpPr>
@@ -8271,7 +9710,7 @@
       </p:sp>
       <p:sp>
         <p:nvSpPr>
-          <p:cNvPr id="101" name="TextBox 100"/>
+          <p:cNvPr id="140" name="TextBox 139"/>
           <p:cNvSpPr txBox="1"/>
           <p:nvPr/>
         </p:nvSpPr>
@@ -8306,7 +9745,7 @@
       </p:sp>
       <p:grpSp>
         <p:nvGrpSpPr>
-          <p:cNvPr id="103" name="Bieu do nguyen vong"/>
+          <p:cNvPr id="142" name="Bieu do nguyen vong"/>
           <p:cNvGrpSpPr/>
           <p:nvPr/>
         </p:nvGrpSpPr>
@@ -8320,7 +9759,7 @@
         </p:grpSpPr>
         <p:graphicFrame>
           <p:nvGraphicFramePr>
-            <p:cNvPr id="107" name="Chart 106"/>
+            <p:cNvPr id="146" name="Chart 145"/>
             <p:cNvGraphicFramePr>
               <a:graphicFrameLocks noGrp="1"/>
             </p:cNvGraphicFramePr>
@@ -8339,7 +9778,7 @@
       </p:grpSp>
       <p:sp>
         <p:nvSpPr>
-          <p:cNvPr id="104" name="TextBox 103"/>
+          <p:cNvPr id="143" name="TextBox 142"/>
           <p:cNvSpPr txBox="1"/>
           <p:nvPr/>
         </p:nvSpPr>
@@ -8374,7 +9813,7 @@
       </p:sp>
       <p:sp>
         <p:nvSpPr>
-          <p:cNvPr id="105" name="TextBox 104"/>
+          <p:cNvPr id="144" name="TextBox 143"/>
           <p:cNvSpPr txBox="1"/>
           <p:nvPr/>
         </p:nvSpPr>
@@ -8409,7 +9848,7 @@
       </p:sp>
       <p:sp>
         <p:nvSpPr>
-          <p:cNvPr id="106" name="TextBox 105"/>
+          <p:cNvPr id="145" name="TextBox 144"/>
           <p:cNvSpPr txBox="1"/>
           <p:nvPr/>
         </p:nvSpPr>
@@ -8444,7 +9883,7 @@
       </p:sp>
       <p:sp>
         <p:nvSpPr>
-          <p:cNvPr id="108" name="Rounded Rectangle 107"/>
+          <p:cNvPr id="147" name="Rounded Rectangle 146"/>
           <p:cNvSpPr/>
           <p:nvPr/>
         </p:nvSpPr>
@@ -8491,7 +9930,7 @@
       </p:sp>
       <p:sp>
         <p:nvSpPr>
-          <p:cNvPr id="109" name="TextBox 108"/>
+          <p:cNvPr id="148" name="TextBox 147"/>
           <p:cNvSpPr txBox="1"/>
           <p:nvPr/>
         </p:nvSpPr>
@@ -8526,7 +9965,7 @@
       </p:sp>
       <p:sp>
         <p:nvSpPr>
-          <p:cNvPr id="110" name="Rounded Rectangle 109"/>
+          <p:cNvPr id="149" name="Rounded Rectangle 148"/>
           <p:cNvSpPr/>
           <p:nvPr/>
         </p:nvSpPr>
@@ -8574,7 +10013,7 @@
       </p:sp>
       <p:sp>
         <p:nvSpPr>
-          <p:cNvPr id="111" name="TextBox 110"/>
+          <p:cNvPr id="150" name="TextBox 149"/>
           <p:cNvSpPr txBox="1"/>
           <p:nvPr/>
         </p:nvSpPr>
@@ -8609,7 +10048,7 @@
       </p:sp>
       <p:sp>
         <p:nvSpPr>
-          <p:cNvPr id="112" name="Rounded Rectangle 111"/>
+          <p:cNvPr id="151" name="Rounded Rectangle 150"/>
           <p:cNvSpPr/>
           <p:nvPr/>
         </p:nvSpPr>
@@ -8656,7 +10095,7 @@
       </p:sp>
       <p:sp>
         <p:nvSpPr>
-          <p:cNvPr id="113" name="TextBox 112"/>
+          <p:cNvPr id="152" name="TextBox 151"/>
           <p:cNvSpPr txBox="1"/>
           <p:nvPr/>
         </p:nvSpPr>

--- a/poster/poster_khung_1-2.pptx
+++ b/poster/poster_khung_1-2.pptx
@@ -8601,7 +8601,7 @@
                 </a:solidFill>
                 <a:latin typeface="IBM Plex Sans"/>
               </a:rPr>
-              <a:t>Em thêm muộn chèn vào vị trí ngẫu nhiên</a:t>
+              <a:t>Số đã bốc giữ nguyên ở các lần chạy sau</a:t>
             </a:r>
           </a:p>
         </p:txBody>
@@ -8636,7 +8636,7 @@
                 </a:solidFill>
                 <a:latin typeface="IBM Plex Sans"/>
               </a:rPr>
-              <a:t>Thứ tự các em cũ giữ nguyên</a:t>
+              <a:t>Muốn bốc lại phải bấm "Vẽ lại"</a:t>
             </a:r>
           </a:p>
         </p:txBody>
@@ -8649,8 +8649,8 @@
         </p:nvSpPr>
         <p:spPr>
           <a:xfrm>
-            <a:off x="22263810" y="23757202"/>
-            <a:ext cx="180000" cy="222787"/>
+            <a:off x="9979650" y="24291207"/>
+            <a:ext cx="180000" cy="213876"/>
           </a:xfrm>
           <a:prstGeom prst="rect">
             <a:avLst/>
@@ -8665,41 +8665,6 @@
           <a:p>
             <a:pPr algn="l"/>
             <a:r>
-              <a:rPr sz="1349" b="0" i="0">
-                <a:solidFill>
-                  <a:srgbClr val="5B6570"/>
-                </a:solidFill>
-                <a:latin typeface="IBM Plex Sans"/>
-              </a:rPr>
-              <a:t>Muốn bốc lại phải bấm "Vẽ lại"</a:t>
-            </a:r>
-          </a:p>
-        </p:txBody>
-      </p:sp>
-      <p:sp>
-        <p:nvSpPr>
-          <p:cNvPr id="116" name="TextBox 115"/>
-          <p:cNvSpPr txBox="1"/>
-          <p:nvPr/>
-        </p:nvSpPr>
-        <p:spPr>
-          <a:xfrm>
-            <a:off x="9979650" y="24291207"/>
-            <a:ext cx="180000" cy="213876"/>
-          </a:xfrm>
-          <a:prstGeom prst="rect">
-            <a:avLst/>
-          </a:prstGeom>
-          <a:noFill/>
-        </p:spPr>
-        <p:txBody>
-          <a:bodyPr wrap="none" anchor="t" lIns="0" rIns="0" tIns="0" bIns="0">
-            <a:spAutoFit/>
-          </a:bodyPr>
-          <a:lstStyle/>
-          <a:p>
-            <a:pPr algn="l"/>
-            <a:r>
               <a:rPr sz="1295" b="0" i="0">
                 <a:solidFill>
                   <a:srgbClr val="8A929A"/>
@@ -8713,7 +8678,7 @@
       </p:sp>
       <p:sp>
         <p:nvSpPr>
-          <p:cNvPr id="117" name="Rounded Rectangle 116"/>
+          <p:cNvPr id="116" name="Rounded Rectangle 115"/>
           <p:cNvSpPr/>
           <p:nvPr/>
         </p:nvSpPr>
@@ -8760,7 +8725,7 @@
       </p:sp>
       <p:sp>
         <p:nvSpPr>
-          <p:cNvPr id="118" name="TextBox 117"/>
+          <p:cNvPr id="117" name="TextBox 116"/>
           <p:cNvSpPr txBox="1"/>
           <p:nvPr/>
         </p:nvSpPr>
@@ -8795,7 +8760,7 @@
       </p:sp>
       <p:sp>
         <p:nvSpPr>
-          <p:cNvPr id="119" name="Rounded Rectangle 118"/>
+          <p:cNvPr id="118" name="Rounded Rectangle 117"/>
           <p:cNvSpPr/>
           <p:nvPr/>
         </p:nvSpPr>
@@ -8843,7 +8808,7 @@
       </p:sp>
       <p:sp>
         <p:nvSpPr>
-          <p:cNvPr id="120" name="Oval 119"/>
+          <p:cNvPr id="119" name="Oval 118"/>
           <p:cNvSpPr/>
           <p:nvPr/>
         </p:nvSpPr>
@@ -8896,7 +8861,7 @@
       </p:sp>
       <p:sp>
         <p:nvSpPr>
-          <p:cNvPr id="121" name="TextBox 120"/>
+          <p:cNvPr id="120" name="TextBox 119"/>
           <p:cNvSpPr txBox="1"/>
           <p:nvPr/>
         </p:nvSpPr>
@@ -8931,7 +8896,7 @@
       </p:sp>
       <p:sp>
         <p:nvSpPr>
-          <p:cNvPr id="122" name="Oval 121"/>
+          <p:cNvPr id="121" name="Oval 120"/>
           <p:cNvSpPr/>
           <p:nvPr/>
         </p:nvSpPr>
@@ -8984,7 +8949,7 @@
       </p:sp>
       <p:sp>
         <p:nvSpPr>
-          <p:cNvPr id="123" name="Rounded Rectangle 122"/>
+          <p:cNvPr id="122" name="Rounded Rectangle 121"/>
           <p:cNvSpPr/>
           <p:nvPr/>
         </p:nvSpPr>
@@ -9031,7 +8996,7 @@
       </p:sp>
       <p:sp>
         <p:nvSpPr>
-          <p:cNvPr id="124" name="TextBox 123"/>
+          <p:cNvPr id="123" name="TextBox 122"/>
           <p:cNvSpPr txBox="1"/>
           <p:nvPr/>
         </p:nvSpPr>
@@ -9066,7 +9031,7 @@
       </p:sp>
       <p:sp>
         <p:nvSpPr>
-          <p:cNvPr id="125" name="Oval 124"/>
+          <p:cNvPr id="124" name="Oval 123"/>
           <p:cNvSpPr/>
           <p:nvPr/>
         </p:nvSpPr>
@@ -9119,7 +9084,7 @@
       </p:sp>
       <p:sp>
         <p:nvSpPr>
-          <p:cNvPr id="126" name="Rounded Rectangle 125"/>
+          <p:cNvPr id="125" name="Rounded Rectangle 124"/>
           <p:cNvSpPr/>
           <p:nvPr/>
         </p:nvSpPr>
@@ -9166,7 +9131,7 @@
       </p:sp>
       <p:sp>
         <p:nvSpPr>
-          <p:cNvPr id="127" name="TextBox 126"/>
+          <p:cNvPr id="126" name="TextBox 125"/>
           <p:cNvSpPr txBox="1"/>
           <p:nvPr/>
         </p:nvSpPr>
@@ -9201,7 +9166,7 @@
       </p:sp>
       <p:sp>
         <p:nvSpPr>
-          <p:cNvPr id="128" name="Oval 127"/>
+          <p:cNvPr id="127" name="Oval 126"/>
           <p:cNvSpPr/>
           <p:nvPr/>
         </p:nvSpPr>
@@ -9254,7 +9219,7 @@
       </p:sp>
       <p:sp>
         <p:nvSpPr>
-          <p:cNvPr id="129" name="Rounded Rectangle 128"/>
+          <p:cNvPr id="128" name="Rounded Rectangle 127"/>
           <p:cNvSpPr/>
           <p:nvPr/>
         </p:nvSpPr>
@@ -9301,7 +9266,7 @@
       </p:sp>
       <p:sp>
         <p:nvSpPr>
-          <p:cNvPr id="130" name="TextBox 129"/>
+          <p:cNvPr id="129" name="TextBox 128"/>
           <p:cNvSpPr txBox="1"/>
           <p:nvPr/>
         </p:nvSpPr>
@@ -9336,7 +9301,7 @@
       </p:sp>
       <p:sp>
         <p:nvSpPr>
-          <p:cNvPr id="131" name="Oval 130"/>
+          <p:cNvPr id="130" name="Oval 129"/>
           <p:cNvSpPr/>
           <p:nvPr/>
         </p:nvSpPr>
@@ -9389,7 +9354,7 @@
       </p:sp>
       <p:sp>
         <p:nvSpPr>
-          <p:cNvPr id="132" name="Rounded Rectangle 131"/>
+          <p:cNvPr id="131" name="Rounded Rectangle 130"/>
           <p:cNvSpPr/>
           <p:nvPr/>
         </p:nvSpPr>
@@ -9436,7 +9401,7 @@
       </p:sp>
       <p:sp>
         <p:nvSpPr>
-          <p:cNvPr id="133" name="TextBox 132"/>
+          <p:cNvPr id="132" name="TextBox 131"/>
           <p:cNvSpPr txBox="1"/>
           <p:nvPr/>
         </p:nvSpPr>
@@ -9471,7 +9436,7 @@
       </p:sp>
       <p:sp>
         <p:nvSpPr>
-          <p:cNvPr id="134" name="Rounded Rectangle 133"/>
+          <p:cNvPr id="133" name="Rounded Rectangle 132"/>
           <p:cNvSpPr/>
           <p:nvPr/>
         </p:nvSpPr>
@@ -9519,7 +9484,7 @@
       </p:sp>
       <p:sp>
         <p:nvSpPr>
-          <p:cNvPr id="135" name="Oval 134"/>
+          <p:cNvPr id="134" name="Oval 133"/>
           <p:cNvSpPr/>
           <p:nvPr/>
         </p:nvSpPr>
@@ -9572,7 +9537,7 @@
       </p:sp>
       <p:sp>
         <p:nvSpPr>
-          <p:cNvPr id="136" name="TextBox 135"/>
+          <p:cNvPr id="135" name="TextBox 134"/>
           <p:cNvSpPr txBox="1"/>
           <p:nvPr/>
         </p:nvSpPr>
@@ -9607,7 +9572,7 @@
       </p:sp>
       <p:grpSp>
         <p:nvGrpSpPr>
-          <p:cNvPr id="137" name="Bieu do khai gian"/>
+          <p:cNvPr id="136" name="Bieu do khai gian"/>
           <p:cNvGrpSpPr/>
           <p:nvPr/>
         </p:nvGrpSpPr>
@@ -9621,7 +9586,7 @@
         </p:grpSpPr>
         <p:graphicFrame>
           <p:nvGraphicFramePr>
-            <p:cNvPr id="141" name="Chart 140"/>
+            <p:cNvPr id="140" name="Chart 139"/>
             <p:cNvGraphicFramePr>
               <a:graphicFrameLocks noGrp="1"/>
             </p:cNvGraphicFramePr>
@@ -9640,7 +9605,7 @@
       </p:grpSp>
       <p:sp>
         <p:nvSpPr>
-          <p:cNvPr id="138" name="TextBox 137"/>
+          <p:cNvPr id="137" name="TextBox 136"/>
           <p:cNvSpPr txBox="1"/>
           <p:nvPr/>
         </p:nvSpPr>
@@ -9675,7 +9640,7 @@
       </p:sp>
       <p:sp>
         <p:nvSpPr>
-          <p:cNvPr id="139" name="TextBox 138"/>
+          <p:cNvPr id="138" name="TextBox 137"/>
           <p:cNvSpPr txBox="1"/>
           <p:nvPr/>
         </p:nvSpPr>
@@ -9710,7 +9675,7 @@
       </p:sp>
       <p:sp>
         <p:nvSpPr>
-          <p:cNvPr id="140" name="TextBox 139"/>
+          <p:cNvPr id="139" name="TextBox 138"/>
           <p:cNvSpPr txBox="1"/>
           <p:nvPr/>
         </p:nvSpPr>
@@ -9745,7 +9710,7 @@
       </p:sp>
       <p:grpSp>
         <p:nvGrpSpPr>
-          <p:cNvPr id="142" name="Bieu do nguyen vong"/>
+          <p:cNvPr id="141" name="Bieu do nguyen vong"/>
           <p:cNvGrpSpPr/>
           <p:nvPr/>
         </p:nvGrpSpPr>
@@ -9759,7 +9724,7 @@
         </p:grpSpPr>
         <p:graphicFrame>
           <p:nvGraphicFramePr>
-            <p:cNvPr id="146" name="Chart 145"/>
+            <p:cNvPr id="145" name="Chart 144"/>
             <p:cNvGraphicFramePr>
               <a:graphicFrameLocks noGrp="1"/>
             </p:cNvGraphicFramePr>
@@ -9778,7 +9743,7 @@
       </p:grpSp>
       <p:sp>
         <p:nvSpPr>
-          <p:cNvPr id="143" name="TextBox 142"/>
+          <p:cNvPr id="142" name="TextBox 141"/>
           <p:cNvSpPr txBox="1"/>
           <p:nvPr/>
         </p:nvSpPr>
@@ -9813,7 +9778,7 @@
       </p:sp>
       <p:sp>
         <p:nvSpPr>
-          <p:cNvPr id="144" name="TextBox 143"/>
+          <p:cNvPr id="143" name="TextBox 142"/>
           <p:cNvSpPr txBox="1"/>
           <p:nvPr/>
         </p:nvSpPr>
@@ -9848,7 +9813,7 @@
       </p:sp>
       <p:sp>
         <p:nvSpPr>
-          <p:cNvPr id="145" name="TextBox 144"/>
+          <p:cNvPr id="144" name="TextBox 143"/>
           <p:cNvSpPr txBox="1"/>
           <p:nvPr/>
         </p:nvSpPr>
@@ -9883,7 +9848,7 @@
       </p:sp>
       <p:sp>
         <p:nvSpPr>
-          <p:cNvPr id="147" name="Rounded Rectangle 146"/>
+          <p:cNvPr id="146" name="Rounded Rectangle 145"/>
           <p:cNvSpPr/>
           <p:nvPr/>
         </p:nvSpPr>
@@ -9930,7 +9895,7 @@
       </p:sp>
       <p:sp>
         <p:nvSpPr>
-          <p:cNvPr id="148" name="TextBox 147"/>
+          <p:cNvPr id="147" name="TextBox 146"/>
           <p:cNvSpPr txBox="1"/>
           <p:nvPr/>
         </p:nvSpPr>
@@ -9965,7 +9930,7 @@
       </p:sp>
       <p:sp>
         <p:nvSpPr>
-          <p:cNvPr id="149" name="Rounded Rectangle 148"/>
+          <p:cNvPr id="148" name="Rounded Rectangle 147"/>
           <p:cNvSpPr/>
           <p:nvPr/>
         </p:nvSpPr>
@@ -10013,7 +9978,7 @@
       </p:sp>
       <p:sp>
         <p:nvSpPr>
-          <p:cNvPr id="150" name="TextBox 149"/>
+          <p:cNvPr id="149" name="TextBox 148"/>
           <p:cNvSpPr txBox="1"/>
           <p:nvPr/>
         </p:nvSpPr>
@@ -10048,7 +10013,7 @@
       </p:sp>
       <p:sp>
         <p:nvSpPr>
-          <p:cNvPr id="151" name="Rounded Rectangle 150"/>
+          <p:cNvPr id="150" name="Rounded Rectangle 149"/>
           <p:cNvSpPr/>
           <p:nvPr/>
         </p:nvSpPr>
@@ -10095,7 +10060,7 @@
       </p:sp>
       <p:sp>
         <p:nvSpPr>
-          <p:cNvPr id="152" name="TextBox 151"/>
+          <p:cNvPr id="151" name="TextBox 150"/>
           <p:cNvSpPr txBox="1"/>
           <p:nvPr/>
         </p:nvSpPr>

--- a/poster/poster_khung_1-2.pptx
+++ b/poster/poster_khung_1-2.pptx
@@ -8636,7 +8636,7 @@
                 </a:solidFill>
                 <a:latin typeface="IBM Plex Sans"/>
               </a:rPr>
-              <a:t>Muốn bốc lại phải bấm "Vẽ lại"</a:t>
+              <a:t>Bốc lại = đổi hạt giống, xác nhận 2 lần</a:t>
             </a:r>
           </a:p>
         </p:txBody>

--- a/poster/poster_khung_1-2.pptx
+++ b/poster/poster_khung_1-2.pptx
@@ -5923,11 +5923,11 @@
         <p:spPr>
           <a:xfrm>
             <a:off x="9979650" y="17755650"/>
-            <a:ext cx="2056500" cy="3838800"/>
+            <a:ext cx="1850850" cy="3838800"/>
           </a:xfrm>
           <a:prstGeom prst="roundRect">
             <a:avLst>
-              <a:gd name="adj" fmla="val 6000"/>
+              <a:gd name="adj" fmla="val 6666"/>
             </a:avLst>
           </a:prstGeom>
           <a:solidFill>
@@ -5970,8 +5970,8 @@
         </p:nvSpPr>
         <p:spPr>
           <a:xfrm>
-            <a:off x="10199010" y="17988720"/>
-            <a:ext cx="180000" cy="356460"/>
+            <a:off x="10199010" y="17991462"/>
+            <a:ext cx="180000" cy="392106"/>
           </a:xfrm>
           <a:prstGeom prst="rect">
             <a:avLst/>
@@ -5986,7 +5986,7 @@
           <a:p>
             <a:pPr algn="l"/>
             <a:r>
-              <a:rPr sz="2159" b="1" i="0">
+              <a:rPr sz="2374" b="1" i="0">
                 <a:solidFill>
                   <a:srgbClr val="1C2321"/>
                 </a:solidFill>
@@ -6005,8 +6005,8 @@
         </p:nvSpPr>
         <p:spPr>
           <a:xfrm>
-            <a:off x="10199010" y="18487764"/>
-            <a:ext cx="180000" cy="249522"/>
+            <a:off x="10199010" y="18531636"/>
+            <a:ext cx="180000" cy="285168"/>
           </a:xfrm>
           <a:prstGeom prst="rect">
             <a:avLst/>
@@ -6021,7 +6021,7 @@
           <a:p>
             <a:pPr algn="l"/>
             <a:r>
-              <a:rPr sz="1511" b="0" i="0">
+              <a:rPr sz="1727" b="0" i="0">
                 <a:solidFill>
                   <a:srgbClr val="5B6570"/>
                 </a:solidFill>
@@ -6040,8 +6040,8 @@
         </p:nvSpPr>
         <p:spPr>
           <a:xfrm>
-            <a:off x="10199010" y="18775674"/>
-            <a:ext cx="180000" cy="249522"/>
+            <a:off x="10199010" y="18860676"/>
+            <a:ext cx="180000" cy="285168"/>
           </a:xfrm>
           <a:prstGeom prst="rect">
             <a:avLst/>
@@ -6056,7 +6056,7 @@
           <a:p>
             <a:pPr algn="l"/>
             <a:r>
-              <a:rPr sz="1511" b="0" i="0">
+              <a:rPr sz="1727" b="0" i="0">
                 <a:solidFill>
                   <a:srgbClr val="5B6570"/>
                 </a:solidFill>
@@ -6075,8 +6075,8 @@
         </p:nvSpPr>
         <p:spPr>
           <a:xfrm>
-            <a:off x="10199010" y="19063584"/>
-            <a:ext cx="180000" cy="249522"/>
+            <a:off x="10199010" y="19189716"/>
+            <a:ext cx="180000" cy="285168"/>
           </a:xfrm>
           <a:prstGeom prst="rect">
             <a:avLst/>
@@ -6091,7 +6091,7 @@
           <a:p>
             <a:pPr algn="l"/>
             <a:r>
-              <a:rPr sz="1511" b="0" i="0">
+              <a:rPr sz="1727" b="0" i="0">
                 <a:solidFill>
                   <a:srgbClr val="5B6570"/>
                 </a:solidFill>
@@ -6110,8 +6110,8 @@
         </p:nvSpPr>
         <p:spPr>
           <a:xfrm>
-            <a:off x="10199010" y="19351494"/>
-            <a:ext cx="180000" cy="249522"/>
+            <a:off x="10199010" y="19518756"/>
+            <a:ext cx="180000" cy="285168"/>
           </a:xfrm>
           <a:prstGeom prst="rect">
             <a:avLst/>
@@ -6126,7 +6126,7 @@
           <a:p>
             <a:pPr algn="l"/>
             <a:r>
-              <a:rPr sz="1511" b="0" i="0">
+              <a:rPr sz="1727" b="0" i="0">
                 <a:solidFill>
                   <a:srgbClr val="5B6570"/>
                 </a:solidFill>
@@ -6145,8 +6145,8 @@
         </p:nvSpPr>
         <p:spPr>
           <a:xfrm>
-            <a:off x="10199010" y="19639404"/>
-            <a:ext cx="180000" cy="249522"/>
+            <a:off x="10199010" y="19847796"/>
+            <a:ext cx="180000" cy="285168"/>
           </a:xfrm>
           <a:prstGeom prst="rect">
             <a:avLst/>
@@ -6161,7 +6161,7 @@
           <a:p>
             <a:pPr algn="l"/>
             <a:r>
-              <a:rPr sz="1511" b="0" i="0">
+              <a:rPr sz="1727" b="0" i="0">
                 <a:solidFill>
                   <a:srgbClr val="5B6570"/>
                 </a:solidFill>
@@ -6180,8 +6180,8 @@
         </p:nvSpPr>
         <p:spPr>
           <a:xfrm>
-            <a:off x="10199010" y="19927314"/>
-            <a:ext cx="180000" cy="249522"/>
+            <a:off x="10199010" y="20176836"/>
+            <a:ext cx="180000" cy="285168"/>
           </a:xfrm>
           <a:prstGeom prst="rect">
             <a:avLst/>
@@ -6196,7 +6196,7 @@
           <a:p>
             <a:pPr algn="l"/>
             <a:r>
-              <a:rPr sz="1511" b="0" i="0">
+              <a:rPr sz="1727" b="0" i="0">
                 <a:solidFill>
                   <a:srgbClr val="5B6570"/>
                 </a:solidFill>
@@ -6215,8 +6215,8 @@
         </p:nvSpPr>
         <p:spPr>
           <a:xfrm>
-            <a:off x="10199010" y="20215224"/>
-            <a:ext cx="180000" cy="249522"/>
+            <a:off x="10199010" y="20505876"/>
+            <a:ext cx="180000" cy="285168"/>
           </a:xfrm>
           <a:prstGeom prst="rect">
             <a:avLst/>
@@ -6231,7 +6231,7 @@
           <a:p>
             <a:pPr algn="l"/>
             <a:r>
-              <a:rPr sz="1511" b="0" i="0">
+              <a:rPr sz="1727" b="0" i="0">
                 <a:solidFill>
                   <a:srgbClr val="5B6570"/>
                 </a:solidFill>
@@ -6250,8 +6250,8 @@
         </p:nvSpPr>
         <p:spPr>
           <a:xfrm>
-            <a:off x="10199010" y="20503134"/>
-            <a:ext cx="180000" cy="249522"/>
+            <a:off x="10199010" y="20834916"/>
+            <a:ext cx="180000" cy="285168"/>
           </a:xfrm>
           <a:prstGeom prst="rect">
             <a:avLst/>
@@ -6266,7 +6266,7 @@
           <a:p>
             <a:pPr algn="l"/>
             <a:r>
-              <a:rPr sz="1511" b="0" i="0">
+              <a:rPr sz="1727" b="0" i="0">
                 <a:solidFill>
                   <a:srgbClr val="5B6570"/>
                 </a:solidFill>
@@ -6285,8 +6285,8 @@
         </p:nvSpPr>
         <p:spPr>
           <a:xfrm>
-            <a:off x="10199010" y="20791044"/>
-            <a:ext cx="180000" cy="249522"/>
+            <a:off x="10199010" y="21163956"/>
+            <a:ext cx="180000" cy="285168"/>
           </a:xfrm>
           <a:prstGeom prst="rect">
             <a:avLst/>
@@ -6301,7 +6301,7 @@
           <a:p>
             <a:pPr algn="l"/>
             <a:r>
-              <a:rPr sz="1511" b="0" i="0">
+              <a:rPr sz="1727" b="0" i="0">
                 <a:solidFill>
                   <a:srgbClr val="5B6570"/>
                 </a:solidFill>
@@ -6320,8 +6320,8 @@
         </p:nvSpPr>
         <p:spPr>
           <a:xfrm>
-            <a:off x="12036149" y="19565370"/>
-            <a:ext cx="411300" cy="219360"/>
+            <a:off x="11830499" y="19565370"/>
+            <a:ext cx="342750" cy="219360"/>
           </a:xfrm>
           <a:prstGeom prst="rightArrow">
             <a:avLst/>
@@ -6364,8 +6364,8 @@
         </p:nvSpPr>
         <p:spPr>
           <a:xfrm>
-            <a:off x="12447450" y="17755650"/>
-            <a:ext cx="3975900" cy="3838800"/>
+            <a:off x="12173250" y="17755650"/>
+            <a:ext cx="4250100" cy="3838800"/>
           </a:xfrm>
           <a:prstGeom prst="roundRect">
             <a:avLst>
@@ -6412,7 +6412,7 @@
         </p:nvSpPr>
         <p:spPr>
           <a:xfrm>
-            <a:off x="12625680" y="17947590"/>
+            <a:off x="12351480" y="17947590"/>
             <a:ext cx="411300" cy="411300"/>
           </a:xfrm>
           <a:prstGeom prst="ellipse">
@@ -6465,8 +6465,8 @@
         </p:nvSpPr>
         <p:spPr>
           <a:xfrm>
-            <a:off x="13160370" y="17988720"/>
-            <a:ext cx="180000" cy="356460"/>
+            <a:off x="12886170" y="17990091"/>
+            <a:ext cx="180000" cy="374283"/>
           </a:xfrm>
           <a:prstGeom prst="rect">
             <a:avLst/>
@@ -6481,7 +6481,7 @@
           <a:p>
             <a:pPr algn="l"/>
             <a:r>
-              <a:rPr sz="2159" b="1" i="0">
+              <a:rPr sz="2267" b="1" i="0">
                 <a:solidFill>
                   <a:srgbClr val="1C2321"/>
                 </a:solidFill>
@@ -6500,8 +6500,8 @@
         </p:nvSpPr>
         <p:spPr>
           <a:xfrm>
-            <a:off x="12666810" y="18487764"/>
-            <a:ext cx="180000" cy="249522"/>
+            <a:off x="12392609" y="18517926"/>
+            <a:ext cx="180000" cy="285168"/>
           </a:xfrm>
           <a:prstGeom prst="rect">
             <a:avLst/>
@@ -6516,7 +6516,7 @@
           <a:p>
             <a:pPr algn="l"/>
             <a:r>
-              <a:rPr sz="1511" b="0" i="0">
+              <a:rPr sz="1727" b="0" i="0">
                 <a:solidFill>
                   <a:srgbClr val="5B6570"/>
                 </a:solidFill>
@@ -6535,8 +6535,8 @@
         </p:nvSpPr>
         <p:spPr>
           <a:xfrm>
-            <a:off x="12666810" y="18775674"/>
-            <a:ext cx="180000" cy="249522"/>
+            <a:off x="12392609" y="18846966"/>
+            <a:ext cx="180000" cy="285168"/>
           </a:xfrm>
           <a:prstGeom prst="rect">
             <a:avLst/>
@@ -6551,7 +6551,7 @@
           <a:p>
             <a:pPr algn="l"/>
             <a:r>
-              <a:rPr sz="1511" b="0" i="0">
+              <a:rPr sz="1727" b="0" i="0">
                 <a:solidFill>
                   <a:srgbClr val="5B6570"/>
                 </a:solidFill>
@@ -6570,8 +6570,8 @@
         </p:nvSpPr>
         <p:spPr>
           <a:xfrm>
-            <a:off x="12666810" y="19063584"/>
-            <a:ext cx="180000" cy="249522"/>
+            <a:off x="12392609" y="19176006"/>
+            <a:ext cx="180000" cy="285168"/>
           </a:xfrm>
           <a:prstGeom prst="rect">
             <a:avLst/>
@@ -6586,7 +6586,7 @@
           <a:p>
             <a:pPr algn="l"/>
             <a:r>
-              <a:rPr sz="1511" b="0" i="0">
+              <a:rPr sz="1727" b="0" i="0">
                 <a:solidFill>
                   <a:srgbClr val="5B6570"/>
                 </a:solidFill>
@@ -6605,8 +6605,8 @@
         </p:nvSpPr>
         <p:spPr>
           <a:xfrm>
-            <a:off x="12666810" y="19351494"/>
-            <a:ext cx="180000" cy="249522"/>
+            <a:off x="12392609" y="19505046"/>
+            <a:ext cx="180000" cy="285168"/>
           </a:xfrm>
           <a:prstGeom prst="rect">
             <a:avLst/>
@@ -6621,7 +6621,7 @@
           <a:p>
             <a:pPr algn="l"/>
             <a:r>
-              <a:rPr sz="1511" b="0" i="0">
+              <a:rPr sz="1727" b="0" i="0">
                 <a:solidFill>
                   <a:srgbClr val="5B6570"/>
                 </a:solidFill>
@@ -6640,8 +6640,8 @@
         </p:nvSpPr>
         <p:spPr>
           <a:xfrm>
-            <a:off x="12666810" y="19639404"/>
-            <a:ext cx="180000" cy="249522"/>
+            <a:off x="12392609" y="19834086"/>
+            <a:ext cx="180000" cy="285168"/>
           </a:xfrm>
           <a:prstGeom prst="rect">
             <a:avLst/>
@@ -6656,7 +6656,7 @@
           <a:p>
             <a:pPr algn="l"/>
             <a:r>
-              <a:rPr sz="1511" b="0" i="0">
+              <a:rPr sz="1727" b="0" i="0">
                 <a:solidFill>
                   <a:srgbClr val="5B6570"/>
                 </a:solidFill>
@@ -6675,8 +6675,8 @@
         </p:nvSpPr>
         <p:spPr>
           <a:xfrm>
-            <a:off x="12666810" y="19927314"/>
-            <a:ext cx="180000" cy="249522"/>
+            <a:off x="12392609" y="20163126"/>
+            <a:ext cx="180000" cy="285168"/>
           </a:xfrm>
           <a:prstGeom prst="rect">
             <a:avLst/>
@@ -6691,7 +6691,7 @@
           <a:p>
             <a:pPr algn="l"/>
             <a:r>
-              <a:rPr sz="1511" b="0" i="0">
+              <a:rPr sz="1727" b="0" i="0">
                 <a:solidFill>
                   <a:srgbClr val="5B6570"/>
                 </a:solidFill>
@@ -6710,8 +6710,8 @@
         </p:nvSpPr>
         <p:spPr>
           <a:xfrm>
-            <a:off x="12666810" y="20215224"/>
-            <a:ext cx="180000" cy="249522"/>
+            <a:off x="12392609" y="20492166"/>
+            <a:ext cx="180000" cy="285168"/>
           </a:xfrm>
           <a:prstGeom prst="rect">
             <a:avLst/>
@@ -6726,13 +6726,13 @@
           <a:p>
             <a:pPr algn="l"/>
             <a:r>
-              <a:rPr sz="1511" b="0" i="0">
+              <a:rPr sz="1727" b="0" i="0">
                 <a:solidFill>
                   <a:srgbClr val="5B6570"/>
                 </a:solidFill>
                 <a:latin typeface="IBM Plex Sans"/>
               </a:rPr>
-              <a:t/>
+              <a:t>CLB không biết em chọn mình</a:t>
             </a:r>
           </a:p>
         </p:txBody>
@@ -6745,8 +6745,8 @@
         </p:nvSpPr>
         <p:spPr>
           <a:xfrm>
-            <a:off x="12666810" y="20503134"/>
-            <a:ext cx="180000" cy="249522"/>
+            <a:off x="12392609" y="20821206"/>
+            <a:ext cx="180000" cy="285168"/>
           </a:xfrm>
           <a:prstGeom prst="rect">
             <a:avLst/>
@@ -6761,42 +6761,7 @@
           <a:p>
             <a:pPr algn="l"/>
             <a:r>
-              <a:rPr sz="1511" b="0" i="0">
-                <a:solidFill>
-                  <a:srgbClr val="5B6570"/>
-                </a:solidFill>
-                <a:latin typeface="IBM Plex Sans"/>
-              </a:rPr>
-              <a:t>CLB không biết em chọn mình</a:t>
-            </a:r>
-          </a:p>
-        </p:txBody>
-      </p:sp>
-      <p:sp>
-        <p:nvSpPr>
-          <p:cNvPr id="67" name="TextBox 66"/>
-          <p:cNvSpPr txBox="1"/>
-          <p:nvPr/>
-        </p:nvSpPr>
-        <p:spPr>
-          <a:xfrm>
-            <a:off x="12666810" y="20791044"/>
-            <a:ext cx="180000" cy="249522"/>
-          </a:xfrm>
-          <a:prstGeom prst="rect">
-            <a:avLst/>
-          </a:prstGeom>
-          <a:noFill/>
-        </p:spPr>
-        <p:txBody>
-          <a:bodyPr wrap="none" anchor="t" lIns="0" rIns="0" tIns="0" bIns="0">
-            <a:spAutoFit/>
-          </a:bodyPr>
-          <a:lstStyle/>
-          <a:p>
-            <a:pPr algn="l"/>
-            <a:r>
-              <a:rPr sz="1511" b="0" i="0">
+              <a:rPr sz="1727" b="0" i="0">
                 <a:solidFill>
                   <a:srgbClr val="5B6570"/>
                 </a:solidFill>
@@ -6809,14 +6774,14 @@
       </p:sp>
       <p:sp>
         <p:nvSpPr>
-          <p:cNvPr id="68" name="Right Arrow 67"/>
+          <p:cNvPr id="67" name="Right Arrow 66"/>
           <p:cNvSpPr/>
           <p:nvPr/>
         </p:nvSpPr>
         <p:spPr>
           <a:xfrm>
             <a:off x="16423350" y="19565370"/>
-            <a:ext cx="411300" cy="219360"/>
+            <a:ext cx="342750" cy="219360"/>
           </a:xfrm>
           <a:prstGeom prst="rightArrow">
             <a:avLst/>
@@ -6853,14 +6818,14 @@
       </p:sp>
       <p:sp>
         <p:nvSpPr>
-          <p:cNvPr id="69" name="Rounded Rectangle 68"/>
+          <p:cNvPr id="68" name="Rounded Rectangle 67"/>
           <p:cNvSpPr/>
           <p:nvPr/>
         </p:nvSpPr>
         <p:spPr>
           <a:xfrm>
-            <a:off x="16834650" y="17755650"/>
-            <a:ext cx="5278350" cy="3838800"/>
+            <a:off x="16766100" y="17755650"/>
+            <a:ext cx="5209800" cy="3838800"/>
           </a:xfrm>
           <a:prstGeom prst="roundRect">
             <a:avLst>
@@ -6901,13 +6866,13 @@
       </p:sp>
       <p:sp>
         <p:nvSpPr>
-          <p:cNvPr id="70" name="Oval 69"/>
+          <p:cNvPr id="69" name="Oval 68"/>
           <p:cNvSpPr/>
           <p:nvPr/>
         </p:nvSpPr>
         <p:spPr>
           <a:xfrm>
-            <a:off x="17012880" y="17947590"/>
+            <a:off x="16944330" y="17947590"/>
             <a:ext cx="411300" cy="411300"/>
           </a:xfrm>
           <a:prstGeom prst="ellipse">
@@ -6954,14 +6919,14 @@
       </p:sp>
       <p:sp>
         <p:nvSpPr>
-          <p:cNvPr id="71" name="TextBox 70"/>
+          <p:cNvPr id="70" name="TextBox 69"/>
           <p:cNvSpPr txBox="1"/>
           <p:nvPr/>
         </p:nvSpPr>
         <p:spPr>
           <a:xfrm>
-            <a:off x="17547570" y="18002430"/>
-            <a:ext cx="180000" cy="356460"/>
+            <a:off x="17479020" y="17991462"/>
+            <a:ext cx="180000" cy="392106"/>
           </a:xfrm>
           <a:prstGeom prst="rect">
             <a:avLst/>
@@ -6976,7 +6941,7 @@
           <a:p>
             <a:pPr algn="l"/>
             <a:r>
-              <a:rPr sz="2159" b="1" i="0">
+              <a:rPr sz="2374" b="1" i="0">
                 <a:solidFill>
                   <a:srgbClr val="1C2321"/>
                 </a:solidFill>
@@ -6989,14 +6954,14 @@
       </p:sp>
       <p:sp>
         <p:nvSpPr>
-          <p:cNvPr id="72" name="TextBox 71"/>
+          <p:cNvPr id="71" name="TextBox 70"/>
           <p:cNvSpPr txBox="1"/>
           <p:nvPr/>
         </p:nvSpPr>
         <p:spPr>
           <a:xfrm>
-            <a:off x="17054010" y="18501474"/>
-            <a:ext cx="180000" cy="249522"/>
+            <a:off x="16985460" y="18531636"/>
+            <a:ext cx="180000" cy="285168"/>
           </a:xfrm>
           <a:prstGeom prst="rect">
             <a:avLst/>
@@ -7011,7 +6976,7 @@
           <a:p>
             <a:pPr algn="l"/>
             <a:r>
-              <a:rPr sz="1511" b="0" i="0">
+              <a:rPr sz="1727" b="0" i="0">
                 <a:solidFill>
                   <a:srgbClr val="5B6570"/>
                 </a:solidFill>
@@ -7024,14 +6989,14 @@
       </p:sp>
       <p:sp>
         <p:nvSpPr>
-          <p:cNvPr id="73" name="TextBox 72"/>
+          <p:cNvPr id="72" name="TextBox 71"/>
           <p:cNvSpPr txBox="1"/>
           <p:nvPr/>
         </p:nvSpPr>
         <p:spPr>
           <a:xfrm>
-            <a:off x="17054010" y="18789384"/>
-            <a:ext cx="180000" cy="249522"/>
+            <a:off x="16985460" y="18860676"/>
+            <a:ext cx="180000" cy="285168"/>
           </a:xfrm>
           <a:prstGeom prst="rect">
             <a:avLst/>
@@ -7046,7 +7011,7 @@
           <a:p>
             <a:pPr algn="l"/>
             <a:r>
-              <a:rPr sz="1511" b="0" i="0">
+              <a:rPr sz="1727" b="0" i="0">
                 <a:solidFill>
                   <a:srgbClr val="5B6570"/>
                 </a:solidFill>
@@ -7059,14 +7024,14 @@
       </p:sp>
       <p:sp>
         <p:nvSpPr>
-          <p:cNvPr id="74" name="TextBox 73"/>
+          <p:cNvPr id="73" name="TextBox 72"/>
           <p:cNvSpPr txBox="1"/>
           <p:nvPr/>
         </p:nvSpPr>
         <p:spPr>
           <a:xfrm>
-            <a:off x="17054010" y="19077294"/>
-            <a:ext cx="180000" cy="249522"/>
+            <a:off x="16985460" y="19189716"/>
+            <a:ext cx="180000" cy="285168"/>
           </a:xfrm>
           <a:prstGeom prst="rect">
             <a:avLst/>
@@ -7081,7 +7046,7 @@
           <a:p>
             <a:pPr algn="l"/>
             <a:r>
-              <a:rPr sz="1511" b="0" i="0">
+              <a:rPr sz="1727" b="0" i="0">
                 <a:solidFill>
                   <a:srgbClr val="5B6570"/>
                 </a:solidFill>
@@ -7094,14 +7059,14 @@
       </p:sp>
       <p:sp>
         <p:nvSpPr>
-          <p:cNvPr id="75" name="TextBox 74"/>
+          <p:cNvPr id="74" name="TextBox 73"/>
           <p:cNvSpPr txBox="1"/>
           <p:nvPr/>
         </p:nvSpPr>
         <p:spPr>
           <a:xfrm>
-            <a:off x="17054010" y="19365204"/>
-            <a:ext cx="180000" cy="249522"/>
+            <a:off x="16985460" y="19518756"/>
+            <a:ext cx="180000" cy="285168"/>
           </a:xfrm>
           <a:prstGeom prst="rect">
             <a:avLst/>
@@ -7116,7 +7081,7 @@
           <a:p>
             <a:pPr algn="l"/>
             <a:r>
-              <a:rPr sz="1511" b="0" i="0">
+              <a:rPr sz="1727" b="0" i="0">
                 <a:solidFill>
                   <a:srgbClr val="5B6570"/>
                 </a:solidFill>
@@ -7129,18 +7094,18 @@
       </p:sp>
       <p:sp>
         <p:nvSpPr>
-          <p:cNvPr id="76" name="Rounded Rectangle 75"/>
+          <p:cNvPr id="75" name="Rounded Rectangle 74"/>
           <p:cNvSpPr/>
           <p:nvPr/>
         </p:nvSpPr>
         <p:spPr>
           <a:xfrm>
-            <a:off x="17054010" y="19949250"/>
-            <a:ext cx="4839630" cy="1466970"/>
+            <a:off x="16985460" y="19880700"/>
+            <a:ext cx="4771080" cy="1617780"/>
           </a:xfrm>
           <a:prstGeom prst="roundRect">
             <a:avLst>
-              <a:gd name="adj" fmla="val 8411"/>
+              <a:gd name="adj" fmla="val 7627"/>
             </a:avLst>
           </a:prstGeom>
           <a:solidFill>
@@ -7177,14 +7142,14 @@
       </p:sp>
       <p:sp>
         <p:nvSpPr>
-          <p:cNvPr id="77" name="TextBox 76"/>
+          <p:cNvPr id="76" name="TextBox 75"/>
           <p:cNvSpPr txBox="1"/>
           <p:nvPr/>
         </p:nvSpPr>
         <p:spPr>
           <a:xfrm>
-            <a:off x="17273370" y="20176836"/>
-            <a:ext cx="180000" cy="285168"/>
+            <a:off x="17204820" y="20111028"/>
+            <a:ext cx="180000" cy="320814"/>
           </a:xfrm>
           <a:prstGeom prst="rect">
             <a:avLst/>
@@ -7199,7 +7164,7 @@
           <a:p>
             <a:pPr algn="l"/>
             <a:r>
-              <a:rPr sz="1727" b="1" i="0">
+              <a:rPr sz="1943" b="1" i="0">
                 <a:solidFill>
                   <a:srgbClr val="1C2321"/>
                 </a:solidFill>
@@ -7212,14 +7177,14 @@
       </p:sp>
       <p:sp>
         <p:nvSpPr>
-          <p:cNvPr id="78" name="TextBox 77"/>
+          <p:cNvPr id="77" name="TextBox 76"/>
           <p:cNvSpPr txBox="1"/>
           <p:nvPr/>
         </p:nvSpPr>
         <p:spPr>
           <a:xfrm>
-            <a:off x="17273370" y="20611443"/>
-            <a:ext cx="180000" cy="231699"/>
+            <a:off x="17204820" y="20573055"/>
+            <a:ext cx="180000" cy="267345"/>
           </a:xfrm>
           <a:prstGeom prst="rect">
             <a:avLst/>
@@ -7234,7 +7199,7 @@
           <a:p>
             <a:pPr algn="l"/>
             <a:r>
-              <a:rPr sz="1403" b="0" i="0">
+              <a:rPr sz="1619" b="0" i="0">
                 <a:solidFill>
                   <a:srgbClr val="5B6570"/>
                 </a:solidFill>
@@ -7247,14 +7212,14 @@
       </p:sp>
       <p:sp>
         <p:nvSpPr>
-          <p:cNvPr id="79" name="TextBox 78"/>
+          <p:cNvPr id="78" name="TextBox 77"/>
           <p:cNvSpPr txBox="1"/>
           <p:nvPr/>
         </p:nvSpPr>
         <p:spPr>
           <a:xfrm>
-            <a:off x="17273370" y="20871933"/>
-            <a:ext cx="180000" cy="231699"/>
+            <a:off x="17204820" y="20860965"/>
+            <a:ext cx="180000" cy="267345"/>
           </a:xfrm>
           <a:prstGeom prst="rect">
             <a:avLst/>
@@ -7269,7 +7234,7 @@
           <a:p>
             <a:pPr algn="l"/>
             <a:r>
-              <a:rPr sz="1403" b="0" i="0">
+              <a:rPr sz="1619" b="0" i="0">
                 <a:solidFill>
                   <a:srgbClr val="5B6570"/>
                 </a:solidFill>
@@ -7282,14 +7247,14 @@
       </p:sp>
       <p:sp>
         <p:nvSpPr>
-          <p:cNvPr id="80" name="TextBox 79"/>
+          <p:cNvPr id="79" name="TextBox 78"/>
           <p:cNvSpPr txBox="1"/>
           <p:nvPr/>
         </p:nvSpPr>
         <p:spPr>
           <a:xfrm>
-            <a:off x="17273370" y="21132423"/>
-            <a:ext cx="180000" cy="231699"/>
+            <a:off x="17204820" y="21148875"/>
+            <a:ext cx="180000" cy="267345"/>
           </a:xfrm>
           <a:prstGeom prst="rect">
             <a:avLst/>
@@ -7304,7 +7269,7 @@
           <a:p>
             <a:pPr algn="l"/>
             <a:r>
-              <a:rPr sz="1403" b="0" i="0">
+              <a:rPr sz="1619" b="0" i="0">
                 <a:solidFill>
                   <a:srgbClr val="5B6570"/>
                 </a:solidFill>
@@ -7317,14 +7282,14 @@
       </p:sp>
       <p:sp>
         <p:nvSpPr>
-          <p:cNvPr id="81" name="Right Arrow 80"/>
+          <p:cNvPr id="80" name="Right Arrow 79"/>
           <p:cNvSpPr/>
           <p:nvPr/>
         </p:nvSpPr>
         <p:spPr>
           <a:xfrm>
-            <a:off x="22113000" y="19565370"/>
-            <a:ext cx="411300" cy="219360"/>
+            <a:off x="21975900" y="19565370"/>
+            <a:ext cx="342750" cy="219360"/>
           </a:xfrm>
           <a:prstGeom prst="rightArrow">
             <a:avLst/>
@@ -7361,18 +7326,18 @@
       </p:sp>
       <p:sp>
         <p:nvSpPr>
-          <p:cNvPr id="82" name="Rounded Rectangle 81"/>
+          <p:cNvPr id="81" name="Rounded Rectangle 80"/>
           <p:cNvSpPr/>
           <p:nvPr/>
         </p:nvSpPr>
         <p:spPr>
           <a:xfrm>
-            <a:off x="22524300" y="17755650"/>
-            <a:ext cx="3496050" cy="2056500"/>
+            <a:off x="22318650" y="17755650"/>
+            <a:ext cx="3701700" cy="2125050"/>
           </a:xfrm>
           <a:prstGeom prst="roundRect">
             <a:avLst>
-              <a:gd name="adj" fmla="val 6000"/>
+              <a:gd name="adj" fmla="val 5806"/>
             </a:avLst>
           </a:prstGeom>
           <a:solidFill>
@@ -7409,13 +7374,13 @@
       </p:sp>
       <p:sp>
         <p:nvSpPr>
-          <p:cNvPr id="83" name="Oval 82"/>
+          <p:cNvPr id="82" name="Oval 81"/>
           <p:cNvSpPr/>
           <p:nvPr/>
         </p:nvSpPr>
         <p:spPr>
           <a:xfrm>
-            <a:off x="22702530" y="17947590"/>
+            <a:off x="22496880" y="17947590"/>
             <a:ext cx="411300" cy="411300"/>
           </a:xfrm>
           <a:prstGeom prst="ellipse">
@@ -7462,14 +7427,14 @@
       </p:sp>
       <p:sp>
         <p:nvSpPr>
-          <p:cNvPr id="84" name="TextBox 83"/>
+          <p:cNvPr id="83" name="TextBox 82"/>
           <p:cNvSpPr txBox="1"/>
           <p:nvPr/>
         </p:nvSpPr>
         <p:spPr>
           <a:xfrm>
-            <a:off x="23237220" y="17988720"/>
-            <a:ext cx="180000" cy="356460"/>
+            <a:off x="23031570" y="17991462"/>
+            <a:ext cx="180000" cy="392106"/>
           </a:xfrm>
           <a:prstGeom prst="rect">
             <a:avLst/>
@@ -7484,7 +7449,7 @@
           <a:p>
             <a:pPr algn="l"/>
             <a:r>
-              <a:rPr sz="2159" b="1" i="0">
+              <a:rPr sz="2374" b="1" i="0">
                 <a:solidFill>
                   <a:srgbClr val="1C2321"/>
                 </a:solidFill>
@@ -7497,14 +7462,14 @@
       </p:sp>
       <p:sp>
         <p:nvSpPr>
-          <p:cNvPr id="85" name="TextBox 84"/>
+          <p:cNvPr id="84" name="TextBox 83"/>
           <p:cNvSpPr txBox="1"/>
           <p:nvPr/>
         </p:nvSpPr>
         <p:spPr>
           <a:xfrm>
-            <a:off x="22743660" y="18487764"/>
-            <a:ext cx="180000" cy="249522"/>
+            <a:off x="22538010" y="18531636"/>
+            <a:ext cx="180000" cy="285168"/>
           </a:xfrm>
           <a:prstGeom prst="rect">
             <a:avLst/>
@@ -7519,27 +7484,27 @@
           <a:p>
             <a:pPr algn="l"/>
             <a:r>
-              <a:rPr sz="1511" b="0" i="0">
+              <a:rPr sz="1727" b="0" i="0">
                 <a:solidFill>
                   <a:srgbClr val="5B6570"/>
                 </a:solidFill>
                 <a:latin typeface="IBM Plex Sans"/>
               </a:rPr>
-              <a:t>Tìm cặp phá vỡ: em thích CLB</a:t>
-            </a:r>
-          </a:p>
-        </p:txBody>
-      </p:sp>
-      <p:sp>
-        <p:nvSpPr>
-          <p:cNvPr id="86" name="TextBox 85"/>
+              <a:t>Tìm cặp phá vỡ: em thích</a:t>
+            </a:r>
+          </a:p>
+        </p:txBody>
+      </p:sp>
+      <p:sp>
+        <p:nvSpPr>
+          <p:cNvPr id="85" name="TextBox 84"/>
           <p:cNvSpPr txBox="1"/>
           <p:nvPr/>
         </p:nvSpPr>
         <p:spPr>
           <a:xfrm>
-            <a:off x="22743660" y="18775674"/>
-            <a:ext cx="180000" cy="249522"/>
+            <a:off x="22538010" y="18860676"/>
+            <a:ext cx="180000" cy="285168"/>
           </a:xfrm>
           <a:prstGeom prst="rect">
             <a:avLst/>
@@ -7554,27 +7519,27 @@
           <a:p>
             <a:pPr algn="l"/>
             <a:r>
-              <a:rPr sz="1511" b="0" i="0">
+              <a:rPr sz="1727" b="0" i="0">
                 <a:solidFill>
                   <a:srgbClr val="5B6570"/>
                 </a:solidFill>
                 <a:latin typeface="IBM Plex Sans"/>
               </a:rPr>
-              <a:t>khác hơn và CLB đó cũng nhận em</a:t>
-            </a:r>
-          </a:p>
-        </p:txBody>
-      </p:sp>
-      <p:sp>
-        <p:nvSpPr>
-          <p:cNvPr id="87" name="TextBox 86"/>
+              <a:t>CLB khác hơn và CLB đó</a:t>
+            </a:r>
+          </a:p>
+        </p:txBody>
+      </p:sp>
+      <p:sp>
+        <p:nvSpPr>
+          <p:cNvPr id="86" name="TextBox 85"/>
           <p:cNvSpPr txBox="1"/>
           <p:nvPr/>
         </p:nvSpPr>
         <p:spPr>
           <a:xfrm>
-            <a:off x="22743660" y="19063584"/>
-            <a:ext cx="180000" cy="249522"/>
+            <a:off x="22538010" y="19189716"/>
+            <a:ext cx="180000" cy="285168"/>
           </a:xfrm>
           <a:prstGeom prst="rect">
             <a:avLst/>
@@ -7589,7 +7554,42 @@
           <a:p>
             <a:pPr algn="l"/>
             <a:r>
-              <a:rPr sz="1511" b="0" i="0">
+              <a:rPr sz="1727" b="0" i="0">
+                <a:solidFill>
+                  <a:srgbClr val="5B6570"/>
+                </a:solidFill>
+                <a:latin typeface="IBM Plex Sans"/>
+              </a:rPr>
+              <a:t>cũng nhận em</a:t>
+            </a:r>
+          </a:p>
+        </p:txBody>
+      </p:sp>
+      <p:sp>
+        <p:nvSpPr>
+          <p:cNvPr id="87" name="TextBox 86"/>
+          <p:cNvSpPr txBox="1"/>
+          <p:nvPr/>
+        </p:nvSpPr>
+        <p:spPr>
+          <a:xfrm>
+            <a:off x="22538010" y="19518756"/>
+            <a:ext cx="180000" cy="285168"/>
+          </a:xfrm>
+          <a:prstGeom prst="rect">
+            <a:avLst/>
+          </a:prstGeom>
+          <a:noFill/>
+        </p:spPr>
+        <p:txBody>
+          <a:bodyPr wrap="none" anchor="t" lIns="0" rIns="0" tIns="0" bIns="0">
+            <a:spAutoFit/>
+          </a:bodyPr>
+          <a:lstStyle/>
+          <a:p>
+            <a:pPr algn="l"/>
+            <a:r>
+              <a:rPr sz="1727" b="0" i="0">
                 <a:solidFill>
                   <a:srgbClr val="5B6570"/>
                 </a:solidFill>
@@ -7608,8 +7608,8 @@
         </p:nvSpPr>
         <p:spPr>
           <a:xfrm>
-            <a:off x="24162645" y="19812150"/>
-            <a:ext cx="219360" cy="342750"/>
+            <a:off x="24059819" y="19880700"/>
+            <a:ext cx="219360" cy="205650"/>
           </a:xfrm>
           <a:prstGeom prst="downArrow">
             <a:avLst/>
@@ -7652,12 +7652,12 @@
         </p:nvSpPr>
         <p:spPr>
           <a:xfrm>
-            <a:off x="22524300" y="20154900"/>
-            <a:ext cx="3496050" cy="1439550"/>
+            <a:off x="22318650" y="20086350"/>
+            <a:ext cx="3701700" cy="1508100"/>
           </a:xfrm>
           <a:prstGeom prst="roundRect">
             <a:avLst>
-              <a:gd name="adj" fmla="val 8571"/>
+              <a:gd name="adj" fmla="val 8181"/>
             </a:avLst>
           </a:prstGeom>
           <a:solidFill>
@@ -7700,8 +7700,8 @@
         </p:nvSpPr>
         <p:spPr>
           <a:xfrm>
-            <a:off x="22743660" y="20387970"/>
-            <a:ext cx="180000" cy="356460"/>
+            <a:off x="22538010" y="20322162"/>
+            <a:ext cx="180000" cy="392106"/>
           </a:xfrm>
           <a:prstGeom prst="rect">
             <a:avLst/>
@@ -7716,7 +7716,7 @@
           <a:p>
             <a:pPr algn="l"/>
             <a:r>
-              <a:rPr sz="2159" b="1" i="0">
+              <a:rPr sz="2374" b="1" i="0">
                 <a:solidFill>
                   <a:srgbClr val="1C2321"/>
                 </a:solidFill>
@@ -7735,8 +7735,8 @@
         </p:nvSpPr>
         <p:spPr>
           <a:xfrm>
-            <a:off x="22743660" y="20887014"/>
-            <a:ext cx="180000" cy="249522"/>
+            <a:off x="22538010" y="20862336"/>
+            <a:ext cx="180000" cy="285168"/>
           </a:xfrm>
           <a:prstGeom prst="rect">
             <a:avLst/>
@@ -7751,7 +7751,7 @@
           <a:p>
             <a:pPr algn="l"/>
             <a:r>
-              <a:rPr sz="1511" b="0" i="0">
+              <a:rPr sz="1727" b="0" i="0">
                 <a:solidFill>
                   <a:srgbClr val="5B6570"/>
                 </a:solidFill>
@@ -7770,8 +7770,8 @@
         </p:nvSpPr>
         <p:spPr>
           <a:xfrm>
-            <a:off x="22743660" y="21174924"/>
-            <a:ext cx="180000" cy="249522"/>
+            <a:off x="22538010" y="21191376"/>
+            <a:ext cx="180000" cy="285168"/>
           </a:xfrm>
           <a:prstGeom prst="rect">
             <a:avLst/>
@@ -7786,7 +7786,7 @@
           <a:p>
             <a:pPr algn="l"/>
             <a:r>
-              <a:rPr sz="1511" b="0" i="0">
+              <a:rPr sz="1727" b="0" i="0">
                 <a:solidFill>
                   <a:srgbClr val="5B6570"/>
                 </a:solidFill>
@@ -7805,7 +7805,7 @@
         </p:nvSpPr>
         <p:spPr>
           <a:xfrm>
-            <a:off x="14325720" y="21594450"/>
+            <a:off x="14188620" y="21594450"/>
             <a:ext cx="219360" cy="411300"/>
           </a:xfrm>
           <a:prstGeom prst="downArrow">
@@ -7897,8 +7897,8 @@
         </p:nvSpPr>
         <p:spPr>
           <a:xfrm>
-            <a:off x="10199010" y="22208658"/>
-            <a:ext cx="180000" cy="320814"/>
+            <a:off x="10199010" y="22197690"/>
+            <a:ext cx="180000" cy="356460"/>
           </a:xfrm>
           <a:prstGeom prst="rect">
             <a:avLst/>
@@ -7913,7 +7913,7 @@
           <a:p>
             <a:pPr algn="l"/>
             <a:r>
-              <a:rPr sz="1943" b="1" i="0">
+              <a:rPr sz="2159" b="1" i="0">
                 <a:solidFill>
                   <a:srgbClr val="1C2321"/>
                 </a:solidFill>
@@ -7932,12 +7932,12 @@
         </p:nvSpPr>
         <p:spPr>
           <a:xfrm>
-            <a:off x="10199010" y="22622700"/>
-            <a:ext cx="3756540" cy="1371000"/>
+            <a:off x="10199010" y="22608990"/>
+            <a:ext cx="3756540" cy="1453260"/>
           </a:xfrm>
           <a:prstGeom prst="roundRect">
             <a:avLst>
-              <a:gd name="adj" fmla="val 9000"/>
+              <a:gd name="adj" fmla="val 8490"/>
             </a:avLst>
           </a:prstGeom>
           <a:solidFill>
@@ -7980,8 +7980,8 @@
         </p:nvSpPr>
         <p:spPr>
           <a:xfrm>
-            <a:off x="10418370" y="22848915"/>
-            <a:ext cx="180000" cy="267345"/>
+            <a:off x="10418370" y="22837947"/>
+            <a:ext cx="180000" cy="302991"/>
           </a:xfrm>
           <a:prstGeom prst="rect">
             <a:avLst/>
@@ -7996,7 +7996,7 @@
           <a:p>
             <a:pPr algn="l"/>
             <a:r>
-              <a:rPr sz="1619" b="1" i="0">
+              <a:rPr sz="1835" b="1" i="0">
                 <a:solidFill>
                   <a:srgbClr val="1C2321"/>
                 </a:solidFill>
@@ -8015,8 +8015,8 @@
         </p:nvSpPr>
         <p:spPr>
           <a:xfrm>
-            <a:off x="10418370" y="23263642"/>
-            <a:ext cx="180000" cy="222787"/>
+            <a:off x="10418370" y="23272554"/>
+            <a:ext cx="180000" cy="249522"/>
           </a:xfrm>
           <a:prstGeom prst="rect">
             <a:avLst/>
@@ -8031,7 +8031,7 @@
           <a:p>
             <a:pPr algn="l"/>
             <a:r>
-              <a:rPr sz="1349" b="0" i="0">
+              <a:rPr sz="1511" b="0" i="0">
                 <a:solidFill>
                   <a:srgbClr val="5B6570"/>
                 </a:solidFill>
@@ -8050,8 +8050,8 @@
         </p:nvSpPr>
         <p:spPr>
           <a:xfrm>
-            <a:off x="10418370" y="23510422"/>
-            <a:ext cx="180000" cy="222787"/>
+            <a:off x="10418370" y="23533044"/>
+            <a:ext cx="180000" cy="249522"/>
           </a:xfrm>
           <a:prstGeom prst="rect">
             <a:avLst/>
@@ -8066,7 +8066,7 @@
           <a:p>
             <a:pPr algn="l"/>
             <a:r>
-              <a:rPr sz="1349" b="0" i="0">
+              <a:rPr sz="1511" b="0" i="0">
                 <a:solidFill>
                   <a:srgbClr val="5B6570"/>
                 </a:solidFill>
@@ -8085,8 +8085,8 @@
         </p:nvSpPr>
         <p:spPr>
           <a:xfrm>
-            <a:off x="10418370" y="23757202"/>
-            <a:ext cx="180000" cy="222787"/>
+            <a:off x="10418370" y="23793534"/>
+            <a:ext cx="180000" cy="249522"/>
           </a:xfrm>
           <a:prstGeom prst="rect">
             <a:avLst/>
@@ -8101,7 +8101,7 @@
           <a:p>
             <a:pPr algn="l"/>
             <a:r>
-              <a:rPr sz="1349" b="0" i="0">
+              <a:rPr sz="1511" b="0" i="0">
                 <a:solidFill>
                   <a:srgbClr val="5B6570"/>
                 </a:solidFill>
@@ -8120,12 +8120,12 @@
         </p:nvSpPr>
         <p:spPr>
           <a:xfrm>
-            <a:off x="14147490" y="22622700"/>
-            <a:ext cx="3756540" cy="1371000"/>
+            <a:off x="14147490" y="22608990"/>
+            <a:ext cx="3756540" cy="1453260"/>
           </a:xfrm>
           <a:prstGeom prst="roundRect">
             <a:avLst>
-              <a:gd name="adj" fmla="val 9000"/>
+              <a:gd name="adj" fmla="val 8490"/>
             </a:avLst>
           </a:prstGeom>
           <a:solidFill>
@@ -8168,8 +8168,8 @@
         </p:nvSpPr>
         <p:spPr>
           <a:xfrm>
-            <a:off x="14366850" y="22848915"/>
-            <a:ext cx="180000" cy="267345"/>
+            <a:off x="14366850" y="22837947"/>
+            <a:ext cx="180000" cy="302991"/>
           </a:xfrm>
           <a:prstGeom prst="rect">
             <a:avLst/>
@@ -8184,7 +8184,7 @@
           <a:p>
             <a:pPr algn="l"/>
             <a:r>
-              <a:rPr sz="1619" b="1" i="0">
+              <a:rPr sz="1835" b="1" i="0">
                 <a:solidFill>
                   <a:srgbClr val="1C2321"/>
                 </a:solidFill>
@@ -8203,8 +8203,8 @@
         </p:nvSpPr>
         <p:spPr>
           <a:xfrm>
-            <a:off x="14366850" y="23263642"/>
-            <a:ext cx="180000" cy="222787"/>
+            <a:off x="14366850" y="23272554"/>
+            <a:ext cx="180000" cy="249522"/>
           </a:xfrm>
           <a:prstGeom prst="rect">
             <a:avLst/>
@@ -8219,7 +8219,7 @@
           <a:p>
             <a:pPr algn="l"/>
             <a:r>
-              <a:rPr sz="1349" b="0" i="0">
+              <a:rPr sz="1511" b="0" i="0">
                 <a:solidFill>
                   <a:srgbClr val="5B6570"/>
                 </a:solidFill>
@@ -8238,8 +8238,8 @@
         </p:nvSpPr>
         <p:spPr>
           <a:xfrm>
-            <a:off x="14366850" y="23510422"/>
-            <a:ext cx="180000" cy="222787"/>
+            <a:off x="14366850" y="23533044"/>
+            <a:ext cx="180000" cy="249522"/>
           </a:xfrm>
           <a:prstGeom prst="rect">
             <a:avLst/>
@@ -8254,7 +8254,7 @@
           <a:p>
             <a:pPr algn="l"/>
             <a:r>
-              <a:rPr sz="1349" b="0" i="0">
+              <a:rPr sz="1511" b="0" i="0">
                 <a:solidFill>
                   <a:srgbClr val="5B6570"/>
                 </a:solidFill>
@@ -8273,8 +8273,8 @@
         </p:nvSpPr>
         <p:spPr>
           <a:xfrm>
-            <a:off x="14366850" y="23757202"/>
-            <a:ext cx="180000" cy="222787"/>
+            <a:off x="14366850" y="23793534"/>
+            <a:ext cx="180000" cy="249522"/>
           </a:xfrm>
           <a:prstGeom prst="rect">
             <a:avLst/>
@@ -8289,7 +8289,7 @@
           <a:p>
             <a:pPr algn="l"/>
             <a:r>
-              <a:rPr sz="1349" b="0" i="0">
+              <a:rPr sz="1511" b="0" i="0">
                 <a:solidFill>
                   <a:srgbClr val="5B6570"/>
                 </a:solidFill>
@@ -8308,12 +8308,12 @@
         </p:nvSpPr>
         <p:spPr>
           <a:xfrm>
-            <a:off x="18095970" y="22622700"/>
-            <a:ext cx="3756540" cy="1371000"/>
+            <a:off x="18095970" y="22608990"/>
+            <a:ext cx="3756540" cy="1453260"/>
           </a:xfrm>
           <a:prstGeom prst="roundRect">
             <a:avLst>
-              <a:gd name="adj" fmla="val 9000"/>
+              <a:gd name="adj" fmla="val 8490"/>
             </a:avLst>
           </a:prstGeom>
           <a:solidFill>
@@ -8356,8 +8356,8 @@
         </p:nvSpPr>
         <p:spPr>
           <a:xfrm>
-            <a:off x="18315330" y="22848915"/>
-            <a:ext cx="180000" cy="267345"/>
+            <a:off x="18315330" y="22837947"/>
+            <a:ext cx="180000" cy="302991"/>
           </a:xfrm>
           <a:prstGeom prst="rect">
             <a:avLst/>
@@ -8372,7 +8372,7 @@
           <a:p>
             <a:pPr algn="l"/>
             <a:r>
-              <a:rPr sz="1619" b="1" i="0">
+              <a:rPr sz="1835" b="1" i="0">
                 <a:solidFill>
                   <a:srgbClr val="1C2321"/>
                 </a:solidFill>
@@ -8391,8 +8391,8 @@
         </p:nvSpPr>
         <p:spPr>
           <a:xfrm>
-            <a:off x="18315330" y="23263642"/>
-            <a:ext cx="180000" cy="222787"/>
+            <a:off x="18315330" y="23272554"/>
+            <a:ext cx="180000" cy="249522"/>
           </a:xfrm>
           <a:prstGeom prst="rect">
             <a:avLst/>
@@ -8407,7 +8407,7 @@
           <a:p>
             <a:pPr algn="l"/>
             <a:r>
-              <a:rPr sz="1349" b="0" i="0">
+              <a:rPr sz="1511" b="0" i="0">
                 <a:solidFill>
                   <a:srgbClr val="5B6570"/>
                 </a:solidFill>
@@ -8426,8 +8426,8 @@
         </p:nvSpPr>
         <p:spPr>
           <a:xfrm>
-            <a:off x="18315330" y="23510422"/>
-            <a:ext cx="180000" cy="222787"/>
+            <a:off x="18315330" y="23533044"/>
+            <a:ext cx="180000" cy="249522"/>
           </a:xfrm>
           <a:prstGeom prst="rect">
             <a:avLst/>
@@ -8442,13 +8442,13 @@
           <a:p>
             <a:pPr algn="l"/>
             <a:r>
-              <a:rPr sz="1349" b="0" i="0">
+              <a:rPr sz="1511" b="0" i="0">
                 <a:solidFill>
                   <a:srgbClr val="5B6570"/>
                 </a:solidFill>
                 <a:latin typeface="IBM Plex Sans"/>
               </a:rPr>
-              <a:t>Cùng dữ liệu + cùng hạt giống</a:t>
+              <a:t>Cùng dữ liệu và cùng hạt giống</a:t>
             </a:r>
           </a:p>
         </p:txBody>
@@ -8461,8 +8461,8 @@
         </p:nvSpPr>
         <p:spPr>
           <a:xfrm>
-            <a:off x="18315330" y="23757202"/>
-            <a:ext cx="180000" cy="222787"/>
+            <a:off x="18315330" y="23793534"/>
+            <a:ext cx="180000" cy="249522"/>
           </a:xfrm>
           <a:prstGeom prst="rect">
             <a:avLst/>
@@ -8477,7 +8477,7 @@
           <a:p>
             <a:pPr algn="l"/>
             <a:r>
-              <a:rPr sz="1349" b="0" i="0">
+              <a:rPr sz="1511" b="0" i="0">
                 <a:solidFill>
                   <a:srgbClr val="5B6570"/>
                 </a:solidFill>
@@ -8496,12 +8496,12 @@
         </p:nvSpPr>
         <p:spPr>
           <a:xfrm>
-            <a:off x="22044450" y="22622700"/>
-            <a:ext cx="3756540" cy="1371000"/>
+            <a:off x="22044450" y="22608990"/>
+            <a:ext cx="3756540" cy="1453260"/>
           </a:xfrm>
           <a:prstGeom prst="roundRect">
             <a:avLst>
-              <a:gd name="adj" fmla="val 9000"/>
+              <a:gd name="adj" fmla="val 8490"/>
             </a:avLst>
           </a:prstGeom>
           <a:solidFill>
@@ -8544,8 +8544,8 @@
         </p:nvSpPr>
         <p:spPr>
           <a:xfrm>
-            <a:off x="22263810" y="22848915"/>
-            <a:ext cx="180000" cy="267345"/>
+            <a:off x="22263810" y="22837947"/>
+            <a:ext cx="180000" cy="302991"/>
           </a:xfrm>
           <a:prstGeom prst="rect">
             <a:avLst/>
@@ -8560,7 +8560,7 @@
           <a:p>
             <a:pPr algn="l"/>
             <a:r>
-              <a:rPr sz="1619" b="1" i="0">
+              <a:rPr sz="1835" b="1" i="0">
                 <a:solidFill>
                   <a:srgbClr val="1C2321"/>
                 </a:solidFill>
@@ -8579,8 +8579,8 @@
         </p:nvSpPr>
         <p:spPr>
           <a:xfrm>
-            <a:off x="22263810" y="23263642"/>
-            <a:ext cx="180000" cy="222787"/>
+            <a:off x="22263810" y="23272554"/>
+            <a:ext cx="180000" cy="249522"/>
           </a:xfrm>
           <a:prstGeom prst="rect">
             <a:avLst/>
@@ -8595,13 +8595,13 @@
           <a:p>
             <a:pPr algn="l"/>
             <a:r>
-              <a:rPr sz="1349" b="0" i="0">
+              <a:rPr sz="1511" b="0" i="0">
                 <a:solidFill>
                   <a:srgbClr val="5B6570"/>
                 </a:solidFill>
                 <a:latin typeface="IBM Plex Sans"/>
               </a:rPr>
-              <a:t>Số đã bốc giữ nguyên ở các lần chạy sau</a:t>
+              <a:t>Số đã bốc giữ nguyên ở lần chạy sau</a:t>
             </a:r>
           </a:p>
         </p:txBody>
@@ -8614,8 +8614,8 @@
         </p:nvSpPr>
         <p:spPr>
           <a:xfrm>
-            <a:off x="22263810" y="23510422"/>
-            <a:ext cx="180000" cy="222787"/>
+            <a:off x="22263810" y="23533044"/>
+            <a:ext cx="180000" cy="249522"/>
           </a:xfrm>
           <a:prstGeom prst="rect">
             <a:avLst/>
@@ -8630,13 +8630,13 @@
           <a:p>
             <a:pPr algn="l"/>
             <a:r>
-              <a:rPr sz="1349" b="0" i="0">
+              <a:rPr sz="1511" b="0" i="0">
                 <a:solidFill>
                   <a:srgbClr val="5B6570"/>
                 </a:solidFill>
                 <a:latin typeface="IBM Plex Sans"/>
               </a:rPr>
-              <a:t>Bốc lại = đổi hạt giống, xác nhận 2 lần</a:t>
+              <a:t>Muốn bốc lại thì đổi hạt giống</a:t>
             </a:r>
           </a:p>
         </p:txBody>
@@ -8649,8 +8649,8 @@
         </p:nvSpPr>
         <p:spPr>
           <a:xfrm>
-            <a:off x="9979650" y="24291207"/>
-            <a:ext cx="180000" cy="213876"/>
+            <a:off x="22263810" y="23793534"/>
+            <a:ext cx="180000" cy="249522"/>
           </a:xfrm>
           <a:prstGeom prst="rect">
             <a:avLst/>
@@ -8665,6 +8665,41 @@
           <a:p>
             <a:pPr algn="l"/>
             <a:r>
+              <a:rPr sz="1511" b="0" i="0">
+                <a:solidFill>
+                  <a:srgbClr val="5B6570"/>
+                </a:solidFill>
+                <a:latin typeface="IBM Plex Sans"/>
+              </a:rPr>
+              <a:t>và xác nhận thêm một lần</a:t>
+            </a:r>
+          </a:p>
+        </p:txBody>
+      </p:sp>
+      <p:sp>
+        <p:nvSpPr>
+          <p:cNvPr id="116" name="TextBox 115"/>
+          <p:cNvSpPr txBox="1"/>
+          <p:nvPr/>
+        </p:nvSpPr>
+        <p:spPr>
+          <a:xfrm>
+            <a:off x="9979650" y="24291207"/>
+            <a:ext cx="180000" cy="213876"/>
+          </a:xfrm>
+          <a:prstGeom prst="rect">
+            <a:avLst/>
+          </a:prstGeom>
+          <a:noFill/>
+        </p:spPr>
+        <p:txBody>
+          <a:bodyPr wrap="none" anchor="t" lIns="0" rIns="0" tIns="0" bIns="0">
+            <a:spAutoFit/>
+          </a:bodyPr>
+          <a:lstStyle/>
+          <a:p>
+            <a:pPr algn="l"/>
+            <a:r>
               <a:rPr sz="1295" b="0" i="0">
                 <a:solidFill>
                   <a:srgbClr val="8A929A"/>
@@ -8678,7 +8713,7 @@
       </p:sp>
       <p:sp>
         <p:nvSpPr>
-          <p:cNvPr id="116" name="Rounded Rectangle 115"/>
+          <p:cNvPr id="117" name="Rounded Rectangle 116"/>
           <p:cNvSpPr/>
           <p:nvPr/>
         </p:nvSpPr>
@@ -8725,7 +8760,7 @@
       </p:sp>
       <p:sp>
         <p:nvSpPr>
-          <p:cNvPr id="117" name="TextBox 116"/>
+          <p:cNvPr id="118" name="TextBox 117"/>
           <p:cNvSpPr txBox="1"/>
           <p:nvPr/>
         </p:nvSpPr>
@@ -8760,7 +8795,7 @@
       </p:sp>
       <p:sp>
         <p:nvSpPr>
-          <p:cNvPr id="118" name="Rounded Rectangle 117"/>
+          <p:cNvPr id="119" name="Rounded Rectangle 118"/>
           <p:cNvSpPr/>
           <p:nvPr/>
         </p:nvSpPr>
@@ -8808,7 +8843,7 @@
       </p:sp>
       <p:sp>
         <p:nvSpPr>
-          <p:cNvPr id="119" name="Oval 118"/>
+          <p:cNvPr id="120" name="Oval 119"/>
           <p:cNvSpPr/>
           <p:nvPr/>
         </p:nvSpPr>
@@ -8861,7 +8896,7 @@
       </p:sp>
       <p:sp>
         <p:nvSpPr>
-          <p:cNvPr id="120" name="TextBox 119"/>
+          <p:cNvPr id="121" name="TextBox 120"/>
           <p:cNvSpPr txBox="1"/>
           <p:nvPr/>
         </p:nvSpPr>
@@ -8896,7 +8931,7 @@
       </p:sp>
       <p:sp>
         <p:nvSpPr>
-          <p:cNvPr id="121" name="Oval 120"/>
+          <p:cNvPr id="122" name="Oval 121"/>
           <p:cNvSpPr/>
           <p:nvPr/>
         </p:nvSpPr>
@@ -8949,7 +8984,7 @@
       </p:sp>
       <p:sp>
         <p:nvSpPr>
-          <p:cNvPr id="122" name="Rounded Rectangle 121"/>
+          <p:cNvPr id="123" name="Rounded Rectangle 122"/>
           <p:cNvSpPr/>
           <p:nvPr/>
         </p:nvSpPr>
@@ -8996,7 +9031,7 @@
       </p:sp>
       <p:sp>
         <p:nvSpPr>
-          <p:cNvPr id="123" name="TextBox 122"/>
+          <p:cNvPr id="124" name="TextBox 123"/>
           <p:cNvSpPr txBox="1"/>
           <p:nvPr/>
         </p:nvSpPr>
@@ -9031,7 +9066,7 @@
       </p:sp>
       <p:sp>
         <p:nvSpPr>
-          <p:cNvPr id="124" name="Oval 123"/>
+          <p:cNvPr id="125" name="Oval 124"/>
           <p:cNvSpPr/>
           <p:nvPr/>
         </p:nvSpPr>
@@ -9084,7 +9119,7 @@
       </p:sp>
       <p:sp>
         <p:nvSpPr>
-          <p:cNvPr id="125" name="Rounded Rectangle 124"/>
+          <p:cNvPr id="126" name="Rounded Rectangle 125"/>
           <p:cNvSpPr/>
           <p:nvPr/>
         </p:nvSpPr>
@@ -9131,7 +9166,7 @@
       </p:sp>
       <p:sp>
         <p:nvSpPr>
-          <p:cNvPr id="126" name="TextBox 125"/>
+          <p:cNvPr id="127" name="TextBox 126"/>
           <p:cNvSpPr txBox="1"/>
           <p:nvPr/>
         </p:nvSpPr>
@@ -9166,7 +9201,7 @@
       </p:sp>
       <p:sp>
         <p:nvSpPr>
-          <p:cNvPr id="127" name="Oval 126"/>
+          <p:cNvPr id="128" name="Oval 127"/>
           <p:cNvSpPr/>
           <p:nvPr/>
         </p:nvSpPr>
@@ -9219,7 +9254,7 @@
       </p:sp>
       <p:sp>
         <p:nvSpPr>
-          <p:cNvPr id="128" name="Rounded Rectangle 127"/>
+          <p:cNvPr id="129" name="Rounded Rectangle 128"/>
           <p:cNvSpPr/>
           <p:nvPr/>
         </p:nvSpPr>
@@ -9266,7 +9301,7 @@
       </p:sp>
       <p:sp>
         <p:nvSpPr>
-          <p:cNvPr id="129" name="TextBox 128"/>
+          <p:cNvPr id="130" name="TextBox 129"/>
           <p:cNvSpPr txBox="1"/>
           <p:nvPr/>
         </p:nvSpPr>
@@ -9301,7 +9336,7 @@
       </p:sp>
       <p:sp>
         <p:nvSpPr>
-          <p:cNvPr id="130" name="Oval 129"/>
+          <p:cNvPr id="131" name="Oval 130"/>
           <p:cNvSpPr/>
           <p:nvPr/>
         </p:nvSpPr>
@@ -9354,7 +9389,7 @@
       </p:sp>
       <p:sp>
         <p:nvSpPr>
-          <p:cNvPr id="131" name="Rounded Rectangle 130"/>
+          <p:cNvPr id="132" name="Rounded Rectangle 131"/>
           <p:cNvSpPr/>
           <p:nvPr/>
         </p:nvSpPr>
@@ -9401,7 +9436,7 @@
       </p:sp>
       <p:sp>
         <p:nvSpPr>
-          <p:cNvPr id="132" name="TextBox 131"/>
+          <p:cNvPr id="133" name="TextBox 132"/>
           <p:cNvSpPr txBox="1"/>
           <p:nvPr/>
         </p:nvSpPr>
@@ -9436,7 +9471,7 @@
       </p:sp>
       <p:sp>
         <p:nvSpPr>
-          <p:cNvPr id="133" name="Rounded Rectangle 132"/>
+          <p:cNvPr id="134" name="Rounded Rectangle 133"/>
           <p:cNvSpPr/>
           <p:nvPr/>
         </p:nvSpPr>
@@ -9484,7 +9519,7 @@
       </p:sp>
       <p:sp>
         <p:nvSpPr>
-          <p:cNvPr id="134" name="Oval 133"/>
+          <p:cNvPr id="135" name="Oval 134"/>
           <p:cNvSpPr/>
           <p:nvPr/>
         </p:nvSpPr>
@@ -9537,7 +9572,7 @@
       </p:sp>
       <p:sp>
         <p:nvSpPr>
-          <p:cNvPr id="135" name="TextBox 134"/>
+          <p:cNvPr id="136" name="TextBox 135"/>
           <p:cNvSpPr txBox="1"/>
           <p:nvPr/>
         </p:nvSpPr>
@@ -9572,7 +9607,7 @@
       </p:sp>
       <p:grpSp>
         <p:nvGrpSpPr>
-          <p:cNvPr id="136" name="Bieu do khai gian"/>
+          <p:cNvPr id="137" name="Bieu do khai gian"/>
           <p:cNvGrpSpPr/>
           <p:nvPr/>
         </p:nvGrpSpPr>
@@ -9586,7 +9621,7 @@
         </p:grpSpPr>
         <p:graphicFrame>
           <p:nvGraphicFramePr>
-            <p:cNvPr id="140" name="Chart 139"/>
+            <p:cNvPr id="141" name="Chart 140"/>
             <p:cNvGraphicFramePr>
               <a:graphicFrameLocks noGrp="1"/>
             </p:cNvGraphicFramePr>
@@ -9605,7 +9640,7 @@
       </p:grpSp>
       <p:sp>
         <p:nvSpPr>
-          <p:cNvPr id="137" name="TextBox 136"/>
+          <p:cNvPr id="138" name="TextBox 137"/>
           <p:cNvSpPr txBox="1"/>
           <p:nvPr/>
         </p:nvSpPr>
@@ -9640,7 +9675,7 @@
       </p:sp>
       <p:sp>
         <p:nvSpPr>
-          <p:cNvPr id="138" name="TextBox 137"/>
+          <p:cNvPr id="139" name="TextBox 138"/>
           <p:cNvSpPr txBox="1"/>
           <p:nvPr/>
         </p:nvSpPr>
@@ -9675,7 +9710,7 @@
       </p:sp>
       <p:sp>
         <p:nvSpPr>
-          <p:cNvPr id="139" name="TextBox 138"/>
+          <p:cNvPr id="140" name="TextBox 139"/>
           <p:cNvSpPr txBox="1"/>
           <p:nvPr/>
         </p:nvSpPr>
@@ -9710,7 +9745,7 @@
       </p:sp>
       <p:grpSp>
         <p:nvGrpSpPr>
-          <p:cNvPr id="141" name="Bieu do nguyen vong"/>
+          <p:cNvPr id="142" name="Bieu do nguyen vong"/>
           <p:cNvGrpSpPr/>
           <p:nvPr/>
         </p:nvGrpSpPr>
@@ -9724,7 +9759,7 @@
         </p:grpSpPr>
         <p:graphicFrame>
           <p:nvGraphicFramePr>
-            <p:cNvPr id="145" name="Chart 144"/>
+            <p:cNvPr id="146" name="Chart 145"/>
             <p:cNvGraphicFramePr>
               <a:graphicFrameLocks noGrp="1"/>
             </p:cNvGraphicFramePr>
@@ -9743,7 +9778,7 @@
       </p:grpSp>
       <p:sp>
         <p:nvSpPr>
-          <p:cNvPr id="142" name="TextBox 141"/>
+          <p:cNvPr id="143" name="TextBox 142"/>
           <p:cNvSpPr txBox="1"/>
           <p:nvPr/>
         </p:nvSpPr>
@@ -9778,7 +9813,7 @@
       </p:sp>
       <p:sp>
         <p:nvSpPr>
-          <p:cNvPr id="143" name="TextBox 142"/>
+          <p:cNvPr id="144" name="TextBox 143"/>
           <p:cNvSpPr txBox="1"/>
           <p:nvPr/>
         </p:nvSpPr>
@@ -9813,7 +9848,7 @@
       </p:sp>
       <p:sp>
         <p:nvSpPr>
-          <p:cNvPr id="144" name="TextBox 143"/>
+          <p:cNvPr id="145" name="TextBox 144"/>
           <p:cNvSpPr txBox="1"/>
           <p:nvPr/>
         </p:nvSpPr>
@@ -9848,7 +9883,7 @@
       </p:sp>
       <p:sp>
         <p:nvSpPr>
-          <p:cNvPr id="146" name="Rounded Rectangle 145"/>
+          <p:cNvPr id="147" name="Rounded Rectangle 146"/>
           <p:cNvSpPr/>
           <p:nvPr/>
         </p:nvSpPr>
@@ -9895,7 +9930,7 @@
       </p:sp>
       <p:sp>
         <p:nvSpPr>
-          <p:cNvPr id="147" name="TextBox 146"/>
+          <p:cNvPr id="148" name="TextBox 147"/>
           <p:cNvSpPr txBox="1"/>
           <p:nvPr/>
         </p:nvSpPr>
@@ -9930,7 +9965,7 @@
       </p:sp>
       <p:sp>
         <p:nvSpPr>
-          <p:cNvPr id="148" name="Rounded Rectangle 147"/>
+          <p:cNvPr id="149" name="Rounded Rectangle 148"/>
           <p:cNvSpPr/>
           <p:nvPr/>
         </p:nvSpPr>
@@ -9978,7 +10013,7 @@
       </p:sp>
       <p:sp>
         <p:nvSpPr>
-          <p:cNvPr id="149" name="TextBox 148"/>
+          <p:cNvPr id="150" name="TextBox 149"/>
           <p:cNvSpPr txBox="1"/>
           <p:nvPr/>
         </p:nvSpPr>
@@ -10013,7 +10048,7 @@
       </p:sp>
       <p:sp>
         <p:nvSpPr>
-          <p:cNvPr id="150" name="Rounded Rectangle 149"/>
+          <p:cNvPr id="151" name="Rounded Rectangle 150"/>
           <p:cNvSpPr/>
           <p:nvPr/>
         </p:nvSpPr>
@@ -10060,7 +10095,7 @@
       </p:sp>
       <p:sp>
         <p:nvSpPr>
-          <p:cNvPr id="151" name="TextBox 150"/>
+          <p:cNvPr id="152" name="TextBox 151"/>
           <p:cNvSpPr txBox="1"/>
           <p:nvPr/>
         </p:nvSpPr>

--- a/poster/poster_khung_1-2.pptx
+++ b/poster/poster_khung_1-2.pptx
@@ -115,6 +115,287 @@
     <c:plotArea>
       <c:barChart>
         <c:barDir val="bar"/>
+        <c:grouping val="percentStacked"/>
+        <c:ser>
+          <c:idx val="0"/>
+          <c:order val="0"/>
+          <c:tx>
+            <c:strRef>
+              <c:f>Sheet1!$B$1</c:f>
+              <c:strCache>
+                <c:ptCount val="1"/>
+                <c:pt idx="0">
+                  <c:v>Luôn giữ nguyên CLB</c:v>
+                </c:pt>
+              </c:strCache>
+            </c:strRef>
+          </c:tx>
+          <c:spPr>
+            <a:solidFill>
+              <a:srgbClr val="27805A"/>
+            </a:solidFill>
+          </c:spPr>
+          <c:dLbls>
+            <c:dLbl>
+              <c:idx val="0"/>
+              <c:tx>
+                <c:rich>
+                  <a:bodyPr/>
+                  <a:lstStyle/>
+                  <a:p>
+                    <a:r>
+                      <a:rPr sz="1231" b="1">
+                        <a:solidFill>
+                          <a:srgbClr val="FFFFFF"/>
+                        </a:solidFill>
+                      </a:rPr>
+                      <a:t>100%</a:t>
+                    </a:r>
+                  </a:p>
+                </c:rich>
+              </c:tx>
+              <c:dLblPos val="inBase"/>
+              <c:showLegendKey val="0"/>
+              <c:showVal val="1"/>
+              <c:showCatName val="0"/>
+              <c:showSerName val="0"/>
+              <c:showPercent val="0"/>
+              <c:showBubbleSize val="0"/>
+            </c:dLbl>
+            <c:dLbl>
+              <c:idx val="1"/>
+              <c:tx>
+                <c:rich>
+                  <a:bodyPr/>
+                  <a:lstStyle/>
+                  <a:p>
+                    <a:r>
+                      <a:rPr sz="1231" b="1">
+                        <a:solidFill>
+                          <a:srgbClr val="FFFFFF"/>
+                        </a:solidFill>
+                      </a:rPr>
+                      <a:t>96,7% · 116 em</a:t>
+                    </a:r>
+                  </a:p>
+                </c:rich>
+              </c:tx>
+              <c:dLblPos val="inBase"/>
+              <c:showLegendKey val="0"/>
+              <c:showVal val="1"/>
+              <c:showCatName val="0"/>
+              <c:showSerName val="0"/>
+              <c:showPercent val="0"/>
+              <c:showBubbleSize val="0"/>
+            </c:dLbl>
+            <c:dLbl>
+              <c:idx val="2"/>
+              <c:tx>
+                <c:rich>
+                  <a:bodyPr/>
+                  <a:lstStyle/>
+                  <a:p>
+                    <a:r>
+                      <a:rPr sz="1231" b="1">
+                        <a:solidFill>
+                          <a:srgbClr val="FFFFFF"/>
+                        </a:solidFill>
+                      </a:rPr>
+                      <a:t>90,7% · 127 em</a:t>
+                    </a:r>
+                  </a:p>
+                </c:rich>
+              </c:tx>
+              <c:dLblPos val="inBase"/>
+              <c:showLegendKey val="0"/>
+              <c:showVal val="1"/>
+              <c:showCatName val="0"/>
+              <c:showSerName val="0"/>
+              <c:showPercent val="0"/>
+              <c:showBubbleSize val="0"/>
+            </c:dLbl>
+            <c:showLegendKey val="0"/>
+            <c:showVal val="0"/>
+            <c:showCatName val="0"/>
+            <c:showSerName val="0"/>
+            <c:showPercent val="0"/>
+            <c:showBubbleSize val="0"/>
+            <c:showLeaderLines val="1"/>
+          </c:dLbls>
+          <c:cat>
+            <c:strRef>
+              <c:f>Sheet1!$A$2:$A$4</c:f>
+              <c:strCache>
+                <c:ptCount val="3"/>
+                <c:pt idx="0">
+                  <c:v>Bộ 10 em · 0 em có lúc đổi</c:v>
+                </c:pt>
+                <c:pt idx="1">
+                  <c:v>Bộ 120 em · 4 em có lúc đổi</c:v>
+                </c:pt>
+                <c:pt idx="2">
+                  <c:v>Bộ 140 em · 13 em có lúc đổi</c:v>
+                </c:pt>
+              </c:strCache>
+            </c:strRef>
+          </c:cat>
+          <c:val>
+            <c:numRef>
+              <c:f>Sheet1!$B$2:$B$4</c:f>
+              <c:numCache>
+                <c:formatCode>General</c:formatCode>
+                <c:ptCount val="3"/>
+                <c:pt idx="0">
+                  <c:v>10</c:v>
+                </c:pt>
+                <c:pt idx="1">
+                  <c:v>116</c:v>
+                </c:pt>
+                <c:pt idx="2">
+                  <c:v>127</c:v>
+                </c:pt>
+              </c:numCache>
+            </c:numRef>
+          </c:val>
+        </c:ser>
+        <c:ser>
+          <c:idx val="1"/>
+          <c:order val="1"/>
+          <c:tx>
+            <c:strRef>
+              <c:f>Sheet1!$C$1</c:f>
+              <c:strCache>
+                <c:ptCount val="1"/>
+                <c:pt idx="0">
+                  <c:v>Có lúc đổi CLB</c:v>
+                </c:pt>
+              </c:strCache>
+            </c:strRef>
+          </c:tx>
+          <c:spPr>
+            <a:solidFill>
+              <a:srgbClr val="B8781A"/>
+            </a:solidFill>
+          </c:spPr>
+          <c:cat>
+            <c:strRef>
+              <c:f>Sheet1!$A$2:$A$4</c:f>
+              <c:strCache>
+                <c:ptCount val="3"/>
+                <c:pt idx="0">
+                  <c:v>Bộ 10 em · 0 em có lúc đổi</c:v>
+                </c:pt>
+                <c:pt idx="1">
+                  <c:v>Bộ 120 em · 4 em có lúc đổi</c:v>
+                </c:pt>
+                <c:pt idx="2">
+                  <c:v>Bộ 140 em · 13 em có lúc đổi</c:v>
+                </c:pt>
+              </c:strCache>
+            </c:strRef>
+          </c:cat>
+          <c:val>
+            <c:numRef>
+              <c:f>Sheet1!$C$2:$C$4</c:f>
+              <c:numCache>
+                <c:formatCode>General</c:formatCode>
+                <c:ptCount val="3"/>
+                <c:pt idx="0">
+                  <c:v>0</c:v>
+                </c:pt>
+                <c:pt idx="1">
+                  <c:v>4</c:v>
+                </c:pt>
+                <c:pt idx="2">
+                  <c:v>13</c:v>
+                </c:pt>
+              </c:numCache>
+            </c:numRef>
+          </c:val>
+        </c:ser>
+        <c:gapWidth val="40"/>
+        <c:overlap val="100"/>
+        <c:axId val="-2068027336"/>
+        <c:axId val="-2113994440"/>
+      </c:barChart>
+      <c:catAx>
+        <c:axId val="-2068027336"/>
+        <c:scaling>
+          <c:orientation val="maxMin"/>
+        </c:scaling>
+        <c:delete val="0"/>
+        <c:axPos val="l"/>
+        <c:majorTickMark val="out"/>
+        <c:minorTickMark val="none"/>
+        <c:tickLblPos val="nextTo"/>
+        <c:spPr>
+          <a:ln>
+            <a:noFill/>
+          </a:ln>
+        </c:spPr>
+        <c:txPr>
+          <a:bodyPr/>
+          <a:lstStyle/>
+          <a:p>
+            <a:pPr>
+              <a:defRPr sz="869"/>
+            </a:pPr>
+          </a:p>
+        </c:txPr>
+        <c:crossAx val="-2113994440"/>
+        <c:crosses val="autoZero"/>
+        <c:auto val="1"/>
+        <c:lblAlgn val="ctr"/>
+        <c:lblOffset val="100"/>
+        <c:noMultiLvlLbl val="0"/>
+      </c:catAx>
+      <c:valAx>
+        <c:axId val="-2113994440"/>
+        <c:scaling/>
+        <c:delete/>
+        <c:axPos val="b"/>
+        <c:majorTickMark val="out"/>
+        <c:minorTickMark val="none"/>
+        <c:tickLblPos val="nextTo"/>
+        <c:crossAx val="-2068027336"/>
+        <c:crosses val="autoZero"/>
+      </c:valAx>
+    </c:plotArea>
+    <c:legend>
+      <c:legendPos val="t"/>
+      <c:overlay val="0"/>
+    </c:legend>
+    <c:dispBlanksAs val="gap"/>
+  </c:chart>
+  <c:txPr>
+    <a:bodyPr/>
+    <a:lstStyle/>
+    <a:p>
+      <a:pPr>
+        <a:defRPr sz="869">
+          <a:solidFill>
+            <a:srgbClr val="1C2321"/>
+          </a:solidFill>
+          <a:latin typeface="IBM Plex Sans"/>
+        </a:defRPr>
+      </a:pPr>
+      <a:endParaRPr lang="en-US"/>
+    </a:p>
+  </c:txPr>
+  <c:externalData r:id="rId1">
+    <c:autoUpdate val="0"/>
+  </c:externalData>
+</c:chartSpace>
+</file>
+
+<file path=ppt/charts/chart2.xml><?xml version="1.0" encoding="utf-8"?>
+<c:chartSpace xmlns:c="http://schemas.openxmlformats.org/drawingml/2006/chart" xmlns:a="http://schemas.openxmlformats.org/drawingml/2006/main" xmlns:r="http://schemas.openxmlformats.org/officeDocument/2006/relationships">
+  <c:date1904 val="0"/>
+  <c:chart>
+    <c:autoTitleDeleted val="1"/>
+    <c:plotArea>
+      <c:barChart>
+        <c:barDir val="bar"/>
         <c:grouping val="clustered"/>
         <c:ser>
           <c:idx val="0"/>
@@ -134,12 +415,44 @@
             <c:idx val="0"/>
             <c:spPr>
               <a:solidFill>
-                <a:srgbClr val="27805A"/>
+                <a:srgbClr val="B9BEC3"/>
               </a:solidFill>
             </c:spPr>
           </c:dPt>
           <c:dPt>
             <c:idx val="1"/>
+            <c:spPr>
+              <a:solidFill>
+                <a:srgbClr val="B9BEC3"/>
+              </a:solidFill>
+            </c:spPr>
+          </c:dPt>
+          <c:dPt>
+            <c:idx val="2"/>
+            <c:spPr>
+              <a:solidFill>
+                <a:srgbClr val="B8781A"/>
+              </a:solidFill>
+            </c:spPr>
+          </c:dPt>
+          <c:dPt>
+            <c:idx val="3"/>
+            <c:spPr>
+              <a:solidFill>
+                <a:srgbClr val="B9BEC3"/>
+              </a:solidFill>
+            </c:spPr>
+          </c:dPt>
+          <c:dPt>
+            <c:idx val="4"/>
+            <c:spPr>
+              <a:solidFill>
+                <a:srgbClr val="B9BEC3"/>
+              </a:solidFill>
+            </c:spPr>
+          </c:dPt>
+          <c:dPt>
+            <c:idx val="5"/>
             <c:spPr>
               <a:solidFill>
                 <a:srgbClr val="B9BEC3"/>
@@ -160,7 +473,7 @@
                           <a:srgbClr val="1C2321"/>
                         </a:solidFill>
                       </a:rPr>
-                      <a:t>0 / 1 400 em</a:t>
+                      <a:t>15,14%</a:t>
                     </a:r>
                   </a:p>
                 </c:rich>
@@ -186,7 +499,111 @@
                           <a:srgbClr val="1C2321"/>
                         </a:solidFill>
                       </a:rPr>
-                      <a:t>258 / 1 400 em (18,43%)</a:t>
+                      <a:t>4,75%</a:t>
+                    </a:r>
+                  </a:p>
+                </c:rich>
+              </c:tx>
+              <c:dLblPos val="outEnd"/>
+              <c:showLegendKey val="0"/>
+              <c:showVal val="1"/>
+              <c:showCatName val="0"/>
+              <c:showSerName val="0"/>
+              <c:showPercent val="0"/>
+              <c:showBubbleSize val="0"/>
+            </c:dLbl>
+            <c:dLbl>
+              <c:idx val="2"/>
+              <c:tx>
+                <c:rich>
+                  <a:bodyPr/>
+                  <a:lstStyle/>
+                  <a:p>
+                    <a:r>
+                      <a:rPr sz="1231" b="1">
+                        <a:solidFill>
+                          <a:srgbClr val="1C2321"/>
+                        </a:solidFill>
+                      </a:rPr>
+                      <a:t>4,36%</a:t>
+                    </a:r>
+                  </a:p>
+                </c:rich>
+              </c:tx>
+              <c:dLblPos val="outEnd"/>
+              <c:showLegendKey val="0"/>
+              <c:showVal val="1"/>
+              <c:showCatName val="0"/>
+              <c:showSerName val="0"/>
+              <c:showPercent val="0"/>
+              <c:showBubbleSize val="0"/>
+            </c:dLbl>
+            <c:dLbl>
+              <c:idx val="3"/>
+              <c:tx>
+                <c:rich>
+                  <a:bodyPr/>
+                  <a:lstStyle/>
+                  <a:p>
+                    <a:r>
+                      <a:rPr sz="1231" b="1">
+                        <a:solidFill>
+                          <a:srgbClr val="1C2321"/>
+                        </a:solidFill>
+                      </a:rPr>
+                      <a:t>1,27%</a:t>
+                    </a:r>
+                  </a:p>
+                </c:rich>
+              </c:tx>
+              <c:dLblPos val="outEnd"/>
+              <c:showLegendKey val="0"/>
+              <c:showVal val="1"/>
+              <c:showCatName val="0"/>
+              <c:showSerName val="0"/>
+              <c:showPercent val="0"/>
+              <c:showBubbleSize val="0"/>
+            </c:dLbl>
+            <c:dLbl>
+              <c:idx val="4"/>
+              <c:tx>
+                <c:rich>
+                  <a:bodyPr/>
+                  <a:lstStyle/>
+                  <a:p>
+                    <a:r>
+                      <a:rPr sz="1231" b="1">
+                        <a:solidFill>
+                          <a:srgbClr val="1C2321"/>
+                        </a:solidFill>
+                      </a:rPr>
+                      <a:t>0,83%</a:t>
+                    </a:r>
+                  </a:p>
+                </c:rich>
+              </c:tx>
+              <c:dLblPos val="outEnd"/>
+              <c:showLegendKey val="0"/>
+              <c:showVal val="1"/>
+              <c:showCatName val="0"/>
+              <c:showSerName val="0"/>
+              <c:showPercent val="0"/>
+              <c:showBubbleSize val="0"/>
+            </c:dLbl>
+            <c:dLbl>
+              <c:idx val="5"/>
+              <c:tx>
+                <c:rich>
+                  <a:bodyPr/>
+                  <a:lstStyle/>
+                  <a:p>
+                    <a:r>
+                      <a:rPr sz="1231" b="1">
+                        <a:solidFill>
+                          <a:srgbClr val="1C2321"/>
+                        </a:solidFill>
+                      </a:rPr>
+                      <a:t>0,50%</a:t>
                     </a:r>
                   </a:p>
                 </c:rich>
@@ -209,29 +626,53 @@
           </c:dLbls>
           <c:cat>
             <c:strRef>
-              <c:f>Sheet1!$A$2:$A$3</c:f>
+              <c:f>Sheet1!$A$2:$A$7</c:f>
               <c:strCache>
-                <c:ptCount val="2"/>
+                <c:ptCount val="6"/>
                 <c:pt idx="0">
-                  <c:v>Phần mềm (RB-DA)</c:v>
+                  <c:v>Điểm chấm lệch ±0,5</c:v>
                 </c:pt>
                 <c:pt idx="1">
-                  <c:v>Cơ chế Boston</c:v>
+                  <c:v>Điểm chấm lệch ±0,1</c:v>
+                </c:pt>
+                <c:pt idx="2">
+                  <c:v>Đổi hạt giống bốc thăm</c:v>
+                </c:pt>
+                <c:pt idx="3">
+                  <c:v>Bớt 1 học sinh</c:v>
+                </c:pt>
+                <c:pt idx="4">
+                  <c:v>Chỉ tiêu mỗi CLB ±1</c:v>
+                </c:pt>
+                <c:pt idx="5">
+                  <c:v>Thêm 1 học sinh</c:v>
                 </c:pt>
               </c:strCache>
             </c:strRef>
           </c:cat>
           <c:val>
             <c:numRef>
-              <c:f>Sheet1!$B$2:$B$3</c:f>
+              <c:f>Sheet1!$B$2:$B$7</c:f>
               <c:numCache>
                 <c:formatCode>General</c:formatCode>
-                <c:ptCount val="2"/>
+                <c:ptCount val="6"/>
                 <c:pt idx="0">
-                  <c:v>0</c:v>
+                  <c:v>15.14</c:v>
                 </c:pt>
                 <c:pt idx="1">
-                  <c:v>258</c:v>
+                  <c:v>4.75</c:v>
+                </c:pt>
+                <c:pt idx="2">
+                  <c:v>4.36</c:v>
+                </c:pt>
+                <c:pt idx="3">
+                  <c:v>1.27</c:v>
+                </c:pt>
+                <c:pt idx="4">
+                  <c:v>0.83</c:v>
+                </c:pt>
+                <c:pt idx="5">
+                  <c:v>0.5</c:v>
                 </c:pt>
               </c:numCache>
             </c:numRef>
@@ -263,7 +704,7 @@
           <a:lstStyle/>
           <a:p>
             <a:pPr>
-              <a:defRPr b="1" sz="1159"/>
+              <a:defRPr b="0" sz="1159"/>
             </a:pPr>
           </a:p>
         </c:txPr>
@@ -277,7 +718,7 @@
       <c:valAx>
         <c:axId val="-2113994440"/>
         <c:scaling>
-          <c:max val="400.0"/>
+          <c:max val="16.0"/>
           <c:min val="0.0"/>
         </c:scaling>
         <c:delete val="0"/>
@@ -291,6 +732,7 @@
             </a:ln>
           </c:spPr>
         </c:majorGridlines>
+        <c:numFmt formatCode="0&quot;%&quot;" sourceLinked="0"/>
         <c:majorTickMark val="out"/>
         <c:minorTickMark val="none"/>
         <c:tickLblPos val="nextTo"/>
@@ -314,320 +756,7 @@
         </c:txPr>
         <c:crossAx val="-2068027336"/>
         <c:crosses val="autoZero"/>
-        <c:majorUnit val="100.0"/>
-      </c:valAx>
-    </c:plotArea>
-    <c:dispBlanksAs val="gap"/>
-  </c:chart>
-  <c:txPr>
-    <a:bodyPr/>
-    <a:lstStyle/>
-    <a:p>
-      <a:pPr>
-        <a:defRPr sz="941">
-          <a:solidFill>
-            <a:srgbClr val="1C2321"/>
-          </a:solidFill>
-          <a:latin typeface="IBM Plex Sans"/>
-        </a:defRPr>
-      </a:pPr>
-      <a:endParaRPr lang="en-US"/>
-    </a:p>
-  </c:txPr>
-  <c:externalData r:id="rId1">
-    <c:autoUpdate val="0"/>
-  </c:externalData>
-</c:chartSpace>
-</file>
-
-<file path=ppt/charts/chart2.xml><?xml version="1.0" encoding="utf-8"?>
-<c:chartSpace xmlns:c="http://schemas.openxmlformats.org/drawingml/2006/chart" xmlns:a="http://schemas.openxmlformats.org/drawingml/2006/main" xmlns:r="http://schemas.openxmlformats.org/officeDocument/2006/relationships">
-  <c:date1904 val="0"/>
-  <c:chart>
-    <c:autoTitleDeleted val="1"/>
-    <c:plotArea>
-      <c:barChart>
-        <c:barDir val="col"/>
-        <c:grouping val="clustered"/>
-        <c:ser>
-          <c:idx val="0"/>
-          <c:order val="0"/>
-          <c:tx>
-            <c:strRef>
-              <c:f>Sheet1!$B$1</c:f>
-              <c:strCache>
-                <c:ptCount val="1"/>
-                <c:pt idx="0">
-                  <c:v>Số em</c:v>
-                </c:pt>
-              </c:strCache>
-            </c:strRef>
-          </c:tx>
-          <c:dPt>
-            <c:idx val="0"/>
-            <c:spPr>
-              <a:solidFill>
-                <a:srgbClr val="27805A"/>
-              </a:solidFill>
-            </c:spPr>
-          </c:dPt>
-          <c:dPt>
-            <c:idx val="1"/>
-            <c:spPr>
-              <a:solidFill>
-                <a:srgbClr val="7FAE95"/>
-              </a:solidFill>
-            </c:spPr>
-          </c:dPt>
-          <c:dPt>
-            <c:idx val="2"/>
-            <c:spPr>
-              <a:solidFill>
-                <a:srgbClr val="7FAE95"/>
-              </a:solidFill>
-            </c:spPr>
-          </c:dPt>
-          <c:dPt>
-            <c:idx val="3"/>
-            <c:spPr>
-              <a:solidFill>
-                <a:srgbClr val="7FAE95"/>
-              </a:solidFill>
-            </c:spPr>
-          </c:dPt>
-          <c:dLbls>
-            <c:dLbl>
-              <c:idx val="0"/>
-              <c:tx>
-                <c:rich>
-                  <a:bodyPr/>
-                  <a:lstStyle/>
-                  <a:p>
-                    <a:r>
-                      <a:rPr sz="1231" b="1">
-                        <a:solidFill>
-                          <a:srgbClr val="1C2321"/>
-                        </a:solidFill>
-                      </a:rPr>
-                      <a:t>64 em · 59%</a:t>
-                    </a:r>
-                  </a:p>
-                </c:rich>
-              </c:tx>
-              <c:dLblPos val="outEnd"/>
-              <c:showLegendKey val="0"/>
-              <c:showVal val="1"/>
-              <c:showCatName val="0"/>
-              <c:showSerName val="0"/>
-              <c:showPercent val="0"/>
-              <c:showBubbleSize val="0"/>
-            </c:dLbl>
-            <c:dLbl>
-              <c:idx val="1"/>
-              <c:tx>
-                <c:rich>
-                  <a:bodyPr/>
-                  <a:lstStyle/>
-                  <a:p>
-                    <a:r>
-                      <a:rPr sz="1231" b="1">
-                        <a:solidFill>
-                          <a:srgbClr val="1C2321"/>
-                        </a:solidFill>
-                      </a:rPr>
-                      <a:t>28 em · 26%</a:t>
-                    </a:r>
-                  </a:p>
-                </c:rich>
-              </c:tx>
-              <c:dLblPos val="outEnd"/>
-              <c:showLegendKey val="0"/>
-              <c:showVal val="1"/>
-              <c:showCatName val="0"/>
-              <c:showSerName val="0"/>
-              <c:showPercent val="0"/>
-              <c:showBubbleSize val="0"/>
-            </c:dLbl>
-            <c:dLbl>
-              <c:idx val="2"/>
-              <c:tx>
-                <c:rich>
-                  <a:bodyPr/>
-                  <a:lstStyle/>
-                  <a:p>
-                    <a:r>
-                      <a:rPr sz="1231" b="1">
-                        <a:solidFill>
-                          <a:srgbClr val="1C2321"/>
-                        </a:solidFill>
-                      </a:rPr>
-                      <a:t>10 em · 9%</a:t>
-                    </a:r>
-                  </a:p>
-                </c:rich>
-              </c:tx>
-              <c:dLblPos val="outEnd"/>
-              <c:showLegendKey val="0"/>
-              <c:showVal val="1"/>
-              <c:showCatName val="0"/>
-              <c:showSerName val="0"/>
-              <c:showPercent val="0"/>
-              <c:showBubbleSize val="0"/>
-            </c:dLbl>
-            <c:dLbl>
-              <c:idx val="3"/>
-              <c:tx>
-                <c:rich>
-                  <a:bodyPr/>
-                  <a:lstStyle/>
-                  <a:p>
-                    <a:r>
-                      <a:rPr sz="1231" b="1">
-                        <a:solidFill>
-                          <a:srgbClr val="1C2321"/>
-                        </a:solidFill>
-                      </a:rPr>
-                      <a:t>6 em · 6%</a:t>
-                    </a:r>
-                  </a:p>
-                </c:rich>
-              </c:tx>
-              <c:dLblPos val="outEnd"/>
-              <c:showLegendKey val="0"/>
-              <c:showVal val="1"/>
-              <c:showCatName val="0"/>
-              <c:showSerName val="0"/>
-              <c:showPercent val="0"/>
-              <c:showBubbleSize val="0"/>
-            </c:dLbl>
-            <c:showLegendKey val="0"/>
-            <c:showVal val="0"/>
-            <c:showCatName val="0"/>
-            <c:showSerName val="0"/>
-            <c:showPercent val="0"/>
-            <c:showBubbleSize val="0"/>
-            <c:showLeaderLines val="1"/>
-          </c:dLbls>
-          <c:cat>
-            <c:strRef>
-              <c:f>Sheet1!$A$2:$A$5</c:f>
-              <c:strCache>
-                <c:ptCount val="4"/>
-                <c:pt idx="0">
-                  <c:v>NV 1</c:v>
-                </c:pt>
-                <c:pt idx="1">
-                  <c:v>NV 2</c:v>
-                </c:pt>
-                <c:pt idx="2">
-                  <c:v>NV 3</c:v>
-                </c:pt>
-                <c:pt idx="3">
-                  <c:v>NV 4</c:v>
-                </c:pt>
-              </c:strCache>
-            </c:strRef>
-          </c:cat>
-          <c:val>
-            <c:numRef>
-              <c:f>Sheet1!$B$2:$B$5</c:f>
-              <c:numCache>
-                <c:formatCode>General</c:formatCode>
-                <c:ptCount val="4"/>
-                <c:pt idx="0">
-                  <c:v>64</c:v>
-                </c:pt>
-                <c:pt idx="1">
-                  <c:v>28</c:v>
-                </c:pt>
-                <c:pt idx="2">
-                  <c:v>10</c:v>
-                </c:pt>
-                <c:pt idx="3">
-                  <c:v>6</c:v>
-                </c:pt>
-              </c:numCache>
-            </c:numRef>
-          </c:val>
-        </c:ser>
-        <c:gapWidth val="70"/>
-        <c:axId val="-2068027336"/>
-        <c:axId val="-2113994440"/>
-      </c:barChart>
-      <c:catAx>
-        <c:axId val="-2068027336"/>
-        <c:scaling>
-          <c:orientation val="minMax"/>
-        </c:scaling>
-        <c:delete val="0"/>
-        <c:axPos val="b"/>
-        <c:majorTickMark val="out"/>
-        <c:minorTickMark val="none"/>
-        <c:tickLblPos val="nextTo"/>
-        <c:spPr>
-          <a:ln>
-            <a:solidFill>
-              <a:srgbClr val="5B6570"/>
-            </a:solidFill>
-          </a:ln>
-        </c:spPr>
-        <c:txPr>
-          <a:bodyPr/>
-          <a:lstStyle/>
-          <a:p>
-            <a:pPr>
-              <a:defRPr b="1" sz="1159"/>
-            </a:pPr>
-          </a:p>
-        </c:txPr>
-        <c:crossAx val="-2113994440"/>
-        <c:crosses val="autoZero"/>
-        <c:auto val="1"/>
-        <c:lblAlgn val="ctr"/>
-        <c:lblOffset val="100"/>
-        <c:noMultiLvlLbl val="0"/>
-      </c:catAx>
-      <c:valAx>
-        <c:axId val="-2113994440"/>
-        <c:scaling>
-          <c:max val="70.0"/>
-          <c:min val="0.0"/>
-        </c:scaling>
-        <c:delete val="0"/>
-        <c:axPos val="l"/>
-        <c:majorGridlines>
-          <c:spPr>
-            <a:ln>
-              <a:solidFill>
-                <a:srgbClr val="DBDCD5"/>
-              </a:solidFill>
-            </a:ln>
-          </c:spPr>
-        </c:majorGridlines>
-        <c:majorTickMark val="out"/>
-        <c:minorTickMark val="none"/>
-        <c:tickLblPos val="nextTo"/>
-        <c:spPr>
-          <a:ln>
-            <a:noFill/>
-          </a:ln>
-        </c:spPr>
-        <c:txPr>
-          <a:bodyPr/>
-          <a:lstStyle/>
-          <a:p>
-            <a:pPr>
-              <a:defRPr>
-                <a:solidFill>
-                  <a:srgbClr val="8A929A"/>
-                </a:solidFill>
-              </a:defRPr>
-            </a:pPr>
-          </a:p>
-        </c:txPr>
-        <c:crossAx val="-2068027336"/>
-        <c:crosses val="autoZero"/>
-        <c:majorUnit val="20.0"/>
+        <c:majorUnit val="5.0"/>
       </c:valAx>
     </c:plotArea>
     <c:dispBlanksAs val="gap"/>
@@ -9607,28 +9736,28 @@
       </p:sp>
       <p:grpSp>
         <p:nvGrpSpPr>
-          <p:cNvPr id="137" name="Bieu do khai gian"/>
+          <p:cNvPr id="137" name="Bieu do giu nguyen"/>
           <p:cNvGrpSpPr/>
           <p:nvPr/>
         </p:nvGrpSpPr>
         <p:grpSpPr>
           <a:xfrm>
-            <a:off x="27958050" y="13202212"/>
+            <a:off x="27958050" y="13110187"/>
             <a:ext cx="6993899" cy="2208600"/>
-            <a:chOff x="27958050" y="13202212"/>
+            <a:chOff x="27958050" y="13110187"/>
             <a:chExt cx="6993899" cy="2208600"/>
           </a:xfrm>
         </p:grpSpPr>
         <p:graphicFrame>
           <p:nvGraphicFramePr>
-            <p:cNvPr id="141" name="Chart 140"/>
+            <p:cNvPr id="142" name="Chart 141"/>
             <p:cNvGraphicFramePr>
               <a:graphicFrameLocks noGrp="1"/>
             </p:cNvGraphicFramePr>
             <p:nvPr/>
           </p:nvGraphicFramePr>
           <p:xfrm>
-            <a:off x="27958050" y="13202212"/>
+            <a:off x="27958050" y="13110187"/>
             <a:ext cx="6993899" cy="2208600"/>
           </p:xfrm>
           <a:graphic>
@@ -9668,7 +9797,7 @@
                 </a:solidFill>
                 <a:latin typeface="Be Vietnam Pro"/>
               </a:rPr>
-              <a:t>Số em khai sai nguyện vọng mà được lợi</a:t>
+              <a:t>Đổi hạt giống bốc thăm 200 lần</a:t>
             </a:r>
           </a:p>
         </p:txBody>
@@ -9703,7 +9832,7 @@
                 </a:solidFill>
                 <a:latin typeface="IBM Plex Sans"/>
               </a:rPr>
-              <a:t>Vét cạn mọi cách khai của từng em · 200 thể hiện, 1 400 lượt học sinh</a:t>
+              <a:t>Bao nhiêu em luôn giữ nguyên CLB? · 3 bộ dữ liệu mô phỏng</a:t>
             </a:r>
           </a:p>
         </p:txBody>
@@ -9716,7 +9845,7 @@
         </p:nvSpPr>
         <p:spPr>
           <a:xfrm>
-            <a:off x="28050075" y="15541488"/>
+            <a:off x="28050075" y="15656519"/>
             <a:ext cx="180000" cy="143559"/>
           </a:xfrm>
           <a:prstGeom prst="rect">
@@ -9738,36 +9867,71 @@
                 </a:solidFill>
                 <a:latin typeface="IBM Plex Sans"/>
               </a:rPr>
-              <a:t>Dữ liệu mô phỏng — nguồn: NGHIEN_CUU_TOI_UU.md, TN3</a:t>
+              <a:t>Dữ liệu mô phỏng — nguồn: du_lieu_test/SO_LIEU_DA_KIEM_CHUNG.md, mục 3c</a:t>
+            </a:r>
+          </a:p>
+        </p:txBody>
+      </p:sp>
+      <p:sp>
+        <p:nvSpPr>
+          <p:cNvPr id="141" name="TextBox 140"/>
+          <p:cNvSpPr txBox="1"/>
+          <p:nvPr/>
+        </p:nvSpPr>
+        <p:spPr>
+          <a:xfrm>
+            <a:off x="28050075" y="15386885"/>
+            <a:ext cx="180000" cy="167485"/>
+          </a:xfrm>
+          <a:prstGeom prst="rect">
+            <a:avLst/>
+          </a:prstGeom>
+          <a:noFill/>
+        </p:spPr>
+        <p:txBody>
+          <a:bodyPr wrap="none" anchor="t" lIns="0" rIns="0" tIns="0" bIns="0">
+            <a:spAutoFit/>
+          </a:bodyPr>
+          <a:lstStyle/>
+          <a:p>
+            <a:pPr algn="l"/>
+            <a:r>
+              <a:rPr sz="1014" b="1" i="0">
+                <a:solidFill>
+                  <a:srgbClr val="1C2321"/>
+                </a:solidFill>
+                <a:latin typeface="IBM Plex Sans"/>
+              </a:rPr>
+              <a:t>Chỉ 3/270 em (1,1%) có lúc mất suất vì bốc thăm · 0 cặp phá vỡ ở mọi hạt giống</a:t>
             </a:r>
           </a:p>
         </p:txBody>
       </p:sp>
       <p:grpSp>
         <p:nvGrpSpPr>
-          <p:cNvPr id="142" name="Bieu do nguyen vong"/>
+          <p:cNvPr id="143" name="Bieu do nhieu"/>
           <p:cNvGrpSpPr/>
           <p:nvPr/>
         </p:nvGrpSpPr>
         <p:grpSpPr>
           <a:xfrm>
-            <a:off x="27958050" y="16797150"/>
-            <a:ext cx="6993899" cy="3404924"/>
-            <a:chOff x="27958050" y="16797150"/>
-            <a:chExt cx="6993899" cy="3404924"/>
+            <a:off x="27958050" y="16843162"/>
+            <a:ext cx="6993899" cy="3174862"/>
+            <a:chOff x="27958050" y="16843162"/>
+            <a:chExt cx="6993899" cy="3174862"/>
           </a:xfrm>
         </p:grpSpPr>
         <p:graphicFrame>
           <p:nvGraphicFramePr>
-            <p:cNvPr id="146" name="Chart 145"/>
+            <p:cNvPr id="148" name="Chart 147"/>
             <p:cNvGraphicFramePr>
               <a:graphicFrameLocks noGrp="1"/>
             </p:cNvGraphicFramePr>
             <p:nvPr/>
           </p:nvGraphicFramePr>
           <p:xfrm>
-            <a:off x="27958050" y="16797150"/>
-            <a:ext cx="6993899" cy="3404924"/>
+            <a:off x="27958050" y="16843162"/>
+            <a:ext cx="6993899" cy="3174862"/>
           </p:xfrm>
           <a:graphic>
             <a:graphicData uri="http://schemas.openxmlformats.org/drawingml/2006/chart">
@@ -9778,7 +9942,7 @@
       </p:grpSp>
       <p:sp>
         <p:nvSpPr>
-          <p:cNvPr id="143" name="TextBox 142"/>
+          <p:cNvPr id="144" name="TextBox 143"/>
           <p:cNvSpPr txBox="1"/>
           <p:nvPr/>
         </p:nvSpPr>
@@ -9806,14 +9970,14 @@
                 </a:solidFill>
                 <a:latin typeface="Be Vietnam Pro"/>
               </a:rPr>
-              <a:t>Được xếp vào nguyện vọng thứ mấy</a:t>
-            </a:r>
-          </a:p>
-        </p:txBody>
-      </p:sp>
-      <p:sp>
-        <p:nvSpPr>
-          <p:cNvPr id="144" name="TextBox 143"/>
+              <a:t>Điều gì làm kết quả thay đổi nhiều nhất?</a:t>
+            </a:r>
+          </a:p>
+        </p:txBody>
+      </p:sp>
+      <p:sp>
+        <p:nvSpPr>
+          <p:cNvPr id="145" name="TextBox 144"/>
           <p:cNvSpPr txBox="1"/>
           <p:nvPr/>
         </p:nvSpPr>
@@ -9841,14 +10005,14 @@
                 </a:solidFill>
                 <a:latin typeface="IBM Plex Sans"/>
               </a:rPr>
-              <a:t>108 em được xếp · bộ 120 học sinh, 10 CLB · hạt giống bốc thăm 42</a:t>
-            </a:r>
-          </a:p>
-        </p:txBody>
-      </p:sp>
-      <p:sp>
-        <p:nvSpPr>
-          <p:cNvPr id="145" name="TextBox 144"/>
+              <a:t>% học sinh đổi CLB, trung bình · bộ 140 em mô phỏng</a:t>
+            </a:r>
+          </a:p>
+        </p:txBody>
+      </p:sp>
+      <p:sp>
+        <p:nvSpPr>
+          <p:cNvPr id="146" name="TextBox 145"/>
           <p:cNvSpPr txBox="1"/>
           <p:nvPr/>
         </p:nvSpPr>
@@ -9876,14 +10040,49 @@
                 </a:solidFill>
                 <a:latin typeface="IBM Plex Sans"/>
               </a:rPr>
-              <a:t>Dữ liệu mô phỏng — nguồn: du_lieu_test/SO_LIEU_DA_KIEM_CHUNG.md, mục 2</a:t>
-            </a:r>
-          </a:p>
-        </p:txBody>
-      </p:sp>
-      <p:sp>
-        <p:nvSpPr>
-          <p:cNvPr id="147" name="Rounded Rectangle 146"/>
+              <a:t>Dữ liệu mô phỏng — nguồn: NGHIEN_CUU_TOI_UU.md, TN6</a:t>
+            </a:r>
+          </a:p>
+        </p:txBody>
+      </p:sp>
+      <p:sp>
+        <p:nvSpPr>
+          <p:cNvPr id="147" name="TextBox 146"/>
+          <p:cNvSpPr txBox="1"/>
+          <p:nvPr/>
+        </p:nvSpPr>
+        <p:spPr>
+          <a:xfrm>
+            <a:off x="28050075" y="20109129"/>
+            <a:ext cx="180000" cy="167485"/>
+          </a:xfrm>
+          <a:prstGeom prst="rect">
+            <a:avLst/>
+          </a:prstGeom>
+          <a:noFill/>
+        </p:spPr>
+        <p:txBody>
+          <a:bodyPr wrap="none" anchor="t" lIns="0" rIns="0" tIns="0" bIns="0">
+            <a:spAutoFit/>
+          </a:bodyPr>
+          <a:lstStyle/>
+          <a:p>
+            <a:pPr algn="l"/>
+            <a:r>
+              <a:rPr sz="1014" b="1" i="0">
+                <a:solidFill>
+                  <a:srgbClr val="1C2321"/>
+                </a:solidFill>
+                <a:latin typeface="IBM Plex Sans"/>
+              </a:rPr>
+              <a:t>392 phép thử trên 3 bộ dữ liệu · 0 cặp phá vỡ</a:t>
+            </a:r>
+          </a:p>
+        </p:txBody>
+      </p:sp>
+      <p:sp>
+        <p:nvSpPr>
+          <p:cNvPr id="149" name="Rounded Rectangle 148"/>
           <p:cNvSpPr/>
           <p:nvPr/>
         </p:nvSpPr>
@@ -9930,7 +10129,7 @@
       </p:sp>
       <p:sp>
         <p:nvSpPr>
-          <p:cNvPr id="148" name="TextBox 147"/>
+          <p:cNvPr id="150" name="TextBox 149"/>
           <p:cNvSpPr txBox="1"/>
           <p:nvPr/>
         </p:nvSpPr>
@@ -9958,14 +10157,14 @@
                 </a:solidFill>
                 <a:latin typeface="IBM Plex Sans"/>
               </a:rPr>
-              <a:t>[ P5 — em viết 1–2 câu: hai biểu đồ này nói gì với học sinh? ]</a:t>
-            </a:r>
-          </a:p>
-        </p:txBody>
-      </p:sp>
-      <p:sp>
-        <p:nvSpPr>
-          <p:cNvPr id="149" name="Rounded Rectangle 148"/>
+              <a:t>[ P5 — em viết 1–2 câu: hai biểu đồ này nói gì về bốc thăm? ]</a:t>
+            </a:r>
+          </a:p>
+        </p:txBody>
+      </p:sp>
+      <p:sp>
+        <p:nvSpPr>
+          <p:cNvPr id="151" name="Rounded Rectangle 150"/>
           <p:cNvSpPr/>
           <p:nvPr/>
         </p:nvSpPr>
@@ -10013,7 +10212,7 @@
       </p:sp>
       <p:sp>
         <p:nvSpPr>
-          <p:cNvPr id="150" name="TextBox 149"/>
+          <p:cNvPr id="152" name="TextBox 151"/>
           <p:cNvSpPr txBox="1"/>
           <p:nvPr/>
         </p:nvSpPr>
@@ -10048,7 +10247,7 @@
       </p:sp>
       <p:sp>
         <p:nvSpPr>
-          <p:cNvPr id="151" name="Rounded Rectangle 150"/>
+          <p:cNvPr id="153" name="Rounded Rectangle 152"/>
           <p:cNvSpPr/>
           <p:nvPr/>
         </p:nvSpPr>
@@ -10095,7 +10294,7 @@
       </p:sp>
       <p:sp>
         <p:nvSpPr>
-          <p:cNvPr id="152" name="TextBox 151"/>
+          <p:cNvPr id="154" name="TextBox 153"/>
           <p:cNvSpPr txBox="1"/>
           <p:nvPr/>
         </p:nvSpPr>

--- a/poster/poster_khung_1-2.pptx
+++ b/poster/poster_khung_1-2.pptx
@@ -406,59 +406,16 @@
               <c:strCache>
                 <c:ptCount val="1"/>
                 <c:pt idx="0">
-                  <c:v>Số em</c:v>
+                  <c:v>Bộ 10 em</c:v>
                 </c:pt>
               </c:strCache>
             </c:strRef>
           </c:tx>
-          <c:dPt>
-            <c:idx val="0"/>
-            <c:spPr>
-              <a:solidFill>
-                <a:srgbClr val="B9BEC3"/>
-              </a:solidFill>
-            </c:spPr>
-          </c:dPt>
-          <c:dPt>
-            <c:idx val="1"/>
-            <c:spPr>
-              <a:solidFill>
-                <a:srgbClr val="B9BEC3"/>
-              </a:solidFill>
-            </c:spPr>
-          </c:dPt>
-          <c:dPt>
-            <c:idx val="2"/>
-            <c:spPr>
-              <a:solidFill>
-                <a:srgbClr val="B8781A"/>
-              </a:solidFill>
-            </c:spPr>
-          </c:dPt>
-          <c:dPt>
-            <c:idx val="3"/>
-            <c:spPr>
-              <a:solidFill>
-                <a:srgbClr val="B9BEC3"/>
-              </a:solidFill>
-            </c:spPr>
-          </c:dPt>
-          <c:dPt>
-            <c:idx val="4"/>
-            <c:spPr>
-              <a:solidFill>
-                <a:srgbClr val="B9BEC3"/>
-              </a:solidFill>
-            </c:spPr>
-          </c:dPt>
-          <c:dPt>
-            <c:idx val="5"/>
-            <c:spPr>
-              <a:solidFill>
-                <a:srgbClr val="B9BEC3"/>
-              </a:solidFill>
-            </c:spPr>
-          </c:dPt>
+          <c:spPr>
+            <a:solidFill>
+              <a:srgbClr val="A9CDB9"/>
+            </a:solidFill>
+          </c:spPr>
           <c:dLbls>
             <c:dLbl>
               <c:idx val="0"/>
@@ -468,7 +425,483 @@
                   <a:lstStyle/>
                   <a:p>
                     <a:r>
-                      <a:rPr sz="1231" b="1">
+                      <a:rPr sz="797" b="0">
+                        <a:solidFill>
+                          <a:srgbClr val="1C2321"/>
+                        </a:solidFill>
+                      </a:rPr>
+                      <a:t>4,50%</a:t>
+                    </a:r>
+                  </a:p>
+                </c:rich>
+              </c:tx>
+              <c:dLblPos val="outEnd"/>
+              <c:showLegendKey val="0"/>
+              <c:showVal val="1"/>
+              <c:showCatName val="0"/>
+              <c:showSerName val="0"/>
+              <c:showPercent val="0"/>
+              <c:showBubbleSize val="0"/>
+            </c:dLbl>
+            <c:dLbl>
+              <c:idx val="1"/>
+              <c:tx>
+                <c:rich>
+                  <a:bodyPr/>
+                  <a:lstStyle/>
+                  <a:p>
+                    <a:r>
+                      <a:rPr sz="797" b="0">
+                        <a:solidFill>
+                          <a:srgbClr val="1C2321"/>
+                        </a:solidFill>
+                      </a:rPr>
+                      <a:t>0%</a:t>
+                    </a:r>
+                  </a:p>
+                </c:rich>
+              </c:tx>
+              <c:dLblPos val="outEnd"/>
+              <c:showLegendKey val="0"/>
+              <c:showVal val="1"/>
+              <c:showCatName val="0"/>
+              <c:showSerName val="0"/>
+              <c:showPercent val="0"/>
+              <c:showBubbleSize val="0"/>
+            </c:dLbl>
+            <c:dLbl>
+              <c:idx val="2"/>
+              <c:tx>
+                <c:rich>
+                  <a:bodyPr/>
+                  <a:lstStyle/>
+                  <a:p>
+                    <a:r>
+                      <a:rPr sz="797" b="1">
+                        <a:solidFill>
+                          <a:srgbClr val="1C2321"/>
+                        </a:solidFill>
+                      </a:rPr>
+                      <a:t>0%</a:t>
+                    </a:r>
+                  </a:p>
+                </c:rich>
+              </c:tx>
+              <c:dLblPos val="outEnd"/>
+              <c:showLegendKey val="0"/>
+              <c:showVal val="1"/>
+              <c:showCatName val="0"/>
+              <c:showSerName val="0"/>
+              <c:showPercent val="0"/>
+              <c:showBubbleSize val="0"/>
+            </c:dLbl>
+            <c:dLbl>
+              <c:idx val="3"/>
+              <c:tx>
+                <c:rich>
+                  <a:bodyPr/>
+                  <a:lstStyle/>
+                  <a:p>
+                    <a:r>
+                      <a:rPr sz="797" b="0">
+                        <a:solidFill>
+                          <a:srgbClr val="1C2321"/>
+                        </a:solidFill>
+                      </a:rPr>
+                      <a:t>3,33%</a:t>
+                    </a:r>
+                  </a:p>
+                </c:rich>
+              </c:tx>
+              <c:dLblPos val="outEnd"/>
+              <c:showLegendKey val="0"/>
+              <c:showVal val="1"/>
+              <c:showCatName val="0"/>
+              <c:showSerName val="0"/>
+              <c:showPercent val="0"/>
+              <c:showBubbleSize val="0"/>
+            </c:dLbl>
+            <c:dLbl>
+              <c:idx val="4"/>
+              <c:tx>
+                <c:rich>
+                  <a:bodyPr/>
+                  <a:lstStyle/>
+                  <a:p>
+                    <a:r>
+                      <a:rPr sz="797" b="0">
+                        <a:solidFill>
+                          <a:srgbClr val="1C2321"/>
+                        </a:solidFill>
+                      </a:rPr>
+                      <a:t>6,25%</a:t>
+                    </a:r>
+                  </a:p>
+                </c:rich>
+              </c:tx>
+              <c:dLblPos val="outEnd"/>
+              <c:showLegendKey val="0"/>
+              <c:showVal val="1"/>
+              <c:showCatName val="0"/>
+              <c:showSerName val="0"/>
+              <c:showPercent val="0"/>
+              <c:showBubbleSize val="0"/>
+            </c:dLbl>
+            <c:dLbl>
+              <c:idx val="5"/>
+              <c:tx>
+                <c:rich>
+                  <a:bodyPr/>
+                  <a:lstStyle/>
+                  <a:p>
+                    <a:r>
+                      <a:rPr sz="797" b="0">
+                        <a:solidFill>
+                          <a:srgbClr val="1C2321"/>
+                        </a:solidFill>
+                      </a:rPr>
+                      <a:t>2,00%</a:t>
+                    </a:r>
+                  </a:p>
+                </c:rich>
+              </c:tx>
+              <c:dLblPos val="outEnd"/>
+              <c:showLegendKey val="0"/>
+              <c:showVal val="1"/>
+              <c:showCatName val="0"/>
+              <c:showSerName val="0"/>
+              <c:showPercent val="0"/>
+              <c:showBubbleSize val="0"/>
+            </c:dLbl>
+            <c:showLegendKey val="0"/>
+            <c:showVal val="0"/>
+            <c:showCatName val="0"/>
+            <c:showSerName val="0"/>
+            <c:showPercent val="0"/>
+            <c:showBubbleSize val="0"/>
+            <c:showLeaderLines val="1"/>
+          </c:dLbls>
+          <c:cat>
+            <c:strRef>
+              <c:f>Sheet1!$A$2:$A$7</c:f>
+              <c:strCache>
+                <c:ptCount val="6"/>
+                <c:pt idx="0">
+                  <c:v>Điểm chấm lệch ±0,5</c:v>
+                </c:pt>
+                <c:pt idx="1">
+                  <c:v>Điểm chấm lệch ±0,1</c:v>
+                </c:pt>
+                <c:pt idx="2">
+                  <c:v>Đổi hạt giống bốc thăm</c:v>
+                </c:pt>
+                <c:pt idx="3">
+                  <c:v>Bớt 1 học sinh</c:v>
+                </c:pt>
+                <c:pt idx="4">
+                  <c:v>Chỉ tiêu mỗi CLB ±1</c:v>
+                </c:pt>
+                <c:pt idx="5">
+                  <c:v>Thêm 1 học sinh</c:v>
+                </c:pt>
+              </c:strCache>
+            </c:strRef>
+          </c:cat>
+          <c:val>
+            <c:numRef>
+              <c:f>Sheet1!$B$2:$B$7</c:f>
+              <c:numCache>
+                <c:formatCode>General</c:formatCode>
+                <c:ptCount val="6"/>
+                <c:pt idx="0">
+                  <c:v>4.5</c:v>
+                </c:pt>
+                <c:pt idx="1">
+                  <c:v>0.0</c:v>
+                </c:pt>
+                <c:pt idx="2">
+                  <c:v>0.0</c:v>
+                </c:pt>
+                <c:pt idx="3">
+                  <c:v>3.33</c:v>
+                </c:pt>
+                <c:pt idx="4">
+                  <c:v>6.25</c:v>
+                </c:pt>
+                <c:pt idx="5">
+                  <c:v>2.0</c:v>
+                </c:pt>
+              </c:numCache>
+            </c:numRef>
+          </c:val>
+        </c:ser>
+        <c:ser>
+          <c:idx val="1"/>
+          <c:order val="1"/>
+          <c:tx>
+            <c:strRef>
+              <c:f>Sheet1!$C$1</c:f>
+              <c:strCache>
+                <c:ptCount val="1"/>
+                <c:pt idx="0">
+                  <c:v>Bộ 120 em</c:v>
+                </c:pt>
+              </c:strCache>
+            </c:strRef>
+          </c:tx>
+          <c:spPr>
+            <a:solidFill>
+              <a:srgbClr val="5FA07E"/>
+            </a:solidFill>
+          </c:spPr>
+          <c:dLbls>
+            <c:dLbl>
+              <c:idx val="0"/>
+              <c:tx>
+                <c:rich>
+                  <a:bodyPr/>
+                  <a:lstStyle/>
+                  <a:p>
+                    <a:r>
+                      <a:rPr sz="797" b="0">
+                        <a:solidFill>
+                          <a:srgbClr val="1C2321"/>
+                        </a:solidFill>
+                      </a:rPr>
+                      <a:t>9,92%</a:t>
+                    </a:r>
+                  </a:p>
+                </c:rich>
+              </c:tx>
+              <c:dLblPos val="outEnd"/>
+              <c:showLegendKey val="0"/>
+              <c:showVal val="1"/>
+              <c:showCatName val="0"/>
+              <c:showSerName val="0"/>
+              <c:showPercent val="0"/>
+              <c:showBubbleSize val="0"/>
+            </c:dLbl>
+            <c:dLbl>
+              <c:idx val="1"/>
+              <c:tx>
+                <c:rich>
+                  <a:bodyPr/>
+                  <a:lstStyle/>
+                  <a:p>
+                    <a:r>
+                      <a:rPr sz="797" b="0">
+                        <a:solidFill>
+                          <a:srgbClr val="1C2321"/>
+                        </a:solidFill>
+                      </a:rPr>
+                      <a:t>1,54%</a:t>
+                    </a:r>
+                  </a:p>
+                </c:rich>
+              </c:tx>
+              <c:dLblPos val="outEnd"/>
+              <c:showLegendKey val="0"/>
+              <c:showVal val="1"/>
+              <c:showCatName val="0"/>
+              <c:showSerName val="0"/>
+              <c:showPercent val="0"/>
+              <c:showBubbleSize val="0"/>
+            </c:dLbl>
+            <c:dLbl>
+              <c:idx val="2"/>
+              <c:tx>
+                <c:rich>
+                  <a:bodyPr/>
+                  <a:lstStyle/>
+                  <a:p>
+                    <a:r>
+                      <a:rPr sz="797" b="1">
+                        <a:solidFill>
+                          <a:srgbClr val="1C2321"/>
+                        </a:solidFill>
+                      </a:rPr>
+                      <a:t>1,83%</a:t>
+                    </a:r>
+                  </a:p>
+                </c:rich>
+              </c:tx>
+              <c:dLblPos val="outEnd"/>
+              <c:showLegendKey val="0"/>
+              <c:showVal val="1"/>
+              <c:showCatName val="0"/>
+              <c:showSerName val="0"/>
+              <c:showPercent val="0"/>
+              <c:showBubbleSize val="0"/>
+            </c:dLbl>
+            <c:dLbl>
+              <c:idx val="3"/>
+              <c:tx>
+                <c:rich>
+                  <a:bodyPr/>
+                  <a:lstStyle/>
+                  <a:p>
+                    <a:r>
+                      <a:rPr sz="797" b="0">
+                        <a:solidFill>
+                          <a:srgbClr val="1C2321"/>
+                        </a:solidFill>
+                      </a:rPr>
+                      <a:t>1,68%</a:t>
+                    </a:r>
+                  </a:p>
+                </c:rich>
+              </c:tx>
+              <c:dLblPos val="outEnd"/>
+              <c:showLegendKey val="0"/>
+              <c:showVal val="1"/>
+              <c:showCatName val="0"/>
+              <c:showSerName val="0"/>
+              <c:showPercent val="0"/>
+              <c:showBubbleSize val="0"/>
+            </c:dLbl>
+            <c:dLbl>
+              <c:idx val="4"/>
+              <c:tx>
+                <c:rich>
+                  <a:bodyPr/>
+                  <a:lstStyle/>
+                  <a:p>
+                    <a:r>
+                      <a:rPr sz="797" b="0">
+                        <a:solidFill>
+                          <a:srgbClr val="1C2321"/>
+                        </a:solidFill>
+                      </a:rPr>
+                      <a:t>0,38%</a:t>
+                    </a:r>
+                  </a:p>
+                </c:rich>
+              </c:tx>
+              <c:dLblPos val="outEnd"/>
+              <c:showLegendKey val="0"/>
+              <c:showVal val="1"/>
+              <c:showCatName val="0"/>
+              <c:showSerName val="0"/>
+              <c:showPercent val="0"/>
+              <c:showBubbleSize val="0"/>
+            </c:dLbl>
+            <c:dLbl>
+              <c:idx val="5"/>
+              <c:tx>
+                <c:rich>
+                  <a:bodyPr/>
+                  <a:lstStyle/>
+                  <a:p>
+                    <a:r>
+                      <a:rPr sz="797" b="0">
+                        <a:solidFill>
+                          <a:srgbClr val="1C2321"/>
+                        </a:solidFill>
+                      </a:rPr>
+                      <a:t>0,08%</a:t>
+                    </a:r>
+                  </a:p>
+                </c:rich>
+              </c:tx>
+              <c:dLblPos val="outEnd"/>
+              <c:showLegendKey val="0"/>
+              <c:showVal val="1"/>
+              <c:showCatName val="0"/>
+              <c:showSerName val="0"/>
+              <c:showPercent val="0"/>
+              <c:showBubbleSize val="0"/>
+            </c:dLbl>
+            <c:showLegendKey val="0"/>
+            <c:showVal val="0"/>
+            <c:showCatName val="0"/>
+            <c:showSerName val="0"/>
+            <c:showPercent val="0"/>
+            <c:showBubbleSize val="0"/>
+            <c:showLeaderLines val="1"/>
+          </c:dLbls>
+          <c:cat>
+            <c:strRef>
+              <c:f>Sheet1!$A$2:$A$7</c:f>
+              <c:strCache>
+                <c:ptCount val="6"/>
+                <c:pt idx="0">
+                  <c:v>Điểm chấm lệch ±0,5</c:v>
+                </c:pt>
+                <c:pt idx="1">
+                  <c:v>Điểm chấm lệch ±0,1</c:v>
+                </c:pt>
+                <c:pt idx="2">
+                  <c:v>Đổi hạt giống bốc thăm</c:v>
+                </c:pt>
+                <c:pt idx="3">
+                  <c:v>Bớt 1 học sinh</c:v>
+                </c:pt>
+                <c:pt idx="4">
+                  <c:v>Chỉ tiêu mỗi CLB ±1</c:v>
+                </c:pt>
+                <c:pt idx="5">
+                  <c:v>Thêm 1 học sinh</c:v>
+                </c:pt>
+              </c:strCache>
+            </c:strRef>
+          </c:cat>
+          <c:val>
+            <c:numRef>
+              <c:f>Sheet1!$C$2:$C$7</c:f>
+              <c:numCache>
+                <c:formatCode>General</c:formatCode>
+                <c:ptCount val="6"/>
+                <c:pt idx="0">
+                  <c:v>9.92</c:v>
+                </c:pt>
+                <c:pt idx="1">
+                  <c:v>1.54</c:v>
+                </c:pt>
+                <c:pt idx="2">
+                  <c:v>1.83</c:v>
+                </c:pt>
+                <c:pt idx="3">
+                  <c:v>1.68</c:v>
+                </c:pt>
+                <c:pt idx="4">
+                  <c:v>0.38</c:v>
+                </c:pt>
+                <c:pt idx="5">
+                  <c:v>0.08</c:v>
+                </c:pt>
+              </c:numCache>
+            </c:numRef>
+          </c:val>
+        </c:ser>
+        <c:ser>
+          <c:idx val="2"/>
+          <c:order val="2"/>
+          <c:tx>
+            <c:strRef>
+              <c:f>Sheet1!$D$1</c:f>
+              <c:strCache>
+                <c:ptCount val="1"/>
+                <c:pt idx="0">
+                  <c:v>Bộ 140 em</c:v>
+                </c:pt>
+              </c:strCache>
+            </c:strRef>
+          </c:tx>
+          <c:spPr>
+            <a:solidFill>
+              <a:srgbClr val="27805A"/>
+            </a:solidFill>
+          </c:spPr>
+          <c:dLbls>
+            <c:dLbl>
+              <c:idx val="0"/>
+              <c:tx>
+                <c:rich>
+                  <a:bodyPr/>
+                  <a:lstStyle/>
+                  <a:p>
+                    <a:r>
+                      <a:rPr sz="797" b="0">
                         <a:solidFill>
                           <a:srgbClr val="1C2321"/>
                         </a:solidFill>
@@ -494,7 +927,7 @@
                   <a:lstStyle/>
                   <a:p>
                     <a:r>
-                      <a:rPr sz="1231" b="1">
+                      <a:rPr sz="797" b="0">
                         <a:solidFill>
                           <a:srgbClr val="1C2321"/>
                         </a:solidFill>
@@ -520,7 +953,7 @@
                   <a:lstStyle/>
                   <a:p>
                     <a:r>
-                      <a:rPr sz="1231" b="1">
+                      <a:rPr sz="797" b="1">
                         <a:solidFill>
                           <a:srgbClr val="1C2321"/>
                         </a:solidFill>
@@ -546,7 +979,7 @@
                   <a:lstStyle/>
                   <a:p>
                     <a:r>
-                      <a:rPr sz="1231" b="1">
+                      <a:rPr sz="797" b="0">
                         <a:solidFill>
                           <a:srgbClr val="1C2321"/>
                         </a:solidFill>
@@ -572,7 +1005,7 @@
                   <a:lstStyle/>
                   <a:p>
                     <a:r>
-                      <a:rPr sz="1231" b="1">
+                      <a:rPr sz="797" b="0">
                         <a:solidFill>
                           <a:srgbClr val="1C2321"/>
                         </a:solidFill>
@@ -598,7 +1031,7 @@
                   <a:lstStyle/>
                   <a:p>
                     <a:r>
-                      <a:rPr sz="1231" b="1">
+                      <a:rPr sz="797" b="0">
                         <a:solidFill>
                           <a:srgbClr val="1C2321"/>
                         </a:solidFill>
@@ -652,7 +1085,7 @@
           </c:cat>
           <c:val>
             <c:numRef>
-              <c:f>Sheet1!$B$2:$B$7</c:f>
+              <c:f>Sheet1!$D$2:$D$7</c:f>
               <c:numCache>
                 <c:formatCode>General</c:formatCode>
                 <c:ptCount val="6"/>
@@ -678,7 +1111,8 @@
             </c:numRef>
           </c:val>
         </c:ser>
-        <c:gapWidth val="70"/>
+        <c:gapWidth val="50"/>
+        <c:overlap val="-10"/>
         <c:axId val="-2068027336"/>
         <c:axId val="-2113994440"/>
       </c:barChart>
@@ -704,7 +1138,7 @@
           <a:lstStyle/>
           <a:p>
             <a:pPr>
-              <a:defRPr b="0" sz="1159"/>
+              <a:defRPr sz="1014"/>
             </a:pPr>
           </a:p>
         </c:txPr>
@@ -759,6 +1193,10 @@
         <c:majorUnit val="5.0"/>
       </c:valAx>
     </c:plotArea>
+    <c:legend>
+      <c:legendPos val="t"/>
+      <c:overlay val="0"/>
+    </c:legend>
     <c:dispBlanksAs val="gap"/>
   </c:chart>
   <c:txPr>
@@ -766,7 +1204,7 @@
     <a:lstStyle/>
     <a:p>
       <a:pPr>
-        <a:defRPr sz="941">
+        <a:defRPr sz="797">
           <a:solidFill>
             <a:srgbClr val="1C2321"/>
           </a:solidFill>
@@ -9915,10 +10353,10 @@
         </p:nvGrpSpPr>
         <p:grpSpPr>
           <a:xfrm>
-            <a:off x="27958050" y="16843162"/>
-            <a:ext cx="6993899" cy="3174862"/>
-            <a:chOff x="27958050" y="16843162"/>
-            <a:chExt cx="6993899" cy="3174862"/>
+            <a:off x="27958050" y="16751137"/>
+            <a:ext cx="6993899" cy="3358912"/>
+            <a:chOff x="27958050" y="16751137"/>
+            <a:chExt cx="6993899" cy="3358912"/>
           </a:xfrm>
         </p:grpSpPr>
         <p:graphicFrame>
@@ -9930,8 +10368,8 @@
             <p:nvPr/>
           </p:nvGraphicFramePr>
           <p:xfrm>
-            <a:off x="27958050" y="16843162"/>
-            <a:ext cx="6993899" cy="3174862"/>
+            <a:off x="27958050" y="16751137"/>
+            <a:ext cx="6993899" cy="3358912"/>
           </p:xfrm>
           <a:graphic>
             <a:graphicData uri="http://schemas.openxmlformats.org/drawingml/2006/chart">
@@ -10005,7 +10443,7 @@
                 </a:solidFill>
                 <a:latin typeface="IBM Plex Sans"/>
               </a:rPr>
-              <a:t>% học sinh đổi CLB, trung bình · bộ 140 em mô phỏng</a:t>
+              <a:t>% học sinh đổi CLB, trung bình · 3 bộ dữ liệu mô phỏng</a:t>
             </a:r>
           </a:p>
         </p:txBody>
@@ -10018,7 +10456,7 @@
         </p:nvSpPr>
         <p:spPr>
           <a:xfrm>
-            <a:off x="28050075" y="20378762"/>
+            <a:off x="28050075" y="20415573"/>
             <a:ext cx="180000" cy="143559"/>
           </a:xfrm>
           <a:prstGeom prst="rect">
@@ -10040,7 +10478,7 @@
                 </a:solidFill>
                 <a:latin typeface="IBM Plex Sans"/>
               </a:rPr>
-              <a:t>Dữ liệu mô phỏng — nguồn: NGHIEN_CUU_TOI_UU.md, TN6</a:t>
+              <a:t>Dữ liệu mô phỏng — nguồn: NGHIEN_CUU_TOI_UU.md, TN6 (du_lieu_test/so_lieu_ben_vung.json)</a:t>
             </a:r>
           </a:p>
         </p:txBody>
@@ -10053,7 +10491,7 @@
         </p:nvSpPr>
         <p:spPr>
           <a:xfrm>
-            <a:off x="28050075" y="20109129"/>
+            <a:off x="28050075" y="20168945"/>
             <a:ext cx="180000" cy="167485"/>
           </a:xfrm>
           <a:prstGeom prst="rect">
@@ -10075,7 +10513,7 @@
                 </a:solidFill>
                 <a:latin typeface="IBM Plex Sans"/>
               </a:rPr>
-              <a:t>392 phép thử trên 3 bộ dữ liệu · 0 cặp phá vỡ</a:t>
+              <a:t>Bốc thăm: 0% – 4,36% tuỳ độ chật của dữ liệu · 392 phép thử · 0 cặp phá vỡ</a:t>
             </a:r>
           </a:p>
         </p:txBody>
